--- a/sesion-04/Sesion_04_PLN_Gestion_Documental.pptx
+++ b/sesion-04/Sesion_04_PLN_Gestion_Documental.pptx
@@ -19,9 +19,10 @@
     <p:sldId id="267" r:id="rId13"/>
     <p:sldId id="268" r:id="rId14"/>
     <p:sldId id="269" r:id="rId15"/>
+    <p:sldId id="270" r:id="rId16"/>
   </p:sldIdLst>
   <p:notesMasterIdLst>
-    <p:notesMasterId r:id="rId16"/>
+    <p:notesMasterId r:id="rId17"/>
   </p:notesMasterIdLst>
   <p:sldSz cx="12192000" cy="6858000"/>
   <p:notesSz cx="6858000" cy="12192000"/>
@@ -515,7 +516,7 @@
           <a:p>
             <a:r>
               <a:rPr lang="en-US" dirty="0"/>
-              <a:t/>
+              <a:t>Comparte solo la versión de participante del archivo de registros. Si compartes el completo, la hoja de clave revela los temas y la práctica C se arruina.</a:t>
             </a:r>
             <a:endParaRPr lang="en-US" dirty="0"/>
           </a:p>
@@ -691,7 +692,7 @@
           <a:p>
             <a:r>
               <a:rPr lang="en-US" dirty="0"/>
-              <a:t>No revelar la distribución real de los temas hasta el final. Los seis registros ambiguos son los que hacen la discusión.</a:t>
+              <a:t/>
             </a:r>
             <a:endParaRPr lang="en-US" dirty="0"/>
           </a:p>
@@ -779,7 +780,7 @@
           <a:p>
             <a:r>
               <a:rPr lang="en-US" dirty="0"/>
-              <a:t/>
+              <a:t>No reveles la distribución real de los temas hasta el final. Los seis registros ambiguos son los que hacen la discusión. Cronometra los tres tiempos en voz alta.</a:t>
             </a:r>
             <a:endParaRPr lang="en-US" dirty="0"/>
           </a:p>
@@ -955,7 +956,7 @@
           <a:p>
             <a:r>
               <a:rPr lang="en-US" dirty="0"/>
-              <a:t/>
+              <a:t>Diez minutos. Haz notar que la segunda salida ya la usaron hoy sin darse cuenta: construyeron el libro sobre una muestra y después clasificaron el total. Es una técnica, no un atajo.</a:t>
             </a:r>
             <a:endParaRPr lang="en-US" dirty="0"/>
           </a:p>
@@ -979,6 +980,94 @@
             <a:fld id="{F7021451-1387-4CA6-816F-3879F97B5CBC}" type="slidenum">
               <a:rPr lang="en-US"/>
               <a:t>14</a:t>
+            </a:fld>
+            <a:endParaRPr lang="en-US"/>
+          </a:p>
+        </p:txBody>
+      </p:sp>
+    </p:spTree>
+    <p:extLst>
+      <p:ext uri="{BB962C8B-B14F-4D97-AF65-F5344CB8AC3E}">
+        <p14:creationId xmlns:p14="http://schemas.microsoft.com/office/powerpoint/2010/main" val="1024086991"/>
+      </p:ext>
+    </p:extLst>
+  </p:cSld>
+  <p:clrMapOvr>
+    <a:masterClrMapping/>
+  </p:clrMapOvr>
+</p:notes>
+</file>
+
+<file path=ppt/notesSlides/notesSlide15.xml><?xml version="1.0" encoding="utf-8"?>
+<p:notes xmlns:a="http://schemas.openxmlformats.org/drawingml/2006/main" xmlns:r="http://schemas.openxmlformats.org/officeDocument/2006/relationships" xmlns:p="http://schemas.openxmlformats.org/presentationml/2006/main">
+  <p:cSld>
+    <p:spTree>
+      <p:nvGrpSpPr>
+        <p:cNvPr id="1" name=""/>
+        <p:cNvGrpSpPr/>
+        <p:nvPr/>
+      </p:nvGrpSpPr>
+      <p:grpSpPr>
+        <a:xfrm>
+          <a:off x="0" y="0"/>
+          <a:ext cx="0" cy="0"/>
+          <a:chOff x="0" y="0"/>
+          <a:chExt cx="0" cy="0"/>
+        </a:xfrm>
+      </p:grpSpPr>
+      <p:sp>
+        <p:nvSpPr>
+          <p:cNvPr id="2" name="Slide Image Placeholder 1"/>
+          <p:cNvSpPr>
+            <a:spLocks noGrp="1" noRot="1" noChangeAspect="1"/>
+          </p:cNvSpPr>
+          <p:nvPr>
+            <p:ph type="sldImg"/>
+          </p:nvPr>
+        </p:nvSpPr>
+        <p:spPr/>
+      </p:sp>
+      <p:sp>
+        <p:nvSpPr>
+          <p:cNvPr id="3" name="Notes Placeholder 2"/>
+          <p:cNvSpPr>
+            <a:spLocks noGrp="1"/>
+          </p:cNvSpPr>
+          <p:nvPr>
+            <p:ph type="body" idx="1"/>
+          </p:nvPr>
+        </p:nvSpPr>
+        <p:spPr/>
+        <p:txBody>
+          <a:bodyPr/>
+          <a:lstStyle/>
+          <a:p>
+            <a:r>
+              <a:rPr lang="en-US" dirty="0"/>
+              <a:t/>
+            </a:r>
+            <a:endParaRPr lang="en-US" dirty="0"/>
+          </a:p>
+        </p:txBody>
+      </p:sp>
+      <p:sp>
+        <p:nvSpPr>
+          <p:cNvPr id="4" name="Slide Number Placeholder 3"/>
+          <p:cNvSpPr>
+            <a:spLocks noGrp="1"/>
+          </p:cNvSpPr>
+          <p:nvPr>
+            <p:ph type="sldNum" sz="quarter" idx="10"/>
+          </p:nvPr>
+        </p:nvSpPr>
+        <p:spPr/>
+        <p:txBody>
+          <a:bodyPr/>
+          <a:lstStyle/>
+          <a:p>
+            <a:fld id="{F7021451-1387-4CA6-816F-3879F97B5CBC}" type="slidenum">
+              <a:rPr lang="en-US"/>
+              <a:t>15</a:t>
             </a:fld>
             <a:endParaRPr lang="en-US"/>
           </a:p>
@@ -1395,7 +1484,7 @@
           <a:p>
             <a:r>
               <a:rPr lang="en-US" dirty="0"/>
-              <a:t/>
+              <a:t>Anuncia desde el principio que lo que se busca es la afirmación que no se sostiene. Si no, se quedan comparando estilos.</a:t>
             </a:r>
             <a:endParaRPr lang="en-US" dirty="0"/>
           </a:p>
@@ -1571,7 +1660,7 @@
           <a:p>
             <a:r>
               <a:rPr lang="en-US" dirty="0"/>
-              <a:t/>
+              <a:t>Dales dos ejemplos de qué buscar: población objetivo contra población potencial, y una lista limitativa contra una enunciativa. Los que terminan en quince minutos no están cazando nada.</a:t>
             </a:r>
             <a:endParaRPr lang="en-US" dirty="0"/>
           </a:p>
@@ -2115,7 +2204,7 @@
                 <a:ea typeface="Calibri" pitchFamily="34" charset="-122"/>
                 <a:cs typeface="Calibri" pitchFamily="34" charset="-120"/>
               </a:rPr>
-              <a:t>MÓDULO II. ANÁLISIS CUALITATIVO ASISTIDO POR IA Y PLN</a:t>
+              <a:t>MÓDULO II. ANÁLISIS CUALITATIVO ASISTIDO POR IA</a:t>
             </a:r>
             <a:endParaRPr lang="en-US" sz="1500" dirty="0"/>
           </a:p>
@@ -2193,7 +2282,7 @@
                 <a:ea typeface="Arial" pitchFamily="34" charset="-122"/>
                 <a:cs typeface="Arial" pitchFamily="34" charset="-120"/>
               </a:rPr>
-              <a:t>Procesamiento de lenguaje natural para la gestión documental</a:t>
+              <a:t>Cómo trabajar con mucho texto: las cuatro tareas del PLN</a:t>
             </a:r>
             <a:endParaRPr lang="en-US" sz="3400" dirty="0"/>
           </a:p>
@@ -2298,7 +2387,7 @@
                 <a:ea typeface="Calibri" pitchFamily="34" charset="-122"/>
                 <a:cs typeface="Calibri" pitchFamily="34" charset="-120"/>
               </a:rPr>
-              <a:t>Curso de Inteligencia Artificial Aplicada. INEGI 2026.</a:t>
+              <a:t>Curso de Inteligencia Artificial Aplicada. INEGI 2026. CC BY-NC-SA 4.0.</a:t>
             </a:r>
             <a:endParaRPr lang="en-US" sz="1300" dirty="0"/>
           </a:p>
@@ -2315,6 +2404,828 @@
 <file path=ppt/slides/slide10.xml><?xml version="1.0" encoding="utf-8"?>
 <p:sld xmlns:a="http://schemas.openxmlformats.org/drawingml/2006/main" xmlns:r="http://schemas.openxmlformats.org/officeDocument/2006/relationships" xmlns:p="http://schemas.openxmlformats.org/presentationml/2006/main">
   <p:cSld name="Slide 10">
+    <p:spTree>
+      <p:nvGrpSpPr>
+        <p:cNvPr id="1" name=""/>
+        <p:cNvGrpSpPr/>
+        <p:nvPr/>
+      </p:nvGrpSpPr>
+      <p:grpSpPr>
+        <a:xfrm>
+          <a:off x="0" y="0"/>
+          <a:ext cx="0" cy="0"/>
+          <a:chOff x="0" y="0"/>
+          <a:chExt cx="0" cy="0"/>
+        </a:xfrm>
+      </p:grpSpPr>
+      <p:sp>
+        <p:nvSpPr>
+          <p:cNvPr id="2" name="Text 0"/>
+          <p:cNvSpPr txBox="1"/>
+          <p:nvPr/>
+        </p:nvSpPr>
+        <p:spPr>
+          <a:xfrm>
+            <a:off x="566928" y="402336"/>
+            <a:ext cx="9229039" cy="749808"/>
+          </a:xfrm>
+          <a:prstGeom prst="rect">
+            <a:avLst/>
+          </a:prstGeom>
+          <a:noFill/>
+          <a:ln/>
+        </p:spPr>
+        <p:txBody>
+          <a:bodyPr wrap="square" lIns="0" tIns="0" rIns="0" bIns="0" rtlCol="0" anchor="t"/>
+          <a:lstStyle/>
+          <a:p>
+            <a:pPr algn="l" indent="0" marL="0">
+              <a:buNone/>
+            </a:pPr>
+            <a:r>
+              <a:rPr lang="en-US" sz="3200" b="1" dirty="0">
+                <a:solidFill>
+                  <a:srgbClr val="16262E"/>
+                </a:solidFill>
+                <a:latin typeface="Arial" pitchFamily="34" charset="0"/>
+                <a:ea typeface="Arial" pitchFamily="34" charset="-122"/>
+                <a:cs typeface="Arial" pitchFamily="34" charset="-120"/>
+              </a:rPr>
+              <a:t>El flujo profesional tiene tres tiempos</a:t>
+            </a:r>
+            <a:endParaRPr lang="en-US" sz="3200" dirty="0"/>
+          </a:p>
+        </p:txBody>
+      </p:sp>
+      <p:sp>
+        <p:nvSpPr>
+          <p:cNvPr id="3" name="Text 1"/>
+          <p:cNvSpPr txBox="1"/>
+          <p:nvPr/>
+        </p:nvSpPr>
+        <p:spPr>
+          <a:xfrm>
+            <a:off x="566928" y="1280160"/>
+            <a:ext cx="9960559" cy="365760"/>
+          </a:xfrm>
+          <a:prstGeom prst="rect">
+            <a:avLst/>
+          </a:prstGeom>
+          <a:noFill/>
+          <a:ln/>
+        </p:spPr>
+        <p:txBody>
+          <a:bodyPr wrap="square" lIns="0" tIns="0" rIns="0" bIns="0" rtlCol="0" anchor="t"/>
+          <a:lstStyle/>
+          <a:p>
+            <a:pPr indent="0" marL="0">
+              <a:buNone/>
+            </a:pPr>
+            <a:r>
+              <a:rPr lang="en-US" sz="1500" dirty="0">
+                <a:solidFill>
+                  <a:srgbClr val="5A6B73"/>
+                </a:solidFill>
+                <a:latin typeface="Calibri" pitchFamily="34" charset="0"/>
+                <a:ea typeface="Calibri" pitchFamily="34" charset="-122"/>
+                <a:cs typeface="Calibri" pitchFamily="34" charset="-120"/>
+              </a:rPr>
+              <a:t>El orden no es una sugerencia. Es lo que convierte el ejercicio en un trabajo que puedes defender.</a:t>
+            </a:r>
+            <a:endParaRPr lang="en-US" sz="1500" dirty="0"/>
+          </a:p>
+        </p:txBody>
+      </p:sp>
+      <p:sp>
+        <p:nvSpPr>
+          <p:cNvPr id="4" name="Shape 2"/>
+          <p:cNvSpPr/>
+          <p:nvPr/>
+        </p:nvSpPr>
+        <p:spPr>
+          <a:xfrm>
+            <a:off x="566928" y="1810512"/>
+            <a:ext cx="3405530" cy="3950208"/>
+          </a:xfrm>
+          <a:prstGeom prst="roundRect">
+            <a:avLst>
+              <a:gd name="adj" fmla="val 2417"/>
+            </a:avLst>
+          </a:prstGeom>
+          <a:solidFill>
+            <a:srgbClr val="D7E7E7"/>
+          </a:solidFill>
+          <a:ln w="12700">
+            <a:solidFill>
+              <a:srgbClr val="D7E7E7"/>
+            </a:solidFill>
+            <a:prstDash val="solid"/>
+          </a:ln>
+        </p:spPr>
+      </p:sp>
+      <p:sp>
+        <p:nvSpPr>
+          <p:cNvPr id="5" name="Shape 3"/>
+          <p:cNvSpPr/>
+          <p:nvPr/>
+        </p:nvSpPr>
+        <p:spPr>
+          <a:xfrm>
+            <a:off x="1986229" y="2066544"/>
+            <a:ext cx="566928" cy="566928"/>
+          </a:xfrm>
+          <a:prstGeom prst="ellipse">
+            <a:avLst/>
+          </a:prstGeom>
+          <a:solidFill>
+            <a:srgbClr val="2E7D7D"/>
+          </a:solidFill>
+          <a:ln w="12700">
+            <a:solidFill>
+              <a:srgbClr val="2E7D7D"/>
+            </a:solidFill>
+            <a:prstDash val="solid"/>
+          </a:ln>
+        </p:spPr>
+      </p:sp>
+      <p:sp>
+        <p:nvSpPr>
+          <p:cNvPr id="6" name="Text 4"/>
+          <p:cNvSpPr txBox="1"/>
+          <p:nvPr/>
+        </p:nvSpPr>
+        <p:spPr>
+          <a:xfrm>
+            <a:off x="1986229" y="2066544"/>
+            <a:ext cx="566928" cy="566928"/>
+          </a:xfrm>
+          <a:prstGeom prst="rect">
+            <a:avLst/>
+          </a:prstGeom>
+          <a:noFill/>
+          <a:ln/>
+        </p:spPr>
+        <p:txBody>
+          <a:bodyPr wrap="square" lIns="0" tIns="0" rIns="0" bIns="0" rtlCol="0" anchor="ctr"/>
+          <a:lstStyle/>
+          <a:p>
+            <a:pPr algn="ctr" indent="0" marL="0">
+              <a:buNone/>
+            </a:pPr>
+            <a:r>
+              <a:rPr lang="en-US" sz="2000" b="1" dirty="0">
+                <a:solidFill>
+                  <a:srgbClr val="FFFFFF"/>
+                </a:solidFill>
+                <a:latin typeface="Arial" pitchFamily="34" charset="0"/>
+                <a:ea typeface="Arial" pitchFamily="34" charset="-122"/>
+                <a:cs typeface="Arial" pitchFamily="34" charset="-120"/>
+              </a:rPr>
+              <a:t>1</a:t>
+            </a:r>
+            <a:endParaRPr lang="en-US" sz="2000" dirty="0"/>
+          </a:p>
+        </p:txBody>
+      </p:sp>
+      <p:sp>
+        <p:nvSpPr>
+          <p:cNvPr id="7" name="Text 5"/>
+          <p:cNvSpPr txBox="1"/>
+          <p:nvPr/>
+        </p:nvSpPr>
+        <p:spPr>
+          <a:xfrm>
+            <a:off x="749808" y="2743200"/>
+            <a:ext cx="3039770" cy="457200"/>
+          </a:xfrm>
+          <a:prstGeom prst="rect">
+            <a:avLst/>
+          </a:prstGeom>
+          <a:noFill/>
+          <a:ln/>
+        </p:spPr>
+        <p:txBody>
+          <a:bodyPr wrap="square" lIns="0" tIns="0" rIns="0" bIns="0" rtlCol="0" anchor="t"/>
+          <a:lstStyle/>
+          <a:p>
+            <a:pPr algn="ctr" indent="0" marL="0">
+              <a:buNone/>
+            </a:pPr>
+            <a:r>
+              <a:rPr lang="en-US" sz="1600" b="1" dirty="0">
+                <a:solidFill>
+                  <a:srgbClr val="16262E"/>
+                </a:solidFill>
+                <a:latin typeface="Arial" pitchFamily="34" charset="0"/>
+                <a:ea typeface="Arial" pitchFamily="34" charset="-122"/>
+                <a:cs typeface="Arial" pitchFamily="34" charset="-120"/>
+              </a:rPr>
+              <a:t>El modelo propone</a:t>
+            </a:r>
+            <a:endParaRPr lang="en-US" sz="1600" dirty="0"/>
+          </a:p>
+        </p:txBody>
+      </p:sp>
+      <p:sp>
+        <p:nvSpPr>
+          <p:cNvPr id="8" name="Text 6"/>
+          <p:cNvSpPr txBox="1"/>
+          <p:nvPr/>
+        </p:nvSpPr>
+        <p:spPr>
+          <a:xfrm>
+            <a:off x="786384" y="3273552"/>
+            <a:ext cx="2966618" cy="2304288"/>
+          </a:xfrm>
+          <a:prstGeom prst="rect">
+            <a:avLst/>
+          </a:prstGeom>
+          <a:noFill/>
+          <a:ln/>
+        </p:spPr>
+        <p:txBody>
+          <a:bodyPr wrap="square" lIns="0" tIns="0" rIns="0" bIns="0" rtlCol="0" anchor="t"/>
+          <a:lstStyle/>
+          <a:p>
+            <a:pPr indent="0" marL="0">
+              <a:lnSpc>
+                <a:spcPct val="112000"/>
+              </a:lnSpc>
+              <a:buNone/>
+            </a:pPr>
+            <a:r>
+              <a:rPr lang="en-US" sz="1250" dirty="0">
+                <a:solidFill>
+                  <a:srgbClr val="16262E"/>
+                </a:solidFill>
+                <a:latin typeface="Calibri" pitchFamily="34" charset="0"/>
+                <a:ea typeface="Calibri" pitchFamily="34" charset="-122"/>
+                <a:cs typeface="Calibri" pitchFamily="34" charset="-120"/>
+              </a:rPr>
+              <a:t>Le das una muestra de los registros y le pides un libro de códigos: categorías, con su definición y con ejemplos.</a:t>
+            </a:r>
+            <a:endParaRPr lang="en-US" sz="1250" dirty="0"/>
+          </a:p>
+          <a:p>
+            <a:pPr indent="0" marL="0">
+              <a:lnSpc>
+                <a:spcPct val="112000"/>
+              </a:lnSpc>
+              <a:buNone/>
+            </a:pPr>
+            <a:endParaRPr lang="en-US" sz="1250" dirty="0"/>
+          </a:p>
+          <a:p>
+            <a:pPr indent="0" marL="0">
+              <a:lnSpc>
+                <a:spcPct val="112000"/>
+              </a:lnSpc>
+              <a:buNone/>
+            </a:pPr>
+            <a:r>
+              <a:rPr lang="en-US" sz="1250" dirty="0">
+                <a:solidFill>
+                  <a:srgbClr val="16262E"/>
+                </a:solidFill>
+                <a:latin typeface="Calibri" pitchFamily="34" charset="0"/>
+                <a:ea typeface="Calibri" pitchFamily="34" charset="-122"/>
+                <a:cs typeface="Calibri" pitchFamily="34" charset="-120"/>
+              </a:rPr>
+              <a:t>Aquí hace lo que hace bien, que es encontrar patrones en volumen.</a:t>
+            </a:r>
+            <a:endParaRPr lang="en-US" sz="1250" dirty="0"/>
+          </a:p>
+        </p:txBody>
+      </p:sp>
+      <p:sp>
+        <p:nvSpPr>
+          <p:cNvPr id="9" name="Shape 7"/>
+          <p:cNvSpPr/>
+          <p:nvPr/>
+        </p:nvSpPr>
+        <p:spPr>
+          <a:xfrm>
+            <a:off x="4045610" y="2194560"/>
+            <a:ext cx="274320" cy="310896"/>
+          </a:xfrm>
+          <a:prstGeom prst="rightArrow">
+            <a:avLst/>
+          </a:prstGeom>
+          <a:solidFill>
+            <a:srgbClr val="5A6B73"/>
+          </a:solidFill>
+          <a:ln w="12700">
+            <a:solidFill>
+              <a:srgbClr val="5A6B73"/>
+            </a:solidFill>
+            <a:prstDash val="solid"/>
+          </a:ln>
+        </p:spPr>
+      </p:sp>
+      <p:sp>
+        <p:nvSpPr>
+          <p:cNvPr id="10" name="Shape 8"/>
+          <p:cNvSpPr/>
+          <p:nvPr/>
+        </p:nvSpPr>
+        <p:spPr>
+          <a:xfrm>
+            <a:off x="4393082" y="1810512"/>
+            <a:ext cx="3405530" cy="3950208"/>
+          </a:xfrm>
+          <a:prstGeom prst="roundRect">
+            <a:avLst>
+              <a:gd name="adj" fmla="val 2417"/>
+            </a:avLst>
+          </a:prstGeom>
+          <a:solidFill>
+            <a:srgbClr val="F7E4D8"/>
+          </a:solidFill>
+          <a:ln w="12700">
+            <a:solidFill>
+              <a:srgbClr val="F7E4D8"/>
+            </a:solidFill>
+            <a:prstDash val="solid"/>
+          </a:ln>
+        </p:spPr>
+      </p:sp>
+      <p:sp>
+        <p:nvSpPr>
+          <p:cNvPr id="11" name="Shape 9"/>
+          <p:cNvSpPr/>
+          <p:nvPr/>
+        </p:nvSpPr>
+        <p:spPr>
+          <a:xfrm>
+            <a:off x="5812384" y="2066544"/>
+            <a:ext cx="566928" cy="566928"/>
+          </a:xfrm>
+          <a:prstGeom prst="ellipse">
+            <a:avLst/>
+          </a:prstGeom>
+          <a:solidFill>
+            <a:srgbClr val="C85A28"/>
+          </a:solidFill>
+          <a:ln w="12700">
+            <a:solidFill>
+              <a:srgbClr val="C85A28"/>
+            </a:solidFill>
+            <a:prstDash val="solid"/>
+          </a:ln>
+        </p:spPr>
+      </p:sp>
+      <p:sp>
+        <p:nvSpPr>
+          <p:cNvPr id="12" name="Text 10"/>
+          <p:cNvSpPr txBox="1"/>
+          <p:nvPr/>
+        </p:nvSpPr>
+        <p:spPr>
+          <a:xfrm>
+            <a:off x="5812384" y="2066544"/>
+            <a:ext cx="566928" cy="566928"/>
+          </a:xfrm>
+          <a:prstGeom prst="rect">
+            <a:avLst/>
+          </a:prstGeom>
+          <a:noFill/>
+          <a:ln/>
+        </p:spPr>
+        <p:txBody>
+          <a:bodyPr wrap="square" lIns="0" tIns="0" rIns="0" bIns="0" rtlCol="0" anchor="ctr"/>
+          <a:lstStyle/>
+          <a:p>
+            <a:pPr algn="ctr" indent="0" marL="0">
+              <a:buNone/>
+            </a:pPr>
+            <a:r>
+              <a:rPr lang="en-US" sz="2000" b="1" dirty="0">
+                <a:solidFill>
+                  <a:srgbClr val="FFFFFF"/>
+                </a:solidFill>
+                <a:latin typeface="Arial" pitchFamily="34" charset="0"/>
+                <a:ea typeface="Arial" pitchFamily="34" charset="-122"/>
+                <a:cs typeface="Arial" pitchFamily="34" charset="-120"/>
+              </a:rPr>
+              <a:t>2</a:t>
+            </a:r>
+            <a:endParaRPr lang="en-US" sz="2000" dirty="0"/>
+          </a:p>
+        </p:txBody>
+      </p:sp>
+      <p:sp>
+        <p:nvSpPr>
+          <p:cNvPr id="13" name="Text 11"/>
+          <p:cNvSpPr txBox="1"/>
+          <p:nvPr/>
+        </p:nvSpPr>
+        <p:spPr>
+          <a:xfrm>
+            <a:off x="4575962" y="2743200"/>
+            <a:ext cx="3039770" cy="457200"/>
+          </a:xfrm>
+          <a:prstGeom prst="rect">
+            <a:avLst/>
+          </a:prstGeom>
+          <a:noFill/>
+          <a:ln/>
+        </p:spPr>
+        <p:txBody>
+          <a:bodyPr wrap="square" lIns="0" tIns="0" rIns="0" bIns="0" rtlCol="0" anchor="t"/>
+          <a:lstStyle/>
+          <a:p>
+            <a:pPr algn="ctr" indent="0" marL="0">
+              <a:buNone/>
+            </a:pPr>
+            <a:r>
+              <a:rPr lang="en-US" sz="1600" b="1" dirty="0">
+                <a:solidFill>
+                  <a:srgbClr val="16262E"/>
+                </a:solidFill>
+                <a:latin typeface="Arial" pitchFamily="34" charset="0"/>
+                <a:ea typeface="Arial" pitchFamily="34" charset="-122"/>
+                <a:cs typeface="Arial" pitchFamily="34" charset="-120"/>
+              </a:rPr>
+              <a:t>Tú ratificas</a:t>
+            </a:r>
+            <a:endParaRPr lang="en-US" sz="1600" dirty="0"/>
+          </a:p>
+        </p:txBody>
+      </p:sp>
+      <p:sp>
+        <p:nvSpPr>
+          <p:cNvPr id="14" name="Text 12"/>
+          <p:cNvSpPr txBox="1"/>
+          <p:nvPr/>
+        </p:nvSpPr>
+        <p:spPr>
+          <a:xfrm>
+            <a:off x="4612538" y="3273552"/>
+            <a:ext cx="2966618" cy="2304288"/>
+          </a:xfrm>
+          <a:prstGeom prst="rect">
+            <a:avLst/>
+          </a:prstGeom>
+          <a:noFill/>
+          <a:ln/>
+        </p:spPr>
+        <p:txBody>
+          <a:bodyPr wrap="square" lIns="0" tIns="0" rIns="0" bIns="0" rtlCol="0" anchor="t"/>
+          <a:lstStyle/>
+          <a:p>
+            <a:pPr indent="0" marL="0">
+              <a:lnSpc>
+                <a:spcPct val="112000"/>
+              </a:lnSpc>
+              <a:buNone/>
+            </a:pPr>
+            <a:r>
+              <a:rPr lang="en-US" sz="1250" dirty="0">
+                <a:solidFill>
+                  <a:srgbClr val="16262E"/>
+                </a:solidFill>
+                <a:latin typeface="Calibri" pitchFamily="34" charset="0"/>
+                <a:ea typeface="Calibri" pitchFamily="34" charset="-122"/>
+                <a:cs typeface="Calibri" pitchFamily="34" charset="-120"/>
+              </a:rPr>
+              <a:t>Revisas ese libro de códigos. Quitas las categorías que se traslapan, precisas las definiciones vagas y agregas las que el modelo no vio.</a:t>
+            </a:r>
+            <a:endParaRPr lang="en-US" sz="1250" dirty="0"/>
+          </a:p>
+          <a:p>
+            <a:pPr indent="0" marL="0">
+              <a:lnSpc>
+                <a:spcPct val="112000"/>
+              </a:lnSpc>
+              <a:buNone/>
+            </a:pPr>
+            <a:endParaRPr lang="en-US" sz="1250" dirty="0"/>
+          </a:p>
+          <a:p>
+            <a:pPr indent="0" marL="0">
+              <a:lnSpc>
+                <a:spcPct val="112000"/>
+              </a:lnSpc>
+              <a:buNone/>
+            </a:pPr>
+            <a:r>
+              <a:rPr lang="en-US" sz="1250" dirty="0">
+                <a:solidFill>
+                  <a:srgbClr val="16262E"/>
+                </a:solidFill>
+                <a:latin typeface="Calibri" pitchFamily="34" charset="0"/>
+                <a:ea typeface="Calibri" pitchFamily="34" charset="-122"/>
+                <a:cs typeface="Calibri" pitchFamily="34" charset="-120"/>
+              </a:rPr>
+              <a:t>Este paso lo haces tú. No se delega.</a:t>
+            </a:r>
+            <a:endParaRPr lang="en-US" sz="1250" dirty="0"/>
+          </a:p>
+        </p:txBody>
+      </p:sp>
+      <p:sp>
+        <p:nvSpPr>
+          <p:cNvPr id="15" name="Shape 13"/>
+          <p:cNvSpPr/>
+          <p:nvPr/>
+        </p:nvSpPr>
+        <p:spPr>
+          <a:xfrm>
+            <a:off x="7871765" y="2194560"/>
+            <a:ext cx="274320" cy="310896"/>
+          </a:xfrm>
+          <a:prstGeom prst="rightArrow">
+            <a:avLst/>
+          </a:prstGeom>
+          <a:solidFill>
+            <a:srgbClr val="5A6B73"/>
+          </a:solidFill>
+          <a:ln w="12700">
+            <a:solidFill>
+              <a:srgbClr val="5A6B73"/>
+            </a:solidFill>
+            <a:prstDash val="solid"/>
+          </a:ln>
+        </p:spPr>
+      </p:sp>
+      <p:sp>
+        <p:nvSpPr>
+          <p:cNvPr id="16" name="Shape 14"/>
+          <p:cNvSpPr/>
+          <p:nvPr/>
+        </p:nvSpPr>
+        <p:spPr>
+          <a:xfrm>
+            <a:off x="8219237" y="1810512"/>
+            <a:ext cx="3405530" cy="3950208"/>
+          </a:xfrm>
+          <a:prstGeom prst="roundRect">
+            <a:avLst>
+              <a:gd name="adj" fmla="val 2417"/>
+            </a:avLst>
+          </a:prstGeom>
+          <a:solidFill>
+            <a:srgbClr val="D7E7E7"/>
+          </a:solidFill>
+          <a:ln w="12700">
+            <a:solidFill>
+              <a:srgbClr val="D7E7E7"/>
+            </a:solidFill>
+            <a:prstDash val="solid"/>
+          </a:ln>
+        </p:spPr>
+      </p:sp>
+      <p:sp>
+        <p:nvSpPr>
+          <p:cNvPr id="17" name="Shape 15"/>
+          <p:cNvSpPr/>
+          <p:nvPr/>
+        </p:nvSpPr>
+        <p:spPr>
+          <a:xfrm>
+            <a:off x="9638538" y="2066544"/>
+            <a:ext cx="566928" cy="566928"/>
+          </a:xfrm>
+          <a:prstGeom prst="ellipse">
+            <a:avLst/>
+          </a:prstGeom>
+          <a:solidFill>
+            <a:srgbClr val="2E7D7D"/>
+          </a:solidFill>
+          <a:ln w="12700">
+            <a:solidFill>
+              <a:srgbClr val="2E7D7D"/>
+            </a:solidFill>
+            <a:prstDash val="solid"/>
+          </a:ln>
+        </p:spPr>
+      </p:sp>
+      <p:sp>
+        <p:nvSpPr>
+          <p:cNvPr id="18" name="Text 16"/>
+          <p:cNvSpPr txBox="1"/>
+          <p:nvPr/>
+        </p:nvSpPr>
+        <p:spPr>
+          <a:xfrm>
+            <a:off x="9638538" y="2066544"/>
+            <a:ext cx="566928" cy="566928"/>
+          </a:xfrm>
+          <a:prstGeom prst="rect">
+            <a:avLst/>
+          </a:prstGeom>
+          <a:noFill/>
+          <a:ln/>
+        </p:spPr>
+        <p:txBody>
+          <a:bodyPr wrap="square" lIns="0" tIns="0" rIns="0" bIns="0" rtlCol="0" anchor="ctr"/>
+          <a:lstStyle/>
+          <a:p>
+            <a:pPr algn="ctr" indent="0" marL="0">
+              <a:buNone/>
+            </a:pPr>
+            <a:r>
+              <a:rPr lang="en-US" sz="2000" b="1" dirty="0">
+                <a:solidFill>
+                  <a:srgbClr val="FFFFFF"/>
+                </a:solidFill>
+                <a:latin typeface="Arial" pitchFamily="34" charset="0"/>
+                <a:ea typeface="Arial" pitchFamily="34" charset="-122"/>
+                <a:cs typeface="Arial" pitchFamily="34" charset="-120"/>
+              </a:rPr>
+              <a:t>3</a:t>
+            </a:r>
+            <a:endParaRPr lang="en-US" sz="2000" dirty="0"/>
+          </a:p>
+        </p:txBody>
+      </p:sp>
+      <p:sp>
+        <p:nvSpPr>
+          <p:cNvPr id="19" name="Text 17"/>
+          <p:cNvSpPr txBox="1"/>
+          <p:nvPr/>
+        </p:nvSpPr>
+        <p:spPr>
+          <a:xfrm>
+            <a:off x="8402117" y="2743200"/>
+            <a:ext cx="3039770" cy="457200"/>
+          </a:xfrm>
+          <a:prstGeom prst="rect">
+            <a:avLst/>
+          </a:prstGeom>
+          <a:noFill/>
+          <a:ln/>
+        </p:spPr>
+        <p:txBody>
+          <a:bodyPr wrap="square" lIns="0" tIns="0" rIns="0" bIns="0" rtlCol="0" anchor="t"/>
+          <a:lstStyle/>
+          <a:p>
+            <a:pPr algn="ctr" indent="0" marL="0">
+              <a:buNone/>
+            </a:pPr>
+            <a:r>
+              <a:rPr lang="en-US" sz="1600" b="1" dirty="0">
+                <a:solidFill>
+                  <a:srgbClr val="16262E"/>
+                </a:solidFill>
+                <a:latin typeface="Arial" pitchFamily="34" charset="0"/>
+                <a:ea typeface="Arial" pitchFamily="34" charset="-122"/>
+                <a:cs typeface="Arial" pitchFamily="34" charset="-120"/>
+              </a:rPr>
+              <a:t>El modelo aplica</a:t>
+            </a:r>
+            <a:endParaRPr lang="en-US" sz="1600" dirty="0"/>
+          </a:p>
+        </p:txBody>
+      </p:sp>
+      <p:sp>
+        <p:nvSpPr>
+          <p:cNvPr id="20" name="Text 18"/>
+          <p:cNvSpPr txBox="1"/>
+          <p:nvPr/>
+        </p:nvSpPr>
+        <p:spPr>
+          <a:xfrm>
+            <a:off x="8438693" y="3273552"/>
+            <a:ext cx="2966618" cy="2304288"/>
+          </a:xfrm>
+          <a:prstGeom prst="rect">
+            <a:avLst/>
+          </a:prstGeom>
+          <a:noFill/>
+          <a:ln/>
+        </p:spPr>
+        <p:txBody>
+          <a:bodyPr wrap="square" lIns="0" tIns="0" rIns="0" bIns="0" rtlCol="0" anchor="t"/>
+          <a:lstStyle/>
+          <a:p>
+            <a:pPr indent="0" marL="0">
+              <a:lnSpc>
+                <a:spcPct val="112000"/>
+              </a:lnSpc>
+              <a:buNone/>
+            </a:pPr>
+            <a:r>
+              <a:rPr lang="en-US" sz="1250" dirty="0">
+                <a:solidFill>
+                  <a:srgbClr val="16262E"/>
+                </a:solidFill>
+                <a:latin typeface="Calibri" pitchFamily="34" charset="0"/>
+                <a:ea typeface="Calibri" pitchFamily="34" charset="-122"/>
+                <a:cs typeface="Calibri" pitchFamily="34" charset="-120"/>
+              </a:rPr>
+              <a:t>Clasificas el conjunto completo con el libro ya ratificado.</a:t>
+            </a:r>
+            <a:endParaRPr lang="en-US" sz="1250" dirty="0"/>
+          </a:p>
+          <a:p>
+            <a:pPr indent="0" marL="0">
+              <a:lnSpc>
+                <a:spcPct val="112000"/>
+              </a:lnSpc>
+              <a:buNone/>
+            </a:pPr>
+            <a:endParaRPr lang="en-US" sz="1250" dirty="0"/>
+          </a:p>
+          <a:p>
+            <a:pPr indent="0" marL="0">
+              <a:lnSpc>
+                <a:spcPct val="112000"/>
+              </a:lnSpc>
+              <a:buNone/>
+            </a:pPr>
+            <a:r>
+              <a:rPr lang="en-US" sz="1250" dirty="0">
+                <a:solidFill>
+                  <a:srgbClr val="16262E"/>
+                </a:solidFill>
+                <a:latin typeface="Calibri" pitchFamily="34" charset="0"/>
+                <a:ea typeface="Calibri" pitchFamily="34" charset="-122"/>
+                <a:cs typeface="Calibri" pitchFamily="34" charset="-120"/>
+              </a:rPr>
+              <a:t>Después revisas una muestra de veinte registros para ver qué tan bien lo hizo.</a:t>
+            </a:r>
+            <a:endParaRPr lang="en-US" sz="1250" dirty="0"/>
+          </a:p>
+        </p:txBody>
+      </p:sp>
+      <p:sp>
+        <p:nvSpPr>
+          <p:cNvPr id="21" name="Shape 19"/>
+          <p:cNvSpPr/>
+          <p:nvPr/>
+        </p:nvSpPr>
+        <p:spPr>
+          <a:xfrm>
+            <a:off x="566928" y="5870448"/>
+            <a:ext cx="11057839" cy="493776"/>
+          </a:xfrm>
+          <a:prstGeom prst="roundRect">
+            <a:avLst>
+              <a:gd name="adj" fmla="val 11111"/>
+            </a:avLst>
+          </a:prstGeom>
+          <a:solidFill>
+            <a:srgbClr val="16262E"/>
+          </a:solidFill>
+          <a:ln w="12700">
+            <a:solidFill>
+              <a:srgbClr val="16262E"/>
+            </a:solidFill>
+            <a:prstDash val="solid"/>
+          </a:ln>
+        </p:spPr>
+      </p:sp>
+      <p:sp>
+        <p:nvSpPr>
+          <p:cNvPr id="22" name="Text 20"/>
+          <p:cNvSpPr txBox="1"/>
+          <p:nvPr/>
+        </p:nvSpPr>
+        <p:spPr>
+          <a:xfrm>
+            <a:off x="804672" y="5870448"/>
+            <a:ext cx="10582351" cy="493776"/>
+          </a:xfrm>
+          <a:prstGeom prst="rect">
+            <a:avLst/>
+          </a:prstGeom>
+          <a:noFill/>
+          <a:ln/>
+        </p:spPr>
+        <p:txBody>
+          <a:bodyPr wrap="square" lIns="0" tIns="0" rIns="0" bIns="0" rtlCol="0" anchor="ctr"/>
+          <a:lstStyle/>
+          <a:p>
+            <a:pPr indent="0" marL="0">
+              <a:buNone/>
+            </a:pPr>
+            <a:r>
+              <a:rPr lang="en-US" sz="1300" b="1" dirty="0">
+                <a:solidFill>
+                  <a:srgbClr val="FFFFFF"/>
+                </a:solidFill>
+                <a:latin typeface="Calibri" pitchFamily="34" charset="0"/>
+                <a:ea typeface="Calibri" pitchFamily="34" charset="-122"/>
+                <a:cs typeface="Calibri" pitchFamily="34" charset="-120"/>
+              </a:rPr>
+              <a:t>Si dejas que el modelo invente las categorías y clasifique de un solo golpe, nadie va a poder explicar después de dónde salieron esas categorías.</a:t>
+            </a:r>
+            <a:endParaRPr lang="en-US" sz="1300" dirty="0"/>
+          </a:p>
+        </p:txBody>
+      </p:sp>
+    </p:spTree>
+  </p:cSld>
+  <p:clrMapOvr>
+    <a:masterClrMapping/>
+  </p:clrMapOvr>
+</p:sld>
+</file>
+
+<file path=ppt/slides/slide11.xml><?xml version="1.0" encoding="utf-8"?>
+<p:sld xmlns:a="http://schemas.openxmlformats.org/drawingml/2006/main" xmlns:r="http://schemas.openxmlformats.org/officeDocument/2006/relationships" xmlns:p="http://schemas.openxmlformats.org/presentationml/2006/main">
+  <p:cSld name="Slide 11">
     <p:bg>
       <p:bgPr>
         <a:solidFill>
@@ -2394,7 +3305,7 @@
                 <a:ea typeface="Calibri" pitchFamily="34" charset="-122"/>
                 <a:cs typeface="Calibri" pitchFamily="34" charset="-120"/>
               </a:rPr>
-              <a:t>POR QUÉ EL ORDEN IMPORTA</a:t>
+              <a:t>POR QUÉ IMPORTA EL ORDEN</a:t>
             </a:r>
             <a:endParaRPr lang="en-US" sz="1400" dirty="0"/>
           </a:p>
@@ -2436,7 +3347,7 @@
                 <a:ea typeface="Arial" pitchFamily="34" charset="-122"/>
                 <a:cs typeface="Arial" pitchFamily="34" charset="-120"/>
               </a:rPr>
-              <a:t>Si deja que el modelo invente las categorías y clasifique de un solo golpe, nadie va a poder explicar después de dónde salieron las categorías.</a:t>
+              <a:t>En una evaluación, las categorías son el análisis. Si no puedes defender el libro de códigos, no puedes defender ninguna cifra que salga de él.</a:t>
             </a:r>
             <a:endParaRPr lang="en-US" sz="3000" dirty="0"/>
           </a:p>
@@ -2478,7 +3389,7 @@
                 <a:ea typeface="Calibri" pitchFamily="34" charset="-122"/>
                 <a:cs typeface="Calibri" pitchFamily="34" charset="-120"/>
               </a:rPr>
-              <a:t>Y en una evaluación de política pública, las categorías son el análisis. Si no puede defender el libro de códigos, no puede defender ninguna de las cifras que salen de él. El paso dos es el que convierte una salida automática en evidencia.</a:t>
+              <a:t>El paso dos es el que convierte una salida automática en evidencia. Es también el que se califica. Un libro de códigos sin diferencias entre la versión propuesta y la ratificada es la señal de que ese paso no se hizo.</a:t>
             </a:r>
             <a:endParaRPr lang="en-US" sz="1600" dirty="0"/>
           </a:p>
@@ -2492,9 +3403,9 @@
 </p:sld>
 </file>
 
-<file path=ppt/slides/slide11.xml><?xml version="1.0" encoding="utf-8"?>
+<file path=ppt/slides/slide12.xml><?xml version="1.0" encoding="utf-8"?>
 <p:sld xmlns:a="http://schemas.openxmlformats.org/drawingml/2006/main" xmlns:r="http://schemas.openxmlformats.org/officeDocument/2006/relationships" xmlns:p="http://schemas.openxmlformats.org/presentationml/2006/main">
-  <p:cSld name="Slide 11">
+  <p:cSld name="Slide 12">
     <p:bg>
       <p:bgPr>
         <a:solidFill>
@@ -2576,7 +3487,7 @@
                 <a:ea typeface="Arial" pitchFamily="34" charset="-122"/>
                 <a:cs typeface="Arial" pitchFamily="34" charset="-120"/>
               </a:rPr>
-              <a:t>AHORA USTEDES</a:t>
+              <a:t>TU TURNO</a:t>
             </a:r>
             <a:endParaRPr lang="en-US" sz="1300" dirty="0"/>
           </a:p>
@@ -2814,7 +3725,7 @@
                 <a:ea typeface="Calibri" pitchFamily="34" charset="-122"/>
                 <a:cs typeface="Calibri" pitchFamily="34" charset="-120"/>
               </a:rPr>
-              <a:t>Diez minutos. Dele a la herramienta una muestra de los registros y pídale un libro de códigos con categoría, definición operativa y tres ejemplos de cada una.</a:t>
+              <a:t>Diez minutos. Dale una muestra de los registros y pídele un libro de códigos con categoría, definición y tres ejemplos de cada una.</a:t>
             </a:r>
             <a:endParaRPr lang="en-US" sz="1450" dirty="0"/>
           </a:p>
@@ -2947,7 +3858,7 @@
                 <a:ea typeface="Calibri" pitchFamily="34" charset="-122"/>
                 <a:cs typeface="Calibri" pitchFamily="34" charset="-120"/>
               </a:rPr>
-              <a:t>Quince minutos. Revise ese libro de códigos y corríjalo. Llene sobre todo la columna de qué NO incluye cada categoría, que es la que evita los traslapes.</a:t>
+              <a:t>Quince minutos. Revisa y corrige ese libro. Llena sobre todo la columna de qué NO incluye cada categoría: es la que evita los traslapes y la que casi nadie llena.</a:t>
             </a:r>
             <a:endParaRPr lang="en-US" sz="1450" dirty="0"/>
           </a:p>
@@ -3080,7 +3991,7 @@
                 <a:ea typeface="Calibri" pitchFamily="34" charset="-122"/>
                 <a:cs typeface="Calibri" pitchFamily="34" charset="-120"/>
               </a:rPr>
-              <a:t>Diez minutos. Clasifique el conjunto completo con el libro ratificado y revise una muestra de veinte registros para ver cuántos quedaron bien clasificados.</a:t>
+              <a:t>Diez minutos. Clasifica el conjunto completo con tu libro ratificado y revisa una muestra de veinte para ver cuántos quedaron bien.</a:t>
             </a:r>
             <a:endParaRPr lang="en-US" sz="1450" dirty="0"/>
           </a:p>
@@ -3213,7 +4124,7 @@
                 <a:ea typeface="Calibri" pitchFamily="34" charset="-122"/>
                 <a:cs typeface="Calibri" pitchFamily="34" charset="-120"/>
               </a:rPr>
-              <a:t>Hay seis registros que tocan dos o tres temas a la vez. Vean qué hace la herramienta con ellos y qué haría usted.</a:t>
+              <a:t>Hay registros que tocan dos o tres temas a la vez. Fíjate qué hace el modelo con ellos y qué harías tú.</a:t>
             </a:r>
             <a:endParaRPr lang="en-US" sz="1450" dirty="0"/>
           </a:p>
@@ -3279,415 +4190,9 @@
                 <a:ea typeface="Calibri" pitchFamily="34" charset="-122"/>
                 <a:cs typeface="Calibri" pitchFamily="34" charset="-120"/>
               </a:rPr>
-              <a:t>Archivo: Registros_atencion_ciudadana_sintetico.xlsx, hoja Registros. Plantilla del libro de códigos en Plantillas_tabulares_curso_IA.xlsx.</a:t>
+              <a:t>Archivo: Registros_atencion_ciudadana_PARTICIPANTE.xlsx, hoja Registros.</a:t>
             </a:r>
             <a:endParaRPr lang="en-US" sz="1350" dirty="0"/>
-          </a:p>
-        </p:txBody>
-      </p:sp>
-    </p:spTree>
-  </p:cSld>
-  <p:clrMapOvr>
-    <a:masterClrMapping/>
-  </p:clrMapOvr>
-</p:sld>
-</file>
-
-<file path=ppt/slides/slide12.xml><?xml version="1.0" encoding="utf-8"?>
-<p:sld xmlns:a="http://schemas.openxmlformats.org/drawingml/2006/main" xmlns:r="http://schemas.openxmlformats.org/officeDocument/2006/relationships" xmlns:p="http://schemas.openxmlformats.org/presentationml/2006/main">
-  <p:cSld name="Slide 12">
-    <p:spTree>
-      <p:nvGrpSpPr>
-        <p:cNvPr id="1" name=""/>
-        <p:cNvGrpSpPr/>
-        <p:nvPr/>
-      </p:nvGrpSpPr>
-      <p:grpSpPr>
-        <a:xfrm>
-          <a:off x="0" y="0"/>
-          <a:ext cx="0" cy="0"/>
-          <a:chOff x="0" y="0"/>
-          <a:chExt cx="0" cy="0"/>
-        </a:xfrm>
-      </p:grpSpPr>
-      <p:sp>
-        <p:nvSpPr>
-          <p:cNvPr id="2" name="Text 0"/>
-          <p:cNvSpPr txBox="1"/>
-          <p:nvPr/>
-        </p:nvSpPr>
-        <p:spPr>
-          <a:xfrm>
-            <a:off x="566928" y="402336"/>
-            <a:ext cx="9229039" cy="749808"/>
-          </a:xfrm>
-          <a:prstGeom prst="rect">
-            <a:avLst/>
-          </a:prstGeom>
-          <a:noFill/>
-          <a:ln/>
-        </p:spPr>
-        <p:txBody>
-          <a:bodyPr wrap="square" lIns="0" tIns="0" rIns="0" bIns="0" rtlCol="0" anchor="t"/>
-          <a:lstStyle/>
-          <a:p>
-            <a:pPr algn="l" indent="0" marL="0">
-              <a:buNone/>
-            </a:pPr>
-            <a:r>
-              <a:rPr lang="en-US" sz="3200" b="1" dirty="0">
-                <a:solidFill>
-                  <a:srgbClr val="16262E"/>
-                </a:solidFill>
-                <a:latin typeface="Arial" pitchFamily="34" charset="0"/>
-                <a:ea typeface="Arial" pitchFamily="34" charset="-122"/>
-                <a:cs typeface="Arial" pitchFamily="34" charset="-120"/>
-              </a:rPr>
-              <a:t>Práctica D. Postura y sentimiento</a:t>
-            </a:r>
-            <a:endParaRPr lang="en-US" sz="3200" dirty="0"/>
-          </a:p>
-        </p:txBody>
-      </p:sp>
-      <p:sp>
-        <p:nvSpPr>
-          <p:cNvPr id="3" name="Text 1"/>
-          <p:cNvSpPr txBox="1"/>
-          <p:nvPr/>
-        </p:nvSpPr>
-        <p:spPr>
-          <a:xfrm>
-            <a:off x="566928" y="1280160"/>
-            <a:ext cx="9960559" cy="365760"/>
-          </a:xfrm>
-          <a:prstGeom prst="rect">
-            <a:avLst/>
-          </a:prstGeom>
-          <a:noFill/>
-          <a:ln/>
-        </p:spPr>
-        <p:txBody>
-          <a:bodyPr wrap="square" lIns="0" tIns="0" rIns="0" bIns="0" rtlCol="0" anchor="t"/>
-          <a:lstStyle/>
-          <a:p>
-            <a:pPr indent="0" marL="0">
-              <a:buNone/>
-            </a:pPr>
-            <a:r>
-              <a:rPr lang="en-US" sz="1500" dirty="0">
-                <a:solidFill>
-                  <a:srgbClr val="5A6B73"/>
-                </a:solidFill>
-                <a:latin typeface="Calibri" pitchFamily="34" charset="0"/>
-                <a:ea typeface="Calibri" pitchFamily="34" charset="-122"/>
-                <a:cs typeface="Calibri" pitchFamily="34" charset="-120"/>
-              </a:rPr>
-              <a:t>Quince minutos sobre transcripciones de foros de consulta comunitaria.</a:t>
-            </a:r>
-            <a:endParaRPr lang="en-US" sz="1500" dirty="0"/>
-          </a:p>
-        </p:txBody>
-      </p:sp>
-      <p:sp>
-        <p:nvSpPr>
-          <p:cNvPr id="4" name="Shape 2"/>
-          <p:cNvSpPr/>
-          <p:nvPr/>
-        </p:nvSpPr>
-        <p:spPr>
-          <a:xfrm>
-            <a:off x="566928" y="2011680"/>
-            <a:ext cx="5391760" cy="1856486"/>
-          </a:xfrm>
-          <a:prstGeom prst="roundRect">
-            <a:avLst>
-              <a:gd name="adj" fmla="val 3940"/>
-            </a:avLst>
-          </a:prstGeom>
-          <a:solidFill>
-            <a:srgbClr val="D7E7E7"/>
-          </a:solidFill>
-          <a:ln w="12700">
-            <a:solidFill>
-              <a:srgbClr val="D7E7E7"/>
-            </a:solidFill>
-            <a:prstDash val="solid"/>
-          </a:ln>
-        </p:spPr>
-      </p:sp>
-      <p:sp>
-        <p:nvSpPr>
-          <p:cNvPr id="5" name="Text 3"/>
-          <p:cNvSpPr txBox="1"/>
-          <p:nvPr/>
-        </p:nvSpPr>
-        <p:spPr>
-          <a:xfrm>
-            <a:off x="804672" y="2249424"/>
-            <a:ext cx="4916272" cy="457200"/>
-          </a:xfrm>
-          <a:prstGeom prst="rect">
-            <a:avLst/>
-          </a:prstGeom>
-          <a:noFill/>
-          <a:ln/>
-        </p:spPr>
-        <p:txBody>
-          <a:bodyPr wrap="square" lIns="0" tIns="0" rIns="0" bIns="0" rtlCol="0" anchor="t"/>
-          <a:lstStyle/>
-          <a:p>
-            <a:pPr indent="0" marL="0">
-              <a:buNone/>
-            </a:pPr>
-            <a:r>
-              <a:rPr lang="en-US" sz="1600" b="1" dirty="0">
-                <a:solidFill>
-                  <a:srgbClr val="16262E"/>
-                </a:solidFill>
-                <a:latin typeface="Arial" pitchFamily="34" charset="0"/>
-                <a:ea typeface="Arial" pitchFamily="34" charset="-122"/>
-                <a:cs typeface="Arial" pitchFamily="34" charset="-120"/>
-              </a:rPr>
-              <a:t>Clasifiquen por dos ejes al mismo tiempo</a:t>
-            </a:r>
-            <a:endParaRPr lang="en-US" sz="1600" dirty="0"/>
-          </a:p>
-        </p:txBody>
-      </p:sp>
-      <p:sp>
-        <p:nvSpPr>
-          <p:cNvPr id="6" name="Text 4"/>
-          <p:cNvSpPr txBox="1"/>
-          <p:nvPr/>
-        </p:nvSpPr>
-        <p:spPr>
-          <a:xfrm>
-            <a:off x="804672" y="2724912"/>
-            <a:ext cx="4916272" cy="905510"/>
-          </a:xfrm>
-          <a:prstGeom prst="rect">
-            <a:avLst/>
-          </a:prstGeom>
-          <a:noFill/>
-          <a:ln/>
-        </p:spPr>
-        <p:txBody>
-          <a:bodyPr wrap="square" lIns="0" tIns="0" rIns="0" bIns="0" rtlCol="0" anchor="t"/>
-          <a:lstStyle/>
-          <a:p>
-            <a:pPr indent="0" marL="0">
-              <a:lnSpc>
-                <a:spcPct val="110000"/>
-              </a:lnSpc>
-              <a:buNone/>
-            </a:pPr>
-            <a:r>
-              <a:rPr lang="en-US" sz="1300" dirty="0">
-                <a:solidFill>
-                  <a:srgbClr val="16262E"/>
-                </a:solidFill>
-                <a:latin typeface="Calibri" pitchFamily="34" charset="0"/>
-                <a:ea typeface="Calibri" pitchFamily="34" charset="-122"/>
-                <a:cs typeface="Calibri" pitchFamily="34" charset="-120"/>
-              </a:rPr>
-              <a:t>Polaridad: positiva, neutra o negativa.</a:t>
-            </a:r>
-            <a:endParaRPr lang="en-US" sz="1300" dirty="0"/>
-          </a:p>
-          <a:p>
-            <a:pPr indent="0" marL="0">
-              <a:lnSpc>
-                <a:spcPct val="110000"/>
-              </a:lnSpc>
-              <a:buNone/>
-            </a:pPr>
-            <a:endParaRPr lang="en-US" sz="1300" dirty="0"/>
-          </a:p>
-          <a:p>
-            <a:pPr indent="0" marL="0">
-              <a:lnSpc>
-                <a:spcPct val="110000"/>
-              </a:lnSpc>
-              <a:buNone/>
-            </a:pPr>
-            <a:r>
-              <a:rPr lang="en-US" sz="1300" dirty="0">
-                <a:solidFill>
-                  <a:srgbClr val="16262E"/>
-                </a:solidFill>
-                <a:latin typeface="Calibri" pitchFamily="34" charset="0"/>
-                <a:ea typeface="Calibri" pitchFamily="34" charset="-122"/>
-                <a:cs typeface="Calibri" pitchFamily="34" charset="-120"/>
-              </a:rPr>
-              <a:t>Causa raíz: infraestructura, presupuesto, gestión o transparencia.</a:t>
-            </a:r>
-            <a:endParaRPr lang="en-US" sz="1300" dirty="0"/>
-          </a:p>
-          <a:p>
-            <a:pPr indent="0" marL="0">
-              <a:lnSpc>
-                <a:spcPct val="110000"/>
-              </a:lnSpc>
-              <a:buNone/>
-            </a:pPr>
-            <a:endParaRPr lang="en-US" sz="1300" dirty="0"/>
-          </a:p>
-          <a:p>
-            <a:pPr indent="0" marL="0">
-              <a:lnSpc>
-                <a:spcPct val="110000"/>
-              </a:lnSpc>
-              <a:buNone/>
-            </a:pPr>
-            <a:r>
-              <a:rPr lang="en-US" sz="1300" dirty="0">
-                <a:solidFill>
-                  <a:srgbClr val="16262E"/>
-                </a:solidFill>
-                <a:latin typeface="Calibri" pitchFamily="34" charset="0"/>
-                <a:ea typeface="Calibri" pitchFamily="34" charset="-122"/>
-                <a:cs typeface="Calibri" pitchFamily="34" charset="-120"/>
-              </a:rPr>
-              <a:t>Un solo eje casi nunca alcanza para decidir nada.</a:t>
-            </a:r>
-            <a:endParaRPr lang="en-US" sz="1300" dirty="0"/>
-          </a:p>
-        </p:txBody>
-      </p:sp>
-      <p:sp>
-        <p:nvSpPr>
-          <p:cNvPr id="7" name="Shape 5"/>
-          <p:cNvSpPr/>
-          <p:nvPr/>
-        </p:nvSpPr>
-        <p:spPr>
-          <a:xfrm>
-            <a:off x="6233008" y="2011680"/>
-            <a:ext cx="5391760" cy="1856486"/>
-          </a:xfrm>
-          <a:prstGeom prst="roundRect">
-            <a:avLst>
-              <a:gd name="adj" fmla="val 3940"/>
-            </a:avLst>
-          </a:prstGeom>
-          <a:solidFill>
-            <a:srgbClr val="F7E4D8"/>
-          </a:solidFill>
-          <a:ln w="12700">
-            <a:solidFill>
-              <a:srgbClr val="F7E4D8"/>
-            </a:solidFill>
-            <a:prstDash val="solid"/>
-          </a:ln>
-        </p:spPr>
-      </p:sp>
-      <p:sp>
-        <p:nvSpPr>
-          <p:cNvPr id="8" name="Text 6"/>
-          <p:cNvSpPr txBox="1"/>
-          <p:nvPr/>
-        </p:nvSpPr>
-        <p:spPr>
-          <a:xfrm>
-            <a:off x="6470752" y="2249424"/>
-            <a:ext cx="4916272" cy="457200"/>
-          </a:xfrm>
-          <a:prstGeom prst="rect">
-            <a:avLst/>
-          </a:prstGeom>
-          <a:noFill/>
-          <a:ln/>
-        </p:spPr>
-        <p:txBody>
-          <a:bodyPr wrap="square" lIns="0" tIns="0" rIns="0" bIns="0" rtlCol="0" anchor="t"/>
-          <a:lstStyle/>
-          <a:p>
-            <a:pPr indent="0" marL="0">
-              <a:buNone/>
-            </a:pPr>
-            <a:r>
-              <a:rPr lang="en-US" sz="1600" b="1" dirty="0">
-                <a:solidFill>
-                  <a:srgbClr val="16262E"/>
-                </a:solidFill>
-                <a:latin typeface="Arial" pitchFamily="34" charset="0"/>
-                <a:ea typeface="Arial" pitchFamily="34" charset="-122"/>
-                <a:cs typeface="Arial" pitchFamily="34" charset="-120"/>
-              </a:rPr>
-              <a:t>La pregunta que hay que hacerse al final</a:t>
-            </a:r>
-            <a:endParaRPr lang="en-US" sz="1600" dirty="0"/>
-          </a:p>
-        </p:txBody>
-      </p:sp>
-      <p:sp>
-        <p:nvSpPr>
-          <p:cNvPr id="9" name="Text 7"/>
-          <p:cNvSpPr txBox="1"/>
-          <p:nvPr/>
-        </p:nvSpPr>
-        <p:spPr>
-          <a:xfrm>
-            <a:off x="6470752" y="2724912"/>
-            <a:ext cx="4916272" cy="905510"/>
-          </a:xfrm>
-          <a:prstGeom prst="rect">
-            <a:avLst/>
-          </a:prstGeom>
-          <a:noFill/>
-          <a:ln/>
-        </p:spPr>
-        <p:txBody>
-          <a:bodyPr wrap="square" lIns="0" tIns="0" rIns="0" bIns="0" rtlCol="0" anchor="t"/>
-          <a:lstStyle/>
-          <a:p>
-            <a:pPr indent="0" marL="0">
-              <a:lnSpc>
-                <a:spcPct val="110000"/>
-              </a:lnSpc>
-              <a:buNone/>
-            </a:pPr>
-            <a:r>
-              <a:rPr lang="en-US" sz="1300" dirty="0">
-                <a:solidFill>
-                  <a:srgbClr val="16262E"/>
-                </a:solidFill>
-                <a:latin typeface="Calibri" pitchFamily="34" charset="0"/>
-                <a:ea typeface="Calibri" pitchFamily="34" charset="-122"/>
-                <a:cs typeface="Calibri" pitchFamily="34" charset="-120"/>
-              </a:rPr>
-              <a:t>Si el resultado es que el 62 por ciento de las intervenciones fueron negativas, ¿qué decisión de política se puede tomar con eso?</a:t>
-            </a:r>
-            <a:endParaRPr lang="en-US" sz="1300" dirty="0"/>
-          </a:p>
-          <a:p>
-            <a:pPr indent="0" marL="0">
-              <a:lnSpc>
-                <a:spcPct val="110000"/>
-              </a:lnSpc>
-              <a:buNone/>
-            </a:pPr>
-            <a:endParaRPr lang="en-US" sz="1300" dirty="0"/>
-          </a:p>
-          <a:p>
-            <a:pPr indent="0" marL="0">
-              <a:lnSpc>
-                <a:spcPct val="110000"/>
-              </a:lnSpc>
-              <a:buNone/>
-            </a:pPr>
-            <a:r>
-              <a:rPr lang="en-US" sz="1300" dirty="0">
-                <a:solidFill>
-                  <a:srgbClr val="16262E"/>
-                </a:solidFill>
-                <a:latin typeface="Calibri" pitchFamily="34" charset="0"/>
-                <a:ea typeface="Calibri" pitchFamily="34" charset="-122"/>
-                <a:cs typeface="Calibri" pitchFamily="34" charset="-120"/>
-              </a:rPr>
-              <a:t>La respuesta suele ser ninguna, y ahí está la lección: la polaridad sola no es un hallazgo, es un punto de partida.</a:t>
-            </a:r>
-            <a:endParaRPr lang="en-US" sz="1300" dirty="0"/>
           </a:p>
         </p:txBody>
       </p:sp>
@@ -3749,7 +4254,7 @@
                 <a:ea typeface="Arial" pitchFamily="34" charset="-122"/>
                 <a:cs typeface="Arial" pitchFamily="34" charset="-120"/>
               </a:rPr>
-              <a:t>Cuando el corpus no cabe en la ventana de contexto</a:t>
+              <a:t>Práctica D. Postura y causa raíz</a:t>
             </a:r>
             <a:endParaRPr lang="en-US" sz="3200" dirty="0"/>
           </a:p>
@@ -3788,7 +4293,7 @@
                 <a:ea typeface="Calibri" pitchFamily="34" charset="-122"/>
                 <a:cs typeface="Calibri" pitchFamily="34" charset="-120"/>
               </a:rPr>
-              <a:t>Toda herramienta tiene un límite de cuánto texto puede leer de una sola vez. Hay tres salidas.</a:t>
+              <a:t>Quince minutos sobre transcripciones de foros de consulta.</a:t>
             </a:r>
             <a:endParaRPr lang="en-US" sz="1500" dirty="0"/>
           </a:p>
@@ -3803,19 +4308,19 @@
         <p:spPr>
           <a:xfrm>
             <a:off x="566928" y="2011680"/>
-            <a:ext cx="3503066" cy="2296160"/>
+            <a:ext cx="5391760" cy="2291842"/>
           </a:xfrm>
           <a:prstGeom prst="roundRect">
             <a:avLst>
-              <a:gd name="adj" fmla="val 3186"/>
+              <a:gd name="adj" fmla="val 3192"/>
             </a:avLst>
           </a:prstGeom>
           <a:solidFill>
-            <a:srgbClr val="F2F5F6"/>
+            <a:srgbClr val="D7E7E7"/>
           </a:solidFill>
           <a:ln w="12700">
             <a:solidFill>
-              <a:srgbClr val="F2F5F6"/>
+              <a:srgbClr val="D7E7E7"/>
             </a:solidFill>
             <a:prstDash val="solid"/>
           </a:ln>
@@ -3823,102 +4328,38 @@
       </p:sp>
       <p:sp>
         <p:nvSpPr>
-          <p:cNvPr id="5" name="Shape 3"/>
-          <p:cNvSpPr/>
-          <p:nvPr/>
-        </p:nvSpPr>
-        <p:spPr>
-          <a:xfrm>
-            <a:off x="804672" y="2231136"/>
-            <a:ext cx="420624" cy="420624"/>
-          </a:xfrm>
-          <a:prstGeom prst="ellipse">
-            <a:avLst/>
-          </a:prstGeom>
-          <a:solidFill>
-            <a:srgbClr val="2E7D7D"/>
-          </a:solidFill>
-          <a:ln w="12700">
-            <a:solidFill>
-              <a:srgbClr val="2E7D7D"/>
-            </a:solidFill>
-            <a:prstDash val="solid"/>
-          </a:ln>
-        </p:spPr>
-      </p:sp>
-      <p:sp>
-        <p:nvSpPr>
-          <p:cNvPr id="6" name="Text 4"/>
-          <p:cNvSpPr txBox="1"/>
-          <p:nvPr/>
-        </p:nvSpPr>
-        <p:spPr>
-          <a:xfrm>
-            <a:off x="804672" y="2231136"/>
-            <a:ext cx="420624" cy="420624"/>
-          </a:xfrm>
-          <a:prstGeom prst="rect">
-            <a:avLst/>
-          </a:prstGeom>
-          <a:noFill/>
-          <a:ln/>
-        </p:spPr>
-        <p:txBody>
-          <a:bodyPr wrap="square" lIns="0" tIns="0" rIns="0" bIns="0" rtlCol="0" anchor="ctr"/>
-          <a:lstStyle/>
-          <a:p>
-            <a:pPr algn="ctr" indent="0" marL="0">
-              <a:buNone/>
-            </a:pPr>
-            <a:r>
-              <a:rPr lang="en-US" sz="1400" b="1" dirty="0">
-                <a:solidFill>
-                  <a:srgbClr val="FFFFFF"/>
+          <p:cNvPr id="5" name="Text 3"/>
+          <p:cNvSpPr txBox="1"/>
+          <p:nvPr/>
+        </p:nvSpPr>
+        <p:spPr>
+          <a:xfrm>
+            <a:off x="804672" y="2249424"/>
+            <a:ext cx="4916272" cy="319024"/>
+          </a:xfrm>
+          <a:prstGeom prst="rect">
+            <a:avLst/>
+          </a:prstGeom>
+          <a:noFill/>
+          <a:ln/>
+        </p:spPr>
+        <p:txBody>
+          <a:bodyPr wrap="square" lIns="0" tIns="0" rIns="0" bIns="0" rtlCol="0" anchor="t"/>
+          <a:lstStyle/>
+          <a:p>
+            <a:pPr indent="0" marL="0">
+              <a:buNone/>
+            </a:pPr>
+            <a:r>
+              <a:rPr lang="en-US" sz="1600" b="1" dirty="0">
+                <a:solidFill>
+                  <a:srgbClr val="16262E"/>
                 </a:solidFill>
                 <a:latin typeface="Arial" pitchFamily="34" charset="0"/>
                 <a:ea typeface="Arial" pitchFamily="34" charset="-122"/>
                 <a:cs typeface="Arial" pitchFamily="34" charset="-120"/>
               </a:rPr>
-              <a:t>1</a:t>
-            </a:r>
-            <a:endParaRPr lang="en-US" sz="1400" dirty="0"/>
-          </a:p>
-        </p:txBody>
-      </p:sp>
-      <p:sp>
-        <p:nvSpPr>
-          <p:cNvPr id="7" name="Text 5"/>
-          <p:cNvSpPr txBox="1"/>
-          <p:nvPr/>
-        </p:nvSpPr>
-        <p:spPr>
-          <a:xfrm>
-            <a:off x="804672" y="2798064"/>
-            <a:ext cx="3027578" cy="457200"/>
-          </a:xfrm>
-          <a:prstGeom prst="rect">
-            <a:avLst/>
-          </a:prstGeom>
-          <a:noFill/>
-          <a:ln/>
-        </p:spPr>
-        <p:txBody>
-          <a:bodyPr wrap="square" lIns="0" tIns="0" rIns="0" bIns="0" rtlCol="0" anchor="t"/>
-          <a:lstStyle/>
-          <a:p>
-            <a:pPr indent="0" marL="0">
-              <a:buNone/>
-            </a:pPr>
-            <a:r>
-              <a:rPr lang="en-US" sz="1600" b="1" dirty="0">
-                <a:solidFill>
-                  <a:srgbClr val="16262E"/>
-                </a:solidFill>
-                <a:latin typeface="Arial" pitchFamily="34" charset="0"/>
-                <a:ea typeface="Arial" pitchFamily="34" charset="-122"/>
-                <a:cs typeface="Arial" pitchFamily="34" charset="-120"/>
-              </a:rPr>
-              <a:t>Partir en bloques</a:t>
+              <a:t>Clasifica por dos ejes a la vez</a:t>
             </a:r>
             <a:endParaRPr lang="en-US" sz="1600" dirty="0"/>
           </a:p>
@@ -3926,14 +4367,14 @@
       </p:sp>
       <p:sp>
         <p:nvSpPr>
-          <p:cNvPr id="8" name="Text 6"/>
-          <p:cNvSpPr txBox="1"/>
-          <p:nvPr/>
-        </p:nvSpPr>
-        <p:spPr>
-          <a:xfrm>
-            <a:off x="804672" y="3273552"/>
-            <a:ext cx="3027578" cy="796544"/>
+          <p:cNvPr id="6" name="Text 4"/>
+          <p:cNvSpPr txBox="1"/>
+          <p:nvPr/>
+        </p:nvSpPr>
+        <p:spPr>
+          <a:xfrm>
+            <a:off x="804672" y="2714752"/>
+            <a:ext cx="4916272" cy="1387602"/>
           </a:xfrm>
           <a:prstGeom prst="rect">
             <a:avLst/>
@@ -3960,162 +4401,10 @@
                 <a:ea typeface="Calibri" pitchFamily="34" charset="-122"/>
                 <a:cs typeface="Calibri" pitchFamily="34" charset="-120"/>
               </a:rPr>
-              <a:t>Procesar por tandas y consolidar los resultados al final. Funciona, pero hay que cuidar que el libro de códigos sea el mismo en todas las tandas.</a:t>
+              <a:t>Polaridad: positiva, neutra o negativa.</a:t>
             </a:r>
             <a:endParaRPr lang="en-US" sz="1300" dirty="0"/>
           </a:p>
-        </p:txBody>
-      </p:sp>
-      <p:sp>
-        <p:nvSpPr>
-          <p:cNvPr id="9" name="Shape 7"/>
-          <p:cNvSpPr/>
-          <p:nvPr/>
-        </p:nvSpPr>
-        <p:spPr>
-          <a:xfrm>
-            <a:off x="4344314" y="2011680"/>
-            <a:ext cx="3503066" cy="2296160"/>
-          </a:xfrm>
-          <a:prstGeom prst="roundRect">
-            <a:avLst>
-              <a:gd name="adj" fmla="val 3186"/>
-            </a:avLst>
-          </a:prstGeom>
-          <a:solidFill>
-            <a:srgbClr val="F2F5F6"/>
-          </a:solidFill>
-          <a:ln w="12700">
-            <a:solidFill>
-              <a:srgbClr val="F2F5F6"/>
-            </a:solidFill>
-            <a:prstDash val="solid"/>
-          </a:ln>
-        </p:spPr>
-      </p:sp>
-      <p:sp>
-        <p:nvSpPr>
-          <p:cNvPr id="10" name="Shape 8"/>
-          <p:cNvSpPr/>
-          <p:nvPr/>
-        </p:nvSpPr>
-        <p:spPr>
-          <a:xfrm>
-            <a:off x="4582058" y="2231136"/>
-            <a:ext cx="420624" cy="420624"/>
-          </a:xfrm>
-          <a:prstGeom prst="ellipse">
-            <a:avLst/>
-          </a:prstGeom>
-          <a:solidFill>
-            <a:srgbClr val="2E7D7D"/>
-          </a:solidFill>
-          <a:ln w="12700">
-            <a:solidFill>
-              <a:srgbClr val="2E7D7D"/>
-            </a:solidFill>
-            <a:prstDash val="solid"/>
-          </a:ln>
-        </p:spPr>
-      </p:sp>
-      <p:sp>
-        <p:nvSpPr>
-          <p:cNvPr id="11" name="Text 9"/>
-          <p:cNvSpPr txBox="1"/>
-          <p:nvPr/>
-        </p:nvSpPr>
-        <p:spPr>
-          <a:xfrm>
-            <a:off x="4582058" y="2231136"/>
-            <a:ext cx="420624" cy="420624"/>
-          </a:xfrm>
-          <a:prstGeom prst="rect">
-            <a:avLst/>
-          </a:prstGeom>
-          <a:noFill/>
-          <a:ln/>
-        </p:spPr>
-        <p:txBody>
-          <a:bodyPr wrap="square" lIns="0" tIns="0" rIns="0" bIns="0" rtlCol="0" anchor="ctr"/>
-          <a:lstStyle/>
-          <a:p>
-            <a:pPr algn="ctr" indent="0" marL="0">
-              <a:buNone/>
-            </a:pPr>
-            <a:r>
-              <a:rPr lang="en-US" sz="1400" b="1" dirty="0">
-                <a:solidFill>
-                  <a:srgbClr val="FFFFFF"/>
-                </a:solidFill>
-                <a:latin typeface="Arial" pitchFamily="34" charset="0"/>
-                <a:ea typeface="Arial" pitchFamily="34" charset="-122"/>
-                <a:cs typeface="Arial" pitchFamily="34" charset="-120"/>
-              </a:rPr>
-              <a:t>2</a:t>
-            </a:r>
-            <a:endParaRPr lang="en-US" sz="1400" dirty="0"/>
-          </a:p>
-        </p:txBody>
-      </p:sp>
-      <p:sp>
-        <p:nvSpPr>
-          <p:cNvPr id="12" name="Text 10"/>
-          <p:cNvSpPr txBox="1"/>
-          <p:nvPr/>
-        </p:nvSpPr>
-        <p:spPr>
-          <a:xfrm>
-            <a:off x="4582058" y="2798064"/>
-            <a:ext cx="3027578" cy="457200"/>
-          </a:xfrm>
-          <a:prstGeom prst="rect">
-            <a:avLst/>
-          </a:prstGeom>
-          <a:noFill/>
-          <a:ln/>
-        </p:spPr>
-        <p:txBody>
-          <a:bodyPr wrap="square" lIns="0" tIns="0" rIns="0" bIns="0" rtlCol="0" anchor="t"/>
-          <a:lstStyle/>
-          <a:p>
-            <a:pPr indent="0" marL="0">
-              <a:buNone/>
-            </a:pPr>
-            <a:r>
-              <a:rPr lang="en-US" sz="1600" b="1" dirty="0">
-                <a:solidFill>
-                  <a:srgbClr val="16262E"/>
-                </a:solidFill>
-                <a:latin typeface="Arial" pitchFamily="34" charset="0"/>
-                <a:ea typeface="Arial" pitchFamily="34" charset="-122"/>
-                <a:cs typeface="Arial" pitchFamily="34" charset="-120"/>
-              </a:rPr>
-              <a:t>Trabajar con muestra</a:t>
-            </a:r>
-            <a:endParaRPr lang="en-US" sz="1600" dirty="0"/>
-          </a:p>
-        </p:txBody>
-      </p:sp>
-      <p:sp>
-        <p:nvSpPr>
-          <p:cNvPr id="13" name="Text 11"/>
-          <p:cNvSpPr txBox="1"/>
-          <p:nvPr/>
-        </p:nvSpPr>
-        <p:spPr>
-          <a:xfrm>
-            <a:off x="4582058" y="3273552"/>
-            <a:ext cx="3027578" cy="796544"/>
-          </a:xfrm>
-          <a:prstGeom prst="rect">
-            <a:avLst/>
-          </a:prstGeom>
-          <a:noFill/>
-          <a:ln/>
-        </p:spPr>
-        <p:txBody>
-          <a:bodyPr wrap="square" lIns="0" tIns="0" rIns="0" bIns="0" rtlCol="0" anchor="t"/>
-          <a:lstStyle/>
           <a:p>
             <a:pPr indent="0" marL="0">
               <a:lnSpc>
@@ -4123,6 +4412,15 @@
               </a:lnSpc>
               <a:buNone/>
             </a:pPr>
+            <a:endParaRPr lang="en-US" sz="1300" dirty="0"/>
+          </a:p>
+          <a:p>
+            <a:pPr indent="0" marL="0">
+              <a:lnSpc>
+                <a:spcPct val="110000"/>
+              </a:lnSpc>
+              <a:buNone/>
+            </a:pPr>
             <a:r>
               <a:rPr lang="en-US" sz="1300" dirty="0">
                 <a:solidFill>
@@ -4132,26 +4430,55 @@
                 <a:ea typeface="Calibri" pitchFamily="34" charset="-122"/>
                 <a:cs typeface="Calibri" pitchFamily="34" charset="-120"/>
               </a:rPr>
-              <a:t>Construir el libro de códigos sobre una muestra representativa y después validar contra el total. Es lo que hicimos hoy.</a:t>
+              <a:t>Causa raíz: infraestructura, presupuesto, gestión o transparencia.</a:t>
             </a:r>
             <a:endParaRPr lang="en-US" sz="1300" dirty="0"/>
           </a:p>
-        </p:txBody>
-      </p:sp>
-      <p:sp>
-        <p:nvSpPr>
-          <p:cNvPr id="14" name="Shape 12"/>
+          <a:p>
+            <a:pPr indent="0" marL="0">
+              <a:lnSpc>
+                <a:spcPct val="110000"/>
+              </a:lnSpc>
+              <a:buNone/>
+            </a:pPr>
+            <a:endParaRPr lang="en-US" sz="1300" dirty="0"/>
+          </a:p>
+          <a:p>
+            <a:pPr indent="0" marL="0">
+              <a:lnSpc>
+                <a:spcPct val="110000"/>
+              </a:lnSpc>
+              <a:buNone/>
+            </a:pPr>
+            <a:r>
+              <a:rPr lang="en-US" sz="1300" dirty="0">
+                <a:solidFill>
+                  <a:srgbClr val="16262E"/>
+                </a:solidFill>
+                <a:latin typeface="Calibri" pitchFamily="34" charset="0"/>
+                <a:ea typeface="Calibri" pitchFamily="34" charset="-122"/>
+                <a:cs typeface="Calibri" pitchFamily="34" charset="-120"/>
+              </a:rPr>
+              <a:t>Un solo eje casi nunca alcanza para decidir nada.</a:t>
+            </a:r>
+            <a:endParaRPr lang="en-US" sz="1300" dirty="0"/>
+          </a:p>
+        </p:txBody>
+      </p:sp>
+      <p:sp>
+        <p:nvSpPr>
+          <p:cNvPr id="7" name="Shape 5"/>
           <p:cNvSpPr/>
           <p:nvPr/>
         </p:nvSpPr>
         <p:spPr>
           <a:xfrm>
-            <a:off x="8121701" y="2011680"/>
-            <a:ext cx="3503066" cy="2296160"/>
+            <a:off x="6233008" y="2011680"/>
+            <a:ext cx="5391760" cy="2291842"/>
           </a:xfrm>
           <a:prstGeom prst="roundRect">
             <a:avLst>
-              <a:gd name="adj" fmla="val 3186"/>
+              <a:gd name="adj" fmla="val 3192"/>
             </a:avLst>
           </a:prstGeom>
           <a:solidFill>
@@ -4167,102 +4494,38 @@
       </p:sp>
       <p:sp>
         <p:nvSpPr>
-          <p:cNvPr id="15" name="Shape 13"/>
-          <p:cNvSpPr/>
-          <p:nvPr/>
-        </p:nvSpPr>
-        <p:spPr>
-          <a:xfrm>
-            <a:off x="8359445" y="2231136"/>
-            <a:ext cx="420624" cy="420624"/>
-          </a:xfrm>
-          <a:prstGeom prst="ellipse">
-            <a:avLst/>
-          </a:prstGeom>
-          <a:solidFill>
-            <a:srgbClr val="C85A28"/>
-          </a:solidFill>
-          <a:ln w="12700">
-            <a:solidFill>
-              <a:srgbClr val="C85A28"/>
-            </a:solidFill>
-            <a:prstDash val="solid"/>
-          </a:ln>
-        </p:spPr>
-      </p:sp>
-      <p:sp>
-        <p:nvSpPr>
-          <p:cNvPr id="16" name="Text 14"/>
-          <p:cNvSpPr txBox="1"/>
-          <p:nvPr/>
-        </p:nvSpPr>
-        <p:spPr>
-          <a:xfrm>
-            <a:off x="8359445" y="2231136"/>
-            <a:ext cx="420624" cy="420624"/>
-          </a:xfrm>
-          <a:prstGeom prst="rect">
-            <a:avLst/>
-          </a:prstGeom>
-          <a:noFill/>
-          <a:ln/>
-        </p:spPr>
-        <p:txBody>
-          <a:bodyPr wrap="square" lIns="0" tIns="0" rIns="0" bIns="0" rtlCol="0" anchor="ctr"/>
-          <a:lstStyle/>
-          <a:p>
-            <a:pPr algn="ctr" indent="0" marL="0">
-              <a:buNone/>
-            </a:pPr>
-            <a:r>
-              <a:rPr lang="en-US" sz="1400" b="1" dirty="0">
-                <a:solidFill>
-                  <a:srgbClr val="FFFFFF"/>
+          <p:cNvPr id="8" name="Text 6"/>
+          <p:cNvSpPr txBox="1"/>
+          <p:nvPr/>
+        </p:nvSpPr>
+        <p:spPr>
+          <a:xfrm>
+            <a:off x="6470752" y="2249424"/>
+            <a:ext cx="4916272" cy="319024"/>
+          </a:xfrm>
+          <a:prstGeom prst="rect">
+            <a:avLst/>
+          </a:prstGeom>
+          <a:noFill/>
+          <a:ln/>
+        </p:spPr>
+        <p:txBody>
+          <a:bodyPr wrap="square" lIns="0" tIns="0" rIns="0" bIns="0" rtlCol="0" anchor="t"/>
+          <a:lstStyle/>
+          <a:p>
+            <a:pPr indent="0" marL="0">
+              <a:buNone/>
+            </a:pPr>
+            <a:r>
+              <a:rPr lang="en-US" sz="1600" b="1" dirty="0">
+                <a:solidFill>
+                  <a:srgbClr val="16262E"/>
                 </a:solidFill>
                 <a:latin typeface="Arial" pitchFamily="34" charset="0"/>
                 <a:ea typeface="Arial" pitchFamily="34" charset="-122"/>
                 <a:cs typeface="Arial" pitchFamily="34" charset="-120"/>
               </a:rPr>
-              <a:t>3</a:t>
-            </a:r>
-            <a:endParaRPr lang="en-US" sz="1400" dirty="0"/>
-          </a:p>
-        </p:txBody>
-      </p:sp>
-      <p:sp>
-        <p:nvSpPr>
-          <p:cNvPr id="17" name="Text 15"/>
-          <p:cNvSpPr txBox="1"/>
-          <p:nvPr/>
-        </p:nvSpPr>
-        <p:spPr>
-          <a:xfrm>
-            <a:off x="8359445" y="2798064"/>
-            <a:ext cx="3027578" cy="457200"/>
-          </a:xfrm>
-          <a:prstGeom prst="rect">
-            <a:avLst/>
-          </a:prstGeom>
-          <a:noFill/>
-          <a:ln/>
-        </p:spPr>
-        <p:txBody>
-          <a:bodyPr wrap="square" lIns="0" tIns="0" rIns="0" bIns="0" rtlCol="0" anchor="t"/>
-          <a:lstStyle/>
-          <a:p>
-            <a:pPr indent="0" marL="0">
-              <a:buNone/>
-            </a:pPr>
-            <a:r>
-              <a:rPr lang="en-US" sz="1600" b="1" dirty="0">
-                <a:solidFill>
-                  <a:srgbClr val="16262E"/>
-                </a:solidFill>
-                <a:latin typeface="Arial" pitchFamily="34" charset="0"/>
-                <a:ea typeface="Arial" pitchFamily="34" charset="-122"/>
-                <a:cs typeface="Arial" pitchFamily="34" charset="-120"/>
-              </a:rPr>
-              <a:t>Pasar a código</a:t>
+              <a:t>La pregunta del final</a:t>
             </a:r>
             <a:endParaRPr lang="en-US" sz="1600" dirty="0"/>
           </a:p>
@@ -4270,14 +4533,14 @@
       </p:sp>
       <p:sp>
         <p:nvSpPr>
-          <p:cNvPr id="18" name="Text 16"/>
-          <p:cNvSpPr txBox="1"/>
-          <p:nvPr/>
-        </p:nvSpPr>
-        <p:spPr>
-          <a:xfrm>
-            <a:off x="8359445" y="3273552"/>
-            <a:ext cx="3027578" cy="796544"/>
+          <p:cNvPr id="9" name="Text 7"/>
+          <p:cNvSpPr txBox="1"/>
+          <p:nvPr/>
+        </p:nvSpPr>
+        <p:spPr>
+          <a:xfrm>
+            <a:off x="6470752" y="2714752"/>
+            <a:ext cx="4916272" cy="1387602"/>
           </a:xfrm>
           <a:prstGeom prst="rect">
             <a:avLst/>
@@ -4304,7 +4567,36 @@
                 <a:ea typeface="Calibri" pitchFamily="34" charset="-122"/>
                 <a:cs typeface="Calibri" pitchFamily="34" charset="-120"/>
               </a:rPr>
-              <a:t>Cuando el volumen es de decenas de miles de registros, el chat deja de ser la herramienta. Eso es exactamente el Módulo III.</a:t>
+              <a:t>Si tu resultado es que el 62 por ciento de las intervenciones fueron negativas, ¿qué decisión de política puedes tomar con eso?</a:t>
+            </a:r>
+            <a:endParaRPr lang="en-US" sz="1300" dirty="0"/>
+          </a:p>
+          <a:p>
+            <a:pPr indent="0" marL="0">
+              <a:lnSpc>
+                <a:spcPct val="110000"/>
+              </a:lnSpc>
+              <a:buNone/>
+            </a:pPr>
+            <a:endParaRPr lang="en-US" sz="1300" dirty="0"/>
+          </a:p>
+          <a:p>
+            <a:pPr indent="0" marL="0">
+              <a:lnSpc>
+                <a:spcPct val="110000"/>
+              </a:lnSpc>
+              <a:buNone/>
+            </a:pPr>
+            <a:r>
+              <a:rPr lang="en-US" sz="1300" dirty="0">
+                <a:solidFill>
+                  <a:srgbClr val="16262E"/>
+                </a:solidFill>
+                <a:latin typeface="Calibri" pitchFamily="34" charset="0"/>
+                <a:ea typeface="Calibri" pitchFamily="34" charset="-122"/>
+                <a:cs typeface="Calibri" pitchFamily="34" charset="-120"/>
+              </a:rPr>
+              <a:t>La respuesta suele ser ninguna. Ahí está la lección: la polaridad sola no es un hallazgo, es un punto de partida.</a:t>
             </a:r>
             <a:endParaRPr lang="en-US" sz="1300" dirty="0"/>
           </a:p>
@@ -4321,6 +4613,1216 @@
 <file path=ppt/slides/slide14.xml><?xml version="1.0" encoding="utf-8"?>
 <p:sld xmlns:a="http://schemas.openxmlformats.org/drawingml/2006/main" xmlns:r="http://schemas.openxmlformats.org/officeDocument/2006/relationships" xmlns:p="http://schemas.openxmlformats.org/presentationml/2006/main">
   <p:cSld name="Slide 14">
+    <p:spTree>
+      <p:nvGrpSpPr>
+        <p:cNvPr id="1" name=""/>
+        <p:cNvGrpSpPr/>
+        <p:nvPr/>
+      </p:nvGrpSpPr>
+      <p:grpSpPr>
+        <a:xfrm>
+          <a:off x="0" y="0"/>
+          <a:ext cx="0" cy="0"/>
+          <a:chOff x="0" y="0"/>
+          <a:chExt cx="0" cy="0"/>
+        </a:xfrm>
+      </p:grpSpPr>
+      <p:sp>
+        <p:nvSpPr>
+          <p:cNvPr id="2" name="Text 0"/>
+          <p:cNvSpPr txBox="1"/>
+          <p:nvPr/>
+        </p:nvSpPr>
+        <p:spPr>
+          <a:xfrm>
+            <a:off x="566928" y="402336"/>
+            <a:ext cx="9229039" cy="749808"/>
+          </a:xfrm>
+          <a:prstGeom prst="rect">
+            <a:avLst/>
+          </a:prstGeom>
+          <a:noFill/>
+          <a:ln/>
+        </p:spPr>
+        <p:txBody>
+          <a:bodyPr wrap="square" lIns="0" tIns="0" rIns="0" bIns="0" rtlCol="0" anchor="t"/>
+          <a:lstStyle/>
+          <a:p>
+            <a:pPr algn="l" indent="0" marL="0">
+              <a:buNone/>
+            </a:pPr>
+            <a:r>
+              <a:rPr lang="en-US" sz="3200" b="1" dirty="0">
+                <a:solidFill>
+                  <a:srgbClr val="16262E"/>
+                </a:solidFill>
+                <a:latin typeface="Arial" pitchFamily="34" charset="0"/>
+                <a:ea typeface="Arial" pitchFamily="34" charset="-122"/>
+                <a:cs typeface="Arial" pitchFamily="34" charset="-120"/>
+              </a:rPr>
+              <a:t>Cuando el texto no cabe</a:t>
+            </a:r>
+            <a:endParaRPr lang="en-US" sz="3200" dirty="0"/>
+          </a:p>
+        </p:txBody>
+      </p:sp>
+      <p:sp>
+        <p:nvSpPr>
+          <p:cNvPr id="3" name="Text 1"/>
+          <p:cNvSpPr txBox="1"/>
+          <p:nvPr/>
+        </p:nvSpPr>
+        <p:spPr>
+          <a:xfrm>
+            <a:off x="566928" y="1280160"/>
+            <a:ext cx="9960559" cy="365760"/>
+          </a:xfrm>
+          <a:prstGeom prst="rect">
+            <a:avLst/>
+          </a:prstGeom>
+          <a:noFill/>
+          <a:ln/>
+        </p:spPr>
+        <p:txBody>
+          <a:bodyPr wrap="square" lIns="0" tIns="0" rIns="0" bIns="0" rtlCol="0" anchor="t"/>
+          <a:lstStyle/>
+          <a:p>
+            <a:pPr indent="0" marL="0">
+              <a:buNone/>
+            </a:pPr>
+            <a:r>
+              <a:rPr lang="en-US" sz="1500" dirty="0">
+                <a:solidFill>
+                  <a:srgbClr val="5A6B73"/>
+                </a:solidFill>
+                <a:latin typeface="Calibri" pitchFamily="34" charset="0"/>
+                <a:ea typeface="Calibri" pitchFamily="34" charset="-122"/>
+                <a:cs typeface="Calibri" pitchFamily="34" charset="-120"/>
+              </a:rPr>
+              <a:t>Toda herramienta tiene un límite de cuánto puede leer de una sola vez. Es la ventana de contexto que viste el lunes.</a:t>
+            </a:r>
+            <a:endParaRPr lang="en-US" sz="1500" dirty="0"/>
+          </a:p>
+        </p:txBody>
+      </p:sp>
+      <p:sp>
+        <p:nvSpPr>
+          <p:cNvPr id="4" name="Shape 2"/>
+          <p:cNvSpPr/>
+          <p:nvPr/>
+        </p:nvSpPr>
+        <p:spPr>
+          <a:xfrm>
+            <a:off x="566928" y="2432304"/>
+            <a:ext cx="381340" cy="667512"/>
+          </a:xfrm>
+          <a:prstGeom prst="roundRect">
+            <a:avLst>
+              <a:gd name="adj" fmla="val 7194"/>
+            </a:avLst>
+          </a:prstGeom>
+          <a:solidFill>
+            <a:srgbClr val="DCE3E6"/>
+          </a:solidFill>
+          <a:ln w="12700">
+            <a:solidFill>
+              <a:srgbClr val="DCE3E6"/>
+            </a:solidFill>
+            <a:prstDash val="solid"/>
+          </a:ln>
+        </p:spPr>
+      </p:sp>
+      <p:sp>
+        <p:nvSpPr>
+          <p:cNvPr id="5" name="Shape 3"/>
+          <p:cNvSpPr/>
+          <p:nvPr/>
+        </p:nvSpPr>
+        <p:spPr>
+          <a:xfrm>
+            <a:off x="993988" y="2432304"/>
+            <a:ext cx="381340" cy="667512"/>
+          </a:xfrm>
+          <a:prstGeom prst="roundRect">
+            <a:avLst>
+              <a:gd name="adj" fmla="val 7194"/>
+            </a:avLst>
+          </a:prstGeom>
+          <a:solidFill>
+            <a:srgbClr val="DCE3E6"/>
+          </a:solidFill>
+          <a:ln w="12700">
+            <a:solidFill>
+              <a:srgbClr val="DCE3E6"/>
+            </a:solidFill>
+            <a:prstDash val="solid"/>
+          </a:ln>
+        </p:spPr>
+      </p:sp>
+      <p:sp>
+        <p:nvSpPr>
+          <p:cNvPr id="6" name="Shape 4"/>
+          <p:cNvSpPr/>
+          <p:nvPr/>
+        </p:nvSpPr>
+        <p:spPr>
+          <a:xfrm>
+            <a:off x="1421048" y="2432304"/>
+            <a:ext cx="381340" cy="667512"/>
+          </a:xfrm>
+          <a:prstGeom prst="roundRect">
+            <a:avLst>
+              <a:gd name="adj" fmla="val 7194"/>
+            </a:avLst>
+          </a:prstGeom>
+          <a:solidFill>
+            <a:srgbClr val="DCE3E6"/>
+          </a:solidFill>
+          <a:ln w="12700">
+            <a:solidFill>
+              <a:srgbClr val="DCE3E6"/>
+            </a:solidFill>
+            <a:prstDash val="solid"/>
+          </a:ln>
+        </p:spPr>
+      </p:sp>
+      <p:sp>
+        <p:nvSpPr>
+          <p:cNvPr id="7" name="Shape 5"/>
+          <p:cNvSpPr/>
+          <p:nvPr/>
+        </p:nvSpPr>
+        <p:spPr>
+          <a:xfrm>
+            <a:off x="1848108" y="2432304"/>
+            <a:ext cx="381340" cy="667512"/>
+          </a:xfrm>
+          <a:prstGeom prst="roundRect">
+            <a:avLst>
+              <a:gd name="adj" fmla="val 7194"/>
+            </a:avLst>
+          </a:prstGeom>
+          <a:solidFill>
+            <a:srgbClr val="DCE3E6"/>
+          </a:solidFill>
+          <a:ln w="12700">
+            <a:solidFill>
+              <a:srgbClr val="DCE3E6"/>
+            </a:solidFill>
+            <a:prstDash val="solid"/>
+          </a:ln>
+        </p:spPr>
+      </p:sp>
+      <p:sp>
+        <p:nvSpPr>
+          <p:cNvPr id="8" name="Shape 6"/>
+          <p:cNvSpPr/>
+          <p:nvPr/>
+        </p:nvSpPr>
+        <p:spPr>
+          <a:xfrm>
+            <a:off x="2275168" y="2194560"/>
+            <a:ext cx="381340" cy="1143000"/>
+          </a:xfrm>
+          <a:prstGeom prst="roundRect">
+            <a:avLst>
+              <a:gd name="adj" fmla="val 7194"/>
+            </a:avLst>
+          </a:prstGeom>
+          <a:solidFill>
+            <a:srgbClr val="2E7D7D"/>
+          </a:solidFill>
+          <a:ln w="12700">
+            <a:solidFill>
+              <a:srgbClr val="2E7D7D"/>
+            </a:solidFill>
+            <a:prstDash val="solid"/>
+          </a:ln>
+        </p:spPr>
+      </p:sp>
+      <p:sp>
+        <p:nvSpPr>
+          <p:cNvPr id="9" name="Shape 7"/>
+          <p:cNvSpPr/>
+          <p:nvPr/>
+        </p:nvSpPr>
+        <p:spPr>
+          <a:xfrm>
+            <a:off x="2702228" y="2194560"/>
+            <a:ext cx="381340" cy="1143000"/>
+          </a:xfrm>
+          <a:prstGeom prst="roundRect">
+            <a:avLst>
+              <a:gd name="adj" fmla="val 7194"/>
+            </a:avLst>
+          </a:prstGeom>
+          <a:solidFill>
+            <a:srgbClr val="2E7D7D"/>
+          </a:solidFill>
+          <a:ln w="12700">
+            <a:solidFill>
+              <a:srgbClr val="2E7D7D"/>
+            </a:solidFill>
+            <a:prstDash val="solid"/>
+          </a:ln>
+        </p:spPr>
+      </p:sp>
+      <p:sp>
+        <p:nvSpPr>
+          <p:cNvPr id="10" name="Shape 8"/>
+          <p:cNvSpPr/>
+          <p:nvPr/>
+        </p:nvSpPr>
+        <p:spPr>
+          <a:xfrm>
+            <a:off x="3129288" y="2194560"/>
+            <a:ext cx="381340" cy="1143000"/>
+          </a:xfrm>
+          <a:prstGeom prst="roundRect">
+            <a:avLst>
+              <a:gd name="adj" fmla="val 7194"/>
+            </a:avLst>
+          </a:prstGeom>
+          <a:solidFill>
+            <a:srgbClr val="2E7D7D"/>
+          </a:solidFill>
+          <a:ln w="12700">
+            <a:solidFill>
+              <a:srgbClr val="2E7D7D"/>
+            </a:solidFill>
+            <a:prstDash val="solid"/>
+          </a:ln>
+        </p:spPr>
+      </p:sp>
+      <p:sp>
+        <p:nvSpPr>
+          <p:cNvPr id="11" name="Shape 9"/>
+          <p:cNvSpPr/>
+          <p:nvPr/>
+        </p:nvSpPr>
+        <p:spPr>
+          <a:xfrm>
+            <a:off x="3556348" y="2194560"/>
+            <a:ext cx="381340" cy="1143000"/>
+          </a:xfrm>
+          <a:prstGeom prst="roundRect">
+            <a:avLst>
+              <a:gd name="adj" fmla="val 7194"/>
+            </a:avLst>
+          </a:prstGeom>
+          <a:solidFill>
+            <a:srgbClr val="2E7D7D"/>
+          </a:solidFill>
+          <a:ln w="12700">
+            <a:solidFill>
+              <a:srgbClr val="2E7D7D"/>
+            </a:solidFill>
+            <a:prstDash val="solid"/>
+          </a:ln>
+        </p:spPr>
+      </p:sp>
+      <p:sp>
+        <p:nvSpPr>
+          <p:cNvPr id="12" name="Shape 10"/>
+          <p:cNvSpPr/>
+          <p:nvPr/>
+        </p:nvSpPr>
+        <p:spPr>
+          <a:xfrm>
+            <a:off x="3983408" y="2194560"/>
+            <a:ext cx="381340" cy="1143000"/>
+          </a:xfrm>
+          <a:prstGeom prst="roundRect">
+            <a:avLst>
+              <a:gd name="adj" fmla="val 7194"/>
+            </a:avLst>
+          </a:prstGeom>
+          <a:solidFill>
+            <a:srgbClr val="2E7D7D"/>
+          </a:solidFill>
+          <a:ln w="12700">
+            <a:solidFill>
+              <a:srgbClr val="2E7D7D"/>
+            </a:solidFill>
+            <a:prstDash val="solid"/>
+          </a:ln>
+        </p:spPr>
+      </p:sp>
+      <p:sp>
+        <p:nvSpPr>
+          <p:cNvPr id="13" name="Shape 11"/>
+          <p:cNvSpPr/>
+          <p:nvPr/>
+        </p:nvSpPr>
+        <p:spPr>
+          <a:xfrm>
+            <a:off x="4410468" y="2194560"/>
+            <a:ext cx="381340" cy="1143000"/>
+          </a:xfrm>
+          <a:prstGeom prst="roundRect">
+            <a:avLst>
+              <a:gd name="adj" fmla="val 7194"/>
+            </a:avLst>
+          </a:prstGeom>
+          <a:solidFill>
+            <a:srgbClr val="2E7D7D"/>
+          </a:solidFill>
+          <a:ln w="12700">
+            <a:solidFill>
+              <a:srgbClr val="2E7D7D"/>
+            </a:solidFill>
+            <a:prstDash val="solid"/>
+          </a:ln>
+        </p:spPr>
+      </p:sp>
+      <p:sp>
+        <p:nvSpPr>
+          <p:cNvPr id="14" name="Shape 12"/>
+          <p:cNvSpPr/>
+          <p:nvPr/>
+        </p:nvSpPr>
+        <p:spPr>
+          <a:xfrm>
+            <a:off x="4837528" y="2194560"/>
+            <a:ext cx="381340" cy="1143000"/>
+          </a:xfrm>
+          <a:prstGeom prst="roundRect">
+            <a:avLst>
+              <a:gd name="adj" fmla="val 7194"/>
+            </a:avLst>
+          </a:prstGeom>
+          <a:solidFill>
+            <a:srgbClr val="2E7D7D"/>
+          </a:solidFill>
+          <a:ln w="12700">
+            <a:solidFill>
+              <a:srgbClr val="2E7D7D"/>
+            </a:solidFill>
+            <a:prstDash val="solid"/>
+          </a:ln>
+        </p:spPr>
+      </p:sp>
+      <p:sp>
+        <p:nvSpPr>
+          <p:cNvPr id="15" name="Shape 13"/>
+          <p:cNvSpPr/>
+          <p:nvPr/>
+        </p:nvSpPr>
+        <p:spPr>
+          <a:xfrm>
+            <a:off x="5264588" y="2194560"/>
+            <a:ext cx="381340" cy="1143000"/>
+          </a:xfrm>
+          <a:prstGeom prst="roundRect">
+            <a:avLst>
+              <a:gd name="adj" fmla="val 7194"/>
+            </a:avLst>
+          </a:prstGeom>
+          <a:solidFill>
+            <a:srgbClr val="2E7D7D"/>
+          </a:solidFill>
+          <a:ln w="12700">
+            <a:solidFill>
+              <a:srgbClr val="2E7D7D"/>
+            </a:solidFill>
+            <a:prstDash val="solid"/>
+          </a:ln>
+        </p:spPr>
+      </p:sp>
+      <p:sp>
+        <p:nvSpPr>
+          <p:cNvPr id="16" name="Shape 14"/>
+          <p:cNvSpPr/>
+          <p:nvPr/>
+        </p:nvSpPr>
+        <p:spPr>
+          <a:xfrm>
+            <a:off x="5691648" y="2194560"/>
+            <a:ext cx="381340" cy="1143000"/>
+          </a:xfrm>
+          <a:prstGeom prst="roundRect">
+            <a:avLst>
+              <a:gd name="adj" fmla="val 7194"/>
+            </a:avLst>
+          </a:prstGeom>
+          <a:solidFill>
+            <a:srgbClr val="2E7D7D"/>
+          </a:solidFill>
+          <a:ln w="12700">
+            <a:solidFill>
+              <a:srgbClr val="2E7D7D"/>
+            </a:solidFill>
+            <a:prstDash val="solid"/>
+          </a:ln>
+        </p:spPr>
+      </p:sp>
+      <p:sp>
+        <p:nvSpPr>
+          <p:cNvPr id="17" name="Shape 15"/>
+          <p:cNvSpPr/>
+          <p:nvPr/>
+        </p:nvSpPr>
+        <p:spPr>
+          <a:xfrm>
+            <a:off x="6118708" y="2194560"/>
+            <a:ext cx="381340" cy="1143000"/>
+          </a:xfrm>
+          <a:prstGeom prst="roundRect">
+            <a:avLst>
+              <a:gd name="adj" fmla="val 7194"/>
+            </a:avLst>
+          </a:prstGeom>
+          <a:solidFill>
+            <a:srgbClr val="2E7D7D"/>
+          </a:solidFill>
+          <a:ln w="12700">
+            <a:solidFill>
+              <a:srgbClr val="2E7D7D"/>
+            </a:solidFill>
+            <a:prstDash val="solid"/>
+          </a:ln>
+        </p:spPr>
+      </p:sp>
+      <p:sp>
+        <p:nvSpPr>
+          <p:cNvPr id="18" name="Shape 16"/>
+          <p:cNvSpPr/>
+          <p:nvPr/>
+        </p:nvSpPr>
+        <p:spPr>
+          <a:xfrm>
+            <a:off x="6545768" y="2432304"/>
+            <a:ext cx="381340" cy="667512"/>
+          </a:xfrm>
+          <a:prstGeom prst="roundRect">
+            <a:avLst>
+              <a:gd name="adj" fmla="val 7194"/>
+            </a:avLst>
+          </a:prstGeom>
+          <a:solidFill>
+            <a:srgbClr val="DCE3E6"/>
+          </a:solidFill>
+          <a:ln w="12700">
+            <a:solidFill>
+              <a:srgbClr val="DCE3E6"/>
+            </a:solidFill>
+            <a:prstDash val="solid"/>
+          </a:ln>
+        </p:spPr>
+      </p:sp>
+      <p:sp>
+        <p:nvSpPr>
+          <p:cNvPr id="19" name="Shape 17"/>
+          <p:cNvSpPr/>
+          <p:nvPr/>
+        </p:nvSpPr>
+        <p:spPr>
+          <a:xfrm>
+            <a:off x="6972828" y="2432304"/>
+            <a:ext cx="381340" cy="667512"/>
+          </a:xfrm>
+          <a:prstGeom prst="roundRect">
+            <a:avLst>
+              <a:gd name="adj" fmla="val 7194"/>
+            </a:avLst>
+          </a:prstGeom>
+          <a:solidFill>
+            <a:srgbClr val="DCE3E6"/>
+          </a:solidFill>
+          <a:ln w="12700">
+            <a:solidFill>
+              <a:srgbClr val="DCE3E6"/>
+            </a:solidFill>
+            <a:prstDash val="solid"/>
+          </a:ln>
+        </p:spPr>
+      </p:sp>
+      <p:sp>
+        <p:nvSpPr>
+          <p:cNvPr id="20" name="Shape 18"/>
+          <p:cNvSpPr/>
+          <p:nvPr/>
+        </p:nvSpPr>
+        <p:spPr>
+          <a:xfrm>
+            <a:off x="7399888" y="2432304"/>
+            <a:ext cx="381340" cy="667512"/>
+          </a:xfrm>
+          <a:prstGeom prst="roundRect">
+            <a:avLst>
+              <a:gd name="adj" fmla="val 7194"/>
+            </a:avLst>
+          </a:prstGeom>
+          <a:solidFill>
+            <a:srgbClr val="DCE3E6"/>
+          </a:solidFill>
+          <a:ln w="12700">
+            <a:solidFill>
+              <a:srgbClr val="DCE3E6"/>
+            </a:solidFill>
+            <a:prstDash val="solid"/>
+          </a:ln>
+        </p:spPr>
+      </p:sp>
+      <p:sp>
+        <p:nvSpPr>
+          <p:cNvPr id="21" name="Shape 19"/>
+          <p:cNvSpPr/>
+          <p:nvPr/>
+        </p:nvSpPr>
+        <p:spPr>
+          <a:xfrm>
+            <a:off x="7826947" y="2432304"/>
+            <a:ext cx="381340" cy="667512"/>
+          </a:xfrm>
+          <a:prstGeom prst="roundRect">
+            <a:avLst>
+              <a:gd name="adj" fmla="val 7194"/>
+            </a:avLst>
+          </a:prstGeom>
+          <a:solidFill>
+            <a:srgbClr val="DCE3E6"/>
+          </a:solidFill>
+          <a:ln w="12700">
+            <a:solidFill>
+              <a:srgbClr val="DCE3E6"/>
+            </a:solidFill>
+            <a:prstDash val="solid"/>
+          </a:ln>
+        </p:spPr>
+      </p:sp>
+      <p:sp>
+        <p:nvSpPr>
+          <p:cNvPr id="22" name="Shape 20"/>
+          <p:cNvSpPr/>
+          <p:nvPr/>
+        </p:nvSpPr>
+        <p:spPr>
+          <a:xfrm>
+            <a:off x="8254007" y="2432304"/>
+            <a:ext cx="381340" cy="667512"/>
+          </a:xfrm>
+          <a:prstGeom prst="roundRect">
+            <a:avLst>
+              <a:gd name="adj" fmla="val 7194"/>
+            </a:avLst>
+          </a:prstGeom>
+          <a:solidFill>
+            <a:srgbClr val="DCE3E6"/>
+          </a:solidFill>
+          <a:ln w="12700">
+            <a:solidFill>
+              <a:srgbClr val="DCE3E6"/>
+            </a:solidFill>
+            <a:prstDash val="solid"/>
+          </a:ln>
+        </p:spPr>
+      </p:sp>
+      <p:sp>
+        <p:nvSpPr>
+          <p:cNvPr id="23" name="Shape 21"/>
+          <p:cNvSpPr/>
+          <p:nvPr/>
+        </p:nvSpPr>
+        <p:spPr>
+          <a:xfrm>
+            <a:off x="8681067" y="2432304"/>
+            <a:ext cx="381340" cy="667512"/>
+          </a:xfrm>
+          <a:prstGeom prst="roundRect">
+            <a:avLst>
+              <a:gd name="adj" fmla="val 7194"/>
+            </a:avLst>
+          </a:prstGeom>
+          <a:solidFill>
+            <a:srgbClr val="DCE3E6"/>
+          </a:solidFill>
+          <a:ln w="12700">
+            <a:solidFill>
+              <a:srgbClr val="DCE3E6"/>
+            </a:solidFill>
+            <a:prstDash val="solid"/>
+          </a:ln>
+        </p:spPr>
+      </p:sp>
+      <p:sp>
+        <p:nvSpPr>
+          <p:cNvPr id="24" name="Shape 22"/>
+          <p:cNvSpPr/>
+          <p:nvPr/>
+        </p:nvSpPr>
+        <p:spPr>
+          <a:xfrm>
+            <a:off x="9108127" y="2432304"/>
+            <a:ext cx="381340" cy="667512"/>
+          </a:xfrm>
+          <a:prstGeom prst="roundRect">
+            <a:avLst>
+              <a:gd name="adj" fmla="val 7194"/>
+            </a:avLst>
+          </a:prstGeom>
+          <a:solidFill>
+            <a:srgbClr val="DCE3E6"/>
+          </a:solidFill>
+          <a:ln w="12700">
+            <a:solidFill>
+              <a:srgbClr val="DCE3E6"/>
+            </a:solidFill>
+            <a:prstDash val="solid"/>
+          </a:ln>
+        </p:spPr>
+      </p:sp>
+      <p:sp>
+        <p:nvSpPr>
+          <p:cNvPr id="25" name="Shape 23"/>
+          <p:cNvSpPr/>
+          <p:nvPr/>
+        </p:nvSpPr>
+        <p:spPr>
+          <a:xfrm>
+            <a:off x="9535187" y="2432304"/>
+            <a:ext cx="381340" cy="667512"/>
+          </a:xfrm>
+          <a:prstGeom prst="roundRect">
+            <a:avLst>
+              <a:gd name="adj" fmla="val 7194"/>
+            </a:avLst>
+          </a:prstGeom>
+          <a:solidFill>
+            <a:srgbClr val="DCE3E6"/>
+          </a:solidFill>
+          <a:ln w="12700">
+            <a:solidFill>
+              <a:srgbClr val="DCE3E6"/>
+            </a:solidFill>
+            <a:prstDash val="solid"/>
+          </a:ln>
+        </p:spPr>
+      </p:sp>
+      <p:sp>
+        <p:nvSpPr>
+          <p:cNvPr id="26" name="Shape 24"/>
+          <p:cNvSpPr/>
+          <p:nvPr/>
+        </p:nvSpPr>
+        <p:spPr>
+          <a:xfrm>
+            <a:off x="9962247" y="2432304"/>
+            <a:ext cx="381340" cy="667512"/>
+          </a:xfrm>
+          <a:prstGeom prst="roundRect">
+            <a:avLst>
+              <a:gd name="adj" fmla="val 7194"/>
+            </a:avLst>
+          </a:prstGeom>
+          <a:solidFill>
+            <a:srgbClr val="DCE3E6"/>
+          </a:solidFill>
+          <a:ln w="12700">
+            <a:solidFill>
+              <a:srgbClr val="DCE3E6"/>
+            </a:solidFill>
+            <a:prstDash val="solid"/>
+          </a:ln>
+        </p:spPr>
+      </p:sp>
+      <p:sp>
+        <p:nvSpPr>
+          <p:cNvPr id="27" name="Shape 25"/>
+          <p:cNvSpPr/>
+          <p:nvPr/>
+        </p:nvSpPr>
+        <p:spPr>
+          <a:xfrm>
+            <a:off x="10389307" y="2432304"/>
+            <a:ext cx="381340" cy="667512"/>
+          </a:xfrm>
+          <a:prstGeom prst="roundRect">
+            <a:avLst>
+              <a:gd name="adj" fmla="val 7194"/>
+            </a:avLst>
+          </a:prstGeom>
+          <a:solidFill>
+            <a:srgbClr val="DCE3E6"/>
+          </a:solidFill>
+          <a:ln w="12700">
+            <a:solidFill>
+              <a:srgbClr val="DCE3E6"/>
+            </a:solidFill>
+            <a:prstDash val="solid"/>
+          </a:ln>
+        </p:spPr>
+      </p:sp>
+      <p:sp>
+        <p:nvSpPr>
+          <p:cNvPr id="28" name="Shape 26"/>
+          <p:cNvSpPr/>
+          <p:nvPr/>
+        </p:nvSpPr>
+        <p:spPr>
+          <a:xfrm>
+            <a:off x="10816367" y="2432304"/>
+            <a:ext cx="381340" cy="667512"/>
+          </a:xfrm>
+          <a:prstGeom prst="roundRect">
+            <a:avLst>
+              <a:gd name="adj" fmla="val 7194"/>
+            </a:avLst>
+          </a:prstGeom>
+          <a:solidFill>
+            <a:srgbClr val="DCE3E6"/>
+          </a:solidFill>
+          <a:ln w="12700">
+            <a:solidFill>
+              <a:srgbClr val="DCE3E6"/>
+            </a:solidFill>
+            <a:prstDash val="solid"/>
+          </a:ln>
+        </p:spPr>
+      </p:sp>
+      <p:sp>
+        <p:nvSpPr>
+          <p:cNvPr id="29" name="Shape 27"/>
+          <p:cNvSpPr/>
+          <p:nvPr/>
+        </p:nvSpPr>
+        <p:spPr>
+          <a:xfrm>
+            <a:off x="11243427" y="2432304"/>
+            <a:ext cx="381340" cy="667512"/>
+          </a:xfrm>
+          <a:prstGeom prst="roundRect">
+            <a:avLst>
+              <a:gd name="adj" fmla="val 7194"/>
+            </a:avLst>
+          </a:prstGeom>
+          <a:solidFill>
+            <a:srgbClr val="DCE3E6"/>
+          </a:solidFill>
+          <a:ln w="12700">
+            <a:solidFill>
+              <a:srgbClr val="DCE3E6"/>
+            </a:solidFill>
+            <a:prstDash val="solid"/>
+          </a:ln>
+        </p:spPr>
+      </p:sp>
+      <p:sp>
+        <p:nvSpPr>
+          <p:cNvPr id="30" name="Shape 28"/>
+          <p:cNvSpPr/>
+          <p:nvPr/>
+        </p:nvSpPr>
+        <p:spPr>
+          <a:xfrm>
+            <a:off x="2183728" y="2029968"/>
+            <a:ext cx="4407760" cy="1472184"/>
+          </a:xfrm>
+          <a:prstGeom prst="roundRect">
+            <a:avLst>
+              <a:gd name="adj" fmla="val 4969"/>
+            </a:avLst>
+          </a:prstGeom>
+          <a:ln w="31750">
+            <a:solidFill>
+              <a:srgbClr val="C85A28"/>
+            </a:solidFill>
+            <a:prstDash val="dash"/>
+          </a:ln>
+        </p:spPr>
+      </p:sp>
+      <p:sp>
+        <p:nvSpPr>
+          <p:cNvPr id="31" name="Text 29"/>
+          <p:cNvSpPr txBox="1"/>
+          <p:nvPr/>
+        </p:nvSpPr>
+        <p:spPr>
+          <a:xfrm>
+            <a:off x="2183728" y="3575304"/>
+            <a:ext cx="4407760" cy="310896"/>
+          </a:xfrm>
+          <a:prstGeom prst="rect">
+            <a:avLst/>
+          </a:prstGeom>
+          <a:noFill/>
+          <a:ln/>
+        </p:spPr>
+        <p:txBody>
+          <a:bodyPr wrap="square" lIns="0" tIns="0" rIns="0" bIns="0" rtlCol="0" anchor="ctr"/>
+          <a:lstStyle/>
+          <a:p>
+            <a:pPr algn="ctr" indent="0" marL="0">
+              <a:buNone/>
+            </a:pPr>
+            <a:r>
+              <a:rPr lang="en-US" sz="1300" b="1" dirty="0">
+                <a:solidFill>
+                  <a:srgbClr val="C85A28"/>
+                </a:solidFill>
+                <a:latin typeface="Arial" pitchFamily="34" charset="0"/>
+                <a:ea typeface="Arial" pitchFamily="34" charset="-122"/>
+                <a:cs typeface="Arial" pitchFamily="34" charset="-120"/>
+              </a:rPr>
+              <a:t>Lo que el modelo ve</a:t>
+            </a:r>
+            <a:endParaRPr lang="en-US" sz="1300" dirty="0"/>
+          </a:p>
+        </p:txBody>
+      </p:sp>
+      <p:sp>
+        <p:nvSpPr>
+          <p:cNvPr id="32" name="Text 30"/>
+          <p:cNvSpPr txBox="1"/>
+          <p:nvPr/>
+        </p:nvSpPr>
+        <p:spPr>
+          <a:xfrm>
+            <a:off x="6728648" y="3575304"/>
+            <a:ext cx="3840480" cy="310896"/>
+          </a:xfrm>
+          <a:prstGeom prst="rect">
+            <a:avLst/>
+          </a:prstGeom>
+          <a:noFill/>
+          <a:ln/>
+        </p:spPr>
+        <p:txBody>
+          <a:bodyPr wrap="square" lIns="0" tIns="0" rIns="0" bIns="0" rtlCol="0" anchor="ctr"/>
+          <a:lstStyle/>
+          <a:p>
+            <a:pPr indent="0" marL="0">
+              <a:buNone/>
+            </a:pPr>
+            <a:r>
+              <a:rPr lang="en-US" sz="1300" b="1" dirty="0">
+                <a:solidFill>
+                  <a:srgbClr val="5A6B73"/>
+                </a:solidFill>
+                <a:latin typeface="Arial" pitchFamily="34" charset="0"/>
+                <a:ea typeface="Arial" pitchFamily="34" charset="-122"/>
+                <a:cs typeface="Arial" pitchFamily="34" charset="-120"/>
+              </a:rPr>
+              <a:t>Lo que no ve, y no te avisa</a:t>
+            </a:r>
+            <a:endParaRPr lang="en-US" sz="1300" dirty="0"/>
+          </a:p>
+        </p:txBody>
+      </p:sp>
+      <p:sp>
+        <p:nvSpPr>
+          <p:cNvPr id="33" name="Shape 31"/>
+          <p:cNvSpPr/>
+          <p:nvPr/>
+        </p:nvSpPr>
+        <p:spPr>
+          <a:xfrm>
+            <a:off x="566928" y="4050792"/>
+            <a:ext cx="5391760" cy="2167128"/>
+          </a:xfrm>
+          <a:prstGeom prst="roundRect">
+            <a:avLst>
+              <a:gd name="adj" fmla="val 3376"/>
+            </a:avLst>
+          </a:prstGeom>
+          <a:solidFill>
+            <a:srgbClr val="F7E4D8"/>
+          </a:solidFill>
+          <a:ln w="12700">
+            <a:solidFill>
+              <a:srgbClr val="F7E4D8"/>
+            </a:solidFill>
+            <a:prstDash val="solid"/>
+          </a:ln>
+        </p:spPr>
+      </p:sp>
+      <p:sp>
+        <p:nvSpPr>
+          <p:cNvPr id="34" name="Text 32"/>
+          <p:cNvSpPr txBox="1"/>
+          <p:nvPr/>
+        </p:nvSpPr>
+        <p:spPr>
+          <a:xfrm>
+            <a:off x="804672" y="4251960"/>
+            <a:ext cx="4916272" cy="329184"/>
+          </a:xfrm>
+          <a:prstGeom prst="rect">
+            <a:avLst/>
+          </a:prstGeom>
+          <a:noFill/>
+          <a:ln/>
+        </p:spPr>
+        <p:txBody>
+          <a:bodyPr wrap="square" lIns="0" tIns="0" rIns="0" bIns="0" rtlCol="0" anchor="t"/>
+          <a:lstStyle/>
+          <a:p>
+            <a:pPr indent="0" marL="0">
+              <a:buNone/>
+            </a:pPr>
+            <a:r>
+              <a:rPr lang="en-US" sz="1550" b="1" dirty="0">
+                <a:solidFill>
+                  <a:srgbClr val="16262E"/>
+                </a:solidFill>
+                <a:latin typeface="Arial" pitchFamily="34" charset="0"/>
+                <a:ea typeface="Arial" pitchFamily="34" charset="-122"/>
+                <a:cs typeface="Arial" pitchFamily="34" charset="-120"/>
+              </a:rPr>
+              <a:t>El problema no es que falle</a:t>
+            </a:r>
+            <a:endParaRPr lang="en-US" sz="1550" dirty="0"/>
+          </a:p>
+        </p:txBody>
+      </p:sp>
+      <p:sp>
+        <p:nvSpPr>
+          <p:cNvPr id="35" name="Text 33"/>
+          <p:cNvSpPr txBox="1"/>
+          <p:nvPr/>
+        </p:nvSpPr>
+        <p:spPr>
+          <a:xfrm>
+            <a:off x="804672" y="4636008"/>
+            <a:ext cx="4916272" cy="1380744"/>
+          </a:xfrm>
+          <a:prstGeom prst="rect">
+            <a:avLst/>
+          </a:prstGeom>
+          <a:noFill/>
+          <a:ln/>
+        </p:spPr>
+        <p:txBody>
+          <a:bodyPr wrap="square" lIns="0" tIns="0" rIns="0" bIns="0" rtlCol="0" anchor="t"/>
+          <a:lstStyle/>
+          <a:p>
+            <a:pPr indent="0" marL="0">
+              <a:lnSpc>
+                <a:spcPct val="112000"/>
+              </a:lnSpc>
+              <a:buNone/>
+            </a:pPr>
+            <a:r>
+              <a:rPr lang="en-US" sz="1300" dirty="0">
+                <a:solidFill>
+                  <a:srgbClr val="16262E"/>
+                </a:solidFill>
+                <a:latin typeface="Calibri" pitchFamily="34" charset="0"/>
+                <a:ea typeface="Calibri" pitchFamily="34" charset="-122"/>
+                <a:cs typeface="Calibri" pitchFamily="34" charset="-120"/>
+              </a:rPr>
+              <a:t>El problema es que no te dice que no vio el resto. El resumen que te devuelve suena igual de completo que si lo hubiera leído todo.</a:t>
+            </a:r>
+            <a:endParaRPr lang="en-US" sz="1300" dirty="0"/>
+          </a:p>
+          <a:p>
+            <a:pPr indent="0" marL="0">
+              <a:lnSpc>
+                <a:spcPct val="112000"/>
+              </a:lnSpc>
+              <a:buNone/>
+            </a:pPr>
+            <a:endParaRPr lang="en-US" sz="1300" dirty="0"/>
+          </a:p>
+          <a:p>
+            <a:pPr indent="0" marL="0">
+              <a:lnSpc>
+                <a:spcPct val="112000"/>
+              </a:lnSpc>
+              <a:buNone/>
+            </a:pPr>
+            <a:r>
+              <a:rPr lang="en-US" sz="1300" dirty="0">
+                <a:solidFill>
+                  <a:srgbClr val="16262E"/>
+                </a:solidFill>
+                <a:latin typeface="Calibri" pitchFamily="34" charset="0"/>
+                <a:ea typeface="Calibri" pitchFamily="34" charset="-122"/>
+                <a:cs typeface="Calibri" pitchFamily="34" charset="-120"/>
+              </a:rPr>
+              <a:t>Y aunque quepa, el peso se reparte: en un documento muy largo, un dato del medio recibe menos atención que uno del principio o del final.</a:t>
+            </a:r>
+            <a:endParaRPr lang="en-US" sz="1300" dirty="0"/>
+          </a:p>
+        </p:txBody>
+      </p:sp>
+      <p:sp>
+        <p:nvSpPr>
+          <p:cNvPr id="36" name="Shape 34"/>
+          <p:cNvSpPr/>
+          <p:nvPr/>
+        </p:nvSpPr>
+        <p:spPr>
+          <a:xfrm>
+            <a:off x="6233008" y="4050792"/>
+            <a:ext cx="5391760" cy="2167128"/>
+          </a:xfrm>
+          <a:prstGeom prst="roundRect">
+            <a:avLst>
+              <a:gd name="adj" fmla="val 3376"/>
+            </a:avLst>
+          </a:prstGeom>
+          <a:solidFill>
+            <a:srgbClr val="F2F5F6"/>
+          </a:solidFill>
+          <a:ln w="12700">
+            <a:solidFill>
+              <a:srgbClr val="F2F5F6"/>
+            </a:solidFill>
+            <a:prstDash val="solid"/>
+          </a:ln>
+        </p:spPr>
+      </p:sp>
+      <p:sp>
+        <p:nvSpPr>
+          <p:cNvPr id="37" name="Text 35"/>
+          <p:cNvSpPr txBox="1"/>
+          <p:nvPr/>
+        </p:nvSpPr>
+        <p:spPr>
+          <a:xfrm>
+            <a:off x="6470752" y="4251960"/>
+            <a:ext cx="4916272" cy="329184"/>
+          </a:xfrm>
+          <a:prstGeom prst="rect">
+            <a:avLst/>
+          </a:prstGeom>
+          <a:noFill/>
+          <a:ln/>
+        </p:spPr>
+        <p:txBody>
+          <a:bodyPr wrap="square" lIns="0" tIns="0" rIns="0" bIns="0" rtlCol="0" anchor="t"/>
+          <a:lstStyle/>
+          <a:p>
+            <a:pPr indent="0" marL="0">
+              <a:buNone/>
+            </a:pPr>
+            <a:r>
+              <a:rPr lang="en-US" sz="1550" b="1" dirty="0">
+                <a:solidFill>
+                  <a:srgbClr val="16262E"/>
+                </a:solidFill>
+                <a:latin typeface="Arial" pitchFamily="34" charset="0"/>
+                <a:ea typeface="Arial" pitchFamily="34" charset="-122"/>
+                <a:cs typeface="Arial" pitchFamily="34" charset="-120"/>
+              </a:rPr>
+              <a:t>Tres salidas</a:t>
+            </a:r>
+            <a:endParaRPr lang="en-US" sz="1550" dirty="0"/>
+          </a:p>
+        </p:txBody>
+      </p:sp>
+      <p:sp>
+        <p:nvSpPr>
+          <p:cNvPr id="38" name="Text 36"/>
+          <p:cNvSpPr txBox="1"/>
+          <p:nvPr/>
+        </p:nvSpPr>
+        <p:spPr>
+          <a:xfrm>
+            <a:off x="6470752" y="4636008"/>
+            <a:ext cx="4916272" cy="1380744"/>
+          </a:xfrm>
+          <a:prstGeom prst="rect">
+            <a:avLst/>
+          </a:prstGeom>
+          <a:noFill/>
+          <a:ln/>
+        </p:spPr>
+        <p:txBody>
+          <a:bodyPr wrap="square" lIns="0" tIns="0" rIns="0" bIns="0" rtlCol="0" anchor="t"/>
+          <a:lstStyle/>
+          <a:p>
+            <a:pPr indent="0" marL="0">
+              <a:lnSpc>
+                <a:spcPct val="112000"/>
+              </a:lnSpc>
+              <a:buNone/>
+            </a:pPr>
+            <a:r>
+              <a:rPr lang="en-US" sz="1300" dirty="0">
+                <a:solidFill>
+                  <a:srgbClr val="16262E"/>
+                </a:solidFill>
+                <a:latin typeface="Calibri" pitchFamily="34" charset="0"/>
+                <a:ea typeface="Calibri" pitchFamily="34" charset="-122"/>
+                <a:cs typeface="Calibri" pitchFamily="34" charset="-120"/>
+              </a:rPr>
+              <a:t>1. Parte el texto en bloques y consolida al final, con el mismo libro de códigos en todas las tandas.</a:t>
+            </a:r>
+            <a:endParaRPr lang="en-US" sz="1300" dirty="0"/>
+          </a:p>
+          <a:p>
+            <a:pPr indent="0" marL="0">
+              <a:lnSpc>
+                <a:spcPct val="112000"/>
+              </a:lnSpc>
+              <a:buNone/>
+            </a:pPr>
+            <a:endParaRPr lang="en-US" sz="1300" dirty="0"/>
+          </a:p>
+          <a:p>
+            <a:pPr indent="0" marL="0">
+              <a:lnSpc>
+                <a:spcPct val="112000"/>
+              </a:lnSpc>
+              <a:buNone/>
+            </a:pPr>
+            <a:r>
+              <a:rPr lang="en-US" sz="1300" dirty="0">
+                <a:solidFill>
+                  <a:srgbClr val="16262E"/>
+                </a:solidFill>
+                <a:latin typeface="Calibri" pitchFamily="34" charset="0"/>
+                <a:ea typeface="Calibri" pitchFamily="34" charset="-122"/>
+                <a:cs typeface="Calibri" pitchFamily="34" charset="-120"/>
+              </a:rPr>
+              <a:t>2. Trabaja con una muestra y valida contra el total. Es lo que hiciste hoy.</a:t>
+            </a:r>
+            <a:endParaRPr lang="en-US" sz="1300" dirty="0"/>
+          </a:p>
+          <a:p>
+            <a:pPr indent="0" marL="0">
+              <a:lnSpc>
+                <a:spcPct val="112000"/>
+              </a:lnSpc>
+              <a:buNone/>
+            </a:pPr>
+            <a:endParaRPr lang="en-US" sz="1300" dirty="0"/>
+          </a:p>
+          <a:p>
+            <a:pPr indent="0" marL="0">
+              <a:lnSpc>
+                <a:spcPct val="112000"/>
+              </a:lnSpc>
+              <a:buNone/>
+            </a:pPr>
+            <a:r>
+              <a:rPr lang="en-US" sz="1300" dirty="0">
+                <a:solidFill>
+                  <a:srgbClr val="16262E"/>
+                </a:solidFill>
+                <a:latin typeface="Calibri" pitchFamily="34" charset="0"/>
+                <a:ea typeface="Calibri" pitchFamily="34" charset="-122"/>
+                <a:cs typeface="Calibri" pitchFamily="34" charset="-120"/>
+              </a:rPr>
+              <a:t>3. Pásate a código. Cuando son decenas de miles de registros, el chat ya no alcanza. Eso es el Módulo III.</a:t>
+            </a:r>
+            <a:endParaRPr lang="en-US" sz="1300" dirty="0"/>
+          </a:p>
+        </p:txBody>
+      </p:sp>
+    </p:spTree>
+  </p:cSld>
+  <p:clrMapOvr>
+    <a:masterClrMapping/>
+  </p:clrMapOvr>
+</p:sld>
+</file>
+
+<file path=ppt/slides/slide15.xml><?xml version="1.0" encoding="utf-8"?>
+<p:sld xmlns:a="http://schemas.openxmlformats.org/drawingml/2006/main" xmlns:r="http://schemas.openxmlformats.org/officeDocument/2006/relationships" xmlns:p="http://schemas.openxmlformats.org/presentationml/2006/main">
+  <p:cSld name="Slide 15">
     <p:bg>
       <p:bgPr>
         <a:solidFill>
@@ -4439,7 +5941,7 @@
                 <a:ea typeface="Arial" pitchFamily="34" charset="-122"/>
                 <a:cs typeface="Arial" pitchFamily="34" charset="-120"/>
               </a:rPr>
-              <a:t>Entregables de la sesión 4</a:t>
+              <a:t>Lo que entregas hoy</a:t>
             </a:r>
             <a:endParaRPr lang="en-US" sz="3000" dirty="0"/>
           </a:p>
@@ -4561,7 +6063,7 @@
                 <a:ea typeface="Calibri" pitchFamily="34" charset="-122"/>
                 <a:cs typeface="Calibri" pitchFamily="34" charset="-120"/>
               </a:rPr>
-              <a:t>La tabla comparativa de tres programas, con las equivalencias forzadas marcadas y corregidas.</a:t>
+              <a:t>Tu tabla comparativa de tres programas, con las equivalencias forzadas marcadas y corregidas.</a:t>
             </a:r>
             <a:endParaRPr lang="en-US" sz="1450" dirty="0"/>
           </a:p>
@@ -4683,7 +6185,7 @@
                 <a:ea typeface="Calibri" pitchFamily="34" charset="-122"/>
                 <a:cs typeface="Calibri" pitchFamily="34" charset="-120"/>
               </a:rPr>
-              <a:t>El libro de códigos en sus dos versiones: la que propuso la herramienta y la que usted ratificó.</a:t>
+              <a:t>Tu libro de códigos en sus dos versiones: la que propuso el modelo y la que tú ratificaste. Si no hay diferencias entre las dos, el paso dos no se hizo.</a:t>
             </a:r>
             <a:endParaRPr lang="en-US" sz="1450" dirty="0"/>
           </a:p>
@@ -4805,7 +6307,7 @@
                 <a:ea typeface="Calibri" pitchFamily="34" charset="-122"/>
                 <a:cs typeface="Calibri" pitchFamily="34" charset="-120"/>
               </a:rPr>
-              <a:t>La nota de su bitácora sobre en qué caso usaría la síntesis extractiva y en cuál la abstractiva.</a:t>
+              <a:t>La nota de tu bitácora sobre en qué caso usarías la síntesis extractiva y en cuál la abstractiva.</a:t>
             </a:r>
             <a:endParaRPr lang="en-US" sz="1450" dirty="0"/>
           </a:p>
@@ -4927,7 +6429,7 @@
                 <a:ea typeface="Calibri" pitchFamily="34" charset="-122"/>
                 <a:cs typeface="Calibri" pitchFamily="34" charset="-120"/>
               </a:rPr>
-              <a:t>Para el lunes: nada que preparar. Vamos a recorrer el ecosistema completo de herramientas.</a:t>
+              <a:t>Y el tema tentativo del proyecto final de tu equipo, con la ruta metodológica que consideran.</a:t>
             </a:r>
             <a:endParaRPr lang="en-US" sz="1450" dirty="0"/>
           </a:p>
@@ -4966,7 +6468,7 @@
                 <a:ea typeface="Calibri" pitchFamily="34" charset="-122"/>
                 <a:cs typeface="Calibri" pitchFamily="34" charset="-120"/>
               </a:rPr>
-              <a:t>Sesión 5, lunes 21 de septiembre: plataformas especializadas en análisis cualitativo con IA.</a:t>
+              <a:t>Sesión 5, lunes 21 de septiembre: las plataformas de análisis cualitativo. Ese día sí activas la prueba de Elicit, no antes.</a:t>
             </a:r>
             <a:endParaRPr lang="en-US" sz="1300" dirty="0"/>
           </a:p>
@@ -5204,7 +6706,7 @@
                 <a:ea typeface="Calibri" pitchFamily="34" charset="-122"/>
                 <a:cs typeface="Calibri" pitchFamily="34" charset="-120"/>
               </a:rPr>
-              <a:t>Las cuatro tareas del PLN y para qué sirve cada una</a:t>
+              <a:t>Las cuatro tareas y para qué sirve cada una</a:t>
             </a:r>
             <a:endParaRPr lang="en-US" sz="1350" dirty="0"/>
           </a:p>
@@ -5312,7 +6814,7 @@
                 <a:ea typeface="Calibri" pitchFamily="34" charset="-122"/>
                 <a:cs typeface="Calibri" pitchFamily="34" charset="-120"/>
               </a:rPr>
-              <a:t>Práctica A: síntesis extractiva y abstractiva del mismo documento</a:t>
+              <a:t>Práctica A: las dos formas de resumir</a:t>
             </a:r>
             <a:endParaRPr lang="en-US" sz="1350" dirty="0"/>
           </a:p>
@@ -5420,7 +6922,7 @@
                 <a:ea typeface="Calibri" pitchFamily="34" charset="-122"/>
                 <a:cs typeface="Calibri" pitchFamily="34" charset="-120"/>
               </a:rPr>
-              <a:t>Práctica B: extracción de entidades sobre tres programas</a:t>
+              <a:t>Práctica B: sacar la tabla de adentro del texto</a:t>
             </a:r>
             <a:endParaRPr lang="en-US" sz="1350" dirty="0"/>
           </a:p>
@@ -5636,7 +7138,7 @@
                 <a:ea typeface="Calibri" pitchFamily="34" charset="-122"/>
                 <a:cs typeface="Calibri" pitchFamily="34" charset="-120"/>
               </a:rPr>
-              <a:t>Práctica C: agrupamiento temático con ratificación humana</a:t>
+              <a:t>Práctica C: agrupar temas sin perder a la minoría</a:t>
             </a:r>
             <a:endParaRPr lang="en-US" sz="1350" dirty="0"/>
           </a:p>
@@ -5744,7 +7246,7 @@
                 <a:ea typeface="Calibri" pitchFamily="34" charset="-122"/>
                 <a:cs typeface="Calibri" pitchFamily="34" charset="-120"/>
               </a:rPr>
-              <a:t>Práctica D: postura y sentimiento</a:t>
+              <a:t>Práctica D: postura y causa raíz</a:t>
             </a:r>
             <a:endParaRPr lang="en-US" sz="1350" dirty="0"/>
           </a:p>
@@ -5852,7 +7354,7 @@
                 <a:ea typeface="Calibri" pitchFamily="34" charset="-122"/>
                 <a:cs typeface="Calibri" pitchFamily="34" charset="-120"/>
               </a:rPr>
-              <a:t>La ventana de contexto y qué hacer cuando el corpus no cabe</a:t>
+              <a:t>Qué haces cuando el texto no cabe</a:t>
             </a:r>
             <a:endParaRPr lang="en-US" sz="1350" dirty="0"/>
           </a:p>
@@ -5999,7 +7501,7 @@
                 <a:ea typeface="Calibri" pitchFamily="34" charset="-122"/>
                 <a:cs typeface="Calibri" pitchFamily="34" charset="-120"/>
               </a:rPr>
-              <a:t>Hoy son 90 minutos de práctica. Es la sesión con más trabajo de mano de todo el bloque.</a:t>
+              <a:t>Hoy trabajas 90 minutos con las manos en el teclado. Es la sesión con más práctica de las dos semanas.</a:t>
             </a:r>
             <a:endParaRPr lang="en-US" sz="1000" dirty="0"/>
           </a:p>
@@ -6016,6 +7518,13 @@
 <file path=ppt/slides/slide3.xml><?xml version="1.0" encoding="utf-8"?>
 <p:sld xmlns:a="http://schemas.openxmlformats.org/drawingml/2006/main" xmlns:r="http://schemas.openxmlformats.org/officeDocument/2006/relationships" xmlns:p="http://schemas.openxmlformats.org/presentationml/2006/main">
   <p:cSld name="Slide 3">
+    <p:bg>
+      <p:bgPr>
+        <a:solidFill>
+          <a:srgbClr val="16262E"/>
+        </a:solidFill>
+      </p:bgPr>
+    </p:bg>
     <p:spTree>
       <p:nvGrpSpPr>
         <p:cNvPr id="1" name=""/>
@@ -6032,104 +7541,168 @@
       </p:grpSpPr>
       <p:sp>
         <p:nvSpPr>
-          <p:cNvPr id="2" name="Text 0"/>
-          <p:cNvSpPr txBox="1"/>
-          <p:nvPr/>
-        </p:nvSpPr>
-        <p:spPr>
-          <a:xfrm>
-            <a:off x="566928" y="402336"/>
-            <a:ext cx="9229039" cy="749808"/>
-          </a:xfrm>
-          <a:prstGeom prst="rect">
-            <a:avLst/>
-          </a:prstGeom>
-          <a:noFill/>
-          <a:ln/>
-        </p:spPr>
-        <p:txBody>
-          <a:bodyPr wrap="square" lIns="0" tIns="0" rIns="0" bIns="0" rtlCol="0" anchor="t"/>
-          <a:lstStyle/>
-          <a:p>
-            <a:pPr algn="l" indent="0" marL="0">
-              <a:buNone/>
-            </a:pPr>
-            <a:r>
-              <a:rPr lang="en-US" sz="3200" b="1" dirty="0">
-                <a:solidFill>
-                  <a:srgbClr val="16262E"/>
+          <p:cNvPr id="2" name="Shape 0"/>
+          <p:cNvSpPr/>
+          <p:nvPr/>
+        </p:nvSpPr>
+        <p:spPr>
+          <a:xfrm>
+            <a:off x="566928" y="2331720"/>
+            <a:ext cx="1371600" cy="1371600"/>
+          </a:xfrm>
+          <a:prstGeom prst="ellipse">
+            <a:avLst/>
+          </a:prstGeom>
+          <a:solidFill>
+            <a:srgbClr val="C85A28"/>
+          </a:solidFill>
+          <a:ln w="12700">
+            <a:solidFill>
+              <a:srgbClr val="C85A28"/>
+            </a:solidFill>
+            <a:prstDash val="solid"/>
+          </a:ln>
+        </p:spPr>
+      </p:sp>
+      <p:sp>
+        <p:nvSpPr>
+          <p:cNvPr id="3" name="Text 1"/>
+          <p:cNvSpPr txBox="1"/>
+          <p:nvPr/>
+        </p:nvSpPr>
+        <p:spPr>
+          <a:xfrm>
+            <a:off x="566928" y="2331720"/>
+            <a:ext cx="1371600" cy="1371600"/>
+          </a:xfrm>
+          <a:prstGeom prst="rect">
+            <a:avLst/>
+          </a:prstGeom>
+          <a:noFill/>
+          <a:ln/>
+        </p:spPr>
+        <p:txBody>
+          <a:bodyPr wrap="square" lIns="0" tIns="0" rIns="0" bIns="0" rtlCol="0" anchor="ctr"/>
+          <a:lstStyle/>
+          <a:p>
+            <a:pPr algn="ctr" indent="0" marL="0">
+              <a:buNone/>
+            </a:pPr>
+            <a:r>
+              <a:rPr lang="en-US" sz="4400" b="1" dirty="0">
+                <a:solidFill>
+                  <a:srgbClr val="FFFFFF"/>
                 </a:solidFill>
                 <a:latin typeface="Arial" pitchFamily="34" charset="0"/>
                 <a:ea typeface="Arial" pitchFamily="34" charset="-122"/>
                 <a:cs typeface="Arial" pitchFamily="34" charset="-120"/>
               </a:rPr>
-              <a:t>Cuatro tareas, cuatro usos distintos</a:t>
-            </a:r>
-            <a:endParaRPr lang="en-US" sz="3200" dirty="0"/>
-          </a:p>
-        </p:txBody>
-      </p:sp>
-      <p:sp>
-        <p:nvSpPr>
-          <p:cNvPr id="3" name="Text 1"/>
-          <p:cNvSpPr txBox="1"/>
-          <p:nvPr/>
-        </p:nvSpPr>
-        <p:spPr>
-          <a:xfrm>
-            <a:off x="566928" y="1280160"/>
-            <a:ext cx="9960559" cy="365760"/>
-          </a:xfrm>
-          <a:prstGeom prst="rect">
-            <a:avLst/>
-          </a:prstGeom>
-          <a:noFill/>
-          <a:ln/>
-        </p:spPr>
-        <p:txBody>
-          <a:bodyPr wrap="square" lIns="0" tIns="0" rIns="0" bIns="0" rtlCol="0" anchor="t"/>
+              <a:t>1</a:t>
+            </a:r>
+            <a:endParaRPr lang="en-US" sz="4400" dirty="0"/>
+          </a:p>
+        </p:txBody>
+      </p:sp>
+      <p:sp>
+        <p:nvSpPr>
+          <p:cNvPr id="4" name="Text 2"/>
+          <p:cNvSpPr txBox="1"/>
+          <p:nvPr/>
+        </p:nvSpPr>
+        <p:spPr>
+          <a:xfrm>
+            <a:off x="2487168" y="2331720"/>
+            <a:ext cx="8778240" cy="365760"/>
+          </a:xfrm>
+          <a:prstGeom prst="rect">
+            <a:avLst/>
+          </a:prstGeom>
+          <a:noFill/>
+          <a:ln/>
+        </p:spPr>
+        <p:txBody>
+          <a:bodyPr wrap="square" lIns="0" tIns="0" rIns="0" bIns="0" rtlCol="0" anchor="ctr"/>
           <a:lstStyle/>
           <a:p>
             <a:pPr indent="0" marL="0">
               <a:buNone/>
             </a:pPr>
             <a:r>
-              <a:rPr lang="en-US" sz="1500" dirty="0">
-                <a:solidFill>
-                  <a:srgbClr val="5A6B73"/>
+              <a:rPr lang="en-US" sz="1400" b="1" spc="200" kern="0" dirty="0">
+                <a:solidFill>
+                  <a:srgbClr val="D7E7E7"/>
                 </a:solidFill>
                 <a:latin typeface="Calibri" pitchFamily="34" charset="0"/>
                 <a:ea typeface="Calibri" pitchFamily="34" charset="-122"/>
                 <a:cs typeface="Calibri" pitchFamily="34" charset="-120"/>
               </a:rPr>
-              <a:t>Todo lo que se hace con texto en volumen cae en una de estas cuatro. Conviene saber cuál se necesita antes de abrir la herramienta.</a:t>
-            </a:r>
-            <a:endParaRPr lang="en-US" sz="1500" dirty="0"/>
-          </a:p>
-        </p:txBody>
-      </p:sp>
-      <p:sp>
-        <p:nvSpPr>
-          <p:cNvPr id="4" name="Shape 2"/>
+              <a:t>PRIMER BLOQUE</a:t>
+            </a:r>
+            <a:endParaRPr lang="en-US" sz="1400" dirty="0"/>
+          </a:p>
+        </p:txBody>
+      </p:sp>
+      <p:sp>
+        <p:nvSpPr>
+          <p:cNvPr id="5" name="Text 3"/>
+          <p:cNvSpPr txBox="1"/>
+          <p:nvPr/>
+        </p:nvSpPr>
+        <p:spPr>
+          <a:xfrm>
+            <a:off x="2487168" y="2697480"/>
+            <a:ext cx="8961120" cy="1188720"/>
+          </a:xfrm>
+          <a:prstGeom prst="rect">
+            <a:avLst/>
+          </a:prstGeom>
+          <a:noFill/>
+          <a:ln/>
+        </p:spPr>
+        <p:txBody>
+          <a:bodyPr wrap="square" lIns="0" tIns="0" rIns="0" bIns="0" rtlCol="0" anchor="t"/>
+          <a:lstStyle/>
+          <a:p>
+            <a:pPr indent="0" marL="0">
+              <a:buNone/>
+            </a:pPr>
+            <a:r>
+              <a:rPr lang="en-US" sz="3400" b="1" dirty="0">
+                <a:solidFill>
+                  <a:srgbClr val="FFFFFF"/>
+                </a:solidFill>
+                <a:latin typeface="Arial" pitchFamily="34" charset="0"/>
+                <a:ea typeface="Arial" pitchFamily="34" charset="-122"/>
+                <a:cs typeface="Arial" pitchFamily="34" charset="-120"/>
+              </a:rPr>
+              <a:t>Las cuatro tareas del procesamiento de texto</a:t>
+            </a:r>
+            <a:endParaRPr lang="en-US" sz="3400" dirty="0"/>
+          </a:p>
+        </p:txBody>
+      </p:sp>
+      <p:sp>
+        <p:nvSpPr>
+          <p:cNvPr id="6" name="Shape 4"/>
           <p:cNvSpPr/>
           <p:nvPr/>
         </p:nvSpPr>
         <p:spPr>
           <a:xfrm>
-            <a:off x="566928" y="2011680"/>
-            <a:ext cx="2558720" cy="2078228"/>
+            <a:off x="9631375" y="457200"/>
+            <a:ext cx="1993392" cy="347472"/>
           </a:xfrm>
           <a:prstGeom prst="roundRect">
             <a:avLst>
-              <a:gd name="adj" fmla="val 3520"/>
+              <a:gd name="adj" fmla="val 50000"/>
             </a:avLst>
           </a:prstGeom>
           <a:solidFill>
-            <a:srgbClr val="D7E7E7"/>
+            <a:srgbClr val="24404E"/>
           </a:solidFill>
           <a:ln w="12700">
             <a:solidFill>
-              <a:srgbClr val="D7E7E7"/>
+              <a:srgbClr val="24404E"/>
             </a:solidFill>
             <a:prstDash val="solid"/>
           </a:ln>
@@ -6137,39 +7710,14 @@
       </p:sp>
       <p:sp>
         <p:nvSpPr>
-          <p:cNvPr id="5" name="Shape 3"/>
-          <p:cNvSpPr/>
-          <p:nvPr/>
-        </p:nvSpPr>
-        <p:spPr>
-          <a:xfrm>
-            <a:off x="804672" y="2231136"/>
-            <a:ext cx="420624" cy="420624"/>
-          </a:xfrm>
-          <a:prstGeom prst="ellipse">
-            <a:avLst/>
-          </a:prstGeom>
-          <a:solidFill>
-            <a:srgbClr val="2E7D7D"/>
-          </a:solidFill>
-          <a:ln w="12700">
-            <a:solidFill>
-              <a:srgbClr val="2E7D7D"/>
-            </a:solidFill>
-            <a:prstDash val="solid"/>
-          </a:ln>
-        </p:spPr>
-      </p:sp>
-      <p:sp>
-        <p:nvSpPr>
-          <p:cNvPr id="6" name="Text 4"/>
-          <p:cNvSpPr txBox="1"/>
-          <p:nvPr/>
-        </p:nvSpPr>
-        <p:spPr>
-          <a:xfrm>
-            <a:off x="804672" y="2231136"/>
-            <a:ext cx="420624" cy="420624"/>
+          <p:cNvPr id="7" name="Text 5"/>
+          <p:cNvSpPr txBox="1"/>
+          <p:nvPr/>
+        </p:nvSpPr>
+        <p:spPr>
+          <a:xfrm>
+            <a:off x="9631375" y="457200"/>
+            <a:ext cx="1993392" cy="347472"/>
           </a:xfrm>
           <a:prstGeom prst="rect">
             <a:avLst/>
@@ -6185,614 +7733,17 @@
               <a:buNone/>
             </a:pPr>
             <a:r>
-              <a:rPr lang="en-US" sz="1400" b="1" dirty="0">
+              <a:rPr lang="en-US" sz="1200" b="1" dirty="0">
                 <a:solidFill>
                   <a:srgbClr val="FFFFFF"/>
-                </a:solidFill>
-                <a:latin typeface="Arial" pitchFamily="34" charset="0"/>
-                <a:ea typeface="Arial" pitchFamily="34" charset="-122"/>
-                <a:cs typeface="Arial" pitchFamily="34" charset="-120"/>
-              </a:rPr>
-              <a:t>1</a:t>
-            </a:r>
-            <a:endParaRPr lang="en-US" sz="1400" dirty="0"/>
-          </a:p>
-        </p:txBody>
-      </p:sp>
-      <p:sp>
-        <p:nvSpPr>
-          <p:cNvPr id="7" name="Text 5"/>
-          <p:cNvSpPr txBox="1"/>
-          <p:nvPr/>
-        </p:nvSpPr>
-        <p:spPr>
-          <a:xfrm>
-            <a:off x="804672" y="2798064"/>
-            <a:ext cx="2083232" cy="457200"/>
-          </a:xfrm>
-          <a:prstGeom prst="rect">
-            <a:avLst/>
-          </a:prstGeom>
-          <a:noFill/>
-          <a:ln/>
-        </p:spPr>
-        <p:txBody>
-          <a:bodyPr wrap="square" lIns="0" tIns="0" rIns="0" bIns="0" rtlCol="0" anchor="t"/>
-          <a:lstStyle/>
-          <a:p>
-            <a:pPr indent="0" marL="0">
-              <a:buNone/>
-            </a:pPr>
-            <a:r>
-              <a:rPr lang="en-US" sz="1600" b="1" dirty="0">
-                <a:solidFill>
-                  <a:srgbClr val="16262E"/>
-                </a:solidFill>
-                <a:latin typeface="Arial" pitchFamily="34" charset="0"/>
-                <a:ea typeface="Arial" pitchFamily="34" charset="-122"/>
-                <a:cs typeface="Arial" pitchFamily="34" charset="-120"/>
-              </a:rPr>
-              <a:t>Síntesis automática</a:t>
-            </a:r>
-            <a:endParaRPr lang="en-US" sz="1600" dirty="0"/>
-          </a:p>
-        </p:txBody>
-      </p:sp>
-      <p:sp>
-        <p:nvSpPr>
-          <p:cNvPr id="8" name="Text 6"/>
-          <p:cNvSpPr txBox="1"/>
-          <p:nvPr/>
-        </p:nvSpPr>
-        <p:spPr>
-          <a:xfrm>
-            <a:off x="804672" y="3273552"/>
-            <a:ext cx="2083232" cy="578612"/>
-          </a:xfrm>
-          <a:prstGeom prst="rect">
-            <a:avLst/>
-          </a:prstGeom>
-          <a:noFill/>
-          <a:ln/>
-        </p:spPr>
-        <p:txBody>
-          <a:bodyPr wrap="square" lIns="0" tIns="0" rIns="0" bIns="0" rtlCol="0" anchor="t"/>
-          <a:lstStyle/>
-          <a:p>
-            <a:pPr indent="0" marL="0">
-              <a:lnSpc>
-                <a:spcPct val="110000"/>
-              </a:lnSpc>
-              <a:buNone/>
-            </a:pPr>
-            <a:r>
-              <a:rPr lang="en-US" sz="1300" dirty="0">
-                <a:solidFill>
-                  <a:srgbClr val="16262E"/>
                 </a:solidFill>
                 <a:latin typeface="Calibri" pitchFamily="34" charset="0"/>
                 <a:ea typeface="Calibri" pitchFamily="34" charset="-122"/>
                 <a:cs typeface="Calibri" pitchFamily="34" charset="-120"/>
               </a:rPr>
-              <a:t>Reducir mucho texto a poco texto. Tiene dos variantes que sirven para cosas distintas.</a:t>
-            </a:r>
-            <a:endParaRPr lang="en-US" sz="1300" dirty="0"/>
-          </a:p>
-        </p:txBody>
-      </p:sp>
-      <p:sp>
-        <p:nvSpPr>
-          <p:cNvPr id="9" name="Shape 7"/>
-          <p:cNvSpPr/>
-          <p:nvPr/>
-        </p:nvSpPr>
-        <p:spPr>
-          <a:xfrm>
-            <a:off x="3399968" y="2011680"/>
-            <a:ext cx="2558720" cy="2078228"/>
-          </a:xfrm>
-          <a:prstGeom prst="roundRect">
-            <a:avLst>
-              <a:gd name="adj" fmla="val 3520"/>
-            </a:avLst>
-          </a:prstGeom>
-          <a:solidFill>
-            <a:srgbClr val="D7E7E7"/>
-          </a:solidFill>
-          <a:ln w="12700">
-            <a:solidFill>
-              <a:srgbClr val="D7E7E7"/>
-            </a:solidFill>
-            <a:prstDash val="solid"/>
-          </a:ln>
-        </p:spPr>
-      </p:sp>
-      <p:sp>
-        <p:nvSpPr>
-          <p:cNvPr id="10" name="Shape 8"/>
-          <p:cNvSpPr/>
-          <p:nvPr/>
-        </p:nvSpPr>
-        <p:spPr>
-          <a:xfrm>
-            <a:off x="3637712" y="2231136"/>
-            <a:ext cx="420624" cy="420624"/>
-          </a:xfrm>
-          <a:prstGeom prst="ellipse">
-            <a:avLst/>
-          </a:prstGeom>
-          <a:solidFill>
-            <a:srgbClr val="2E7D7D"/>
-          </a:solidFill>
-          <a:ln w="12700">
-            <a:solidFill>
-              <a:srgbClr val="2E7D7D"/>
-            </a:solidFill>
-            <a:prstDash val="solid"/>
-          </a:ln>
-        </p:spPr>
-      </p:sp>
-      <p:sp>
-        <p:nvSpPr>
-          <p:cNvPr id="11" name="Text 9"/>
-          <p:cNvSpPr txBox="1"/>
-          <p:nvPr/>
-        </p:nvSpPr>
-        <p:spPr>
-          <a:xfrm>
-            <a:off x="3637712" y="2231136"/>
-            <a:ext cx="420624" cy="420624"/>
-          </a:xfrm>
-          <a:prstGeom prst="rect">
-            <a:avLst/>
-          </a:prstGeom>
-          <a:noFill/>
-          <a:ln/>
-        </p:spPr>
-        <p:txBody>
-          <a:bodyPr wrap="square" lIns="0" tIns="0" rIns="0" bIns="0" rtlCol="0" anchor="ctr"/>
-          <a:lstStyle/>
-          <a:p>
-            <a:pPr algn="ctr" indent="0" marL="0">
-              <a:buNone/>
-            </a:pPr>
-            <a:r>
-              <a:rPr lang="en-US" sz="1400" b="1" dirty="0">
-                <a:solidFill>
-                  <a:srgbClr val="FFFFFF"/>
-                </a:solidFill>
-                <a:latin typeface="Arial" pitchFamily="34" charset="0"/>
-                <a:ea typeface="Arial" pitchFamily="34" charset="-122"/>
-                <a:cs typeface="Arial" pitchFamily="34" charset="-120"/>
-              </a:rPr>
-              <a:t>2</a:t>
-            </a:r>
-            <a:endParaRPr lang="en-US" sz="1400" dirty="0"/>
-          </a:p>
-        </p:txBody>
-      </p:sp>
-      <p:sp>
-        <p:nvSpPr>
-          <p:cNvPr id="12" name="Text 10"/>
-          <p:cNvSpPr txBox="1"/>
-          <p:nvPr/>
-        </p:nvSpPr>
-        <p:spPr>
-          <a:xfrm>
-            <a:off x="3637712" y="2798064"/>
-            <a:ext cx="2083232" cy="457200"/>
-          </a:xfrm>
-          <a:prstGeom prst="rect">
-            <a:avLst/>
-          </a:prstGeom>
-          <a:noFill/>
-          <a:ln/>
-        </p:spPr>
-        <p:txBody>
-          <a:bodyPr wrap="square" lIns="0" tIns="0" rIns="0" bIns="0" rtlCol="0" anchor="t"/>
-          <a:lstStyle/>
-          <a:p>
-            <a:pPr indent="0" marL="0">
-              <a:buNone/>
-            </a:pPr>
-            <a:r>
-              <a:rPr lang="en-US" sz="1600" b="1" dirty="0">
-                <a:solidFill>
-                  <a:srgbClr val="16262E"/>
-                </a:solidFill>
-                <a:latin typeface="Arial" pitchFamily="34" charset="0"/>
-                <a:ea typeface="Arial" pitchFamily="34" charset="-122"/>
-                <a:cs typeface="Arial" pitchFamily="34" charset="-120"/>
-              </a:rPr>
-              <a:t>Extracción de entidades</a:t>
-            </a:r>
-            <a:endParaRPr lang="en-US" sz="1600" dirty="0"/>
-          </a:p>
-        </p:txBody>
-      </p:sp>
-      <p:sp>
-        <p:nvSpPr>
-          <p:cNvPr id="13" name="Text 11"/>
-          <p:cNvSpPr txBox="1"/>
-          <p:nvPr/>
-        </p:nvSpPr>
-        <p:spPr>
-          <a:xfrm>
-            <a:off x="3637712" y="3273552"/>
-            <a:ext cx="2083232" cy="578612"/>
-          </a:xfrm>
-          <a:prstGeom prst="rect">
-            <a:avLst/>
-          </a:prstGeom>
-          <a:noFill/>
-          <a:ln/>
-        </p:spPr>
-        <p:txBody>
-          <a:bodyPr wrap="square" lIns="0" tIns="0" rIns="0" bIns="0" rtlCol="0" anchor="t"/>
-          <a:lstStyle/>
-          <a:p>
-            <a:pPr indent="0" marL="0">
-              <a:lnSpc>
-                <a:spcPct val="110000"/>
-              </a:lnSpc>
-              <a:buNone/>
-            </a:pPr>
-            <a:r>
-              <a:rPr lang="en-US" sz="1300" dirty="0">
-                <a:solidFill>
-                  <a:srgbClr val="16262E"/>
-                </a:solidFill>
-                <a:latin typeface="Calibri" pitchFamily="34" charset="0"/>
-                <a:ea typeface="Calibri" pitchFamily="34" charset="-122"/>
-                <a:cs typeface="Calibri" pitchFamily="34" charset="-120"/>
-              </a:rPr>
-              <a:t>Sacar datos específicos de texto denso y ponerlos en una tabla comparable.</a:t>
-            </a:r>
-            <a:endParaRPr lang="en-US" sz="1300" dirty="0"/>
-          </a:p>
-        </p:txBody>
-      </p:sp>
-      <p:sp>
-        <p:nvSpPr>
-          <p:cNvPr id="14" name="Shape 12"/>
-          <p:cNvSpPr/>
-          <p:nvPr/>
-        </p:nvSpPr>
-        <p:spPr>
-          <a:xfrm>
-            <a:off x="6233008" y="2011680"/>
-            <a:ext cx="2558720" cy="2078228"/>
-          </a:xfrm>
-          <a:prstGeom prst="roundRect">
-            <a:avLst>
-              <a:gd name="adj" fmla="val 3520"/>
-            </a:avLst>
-          </a:prstGeom>
-          <a:solidFill>
-            <a:srgbClr val="D7E7E7"/>
-          </a:solidFill>
-          <a:ln w="12700">
-            <a:solidFill>
-              <a:srgbClr val="D7E7E7"/>
-            </a:solidFill>
-            <a:prstDash val="solid"/>
-          </a:ln>
-        </p:spPr>
-      </p:sp>
-      <p:sp>
-        <p:nvSpPr>
-          <p:cNvPr id="15" name="Shape 13"/>
-          <p:cNvSpPr/>
-          <p:nvPr/>
-        </p:nvSpPr>
-        <p:spPr>
-          <a:xfrm>
-            <a:off x="6470752" y="2231136"/>
-            <a:ext cx="420624" cy="420624"/>
-          </a:xfrm>
-          <a:prstGeom prst="ellipse">
-            <a:avLst/>
-          </a:prstGeom>
-          <a:solidFill>
-            <a:srgbClr val="2E7D7D"/>
-          </a:solidFill>
-          <a:ln w="12700">
-            <a:solidFill>
-              <a:srgbClr val="2E7D7D"/>
-            </a:solidFill>
-            <a:prstDash val="solid"/>
-          </a:ln>
-        </p:spPr>
-      </p:sp>
-      <p:sp>
-        <p:nvSpPr>
-          <p:cNvPr id="16" name="Text 14"/>
-          <p:cNvSpPr txBox="1"/>
-          <p:nvPr/>
-        </p:nvSpPr>
-        <p:spPr>
-          <a:xfrm>
-            <a:off x="6470752" y="2231136"/>
-            <a:ext cx="420624" cy="420624"/>
-          </a:xfrm>
-          <a:prstGeom prst="rect">
-            <a:avLst/>
-          </a:prstGeom>
-          <a:noFill/>
-          <a:ln/>
-        </p:spPr>
-        <p:txBody>
-          <a:bodyPr wrap="square" lIns="0" tIns="0" rIns="0" bIns="0" rtlCol="0" anchor="ctr"/>
-          <a:lstStyle/>
-          <a:p>
-            <a:pPr algn="ctr" indent="0" marL="0">
-              <a:buNone/>
-            </a:pPr>
-            <a:r>
-              <a:rPr lang="en-US" sz="1400" b="1" dirty="0">
-                <a:solidFill>
-                  <a:srgbClr val="FFFFFF"/>
-                </a:solidFill>
-                <a:latin typeface="Arial" pitchFamily="34" charset="0"/>
-                <a:ea typeface="Arial" pitchFamily="34" charset="-122"/>
-                <a:cs typeface="Arial" pitchFamily="34" charset="-120"/>
-              </a:rPr>
-              <a:t>3</a:t>
-            </a:r>
-            <a:endParaRPr lang="en-US" sz="1400" dirty="0"/>
-          </a:p>
-        </p:txBody>
-      </p:sp>
-      <p:sp>
-        <p:nvSpPr>
-          <p:cNvPr id="17" name="Text 15"/>
-          <p:cNvSpPr txBox="1"/>
-          <p:nvPr/>
-        </p:nvSpPr>
-        <p:spPr>
-          <a:xfrm>
-            <a:off x="6470752" y="2798064"/>
-            <a:ext cx="2083232" cy="457200"/>
-          </a:xfrm>
-          <a:prstGeom prst="rect">
-            <a:avLst/>
-          </a:prstGeom>
-          <a:noFill/>
-          <a:ln/>
-        </p:spPr>
-        <p:txBody>
-          <a:bodyPr wrap="square" lIns="0" tIns="0" rIns="0" bIns="0" rtlCol="0" anchor="t"/>
-          <a:lstStyle/>
-          <a:p>
-            <a:pPr indent="0" marL="0">
-              <a:buNone/>
-            </a:pPr>
-            <a:r>
-              <a:rPr lang="en-US" sz="1600" b="1" dirty="0">
-                <a:solidFill>
-                  <a:srgbClr val="16262E"/>
-                </a:solidFill>
-                <a:latin typeface="Arial" pitchFamily="34" charset="0"/>
-                <a:ea typeface="Arial" pitchFamily="34" charset="-122"/>
-                <a:cs typeface="Arial" pitchFamily="34" charset="-120"/>
-              </a:rPr>
-              <a:t>Agrupamiento temático</a:t>
-            </a:r>
-            <a:endParaRPr lang="en-US" sz="1600" dirty="0"/>
-          </a:p>
-        </p:txBody>
-      </p:sp>
-      <p:sp>
-        <p:nvSpPr>
-          <p:cNvPr id="18" name="Text 16"/>
-          <p:cNvSpPr txBox="1"/>
-          <p:nvPr/>
-        </p:nvSpPr>
-        <p:spPr>
-          <a:xfrm>
-            <a:off x="6470752" y="3273552"/>
-            <a:ext cx="2083232" cy="578612"/>
-          </a:xfrm>
-          <a:prstGeom prst="rect">
-            <a:avLst/>
-          </a:prstGeom>
-          <a:noFill/>
-          <a:ln/>
-        </p:spPr>
-        <p:txBody>
-          <a:bodyPr wrap="square" lIns="0" tIns="0" rIns="0" bIns="0" rtlCol="0" anchor="t"/>
-          <a:lstStyle/>
-          <a:p>
-            <a:pPr indent="0" marL="0">
-              <a:lnSpc>
-                <a:spcPct val="110000"/>
-              </a:lnSpc>
-              <a:buNone/>
-            </a:pPr>
-            <a:r>
-              <a:rPr lang="en-US" sz="1300" dirty="0">
-                <a:solidFill>
-                  <a:srgbClr val="16262E"/>
-                </a:solidFill>
-                <a:latin typeface="Calibri" pitchFamily="34" charset="0"/>
-                <a:ea typeface="Calibri" pitchFamily="34" charset="-122"/>
-                <a:cs typeface="Calibri" pitchFamily="34" charset="-120"/>
-              </a:rPr>
-              <a:t>Descubrir de qué habla un conjunto de textos cuando son demasiados para leerlos.</a:t>
-            </a:r>
-            <a:endParaRPr lang="en-US" sz="1300" dirty="0"/>
-          </a:p>
-        </p:txBody>
-      </p:sp>
-      <p:sp>
-        <p:nvSpPr>
-          <p:cNvPr id="19" name="Shape 17"/>
-          <p:cNvSpPr/>
-          <p:nvPr/>
-        </p:nvSpPr>
-        <p:spPr>
-          <a:xfrm>
-            <a:off x="9066047" y="2011680"/>
-            <a:ext cx="2558720" cy="2078228"/>
-          </a:xfrm>
-          <a:prstGeom prst="roundRect">
-            <a:avLst>
-              <a:gd name="adj" fmla="val 3520"/>
-            </a:avLst>
-          </a:prstGeom>
-          <a:solidFill>
-            <a:srgbClr val="D7E7E7"/>
-          </a:solidFill>
-          <a:ln w="12700">
-            <a:solidFill>
-              <a:srgbClr val="D7E7E7"/>
-            </a:solidFill>
-            <a:prstDash val="solid"/>
-          </a:ln>
-        </p:spPr>
-      </p:sp>
-      <p:sp>
-        <p:nvSpPr>
-          <p:cNvPr id="20" name="Shape 18"/>
-          <p:cNvSpPr/>
-          <p:nvPr/>
-        </p:nvSpPr>
-        <p:spPr>
-          <a:xfrm>
-            <a:off x="9303791" y="2231136"/>
-            <a:ext cx="420624" cy="420624"/>
-          </a:xfrm>
-          <a:prstGeom prst="ellipse">
-            <a:avLst/>
-          </a:prstGeom>
-          <a:solidFill>
-            <a:srgbClr val="2E7D7D"/>
-          </a:solidFill>
-          <a:ln w="12700">
-            <a:solidFill>
-              <a:srgbClr val="2E7D7D"/>
-            </a:solidFill>
-            <a:prstDash val="solid"/>
-          </a:ln>
-        </p:spPr>
-      </p:sp>
-      <p:sp>
-        <p:nvSpPr>
-          <p:cNvPr id="21" name="Text 19"/>
-          <p:cNvSpPr txBox="1"/>
-          <p:nvPr/>
-        </p:nvSpPr>
-        <p:spPr>
-          <a:xfrm>
-            <a:off x="9303791" y="2231136"/>
-            <a:ext cx="420624" cy="420624"/>
-          </a:xfrm>
-          <a:prstGeom prst="rect">
-            <a:avLst/>
-          </a:prstGeom>
-          <a:noFill/>
-          <a:ln/>
-        </p:spPr>
-        <p:txBody>
-          <a:bodyPr wrap="square" lIns="0" tIns="0" rIns="0" bIns="0" rtlCol="0" anchor="ctr"/>
-          <a:lstStyle/>
-          <a:p>
-            <a:pPr algn="ctr" indent="0" marL="0">
-              <a:buNone/>
-            </a:pPr>
-            <a:r>
-              <a:rPr lang="en-US" sz="1400" b="1" dirty="0">
-                <a:solidFill>
-                  <a:srgbClr val="FFFFFF"/>
-                </a:solidFill>
-                <a:latin typeface="Arial" pitchFamily="34" charset="0"/>
-                <a:ea typeface="Arial" pitchFamily="34" charset="-122"/>
-                <a:cs typeface="Arial" pitchFamily="34" charset="-120"/>
-              </a:rPr>
-              <a:t>4</a:t>
-            </a:r>
-            <a:endParaRPr lang="en-US" sz="1400" dirty="0"/>
-          </a:p>
-        </p:txBody>
-      </p:sp>
-      <p:sp>
-        <p:nvSpPr>
-          <p:cNvPr id="22" name="Text 20"/>
-          <p:cNvSpPr txBox="1"/>
-          <p:nvPr/>
-        </p:nvSpPr>
-        <p:spPr>
-          <a:xfrm>
-            <a:off x="9303791" y="2798064"/>
-            <a:ext cx="2083232" cy="457200"/>
-          </a:xfrm>
-          <a:prstGeom prst="rect">
-            <a:avLst/>
-          </a:prstGeom>
-          <a:noFill/>
-          <a:ln/>
-        </p:spPr>
-        <p:txBody>
-          <a:bodyPr wrap="square" lIns="0" tIns="0" rIns="0" bIns="0" rtlCol="0" anchor="t"/>
-          <a:lstStyle/>
-          <a:p>
-            <a:pPr indent="0" marL="0">
-              <a:buNone/>
-            </a:pPr>
-            <a:r>
-              <a:rPr lang="en-US" sz="1600" b="1" dirty="0">
-                <a:solidFill>
-                  <a:srgbClr val="16262E"/>
-                </a:solidFill>
-                <a:latin typeface="Arial" pitchFamily="34" charset="0"/>
-                <a:ea typeface="Arial" pitchFamily="34" charset="-122"/>
-                <a:cs typeface="Arial" pitchFamily="34" charset="-120"/>
-              </a:rPr>
-              <a:t>Postura y sentimiento</a:t>
-            </a:r>
-            <a:endParaRPr lang="en-US" sz="1600" dirty="0"/>
-          </a:p>
-        </p:txBody>
-      </p:sp>
-      <p:sp>
-        <p:nvSpPr>
-          <p:cNvPr id="23" name="Text 21"/>
-          <p:cNvSpPr txBox="1"/>
-          <p:nvPr/>
-        </p:nvSpPr>
-        <p:spPr>
-          <a:xfrm>
-            <a:off x="9303791" y="3273552"/>
-            <a:ext cx="2083232" cy="578612"/>
-          </a:xfrm>
-          <a:prstGeom prst="rect">
-            <a:avLst/>
-          </a:prstGeom>
-          <a:noFill/>
-          <a:ln/>
-        </p:spPr>
-        <p:txBody>
-          <a:bodyPr wrap="square" lIns="0" tIns="0" rIns="0" bIns="0" rtlCol="0" anchor="t"/>
-          <a:lstStyle/>
-          <a:p>
-            <a:pPr indent="0" marL="0">
-              <a:lnSpc>
-                <a:spcPct val="110000"/>
-              </a:lnSpc>
-              <a:buNone/>
-            </a:pPr>
-            <a:r>
-              <a:rPr lang="en-US" sz="1300" dirty="0">
-                <a:solidFill>
-                  <a:srgbClr val="16262E"/>
-                </a:solidFill>
-                <a:latin typeface="Calibri" pitchFamily="34" charset="0"/>
-                <a:ea typeface="Calibri" pitchFamily="34" charset="-122"/>
-                <a:cs typeface="Calibri" pitchFamily="34" charset="-120"/>
-              </a:rPr>
-              <a:t>Clasificar textos para medir percepciones o cumplimiento normativo.</a:t>
-            </a:r>
-            <a:endParaRPr lang="en-US" sz="1300" dirty="0"/>
+              <a:t>9:00 a 9:25</a:t>
+            </a:r>
+            <a:endParaRPr lang="en-US" sz="1200" dirty="0"/>
           </a:p>
         </p:txBody>
       </p:sp>
@@ -6846,7 +7797,7 @@
               <a:buNone/>
             </a:pPr>
             <a:r>
-              <a:rPr lang="en-US" sz="3200" b="1" dirty="0">
+              <a:rPr lang="en-US" sz="2600" b="1" dirty="0">
                 <a:solidFill>
                   <a:srgbClr val="16262E"/>
                 </a:solidFill>
@@ -6854,26 +7805,65 @@
                 <a:ea typeface="Arial" pitchFamily="34" charset="-122"/>
                 <a:cs typeface="Arial" pitchFamily="34" charset="-120"/>
               </a:rPr>
-              <a:t>Las dos síntesis y cuándo usar cada una</a:t>
-            </a:r>
-            <a:endParaRPr lang="en-US" sz="3200" dirty="0"/>
-          </a:p>
-        </p:txBody>
-      </p:sp>
-      <p:sp>
-        <p:nvSpPr>
-          <p:cNvPr id="3" name="Shape 1"/>
+              <a:t>Casi todo tu trabajo con texto cae en una de estas cuatro</a:t>
+            </a:r>
+            <a:endParaRPr lang="en-US" sz="2600" dirty="0"/>
+          </a:p>
+        </p:txBody>
+      </p:sp>
+      <p:sp>
+        <p:nvSpPr>
+          <p:cNvPr id="3" name="Text 1"/>
+          <p:cNvSpPr txBox="1"/>
+          <p:nvPr/>
+        </p:nvSpPr>
+        <p:spPr>
+          <a:xfrm>
+            <a:off x="566928" y="1280160"/>
+            <a:ext cx="9960559" cy="365760"/>
+          </a:xfrm>
+          <a:prstGeom prst="rect">
+            <a:avLst/>
+          </a:prstGeom>
+          <a:noFill/>
+          <a:ln/>
+        </p:spPr>
+        <p:txBody>
+          <a:bodyPr wrap="square" lIns="0" tIns="0" rIns="0" bIns="0" rtlCol="0" anchor="t"/>
+          <a:lstStyle/>
+          <a:p>
+            <a:pPr indent="0" marL="0">
+              <a:buNone/>
+            </a:pPr>
+            <a:r>
+              <a:rPr lang="en-US" sz="1500" dirty="0">
+                <a:solidFill>
+                  <a:srgbClr val="5A6B73"/>
+                </a:solidFill>
+                <a:latin typeface="Calibri" pitchFamily="34" charset="0"/>
+                <a:ea typeface="Calibri" pitchFamily="34" charset="-122"/>
+                <a:cs typeface="Calibri" pitchFamily="34" charset="-120"/>
+              </a:rPr>
+              <a:t>La pregunta antes de escribir un prompt es cuál de las cuatro tienes enfrente. El prompt es distinto en cada caso.</a:t>
+            </a:r>
+            <a:endParaRPr lang="en-US" sz="1500" dirty="0"/>
+          </a:p>
+        </p:txBody>
+      </p:sp>
+      <p:sp>
+        <p:nvSpPr>
+          <p:cNvPr id="4" name="Shape 2"/>
           <p:cNvSpPr/>
           <p:nvPr/>
         </p:nvSpPr>
         <p:spPr>
           <a:xfrm>
-            <a:off x="566928" y="1408176"/>
-            <a:ext cx="5364328" cy="2672334"/>
+            <a:off x="566928" y="2011680"/>
+            <a:ext cx="2558720" cy="2493772"/>
           </a:xfrm>
           <a:prstGeom prst="roundRect">
             <a:avLst>
-              <a:gd name="adj" fmla="val 2737"/>
+              <a:gd name="adj" fmla="val 2933"/>
             </a:avLst>
           </a:prstGeom>
           <a:solidFill>
@@ -6889,19 +7879,17 @@
       </p:sp>
       <p:sp>
         <p:nvSpPr>
-          <p:cNvPr id="4" name="Shape 2"/>
+          <p:cNvPr id="5" name="Shape 3"/>
           <p:cNvSpPr/>
           <p:nvPr/>
         </p:nvSpPr>
         <p:spPr>
           <a:xfrm>
-            <a:off x="566928" y="1408176"/>
-            <a:ext cx="5364328" cy="658368"/>
-          </a:xfrm>
-          <a:prstGeom prst="roundRect">
-            <a:avLst>
-              <a:gd name="adj" fmla="val 11111"/>
-            </a:avLst>
+            <a:off x="804672" y="2231136"/>
+            <a:ext cx="420624" cy="420624"/>
+          </a:xfrm>
+          <a:prstGeom prst="ellipse">
+            <a:avLst/>
           </a:prstGeom>
           <a:solidFill>
             <a:srgbClr val="2E7D7D"/>
@@ -6916,16 +7904,163 @@
       </p:sp>
       <p:sp>
         <p:nvSpPr>
-          <p:cNvPr id="5" name="Shape 3"/>
+          <p:cNvPr id="6" name="Text 4"/>
+          <p:cNvSpPr txBox="1"/>
+          <p:nvPr/>
+        </p:nvSpPr>
+        <p:spPr>
+          <a:xfrm>
+            <a:off x="804672" y="2231136"/>
+            <a:ext cx="420624" cy="420624"/>
+          </a:xfrm>
+          <a:prstGeom prst="rect">
+            <a:avLst/>
+          </a:prstGeom>
+          <a:noFill/>
+          <a:ln/>
+        </p:spPr>
+        <p:txBody>
+          <a:bodyPr wrap="square" lIns="0" tIns="0" rIns="0" bIns="0" rtlCol="0" anchor="ctr"/>
+          <a:lstStyle/>
+          <a:p>
+            <a:pPr algn="ctr" indent="0" marL="0">
+              <a:buNone/>
+            </a:pPr>
+            <a:r>
+              <a:rPr lang="en-US" sz="1400" b="1" dirty="0">
+                <a:solidFill>
+                  <a:srgbClr val="FFFFFF"/>
+                </a:solidFill>
+                <a:latin typeface="Arial" pitchFamily="34" charset="0"/>
+                <a:ea typeface="Arial" pitchFamily="34" charset="-122"/>
+                <a:cs typeface="Arial" pitchFamily="34" charset="-120"/>
+              </a:rPr>
+              <a:t>1</a:t>
+            </a:r>
+            <a:endParaRPr lang="en-US" sz="1400" dirty="0"/>
+          </a:p>
+        </p:txBody>
+      </p:sp>
+      <p:sp>
+        <p:nvSpPr>
+          <p:cNvPr id="7" name="Text 5"/>
+          <p:cNvSpPr txBox="1"/>
+          <p:nvPr/>
+        </p:nvSpPr>
+        <p:spPr>
+          <a:xfrm>
+            <a:off x="804672" y="2798064"/>
+            <a:ext cx="2083232" cy="319024"/>
+          </a:xfrm>
+          <a:prstGeom prst="rect">
+            <a:avLst/>
+          </a:prstGeom>
+          <a:noFill/>
+          <a:ln/>
+        </p:spPr>
+        <p:txBody>
+          <a:bodyPr wrap="square" lIns="0" tIns="0" rIns="0" bIns="0" rtlCol="0" anchor="t"/>
+          <a:lstStyle/>
+          <a:p>
+            <a:pPr indent="0" marL="0">
+              <a:buNone/>
+            </a:pPr>
+            <a:r>
+              <a:rPr lang="en-US" sz="1600" b="1" dirty="0">
+                <a:solidFill>
+                  <a:srgbClr val="16262E"/>
+                </a:solidFill>
+                <a:latin typeface="Arial" pitchFamily="34" charset="0"/>
+                <a:ea typeface="Arial" pitchFamily="34" charset="-122"/>
+                <a:cs typeface="Arial" pitchFamily="34" charset="-120"/>
+              </a:rPr>
+              <a:t>Resumir</a:t>
+            </a:r>
+            <a:endParaRPr lang="en-US" sz="1600" dirty="0"/>
+          </a:p>
+        </p:txBody>
+      </p:sp>
+      <p:sp>
+        <p:nvSpPr>
+          <p:cNvPr id="8" name="Text 6"/>
+          <p:cNvSpPr txBox="1"/>
+          <p:nvPr/>
+        </p:nvSpPr>
+        <p:spPr>
+          <a:xfrm>
+            <a:off x="804672" y="3263392"/>
+            <a:ext cx="2083232" cy="1040892"/>
+          </a:xfrm>
+          <a:prstGeom prst="rect">
+            <a:avLst/>
+          </a:prstGeom>
+          <a:noFill/>
+          <a:ln/>
+        </p:spPr>
+        <p:txBody>
+          <a:bodyPr wrap="square" lIns="0" tIns="0" rIns="0" bIns="0" rtlCol="0" anchor="t"/>
+          <a:lstStyle/>
+          <a:p>
+            <a:pPr indent="0" marL="0">
+              <a:lnSpc>
+                <a:spcPct val="110000"/>
+              </a:lnSpc>
+              <a:buNone/>
+            </a:pPr>
+            <a:r>
+              <a:rPr lang="en-US" sz="1300" dirty="0">
+                <a:solidFill>
+                  <a:srgbClr val="16262E"/>
+                </a:solidFill>
+                <a:latin typeface="Calibri" pitchFamily="34" charset="0"/>
+                <a:ea typeface="Calibri" pitchFamily="34" charset="-122"/>
+                <a:cs typeface="Calibri" pitchFamily="34" charset="-120"/>
+              </a:rPr>
+              <a:t>Convertir mucho texto en poco texto. Tiene dos formas y sirven para cosas distintas.</a:t>
+            </a:r>
+            <a:endParaRPr lang="en-US" sz="1300" dirty="0"/>
+          </a:p>
+        </p:txBody>
+      </p:sp>
+      <p:sp>
+        <p:nvSpPr>
+          <p:cNvPr id="9" name="Shape 7"/>
           <p:cNvSpPr/>
           <p:nvPr/>
         </p:nvSpPr>
         <p:spPr>
           <a:xfrm>
-            <a:off x="566928" y="1773936"/>
-            <a:ext cx="5364328" cy="292608"/>
-          </a:xfrm>
-          <a:prstGeom prst="rect">
+            <a:off x="3399968" y="2011680"/>
+            <a:ext cx="2558720" cy="2493772"/>
+          </a:xfrm>
+          <a:prstGeom prst="roundRect">
+            <a:avLst>
+              <a:gd name="adj" fmla="val 2933"/>
+            </a:avLst>
+          </a:prstGeom>
+          <a:solidFill>
+            <a:srgbClr val="D7E7E7"/>
+          </a:solidFill>
+          <a:ln w="12700">
+            <a:solidFill>
+              <a:srgbClr val="D7E7E7"/>
+            </a:solidFill>
+            <a:prstDash val="solid"/>
+          </a:ln>
+        </p:spPr>
+      </p:sp>
+      <p:sp>
+        <p:nvSpPr>
+          <p:cNvPr id="10" name="Shape 8"/>
+          <p:cNvSpPr/>
+          <p:nvPr/>
+        </p:nvSpPr>
+        <p:spPr>
+          <a:xfrm>
+            <a:off x="3637712" y="2231136"/>
+            <a:ext cx="420624" cy="420624"/>
+          </a:xfrm>
+          <a:prstGeom prst="ellipse">
             <a:avLst/>
           </a:prstGeom>
           <a:solidFill>
@@ -6941,14 +8076,14 @@
       </p:sp>
       <p:sp>
         <p:nvSpPr>
-          <p:cNvPr id="6" name="Text 4"/>
-          <p:cNvSpPr txBox="1"/>
-          <p:nvPr/>
-        </p:nvSpPr>
-        <p:spPr>
-          <a:xfrm>
-            <a:off x="822960" y="1408176"/>
-            <a:ext cx="4852264" cy="658368"/>
+          <p:cNvPr id="11" name="Text 9"/>
+          <p:cNvSpPr txBox="1"/>
+          <p:nvPr/>
+        </p:nvSpPr>
+        <p:spPr>
+          <a:xfrm>
+            <a:off x="3637712" y="2231136"/>
+            <a:ext cx="420624" cy="420624"/>
           </a:xfrm>
           <a:prstGeom prst="rect">
             <a:avLst/>
@@ -6960,11 +8095,11 @@
           <a:bodyPr wrap="square" lIns="0" tIns="0" rIns="0" bIns="0" rtlCol="0" anchor="ctr"/>
           <a:lstStyle/>
           <a:p>
-            <a:pPr indent="0" marL="0">
-              <a:buNone/>
-            </a:pPr>
-            <a:r>
-              <a:rPr lang="en-US" sz="1700" b="1" dirty="0">
+            <a:pPr algn="ctr" indent="0" marL="0">
+              <a:buNone/>
+            </a:pPr>
+            <a:r>
+              <a:rPr lang="en-US" sz="1400" b="1" dirty="0">
                 <a:solidFill>
                   <a:srgbClr val="FFFFFF"/>
                 </a:solidFill>
@@ -6972,22 +8107,61 @@
                 <a:ea typeface="Arial" pitchFamily="34" charset="-122"/>
                 <a:cs typeface="Arial" pitchFamily="34" charset="-120"/>
               </a:rPr>
-              <a:t>Extractiva</a:t>
-            </a:r>
-            <a:endParaRPr lang="en-US" sz="1700" dirty="0"/>
-          </a:p>
-        </p:txBody>
-      </p:sp>
-      <p:sp>
-        <p:nvSpPr>
-          <p:cNvPr id="7" name="Text 5"/>
-          <p:cNvSpPr txBox="1"/>
-          <p:nvPr/>
-        </p:nvSpPr>
-        <p:spPr>
-          <a:xfrm>
-            <a:off x="822960" y="2276856"/>
-            <a:ext cx="4852264" cy="1575054"/>
+              <a:t>2</a:t>
+            </a:r>
+            <a:endParaRPr lang="en-US" sz="1400" dirty="0"/>
+          </a:p>
+        </p:txBody>
+      </p:sp>
+      <p:sp>
+        <p:nvSpPr>
+          <p:cNvPr id="12" name="Text 10"/>
+          <p:cNvSpPr txBox="1"/>
+          <p:nvPr/>
+        </p:nvSpPr>
+        <p:spPr>
+          <a:xfrm>
+            <a:off x="3637712" y="2798064"/>
+            <a:ext cx="2083232" cy="319024"/>
+          </a:xfrm>
+          <a:prstGeom prst="rect">
+            <a:avLst/>
+          </a:prstGeom>
+          <a:noFill/>
+          <a:ln/>
+        </p:spPr>
+        <p:txBody>
+          <a:bodyPr wrap="square" lIns="0" tIns="0" rIns="0" bIns="0" rtlCol="0" anchor="t"/>
+          <a:lstStyle/>
+          <a:p>
+            <a:pPr indent="0" marL="0">
+              <a:buNone/>
+            </a:pPr>
+            <a:r>
+              <a:rPr lang="en-US" sz="1600" b="1" dirty="0">
+                <a:solidFill>
+                  <a:srgbClr val="16262E"/>
+                </a:solidFill>
+                <a:latin typeface="Arial" pitchFamily="34" charset="0"/>
+                <a:ea typeface="Arial" pitchFamily="34" charset="-122"/>
+                <a:cs typeface="Arial" pitchFamily="34" charset="-120"/>
+              </a:rPr>
+              <a:t>Sacar datos</a:t>
+            </a:r>
+            <a:endParaRPr lang="en-US" sz="1600" dirty="0"/>
+          </a:p>
+        </p:txBody>
+      </p:sp>
+      <p:sp>
+        <p:nvSpPr>
+          <p:cNvPr id="13" name="Text 11"/>
+          <p:cNvSpPr txBox="1"/>
+          <p:nvPr/>
+        </p:nvSpPr>
+        <p:spPr>
+          <a:xfrm>
+            <a:off x="3637712" y="3263392"/>
+            <a:ext cx="2083232" cy="1040892"/>
           </a:xfrm>
           <a:prstGeom prst="rect">
             <a:avLst/>
@@ -7001,15 +8175,12 @@
           <a:p>
             <a:pPr indent="0" marL="0">
               <a:lnSpc>
-                <a:spcPct val="115000"/>
+                <a:spcPct val="110000"/>
               </a:lnSpc>
-              <a:spcAft>
-                <a:spcPts val="600"/>
-              </a:spcAft>
-              <a:buNone/>
-            </a:pPr>
-            <a:r>
-              <a:rPr lang="en-US" sz="1400" dirty="0">
+              <a:buNone/>
+            </a:pPr>
+            <a:r>
+              <a:rPr lang="en-US" sz="1300" dirty="0">
                 <a:solidFill>
                   <a:srgbClr val="16262E"/>
                 </a:solidFill>
@@ -7017,22 +8188,171 @@
                 <a:ea typeface="Calibri" pitchFamily="34" charset="-122"/>
                 <a:cs typeface="Calibri" pitchFamily="34" charset="-120"/>
               </a:rPr>
-              <a:t>Toma las oraciones exactas del documento, sin reescribirlas.</a:t>
+              <a:t>Extraer información específica de texto denso y ponerla en una tabla comparable.</a:t>
+            </a:r>
+            <a:endParaRPr lang="en-US" sz="1300" dirty="0"/>
+          </a:p>
+        </p:txBody>
+      </p:sp>
+      <p:sp>
+        <p:nvSpPr>
+          <p:cNvPr id="14" name="Shape 12"/>
+          <p:cNvSpPr/>
+          <p:nvPr/>
+        </p:nvSpPr>
+        <p:spPr>
+          <a:xfrm>
+            <a:off x="6233008" y="2011680"/>
+            <a:ext cx="2558720" cy="2493772"/>
+          </a:xfrm>
+          <a:prstGeom prst="roundRect">
+            <a:avLst>
+              <a:gd name="adj" fmla="val 2933"/>
+            </a:avLst>
+          </a:prstGeom>
+          <a:solidFill>
+            <a:srgbClr val="D7E7E7"/>
+          </a:solidFill>
+          <a:ln w="12700">
+            <a:solidFill>
+              <a:srgbClr val="D7E7E7"/>
+            </a:solidFill>
+            <a:prstDash val="solid"/>
+          </a:ln>
+        </p:spPr>
+      </p:sp>
+      <p:sp>
+        <p:nvSpPr>
+          <p:cNvPr id="15" name="Shape 13"/>
+          <p:cNvSpPr/>
+          <p:nvPr/>
+        </p:nvSpPr>
+        <p:spPr>
+          <a:xfrm>
+            <a:off x="6470752" y="2231136"/>
+            <a:ext cx="420624" cy="420624"/>
+          </a:xfrm>
+          <a:prstGeom prst="ellipse">
+            <a:avLst/>
+          </a:prstGeom>
+          <a:solidFill>
+            <a:srgbClr val="2E7D7D"/>
+          </a:solidFill>
+          <a:ln w="12700">
+            <a:solidFill>
+              <a:srgbClr val="2E7D7D"/>
+            </a:solidFill>
+            <a:prstDash val="solid"/>
+          </a:ln>
+        </p:spPr>
+      </p:sp>
+      <p:sp>
+        <p:nvSpPr>
+          <p:cNvPr id="16" name="Text 14"/>
+          <p:cNvSpPr txBox="1"/>
+          <p:nvPr/>
+        </p:nvSpPr>
+        <p:spPr>
+          <a:xfrm>
+            <a:off x="6470752" y="2231136"/>
+            <a:ext cx="420624" cy="420624"/>
+          </a:xfrm>
+          <a:prstGeom prst="rect">
+            <a:avLst/>
+          </a:prstGeom>
+          <a:noFill/>
+          <a:ln/>
+        </p:spPr>
+        <p:txBody>
+          <a:bodyPr wrap="square" lIns="0" tIns="0" rIns="0" bIns="0" rtlCol="0" anchor="ctr"/>
+          <a:lstStyle/>
+          <a:p>
+            <a:pPr algn="ctr" indent="0" marL="0">
+              <a:buNone/>
+            </a:pPr>
+            <a:r>
+              <a:rPr lang="en-US" sz="1400" b="1" dirty="0">
+                <a:solidFill>
+                  <a:srgbClr val="FFFFFF"/>
+                </a:solidFill>
+                <a:latin typeface="Arial" pitchFamily="34" charset="0"/>
+                <a:ea typeface="Arial" pitchFamily="34" charset="-122"/>
+                <a:cs typeface="Arial" pitchFamily="34" charset="-120"/>
+              </a:rPr>
+              <a:t>3</a:t>
             </a:r>
             <a:endParaRPr lang="en-US" sz="1400" dirty="0"/>
           </a:p>
+        </p:txBody>
+      </p:sp>
+      <p:sp>
+        <p:nvSpPr>
+          <p:cNvPr id="17" name="Text 15"/>
+          <p:cNvSpPr txBox="1"/>
+          <p:nvPr/>
+        </p:nvSpPr>
+        <p:spPr>
+          <a:xfrm>
+            <a:off x="6470752" y="2798064"/>
+            <a:ext cx="2083232" cy="319024"/>
+          </a:xfrm>
+          <a:prstGeom prst="rect">
+            <a:avLst/>
+          </a:prstGeom>
+          <a:noFill/>
+          <a:ln/>
+        </p:spPr>
+        <p:txBody>
+          <a:bodyPr wrap="square" lIns="0" tIns="0" rIns="0" bIns="0" rtlCol="0" anchor="t"/>
+          <a:lstStyle/>
+          <a:p>
+            <a:pPr indent="0" marL="0">
+              <a:buNone/>
+            </a:pPr>
+            <a:r>
+              <a:rPr lang="en-US" sz="1600" b="1" dirty="0">
+                <a:solidFill>
+                  <a:srgbClr val="16262E"/>
+                </a:solidFill>
+                <a:latin typeface="Arial" pitchFamily="34" charset="0"/>
+                <a:ea typeface="Arial" pitchFamily="34" charset="-122"/>
+                <a:cs typeface="Arial" pitchFamily="34" charset="-120"/>
+              </a:rPr>
+              <a:t>Agrupar temas</a:t>
+            </a:r>
+            <a:endParaRPr lang="en-US" sz="1600" dirty="0"/>
+          </a:p>
+        </p:txBody>
+      </p:sp>
+      <p:sp>
+        <p:nvSpPr>
+          <p:cNvPr id="18" name="Text 16"/>
+          <p:cNvSpPr txBox="1"/>
+          <p:nvPr/>
+        </p:nvSpPr>
+        <p:spPr>
+          <a:xfrm>
+            <a:off x="6470752" y="3263392"/>
+            <a:ext cx="2083232" cy="1040892"/>
+          </a:xfrm>
+          <a:prstGeom prst="rect">
+            <a:avLst/>
+          </a:prstGeom>
+          <a:noFill/>
+          <a:ln/>
+        </p:spPr>
+        <p:txBody>
+          <a:bodyPr wrap="square" lIns="0" tIns="0" rIns="0" bIns="0" rtlCol="0" anchor="t"/>
+          <a:lstStyle/>
           <a:p>
             <a:pPr indent="0" marL="0">
               <a:lnSpc>
-                <a:spcPct val="115000"/>
+                <a:spcPct val="110000"/>
               </a:lnSpc>
-              <a:spcAft>
-                <a:spcPts val="600"/>
-              </a:spcAft>
-              <a:buNone/>
-            </a:pPr>
-            <a:r>
-              <a:rPr lang="en-US" sz="1400" dirty="0">
+              <a:buNone/>
+            </a:pPr>
+            <a:r>
+              <a:rPr lang="en-US" sz="1300" dirty="0">
                 <a:solidFill>
                   <a:srgbClr val="16262E"/>
                 </a:solidFill>
@@ -7040,22 +8360,171 @@
                 <a:ea typeface="Calibri" pitchFamily="34" charset="-122"/>
                 <a:cs typeface="Calibri" pitchFamily="34" charset="-120"/>
               </a:rPr>
-              <a:t>Sirve cuando hay que conservar la redacción original porque el texto se va a citar.</a:t>
+              <a:t>Descubrir de qué hablan un montón de textos cuando son demasiados para leerlos.</a:t>
+            </a:r>
+            <a:endParaRPr lang="en-US" sz="1300" dirty="0"/>
+          </a:p>
+        </p:txBody>
+      </p:sp>
+      <p:sp>
+        <p:nvSpPr>
+          <p:cNvPr id="19" name="Shape 17"/>
+          <p:cNvSpPr/>
+          <p:nvPr/>
+        </p:nvSpPr>
+        <p:spPr>
+          <a:xfrm>
+            <a:off x="9066047" y="2011680"/>
+            <a:ext cx="2558720" cy="2493772"/>
+          </a:xfrm>
+          <a:prstGeom prst="roundRect">
+            <a:avLst>
+              <a:gd name="adj" fmla="val 2933"/>
+            </a:avLst>
+          </a:prstGeom>
+          <a:solidFill>
+            <a:srgbClr val="D7E7E7"/>
+          </a:solidFill>
+          <a:ln w="12700">
+            <a:solidFill>
+              <a:srgbClr val="D7E7E7"/>
+            </a:solidFill>
+            <a:prstDash val="solid"/>
+          </a:ln>
+        </p:spPr>
+      </p:sp>
+      <p:sp>
+        <p:nvSpPr>
+          <p:cNvPr id="20" name="Shape 18"/>
+          <p:cNvSpPr/>
+          <p:nvPr/>
+        </p:nvSpPr>
+        <p:spPr>
+          <a:xfrm>
+            <a:off x="9303791" y="2231136"/>
+            <a:ext cx="420624" cy="420624"/>
+          </a:xfrm>
+          <a:prstGeom prst="ellipse">
+            <a:avLst/>
+          </a:prstGeom>
+          <a:solidFill>
+            <a:srgbClr val="2E7D7D"/>
+          </a:solidFill>
+          <a:ln w="12700">
+            <a:solidFill>
+              <a:srgbClr val="2E7D7D"/>
+            </a:solidFill>
+            <a:prstDash val="solid"/>
+          </a:ln>
+        </p:spPr>
+      </p:sp>
+      <p:sp>
+        <p:nvSpPr>
+          <p:cNvPr id="21" name="Text 19"/>
+          <p:cNvSpPr txBox="1"/>
+          <p:nvPr/>
+        </p:nvSpPr>
+        <p:spPr>
+          <a:xfrm>
+            <a:off x="9303791" y="2231136"/>
+            <a:ext cx="420624" cy="420624"/>
+          </a:xfrm>
+          <a:prstGeom prst="rect">
+            <a:avLst/>
+          </a:prstGeom>
+          <a:noFill/>
+          <a:ln/>
+        </p:spPr>
+        <p:txBody>
+          <a:bodyPr wrap="square" lIns="0" tIns="0" rIns="0" bIns="0" rtlCol="0" anchor="ctr"/>
+          <a:lstStyle/>
+          <a:p>
+            <a:pPr algn="ctr" indent="0" marL="0">
+              <a:buNone/>
+            </a:pPr>
+            <a:r>
+              <a:rPr lang="en-US" sz="1400" b="1" dirty="0">
+                <a:solidFill>
+                  <a:srgbClr val="FFFFFF"/>
+                </a:solidFill>
+                <a:latin typeface="Arial" pitchFamily="34" charset="0"/>
+                <a:ea typeface="Arial" pitchFamily="34" charset="-122"/>
+                <a:cs typeface="Arial" pitchFamily="34" charset="-120"/>
+              </a:rPr>
+              <a:t>4</a:t>
             </a:r>
             <a:endParaRPr lang="en-US" sz="1400" dirty="0"/>
           </a:p>
+        </p:txBody>
+      </p:sp>
+      <p:sp>
+        <p:nvSpPr>
+          <p:cNvPr id="22" name="Text 20"/>
+          <p:cNvSpPr txBox="1"/>
+          <p:nvPr/>
+        </p:nvSpPr>
+        <p:spPr>
+          <a:xfrm>
+            <a:off x="9303791" y="2798064"/>
+            <a:ext cx="2083232" cy="319024"/>
+          </a:xfrm>
+          <a:prstGeom prst="rect">
+            <a:avLst/>
+          </a:prstGeom>
+          <a:noFill/>
+          <a:ln/>
+        </p:spPr>
+        <p:txBody>
+          <a:bodyPr wrap="square" lIns="0" tIns="0" rIns="0" bIns="0" rtlCol="0" anchor="t"/>
+          <a:lstStyle/>
+          <a:p>
+            <a:pPr indent="0" marL="0">
+              <a:buNone/>
+            </a:pPr>
+            <a:r>
+              <a:rPr lang="en-US" sz="1600" b="1" dirty="0">
+                <a:solidFill>
+                  <a:srgbClr val="16262E"/>
+                </a:solidFill>
+                <a:latin typeface="Arial" pitchFamily="34" charset="0"/>
+                <a:ea typeface="Arial" pitchFamily="34" charset="-122"/>
+                <a:cs typeface="Arial" pitchFamily="34" charset="-120"/>
+              </a:rPr>
+              <a:t>Clasificar postura</a:t>
+            </a:r>
+            <a:endParaRPr lang="en-US" sz="1600" dirty="0"/>
+          </a:p>
+        </p:txBody>
+      </p:sp>
+      <p:sp>
+        <p:nvSpPr>
+          <p:cNvPr id="23" name="Text 21"/>
+          <p:cNvSpPr txBox="1"/>
+          <p:nvPr/>
+        </p:nvSpPr>
+        <p:spPr>
+          <a:xfrm>
+            <a:off x="9303791" y="3263392"/>
+            <a:ext cx="2083232" cy="1040892"/>
+          </a:xfrm>
+          <a:prstGeom prst="rect">
+            <a:avLst/>
+          </a:prstGeom>
+          <a:noFill/>
+          <a:ln/>
+        </p:spPr>
+        <p:txBody>
+          <a:bodyPr wrap="square" lIns="0" tIns="0" rIns="0" bIns="0" rtlCol="0" anchor="t"/>
+          <a:lstStyle/>
           <a:p>
             <a:pPr indent="0" marL="0">
               <a:lnSpc>
-                <a:spcPct val="115000"/>
+                <a:spcPct val="110000"/>
               </a:lnSpc>
-              <a:spcAft>
-                <a:spcPts val="600"/>
-              </a:spcAft>
-              <a:buNone/>
-            </a:pPr>
-            <a:r>
-              <a:rPr lang="en-US" sz="1400" dirty="0">
+              <a:buNone/>
+            </a:pPr>
+            <a:r>
+              <a:rPr lang="en-US" sz="1300" dirty="0">
                 <a:solidFill>
                   <a:srgbClr val="16262E"/>
                 </a:solidFill>
@@ -7063,303 +8532,9 @@
                 <a:ea typeface="Calibri" pitchFamily="34" charset="-122"/>
                 <a:cs typeface="Calibri" pitchFamily="34" charset="-120"/>
               </a:rPr>
-              <a:t>Es más segura: no puede inventar, porque solo puede copiar.</a:t>
-            </a:r>
-            <a:endParaRPr lang="en-US" sz="1400" dirty="0"/>
-          </a:p>
-          <a:p>
-            <a:pPr indent="0" marL="0">
-              <a:lnSpc>
-                <a:spcPct val="115000"/>
-              </a:lnSpc>
-              <a:spcAft>
-                <a:spcPts val="600"/>
-              </a:spcAft>
-              <a:buNone/>
-            </a:pPr>
-            <a:r>
-              <a:rPr lang="en-US" sz="1400" dirty="0">
-                <a:solidFill>
-                  <a:srgbClr val="16262E"/>
-                </a:solidFill>
-                <a:latin typeface="Calibri" pitchFamily="34" charset="0"/>
-                <a:ea typeface="Calibri" pitchFamily="34" charset="-122"/>
-                <a:cs typeface="Calibri" pitchFamily="34" charset="-120"/>
-              </a:rPr>
-              <a:t>Úsela para armar la evidencia.</a:t>
-            </a:r>
-            <a:endParaRPr lang="en-US" sz="1400" dirty="0"/>
-          </a:p>
-        </p:txBody>
-      </p:sp>
-      <p:sp>
-        <p:nvSpPr>
-          <p:cNvPr id="8" name="Shape 6"/>
-          <p:cNvSpPr/>
-          <p:nvPr/>
-        </p:nvSpPr>
-        <p:spPr>
-          <a:xfrm>
-            <a:off x="6260440" y="1408176"/>
-            <a:ext cx="5364328" cy="2672334"/>
-          </a:xfrm>
-          <a:prstGeom prst="roundRect">
-            <a:avLst>
-              <a:gd name="adj" fmla="val 2737"/>
-            </a:avLst>
-          </a:prstGeom>
-          <a:solidFill>
-            <a:srgbClr val="F7E4D8"/>
-          </a:solidFill>
-          <a:ln w="12700">
-            <a:solidFill>
-              <a:srgbClr val="F7E4D8"/>
-            </a:solidFill>
-            <a:prstDash val="solid"/>
-          </a:ln>
-        </p:spPr>
-      </p:sp>
-      <p:sp>
-        <p:nvSpPr>
-          <p:cNvPr id="9" name="Shape 7"/>
-          <p:cNvSpPr/>
-          <p:nvPr/>
-        </p:nvSpPr>
-        <p:spPr>
-          <a:xfrm>
-            <a:off x="6260440" y="1408176"/>
-            <a:ext cx="5364328" cy="658368"/>
-          </a:xfrm>
-          <a:prstGeom prst="roundRect">
-            <a:avLst>
-              <a:gd name="adj" fmla="val 11111"/>
-            </a:avLst>
-          </a:prstGeom>
-          <a:solidFill>
-            <a:srgbClr val="C85A28"/>
-          </a:solidFill>
-          <a:ln w="12700">
-            <a:solidFill>
-              <a:srgbClr val="C85A28"/>
-            </a:solidFill>
-            <a:prstDash val="solid"/>
-          </a:ln>
-        </p:spPr>
-      </p:sp>
-      <p:sp>
-        <p:nvSpPr>
-          <p:cNvPr id="10" name="Shape 8"/>
-          <p:cNvSpPr/>
-          <p:nvPr/>
-        </p:nvSpPr>
-        <p:spPr>
-          <a:xfrm>
-            <a:off x="6260440" y="1773936"/>
-            <a:ext cx="5364328" cy="292608"/>
-          </a:xfrm>
-          <a:prstGeom prst="rect">
-            <a:avLst/>
-          </a:prstGeom>
-          <a:solidFill>
-            <a:srgbClr val="C85A28"/>
-          </a:solidFill>
-          <a:ln w="12700">
-            <a:solidFill>
-              <a:srgbClr val="C85A28"/>
-            </a:solidFill>
-            <a:prstDash val="solid"/>
-          </a:ln>
-        </p:spPr>
-      </p:sp>
-      <p:sp>
-        <p:nvSpPr>
-          <p:cNvPr id="11" name="Text 9"/>
-          <p:cNvSpPr txBox="1"/>
-          <p:nvPr/>
-        </p:nvSpPr>
-        <p:spPr>
-          <a:xfrm>
-            <a:off x="6516472" y="1408176"/>
-            <a:ext cx="4852264" cy="658368"/>
-          </a:xfrm>
-          <a:prstGeom prst="rect">
-            <a:avLst/>
-          </a:prstGeom>
-          <a:noFill/>
-          <a:ln/>
-        </p:spPr>
-        <p:txBody>
-          <a:bodyPr wrap="square" lIns="0" tIns="0" rIns="0" bIns="0" rtlCol="0" anchor="ctr"/>
-          <a:lstStyle/>
-          <a:p>
-            <a:pPr indent="0" marL="0">
-              <a:buNone/>
-            </a:pPr>
-            <a:r>
-              <a:rPr lang="en-US" sz="1700" b="1" dirty="0">
-                <a:solidFill>
-                  <a:srgbClr val="FFFFFF"/>
-                </a:solidFill>
-                <a:latin typeface="Arial" pitchFamily="34" charset="0"/>
-                <a:ea typeface="Arial" pitchFamily="34" charset="-122"/>
-                <a:cs typeface="Arial" pitchFamily="34" charset="-120"/>
-              </a:rPr>
-              <a:t>Abstractiva</a:t>
-            </a:r>
-            <a:endParaRPr lang="en-US" sz="1700" dirty="0"/>
-          </a:p>
-        </p:txBody>
-      </p:sp>
-      <p:sp>
-        <p:nvSpPr>
-          <p:cNvPr id="12" name="Text 10"/>
-          <p:cNvSpPr txBox="1"/>
-          <p:nvPr/>
-        </p:nvSpPr>
-        <p:spPr>
-          <a:xfrm>
-            <a:off x="6516472" y="2276856"/>
-            <a:ext cx="4852264" cy="1575054"/>
-          </a:xfrm>
-          <a:prstGeom prst="rect">
-            <a:avLst/>
-          </a:prstGeom>
-          <a:noFill/>
-          <a:ln/>
-        </p:spPr>
-        <p:txBody>
-          <a:bodyPr wrap="square" lIns="0" tIns="0" rIns="0" bIns="0" rtlCol="0" anchor="t"/>
-          <a:lstStyle/>
-          <a:p>
-            <a:pPr indent="0" marL="0">
-              <a:lnSpc>
-                <a:spcPct val="115000"/>
-              </a:lnSpc>
-              <a:spcAft>
-                <a:spcPts val="600"/>
-              </a:spcAft>
-              <a:buNone/>
-            </a:pPr>
-            <a:r>
-              <a:rPr lang="en-US" sz="1400" dirty="0">
-                <a:solidFill>
-                  <a:srgbClr val="16262E"/>
-                </a:solidFill>
-                <a:latin typeface="Calibri" pitchFamily="34" charset="0"/>
-                <a:ea typeface="Calibri" pitchFamily="34" charset="-122"/>
-                <a:cs typeface="Calibri" pitchFamily="34" charset="-120"/>
-              </a:rPr>
-              <a:t>Reescribe el contenido en palabras nuevas.</a:t>
-            </a:r>
-            <a:endParaRPr lang="en-US" sz="1400" dirty="0"/>
-          </a:p>
-          <a:p>
-            <a:pPr indent="0" marL="0">
-              <a:lnSpc>
-                <a:spcPct val="115000"/>
-              </a:lnSpc>
-              <a:spcAft>
-                <a:spcPts val="600"/>
-              </a:spcAft>
-              <a:buNone/>
-            </a:pPr>
-            <a:r>
-              <a:rPr lang="en-US" sz="1400" dirty="0">
-                <a:solidFill>
-                  <a:srgbClr val="16262E"/>
-                </a:solidFill>
-                <a:latin typeface="Calibri" pitchFamily="34" charset="0"/>
-                <a:ea typeface="Calibri" pitchFamily="34" charset="-122"/>
-                <a:cs typeface="Calibri" pitchFamily="34" charset="-120"/>
-              </a:rPr>
-              <a:t>Sirve cuando hace falta un resumen que integre patrones y contradicciones entre varios documentos.</a:t>
-            </a:r>
-            <a:endParaRPr lang="en-US" sz="1400" dirty="0"/>
-          </a:p>
-          <a:p>
-            <a:pPr indent="0" marL="0">
-              <a:lnSpc>
-                <a:spcPct val="115000"/>
-              </a:lnSpc>
-              <a:spcAft>
-                <a:spcPts val="600"/>
-              </a:spcAft>
-              <a:buNone/>
-            </a:pPr>
-            <a:r>
-              <a:rPr lang="en-US" sz="1400" dirty="0">
-                <a:solidFill>
-                  <a:srgbClr val="16262E"/>
-                </a:solidFill>
-                <a:latin typeface="Calibri" pitchFamily="34" charset="0"/>
-                <a:ea typeface="Calibri" pitchFamily="34" charset="-122"/>
-                <a:cs typeface="Calibri" pitchFamily="34" charset="-120"/>
-              </a:rPr>
-              <a:t>Es más útil y más riesgosa: puede introducir matices que no estaban.</a:t>
-            </a:r>
-            <a:endParaRPr lang="en-US" sz="1400" dirty="0"/>
-          </a:p>
-          <a:p>
-            <a:pPr indent="0" marL="0">
-              <a:lnSpc>
-                <a:spcPct val="115000"/>
-              </a:lnSpc>
-              <a:spcAft>
-                <a:spcPts val="600"/>
-              </a:spcAft>
-              <a:buNone/>
-            </a:pPr>
-            <a:r>
-              <a:rPr lang="en-US" sz="1400" dirty="0">
-                <a:solidFill>
-                  <a:srgbClr val="16262E"/>
-                </a:solidFill>
-                <a:latin typeface="Calibri" pitchFamily="34" charset="0"/>
-                <a:ea typeface="Calibri" pitchFamily="34" charset="-122"/>
-                <a:cs typeface="Calibri" pitchFamily="34" charset="-120"/>
-              </a:rPr>
-              <a:t>Úsela para redactar la conclusión, y verifíquela contra la extractiva.</a:t>
-            </a:r>
-            <a:endParaRPr lang="en-US" sz="1400" dirty="0"/>
-          </a:p>
-        </p:txBody>
-      </p:sp>
-      <p:sp>
-        <p:nvSpPr>
-          <p:cNvPr id="13" name="Text 11"/>
-          <p:cNvSpPr txBox="1"/>
-          <p:nvPr/>
-        </p:nvSpPr>
-        <p:spPr>
-          <a:xfrm>
-            <a:off x="566928" y="6327648"/>
-            <a:ext cx="11057839" cy="292608"/>
-          </a:xfrm>
-          <a:prstGeom prst="rect">
-            <a:avLst/>
-          </a:prstGeom>
-          <a:noFill/>
-          <a:ln/>
-        </p:spPr>
-        <p:txBody>
-          <a:bodyPr wrap="square" lIns="0" tIns="0" rIns="0" bIns="0" rtlCol="0" anchor="ctr"/>
-          <a:lstStyle/>
-          <a:p>
-            <a:pPr indent="0" marL="0">
-              <a:buNone/>
-            </a:pPr>
-            <a:r>
-              <a:rPr lang="en-US" sz="1000" dirty="0">
-                <a:solidFill>
-                  <a:srgbClr val="5A6B73"/>
-                </a:solidFill>
-                <a:latin typeface="Calibri" pitchFamily="34" charset="0"/>
-                <a:ea typeface="Calibri" pitchFamily="34" charset="-122"/>
-                <a:cs typeface="Calibri" pitchFamily="34" charset="-120"/>
-              </a:rPr>
-              <a:t>Regla práctica: la extractiva arma la evidencia y la abstractiva redacta la conclusión.</a:t>
-            </a:r>
-            <a:endParaRPr lang="en-US" sz="1000" dirty="0"/>
+              <a:t>Medir percepciones o cumplimiento sobre un conjunto de testimonios o quejas.</a:t>
+            </a:r>
+            <a:endParaRPr lang="en-US" sz="1300" dirty="0"/>
           </a:p>
         </p:txBody>
       </p:sp>
@@ -7374,6 +8549,612 @@
 <file path=ppt/slides/slide5.xml><?xml version="1.0" encoding="utf-8"?>
 <p:sld xmlns:a="http://schemas.openxmlformats.org/drawingml/2006/main" xmlns:r="http://schemas.openxmlformats.org/officeDocument/2006/relationships" xmlns:p="http://schemas.openxmlformats.org/presentationml/2006/main">
   <p:cSld name="Slide 5">
+    <p:spTree>
+      <p:nvGrpSpPr>
+        <p:cNvPr id="1" name=""/>
+        <p:cNvGrpSpPr/>
+        <p:nvPr/>
+      </p:nvGrpSpPr>
+      <p:grpSpPr>
+        <a:xfrm>
+          <a:off x="0" y="0"/>
+          <a:ext cx="0" cy="0"/>
+          <a:chOff x="0" y="0"/>
+          <a:chExt cx="0" cy="0"/>
+        </a:xfrm>
+      </p:grpSpPr>
+      <p:sp>
+        <p:nvSpPr>
+          <p:cNvPr id="2" name="Text 0"/>
+          <p:cNvSpPr txBox="1"/>
+          <p:nvPr/>
+        </p:nvSpPr>
+        <p:spPr>
+          <a:xfrm>
+            <a:off x="566928" y="402336"/>
+            <a:ext cx="9229039" cy="749808"/>
+          </a:xfrm>
+          <a:prstGeom prst="rect">
+            <a:avLst/>
+          </a:prstGeom>
+          <a:noFill/>
+          <a:ln/>
+        </p:spPr>
+        <p:txBody>
+          <a:bodyPr wrap="square" lIns="0" tIns="0" rIns="0" bIns="0" rtlCol="0" anchor="t"/>
+          <a:lstStyle/>
+          <a:p>
+            <a:pPr algn="l" indent="0" marL="0">
+              <a:buNone/>
+            </a:pPr>
+            <a:r>
+              <a:rPr lang="en-US" sz="3200" b="1" dirty="0">
+                <a:solidFill>
+                  <a:srgbClr val="16262E"/>
+                </a:solidFill>
+                <a:latin typeface="Arial" pitchFamily="34" charset="0"/>
+                <a:ea typeface="Arial" pitchFamily="34" charset="-122"/>
+                <a:cs typeface="Arial" pitchFamily="34" charset="-120"/>
+              </a:rPr>
+              <a:t>Las dos formas de resumir</a:t>
+            </a:r>
+            <a:endParaRPr lang="en-US" sz="3200" dirty="0"/>
+          </a:p>
+        </p:txBody>
+      </p:sp>
+      <p:sp>
+        <p:nvSpPr>
+          <p:cNvPr id="3" name="Text 1"/>
+          <p:cNvSpPr txBox="1"/>
+          <p:nvPr/>
+        </p:nvSpPr>
+        <p:spPr>
+          <a:xfrm>
+            <a:off x="566928" y="1280160"/>
+            <a:ext cx="9960559" cy="365760"/>
+          </a:xfrm>
+          <a:prstGeom prst="rect">
+            <a:avLst/>
+          </a:prstGeom>
+          <a:noFill/>
+          <a:ln/>
+        </p:spPr>
+        <p:txBody>
+          <a:bodyPr wrap="square" lIns="0" tIns="0" rIns="0" bIns="0" rtlCol="0" anchor="t"/>
+          <a:lstStyle/>
+          <a:p>
+            <a:pPr indent="0" marL="0">
+              <a:buNone/>
+            </a:pPr>
+            <a:r>
+              <a:rPr lang="en-US" sz="1500" dirty="0">
+                <a:solidFill>
+                  <a:srgbClr val="5A6B73"/>
+                </a:solidFill>
+                <a:latin typeface="Calibri" pitchFamily="34" charset="0"/>
+                <a:ea typeface="Calibri" pitchFamily="34" charset="-122"/>
+                <a:cs typeface="Calibri" pitchFamily="34" charset="-120"/>
+              </a:rPr>
+              <a:t>Se parecen y no sirven para lo mismo.</a:t>
+            </a:r>
+            <a:endParaRPr lang="en-US" sz="1500" dirty="0"/>
+          </a:p>
+        </p:txBody>
+      </p:sp>
+      <p:sp>
+        <p:nvSpPr>
+          <p:cNvPr id="4" name="Shape 2"/>
+          <p:cNvSpPr/>
+          <p:nvPr/>
+        </p:nvSpPr>
+        <p:spPr>
+          <a:xfrm>
+            <a:off x="566928" y="1810512"/>
+            <a:ext cx="5364328" cy="2672334"/>
+          </a:xfrm>
+          <a:prstGeom prst="roundRect">
+            <a:avLst>
+              <a:gd name="adj" fmla="val 2737"/>
+            </a:avLst>
+          </a:prstGeom>
+          <a:solidFill>
+            <a:srgbClr val="D7E7E7"/>
+          </a:solidFill>
+          <a:ln w="12700">
+            <a:solidFill>
+              <a:srgbClr val="D7E7E7"/>
+            </a:solidFill>
+            <a:prstDash val="solid"/>
+          </a:ln>
+        </p:spPr>
+      </p:sp>
+      <p:sp>
+        <p:nvSpPr>
+          <p:cNvPr id="5" name="Shape 3"/>
+          <p:cNvSpPr/>
+          <p:nvPr/>
+        </p:nvSpPr>
+        <p:spPr>
+          <a:xfrm>
+            <a:off x="566928" y="1810512"/>
+            <a:ext cx="5364328" cy="658368"/>
+          </a:xfrm>
+          <a:prstGeom prst="roundRect">
+            <a:avLst>
+              <a:gd name="adj" fmla="val 11111"/>
+            </a:avLst>
+          </a:prstGeom>
+          <a:solidFill>
+            <a:srgbClr val="2E7D7D"/>
+          </a:solidFill>
+          <a:ln w="12700">
+            <a:solidFill>
+              <a:srgbClr val="2E7D7D"/>
+            </a:solidFill>
+            <a:prstDash val="solid"/>
+          </a:ln>
+        </p:spPr>
+      </p:sp>
+      <p:sp>
+        <p:nvSpPr>
+          <p:cNvPr id="6" name="Shape 4"/>
+          <p:cNvSpPr/>
+          <p:nvPr/>
+        </p:nvSpPr>
+        <p:spPr>
+          <a:xfrm>
+            <a:off x="566928" y="2176272"/>
+            <a:ext cx="5364328" cy="292608"/>
+          </a:xfrm>
+          <a:prstGeom prst="rect">
+            <a:avLst/>
+          </a:prstGeom>
+          <a:solidFill>
+            <a:srgbClr val="2E7D7D"/>
+          </a:solidFill>
+          <a:ln w="12700">
+            <a:solidFill>
+              <a:srgbClr val="2E7D7D"/>
+            </a:solidFill>
+            <a:prstDash val="solid"/>
+          </a:ln>
+        </p:spPr>
+      </p:sp>
+      <p:sp>
+        <p:nvSpPr>
+          <p:cNvPr id="7" name="Text 5"/>
+          <p:cNvSpPr txBox="1"/>
+          <p:nvPr/>
+        </p:nvSpPr>
+        <p:spPr>
+          <a:xfrm>
+            <a:off x="822960" y="1810512"/>
+            <a:ext cx="4852264" cy="658368"/>
+          </a:xfrm>
+          <a:prstGeom prst="rect">
+            <a:avLst/>
+          </a:prstGeom>
+          <a:noFill/>
+          <a:ln/>
+        </p:spPr>
+        <p:txBody>
+          <a:bodyPr wrap="square" lIns="0" tIns="0" rIns="0" bIns="0" rtlCol="0" anchor="ctr"/>
+          <a:lstStyle/>
+          <a:p>
+            <a:pPr indent="0" marL="0">
+              <a:buNone/>
+            </a:pPr>
+            <a:r>
+              <a:rPr lang="en-US" sz="1700" b="1" dirty="0">
+                <a:solidFill>
+                  <a:srgbClr val="FFFFFF"/>
+                </a:solidFill>
+                <a:latin typeface="Arial" pitchFamily="34" charset="0"/>
+                <a:ea typeface="Arial" pitchFamily="34" charset="-122"/>
+                <a:cs typeface="Arial" pitchFamily="34" charset="-120"/>
+              </a:rPr>
+              <a:t>Extractiva: copia las frases</a:t>
+            </a:r>
+            <a:endParaRPr lang="en-US" sz="1700" dirty="0"/>
+          </a:p>
+        </p:txBody>
+      </p:sp>
+      <p:sp>
+        <p:nvSpPr>
+          <p:cNvPr id="8" name="Text 6"/>
+          <p:cNvSpPr txBox="1"/>
+          <p:nvPr/>
+        </p:nvSpPr>
+        <p:spPr>
+          <a:xfrm>
+            <a:off x="822960" y="2679192"/>
+            <a:ext cx="4852264" cy="1575054"/>
+          </a:xfrm>
+          <a:prstGeom prst="rect">
+            <a:avLst/>
+          </a:prstGeom>
+          <a:noFill/>
+          <a:ln/>
+        </p:spPr>
+        <p:txBody>
+          <a:bodyPr wrap="square" lIns="0" tIns="0" rIns="0" bIns="0" rtlCol="0" anchor="t"/>
+          <a:lstStyle/>
+          <a:p>
+            <a:pPr indent="0" marL="0">
+              <a:lnSpc>
+                <a:spcPct val="115000"/>
+              </a:lnSpc>
+              <a:spcAft>
+                <a:spcPts val="600"/>
+              </a:spcAft>
+              <a:buNone/>
+            </a:pPr>
+            <a:r>
+              <a:rPr lang="en-US" sz="1400" dirty="0">
+                <a:solidFill>
+                  <a:srgbClr val="16262E"/>
+                </a:solidFill>
+                <a:latin typeface="Calibri" pitchFamily="34" charset="0"/>
+                <a:ea typeface="Calibri" pitchFamily="34" charset="-122"/>
+                <a:cs typeface="Calibri" pitchFamily="34" charset="-120"/>
+              </a:rPr>
+              <a:t>Toma las oraciones exactas del documento, sin reescribirlas.</a:t>
+            </a:r>
+            <a:endParaRPr lang="en-US" sz="1400" dirty="0"/>
+          </a:p>
+          <a:p>
+            <a:pPr indent="0" marL="0">
+              <a:lnSpc>
+                <a:spcPct val="115000"/>
+              </a:lnSpc>
+              <a:spcAft>
+                <a:spcPts val="600"/>
+              </a:spcAft>
+              <a:buNone/>
+            </a:pPr>
+            <a:r>
+              <a:rPr lang="en-US" sz="1400" dirty="0">
+                <a:solidFill>
+                  <a:srgbClr val="16262E"/>
+                </a:solidFill>
+                <a:latin typeface="Calibri" pitchFamily="34" charset="0"/>
+                <a:ea typeface="Calibri" pitchFamily="34" charset="-122"/>
+                <a:cs typeface="Calibri" pitchFamily="34" charset="-120"/>
+              </a:rPr>
+              <a:t>Sirve cuando necesitas conservar la redacción porque vas a citar el texto.</a:t>
+            </a:r>
+            <a:endParaRPr lang="en-US" sz="1400" dirty="0"/>
+          </a:p>
+          <a:p>
+            <a:pPr indent="0" marL="0">
+              <a:lnSpc>
+                <a:spcPct val="115000"/>
+              </a:lnSpc>
+              <a:spcAft>
+                <a:spcPts val="600"/>
+              </a:spcAft>
+              <a:buNone/>
+            </a:pPr>
+            <a:r>
+              <a:rPr lang="en-US" sz="1400" dirty="0">
+                <a:solidFill>
+                  <a:srgbClr val="16262E"/>
+                </a:solidFill>
+                <a:latin typeface="Calibri" pitchFamily="34" charset="0"/>
+                <a:ea typeface="Calibri" pitchFamily="34" charset="-122"/>
+                <a:cs typeface="Calibri" pitchFamily="34" charset="-120"/>
+              </a:rPr>
+              <a:t>Es más segura: no puede inventar, porque solo puede copiar.</a:t>
+            </a:r>
+            <a:endParaRPr lang="en-US" sz="1400" dirty="0"/>
+          </a:p>
+          <a:p>
+            <a:pPr indent="0" marL="0">
+              <a:lnSpc>
+                <a:spcPct val="115000"/>
+              </a:lnSpc>
+              <a:spcAft>
+                <a:spcPts val="600"/>
+              </a:spcAft>
+              <a:buNone/>
+            </a:pPr>
+            <a:r>
+              <a:rPr lang="en-US" sz="1400" dirty="0">
+                <a:solidFill>
+                  <a:srgbClr val="16262E"/>
+                </a:solidFill>
+                <a:latin typeface="Calibri" pitchFamily="34" charset="0"/>
+                <a:ea typeface="Calibri" pitchFamily="34" charset="-122"/>
+                <a:cs typeface="Calibri" pitchFamily="34" charset="-120"/>
+              </a:rPr>
+              <a:t>Úsala para armar tu evidencia.</a:t>
+            </a:r>
+            <a:endParaRPr lang="en-US" sz="1400" dirty="0"/>
+          </a:p>
+        </p:txBody>
+      </p:sp>
+      <p:sp>
+        <p:nvSpPr>
+          <p:cNvPr id="9" name="Shape 7"/>
+          <p:cNvSpPr/>
+          <p:nvPr/>
+        </p:nvSpPr>
+        <p:spPr>
+          <a:xfrm>
+            <a:off x="6260440" y="1810512"/>
+            <a:ext cx="5364328" cy="2672334"/>
+          </a:xfrm>
+          <a:prstGeom prst="roundRect">
+            <a:avLst>
+              <a:gd name="adj" fmla="val 2737"/>
+            </a:avLst>
+          </a:prstGeom>
+          <a:solidFill>
+            <a:srgbClr val="F7E4D8"/>
+          </a:solidFill>
+          <a:ln w="12700">
+            <a:solidFill>
+              <a:srgbClr val="F7E4D8"/>
+            </a:solidFill>
+            <a:prstDash val="solid"/>
+          </a:ln>
+        </p:spPr>
+      </p:sp>
+      <p:sp>
+        <p:nvSpPr>
+          <p:cNvPr id="10" name="Shape 8"/>
+          <p:cNvSpPr/>
+          <p:nvPr/>
+        </p:nvSpPr>
+        <p:spPr>
+          <a:xfrm>
+            <a:off x="6260440" y="1810512"/>
+            <a:ext cx="5364328" cy="658368"/>
+          </a:xfrm>
+          <a:prstGeom prst="roundRect">
+            <a:avLst>
+              <a:gd name="adj" fmla="val 11111"/>
+            </a:avLst>
+          </a:prstGeom>
+          <a:solidFill>
+            <a:srgbClr val="C85A28"/>
+          </a:solidFill>
+          <a:ln w="12700">
+            <a:solidFill>
+              <a:srgbClr val="C85A28"/>
+            </a:solidFill>
+            <a:prstDash val="solid"/>
+          </a:ln>
+        </p:spPr>
+      </p:sp>
+      <p:sp>
+        <p:nvSpPr>
+          <p:cNvPr id="11" name="Shape 9"/>
+          <p:cNvSpPr/>
+          <p:nvPr/>
+        </p:nvSpPr>
+        <p:spPr>
+          <a:xfrm>
+            <a:off x="6260440" y="2176272"/>
+            <a:ext cx="5364328" cy="292608"/>
+          </a:xfrm>
+          <a:prstGeom prst="rect">
+            <a:avLst/>
+          </a:prstGeom>
+          <a:solidFill>
+            <a:srgbClr val="C85A28"/>
+          </a:solidFill>
+          <a:ln w="12700">
+            <a:solidFill>
+              <a:srgbClr val="C85A28"/>
+            </a:solidFill>
+            <a:prstDash val="solid"/>
+          </a:ln>
+        </p:spPr>
+      </p:sp>
+      <p:sp>
+        <p:nvSpPr>
+          <p:cNvPr id="12" name="Text 10"/>
+          <p:cNvSpPr txBox="1"/>
+          <p:nvPr/>
+        </p:nvSpPr>
+        <p:spPr>
+          <a:xfrm>
+            <a:off x="6516472" y="1810512"/>
+            <a:ext cx="4852264" cy="658368"/>
+          </a:xfrm>
+          <a:prstGeom prst="rect">
+            <a:avLst/>
+          </a:prstGeom>
+          <a:noFill/>
+          <a:ln/>
+        </p:spPr>
+        <p:txBody>
+          <a:bodyPr wrap="square" lIns="0" tIns="0" rIns="0" bIns="0" rtlCol="0" anchor="ctr"/>
+          <a:lstStyle/>
+          <a:p>
+            <a:pPr indent="0" marL="0">
+              <a:buNone/>
+            </a:pPr>
+            <a:r>
+              <a:rPr lang="en-US" sz="1700" b="1" dirty="0">
+                <a:solidFill>
+                  <a:srgbClr val="FFFFFF"/>
+                </a:solidFill>
+                <a:latin typeface="Arial" pitchFamily="34" charset="0"/>
+                <a:ea typeface="Arial" pitchFamily="34" charset="-122"/>
+                <a:cs typeface="Arial" pitchFamily="34" charset="-120"/>
+              </a:rPr>
+              <a:t>Abstractiva: escribe de nuevo</a:t>
+            </a:r>
+            <a:endParaRPr lang="en-US" sz="1700" dirty="0"/>
+          </a:p>
+        </p:txBody>
+      </p:sp>
+      <p:sp>
+        <p:nvSpPr>
+          <p:cNvPr id="13" name="Text 11"/>
+          <p:cNvSpPr txBox="1"/>
+          <p:nvPr/>
+        </p:nvSpPr>
+        <p:spPr>
+          <a:xfrm>
+            <a:off x="6516472" y="2679192"/>
+            <a:ext cx="4852264" cy="1575054"/>
+          </a:xfrm>
+          <a:prstGeom prst="rect">
+            <a:avLst/>
+          </a:prstGeom>
+          <a:noFill/>
+          <a:ln/>
+        </p:spPr>
+        <p:txBody>
+          <a:bodyPr wrap="square" lIns="0" tIns="0" rIns="0" bIns="0" rtlCol="0" anchor="t"/>
+          <a:lstStyle/>
+          <a:p>
+            <a:pPr indent="0" marL="0">
+              <a:lnSpc>
+                <a:spcPct val="115000"/>
+              </a:lnSpc>
+              <a:spcAft>
+                <a:spcPts val="600"/>
+              </a:spcAft>
+              <a:buNone/>
+            </a:pPr>
+            <a:r>
+              <a:rPr lang="en-US" sz="1400" dirty="0">
+                <a:solidFill>
+                  <a:srgbClr val="16262E"/>
+                </a:solidFill>
+                <a:latin typeface="Calibri" pitchFamily="34" charset="0"/>
+                <a:ea typeface="Calibri" pitchFamily="34" charset="-122"/>
+                <a:cs typeface="Calibri" pitchFamily="34" charset="-120"/>
+              </a:rPr>
+              <a:t>Reescribe el contenido con palabras nuevas.</a:t>
+            </a:r>
+            <a:endParaRPr lang="en-US" sz="1400" dirty="0"/>
+          </a:p>
+          <a:p>
+            <a:pPr indent="0" marL="0">
+              <a:lnSpc>
+                <a:spcPct val="115000"/>
+              </a:lnSpc>
+              <a:spcAft>
+                <a:spcPts val="600"/>
+              </a:spcAft>
+              <a:buNone/>
+            </a:pPr>
+            <a:r>
+              <a:rPr lang="en-US" sz="1400" dirty="0">
+                <a:solidFill>
+                  <a:srgbClr val="16262E"/>
+                </a:solidFill>
+                <a:latin typeface="Calibri" pitchFamily="34" charset="0"/>
+                <a:ea typeface="Calibri" pitchFamily="34" charset="-122"/>
+                <a:cs typeface="Calibri" pitchFamily="34" charset="-120"/>
+              </a:rPr>
+              <a:t>Sirve cuando necesitas un resumen que integre patrones y contradicciones entre varios documentos.</a:t>
+            </a:r>
+            <a:endParaRPr lang="en-US" sz="1400" dirty="0"/>
+          </a:p>
+          <a:p>
+            <a:pPr indent="0" marL="0">
+              <a:lnSpc>
+                <a:spcPct val="115000"/>
+              </a:lnSpc>
+              <a:spcAft>
+                <a:spcPts val="600"/>
+              </a:spcAft>
+              <a:buNone/>
+            </a:pPr>
+            <a:r>
+              <a:rPr lang="en-US" sz="1400" dirty="0">
+                <a:solidFill>
+                  <a:srgbClr val="16262E"/>
+                </a:solidFill>
+                <a:latin typeface="Calibri" pitchFamily="34" charset="0"/>
+                <a:ea typeface="Calibri" pitchFamily="34" charset="-122"/>
+                <a:cs typeface="Calibri" pitchFamily="34" charset="-120"/>
+              </a:rPr>
+              <a:t>Es más útil y más riesgosa: puede meter matices que no estaban.</a:t>
+            </a:r>
+            <a:endParaRPr lang="en-US" sz="1400" dirty="0"/>
+          </a:p>
+          <a:p>
+            <a:pPr indent="0" marL="0">
+              <a:lnSpc>
+                <a:spcPct val="115000"/>
+              </a:lnSpc>
+              <a:spcAft>
+                <a:spcPts val="600"/>
+              </a:spcAft>
+              <a:buNone/>
+            </a:pPr>
+            <a:r>
+              <a:rPr lang="en-US" sz="1400" dirty="0">
+                <a:solidFill>
+                  <a:srgbClr val="16262E"/>
+                </a:solidFill>
+                <a:latin typeface="Calibri" pitchFamily="34" charset="0"/>
+                <a:ea typeface="Calibri" pitchFamily="34" charset="-122"/>
+                <a:cs typeface="Calibri" pitchFamily="34" charset="-120"/>
+              </a:rPr>
+              <a:t>Úsala para redactar tu conclusión, y compárala contra la extractiva.</a:t>
+            </a:r>
+            <a:endParaRPr lang="en-US" sz="1400" dirty="0"/>
+          </a:p>
+        </p:txBody>
+      </p:sp>
+      <p:sp>
+        <p:nvSpPr>
+          <p:cNvPr id="14" name="Text 12"/>
+          <p:cNvSpPr txBox="1"/>
+          <p:nvPr/>
+        </p:nvSpPr>
+        <p:spPr>
+          <a:xfrm>
+            <a:off x="566928" y="6327648"/>
+            <a:ext cx="11057839" cy="292608"/>
+          </a:xfrm>
+          <a:prstGeom prst="rect">
+            <a:avLst/>
+          </a:prstGeom>
+          <a:noFill/>
+          <a:ln/>
+        </p:spPr>
+        <p:txBody>
+          <a:bodyPr wrap="square" lIns="0" tIns="0" rIns="0" bIns="0" rtlCol="0" anchor="ctr"/>
+          <a:lstStyle/>
+          <a:p>
+            <a:pPr indent="0" marL="0">
+              <a:buNone/>
+            </a:pPr>
+            <a:r>
+              <a:rPr lang="en-US" sz="1000" dirty="0">
+                <a:solidFill>
+                  <a:srgbClr val="5A6B73"/>
+                </a:solidFill>
+                <a:latin typeface="Calibri" pitchFamily="34" charset="0"/>
+                <a:ea typeface="Calibri" pitchFamily="34" charset="-122"/>
+                <a:cs typeface="Calibri" pitchFamily="34" charset="-120"/>
+              </a:rPr>
+              <a:t>Regla práctica: la extractiva arma la evidencia, la abstractiva redacta la conclusión.</a:t>
+            </a:r>
+            <a:endParaRPr lang="en-US" sz="1000" dirty="0"/>
+          </a:p>
+        </p:txBody>
+      </p:sp>
+    </p:spTree>
+  </p:cSld>
+  <p:clrMapOvr>
+    <a:masterClrMapping/>
+  </p:clrMapOvr>
+</p:sld>
+</file>
+
+<file path=ppt/slides/slide6.xml><?xml version="1.0" encoding="utf-8"?>
+<p:sld xmlns:a="http://schemas.openxmlformats.org/drawingml/2006/main" xmlns:r="http://schemas.openxmlformats.org/officeDocument/2006/relationships" xmlns:p="http://schemas.openxmlformats.org/presentationml/2006/main">
+  <p:cSld name="Slide 6">
     <p:bg>
       <p:bgPr>
         <a:solidFill>
@@ -7455,7 +9236,7 @@
                 <a:ea typeface="Arial" pitchFamily="34" charset="-122"/>
                 <a:cs typeface="Arial" pitchFamily="34" charset="-120"/>
               </a:rPr>
-              <a:t>AHORA USTEDES</a:t>
+              <a:t>TU TURNO</a:t>
             </a:r>
             <a:endParaRPr lang="en-US" sz="1300" dirty="0"/>
           </a:p>
@@ -7560,7 +9341,7 @@
                 <a:ea typeface="Arial" pitchFamily="34" charset="-122"/>
                 <a:cs typeface="Arial" pitchFamily="34" charset="-120"/>
               </a:rPr>
-              <a:t>Práctica A. Las dos síntesis del mismo documento</a:t>
+              <a:t>Práctica A. Las dos formas sobre el mismo documento</a:t>
             </a:r>
             <a:endParaRPr lang="en-US" sz="2900" dirty="0"/>
           </a:p>
@@ -7693,7 +9474,7 @@
                 <a:ea typeface="Calibri" pitchFamily="34" charset="-122"/>
                 <a:cs typeface="Calibri" pitchFamily="34" charset="-120"/>
               </a:rPr>
-              <a:t>Tome un informe de evaluación público y pídale a Copilot la síntesis extractiva, indicándole expresamente que transcriba oraciones textuales sin reescribirlas.</a:t>
+              <a:t>Toma un informe de evaluación público y pide la síntesis extractiva. Dile expresamente que transcriba oraciones textuales sin reescribirlas, y que las ponga entre comillas.</a:t>
             </a:r>
             <a:endParaRPr lang="en-US" sz="1450" dirty="0"/>
           </a:p>
@@ -7826,7 +9607,7 @@
                 <a:ea typeface="Calibri" pitchFamily="34" charset="-122"/>
                 <a:cs typeface="Calibri" pitchFamily="34" charset="-120"/>
               </a:rPr>
-              <a:t>Pídale ahora la síntesis abstractiva del mismo documento, indicándole que integre los hallazgos en un resumen ejecutivo de máximo 200 palabras.</a:t>
+              <a:t>Ahora pide la abstractiva del mismo documento, con un máximo de doscientas palabras.</a:t>
             </a:r>
             <a:endParaRPr lang="en-US" sz="1450" dirty="0"/>
           </a:p>
@@ -7959,7 +9740,7 @@
                 <a:ea typeface="Calibri" pitchFamily="34" charset="-122"/>
                 <a:cs typeface="Calibri" pitchFamily="34" charset="-120"/>
               </a:rPr>
-              <a:t>Ponga las dos salidas lado a lado y busque una afirmación que aparezca en la abstractiva pero no se sostenga en ninguna oración de la extractiva.</a:t>
+              <a:t>Pon las dos salidas lado a lado y busca una afirmación que esté en la abstractiva pero no se sostenga en ninguna oración de la extractiva.</a:t>
             </a:r>
             <a:endParaRPr lang="en-US" sz="1450" dirty="0"/>
           </a:p>
@@ -8092,7 +9873,7 @@
                 <a:ea typeface="Calibri" pitchFamily="34" charset="-122"/>
                 <a:cs typeface="Calibri" pitchFamily="34" charset="-120"/>
               </a:rPr>
-              <a:t>Escriba en su bitácora en qué caso usaría cada una en su trabajo real.</a:t>
+              <a:t>Anota en tu bitácora en qué caso usarías cada una en tu trabajo real.</a:t>
             </a:r>
             <a:endParaRPr lang="en-US" sz="1450" dirty="0"/>
           </a:p>
@@ -8106,9 +9887,9 @@
 </p:sld>
 </file>
 
-<file path=ppt/slides/slide6.xml><?xml version="1.0" encoding="utf-8"?>
+<file path=ppt/slides/slide7.xml><?xml version="1.0" encoding="utf-8"?>
 <p:sld xmlns:a="http://schemas.openxmlformats.org/drawingml/2006/main" xmlns:r="http://schemas.openxmlformats.org/officeDocument/2006/relationships" xmlns:p="http://schemas.openxmlformats.org/presentationml/2006/main">
-  <p:cSld name="Slide 6">
+  <p:cSld name="Slide 7">
     <p:spTree>
       <p:nvGrpSpPr>
         <p:cNvPr id="1" name=""/>
@@ -8148,7 +9929,7 @@
               <a:buNone/>
             </a:pPr>
             <a:r>
-              <a:rPr lang="en-US" sz="2800" b="1" dirty="0">
+              <a:rPr lang="en-US" sz="3200" b="1" dirty="0">
                 <a:solidFill>
                   <a:srgbClr val="16262E"/>
                 </a:solidFill>
@@ -8156,9 +9937,9 @@
                 <a:ea typeface="Arial" pitchFamily="34" charset="-122"/>
                 <a:cs typeface="Arial" pitchFamily="34" charset="-120"/>
               </a:rPr>
-              <a:t>Extracción de entidades: sacar la tabla de adentro del texto</a:t>
-            </a:r>
-            <a:endParaRPr lang="en-US" sz="2800" dirty="0"/>
+              <a:t>Sacar la tabla de adentro del texto</a:t>
+            </a:r>
+            <a:endParaRPr lang="en-US" sz="3200" dirty="0"/>
           </a:p>
         </p:txBody>
       </p:sp>
@@ -8195,7 +9976,7 @@
                 <a:ea typeface="Calibri" pitchFamily="34" charset="-122"/>
                 <a:cs typeface="Calibri" pitchFamily="34" charset="-120"/>
               </a:rPr>
-              <a:t>Es la tarea que más tiempo ahorra en la revisión de reglas de operación.</a:t>
+              <a:t>Es la tarea que más tiempo te ahorra cuando revisas reglas de operación.</a:t>
             </a:r>
             <a:endParaRPr lang="en-US" sz="1500" dirty="0"/>
           </a:p>
@@ -8210,11 +9991,11 @@
         <p:spPr>
           <a:xfrm>
             <a:off x="566928" y="2011680"/>
-            <a:ext cx="3503066" cy="1529588"/>
+            <a:ext cx="3503066" cy="1945132"/>
           </a:xfrm>
           <a:prstGeom prst="roundRect">
             <a:avLst>
-              <a:gd name="adj" fmla="val 4782"/>
+              <a:gd name="adj" fmla="val 3761"/>
             </a:avLst>
           </a:prstGeom>
           <a:solidFill>
@@ -8237,7 +10018,7 @@
         <p:spPr>
           <a:xfrm>
             <a:off x="804672" y="2249424"/>
-            <a:ext cx="3027578" cy="457200"/>
+            <a:ext cx="3027578" cy="319024"/>
           </a:xfrm>
           <a:prstGeom prst="rect">
             <a:avLst/>
@@ -8275,8 +10056,8 @@
         </p:nvSpPr>
         <p:spPr>
           <a:xfrm>
-            <a:off x="804672" y="2724912"/>
-            <a:ext cx="3027578" cy="578612"/>
+            <a:off x="804672" y="2714752"/>
+            <a:ext cx="3027578" cy="1040892"/>
           </a:xfrm>
           <a:prstGeom prst="rect">
             <a:avLst/>
@@ -8303,7 +10084,7 @@
                 <a:ea typeface="Calibri" pitchFamily="34" charset="-122"/>
                 <a:cs typeface="Calibri" pitchFamily="34" charset="-120"/>
               </a:rPr>
-              <a:t>Por ejemplo, mujeres rurales de 18 a 59 años. Aparece redactada dentro de un artículo, casi nunca en una tabla.</a:t>
+              <a:t>Por ejemplo, mujeres rurales de 18 a 59 años. Viene redactada dentro de un artículo, casi nunca en una tabla.</a:t>
             </a:r>
             <a:endParaRPr lang="en-US" sz="1300" dirty="0"/>
           </a:p>
@@ -8318,11 +10099,11 @@
         <p:spPr>
           <a:xfrm>
             <a:off x="4344314" y="2011680"/>
-            <a:ext cx="3503066" cy="1529588"/>
+            <a:ext cx="3503066" cy="1945132"/>
           </a:xfrm>
           <a:prstGeom prst="roundRect">
             <a:avLst>
-              <a:gd name="adj" fmla="val 4782"/>
+              <a:gd name="adj" fmla="val 3761"/>
             </a:avLst>
           </a:prstGeom>
           <a:solidFill>
@@ -8345,7 +10126,7 @@
         <p:spPr>
           <a:xfrm>
             <a:off x="4582058" y="2249424"/>
-            <a:ext cx="3027578" cy="457200"/>
+            <a:ext cx="3027578" cy="319024"/>
           </a:xfrm>
           <a:prstGeom prst="rect">
             <a:avLst/>
@@ -8383,8 +10164,8 @@
         </p:nvSpPr>
         <p:spPr>
           <a:xfrm>
-            <a:off x="4582058" y="2724912"/>
-            <a:ext cx="3027578" cy="578612"/>
+            <a:off x="4582058" y="2714752"/>
+            <a:ext cx="3027578" cy="1040892"/>
           </a:xfrm>
           <a:prstGeom prst="rect">
             <a:avLst/>
@@ -8411,7 +10192,7 @@
                 <a:ea typeface="Calibri" pitchFamily="34" charset="-122"/>
                 <a:cs typeface="Calibri" pitchFamily="34" charset="-120"/>
               </a:rPr>
-              <a:t>Por ejemplo, 3,100 pesos bimestrales. Suele venir con condiciones de incremento y reducción escondidas en el mismo párrafo.</a:t>
+              <a:t>Por ejemplo, 3,100 pesos bimestrales. Suele traer condiciones de aumento y de reducción escondidas en el mismo párrafo.</a:t>
             </a:r>
             <a:endParaRPr lang="en-US" sz="1300" dirty="0"/>
           </a:p>
@@ -8426,11 +10207,11 @@
         <p:spPr>
           <a:xfrm>
             <a:off x="8121701" y="2011680"/>
-            <a:ext cx="3503066" cy="1529588"/>
+            <a:ext cx="3503066" cy="1945132"/>
           </a:xfrm>
           <a:prstGeom prst="roundRect">
             <a:avLst>
-              <a:gd name="adj" fmla="val 4782"/>
+              <a:gd name="adj" fmla="val 3761"/>
             </a:avLst>
           </a:prstGeom>
           <a:solidFill>
@@ -8453,7 +10234,7 @@
         <p:spPr>
           <a:xfrm>
             <a:off x="8359445" y="2249424"/>
-            <a:ext cx="3027578" cy="457200"/>
+            <a:ext cx="3027578" cy="319024"/>
           </a:xfrm>
           <a:prstGeom prst="rect">
             <a:avLst/>
@@ -8477,7 +10258,7 @@
                 <a:ea typeface="Arial" pitchFamily="34" charset="-122"/>
                 <a:cs typeface="Arial" pitchFamily="34" charset="-120"/>
               </a:rPr>
-              <a:t>Requisitos administrativos</a:t>
+              <a:t>Requisitos</a:t>
             </a:r>
             <a:endParaRPr lang="en-US" sz="1600" dirty="0"/>
           </a:p>
@@ -8491,8 +10272,8 @@
         </p:nvSpPr>
         <p:spPr>
           <a:xfrm>
-            <a:off x="8359445" y="2724912"/>
-            <a:ext cx="3027578" cy="578612"/>
+            <a:off x="8359445" y="2714752"/>
+            <a:ext cx="3027578" cy="1040892"/>
           </a:xfrm>
           <a:prstGeom prst="rect">
             <a:avLst/>
@@ -8519,7 +10300,7 @@
                 <a:ea typeface="Calibri" pitchFamily="34" charset="-122"/>
                 <a:cs typeface="Calibri" pitchFamily="34" charset="-120"/>
               </a:rPr>
-              <a:t>Por ejemplo, comprobante de domicilio y CURP. Fíjense siempre si la lista es limitativa o enunciativa.</a:t>
+              <a:t>Por ejemplo, comprobante de domicilio y CURP. Fíjate siempre si la lista es limitativa o enunciativa: no es lo mismo.</a:t>
             </a:r>
             <a:endParaRPr lang="en-US" sz="1300" dirty="0"/>
           </a:p>
@@ -8533,9 +10314,9 @@
 </p:sld>
 </file>
 
-<file path=ppt/slides/slide7.xml><?xml version="1.0" encoding="utf-8"?>
+<file path=ppt/slides/slide8.xml><?xml version="1.0" encoding="utf-8"?>
 <p:sld xmlns:a="http://schemas.openxmlformats.org/drawingml/2006/main" xmlns:r="http://schemas.openxmlformats.org/officeDocument/2006/relationships" xmlns:p="http://schemas.openxmlformats.org/presentationml/2006/main">
-  <p:cSld name="Slide 7">
+  <p:cSld name="Slide 8">
     <p:bg>
       <p:bgPr>
         <a:solidFill>
@@ -8617,7 +10398,7 @@
                 <a:ea typeface="Arial" pitchFamily="34" charset="-122"/>
                 <a:cs typeface="Arial" pitchFamily="34" charset="-120"/>
               </a:rPr>
-              <a:t>AHORA USTEDES</a:t>
+              <a:t>TU TURNO</a:t>
             </a:r>
             <a:endParaRPr lang="en-US" sz="1300" dirty="0"/>
           </a:p>
@@ -8855,7 +10636,7 @@
                 <a:ea typeface="Calibri" pitchFamily="34" charset="-122"/>
                 <a:cs typeface="Calibri" pitchFamily="34" charset="-120"/>
               </a:rPr>
-              <a:t>Trabajen con tres conjuntos de reglas de operación de programas distintos. Lleguen a una sola tabla con las mismas columnas para los tres.</a:t>
+              <a:t>Trabaja con tres conjuntos de reglas de operación distintos. Llega a una sola tabla con las mismas columnas para los tres.</a:t>
             </a:r>
             <a:endParaRPr lang="en-US" sz="1450" dirty="0"/>
           </a:p>
@@ -8988,7 +10769,7 @@
                 <a:ea typeface="Calibri" pitchFamily="34" charset="-122"/>
                 <a:cs typeface="Calibri" pitchFamily="34" charset="-120"/>
               </a:rPr>
-              <a:t>Aquí está la dificultad real: cada documento nombra las cosas de manera distinta, y el modelo va a forzar equivalencias que no existen.</a:t>
+              <a:t>Aquí está la dificultad de verdad: cada documento le pone otro nombre a las cosas, y el modelo va a forzar equivalencias que no existen.</a:t>
             </a:r>
             <a:endParaRPr lang="en-US" sz="1450" dirty="0"/>
           </a:p>
@@ -9121,7 +10902,7 @@
                 <a:ea typeface="Calibri" pitchFamily="34" charset="-122"/>
                 <a:cs typeface="Calibri" pitchFamily="34" charset="-120"/>
               </a:rPr>
-              <a:t>Su trabajo es detectar dónde forzó una equivalencia falsa y corregirla a mano. Marquen esas celdas con color.</a:t>
+              <a:t>Tu trabajo es cazar esas equivalencias falsas y corregirlas a mano. Marca esas celdas con color.</a:t>
             </a:r>
             <a:endParaRPr lang="en-US" sz="1450" dirty="0"/>
           </a:p>
@@ -9254,7 +11035,7 @@
                 <a:ea typeface="Calibri" pitchFamily="34" charset="-122"/>
                 <a:cs typeface="Calibri" pitchFamily="34" charset="-120"/>
               </a:rPr>
-              <a:t>Cuenten cuántas equivalencias forzadas encontraron. Ese número es el entregable interesante, no la tabla.</a:t>
+              <a:t>Cuenta cuántas encontraste. Ese número es el entregable interesante, no la tabla.</a:t>
             </a:r>
             <a:endParaRPr lang="en-US" sz="1450" dirty="0"/>
           </a:p>
@@ -9334,9 +11115,9 @@
 </p:sld>
 </file>
 
-<file path=ppt/slides/slide8.xml><?xml version="1.0" encoding="utf-8"?>
+<file path=ppt/slides/slide9.xml><?xml version="1.0" encoding="utf-8"?>
 <p:sld xmlns:a="http://schemas.openxmlformats.org/drawingml/2006/main" xmlns:r="http://schemas.openxmlformats.org/officeDocument/2006/relationships" xmlns:p="http://schemas.openxmlformats.org/presentationml/2006/main">
-  <p:cSld name="Slide 8">
+  <p:cSld name="Slide 9">
     <p:bg>
       <p:bgPr>
         <a:solidFill>
@@ -9416,7 +11197,7 @@
                 <a:ea typeface="Arial" pitchFamily="34" charset="-122"/>
                 <a:cs typeface="Arial" pitchFamily="34" charset="-120"/>
               </a:rPr>
-              <a:t>3</a:t>
+              <a:t>2</a:t>
             </a:r>
             <a:endParaRPr lang="en-US" sz="4400" dirty="0"/>
           </a:p>
@@ -9494,7 +11275,7 @@
                 <a:ea typeface="Arial" pitchFamily="34" charset="-122"/>
                 <a:cs typeface="Arial" pitchFamily="34" charset="-120"/>
               </a:rPr>
-              <a:t>Agrupamiento temático con ratificación humana</a:t>
+              <a:t>Agrupar temas sin perder a la minoría</a:t>
             </a:r>
             <a:endParaRPr lang="en-US" sz="3400" dirty="0"/>
           </a:p>
@@ -9563,683 +11344,6 @@
               <a:t>10:25 a 11:00</a:t>
             </a:r>
             <a:endParaRPr lang="en-US" sz="1200" dirty="0"/>
-          </a:p>
-        </p:txBody>
-      </p:sp>
-    </p:spTree>
-  </p:cSld>
-  <p:clrMapOvr>
-    <a:masterClrMapping/>
-  </p:clrMapOvr>
-</p:sld>
-</file>
-
-<file path=ppt/slides/slide9.xml><?xml version="1.0" encoding="utf-8"?>
-<p:sld xmlns:a="http://schemas.openxmlformats.org/drawingml/2006/main" xmlns:r="http://schemas.openxmlformats.org/officeDocument/2006/relationships" xmlns:p="http://schemas.openxmlformats.org/presentationml/2006/main">
-  <p:cSld name="Slide 9">
-    <p:spTree>
-      <p:nvGrpSpPr>
-        <p:cNvPr id="1" name=""/>
-        <p:cNvGrpSpPr/>
-        <p:nvPr/>
-      </p:nvGrpSpPr>
-      <p:grpSpPr>
-        <a:xfrm>
-          <a:off x="0" y="0"/>
-          <a:ext cx="0" cy="0"/>
-          <a:chOff x="0" y="0"/>
-          <a:chExt cx="0" cy="0"/>
-        </a:xfrm>
-      </p:grpSpPr>
-      <p:sp>
-        <p:nvSpPr>
-          <p:cNvPr id="2" name="Text 0"/>
-          <p:cNvSpPr txBox="1"/>
-          <p:nvPr/>
-        </p:nvSpPr>
-        <p:spPr>
-          <a:xfrm>
-            <a:off x="566928" y="402336"/>
-            <a:ext cx="9229039" cy="749808"/>
-          </a:xfrm>
-          <a:prstGeom prst="rect">
-            <a:avLst/>
-          </a:prstGeom>
-          <a:noFill/>
-          <a:ln/>
-        </p:spPr>
-        <p:txBody>
-          <a:bodyPr wrap="square" lIns="0" tIns="0" rIns="0" bIns="0" rtlCol="0" anchor="t"/>
-          <a:lstStyle/>
-          <a:p>
-            <a:pPr algn="l" indent="0" marL="0">
-              <a:buNone/>
-            </a:pPr>
-            <a:r>
-              <a:rPr lang="en-US" sz="3200" b="1" dirty="0">
-                <a:solidFill>
-                  <a:srgbClr val="16262E"/>
-                </a:solidFill>
-                <a:latin typeface="Arial" pitchFamily="34" charset="0"/>
-                <a:ea typeface="Arial" pitchFamily="34" charset="-122"/>
-                <a:cs typeface="Arial" pitchFamily="34" charset="-120"/>
-              </a:rPr>
-              <a:t>El flujo de trabajo profesional tiene tres tiempos</a:t>
-            </a:r>
-            <a:endParaRPr lang="en-US" sz="3200" dirty="0"/>
-          </a:p>
-        </p:txBody>
-      </p:sp>
-      <p:sp>
-        <p:nvSpPr>
-          <p:cNvPr id="3" name="Text 1"/>
-          <p:cNvSpPr txBox="1"/>
-          <p:nvPr/>
-        </p:nvSpPr>
-        <p:spPr>
-          <a:xfrm>
-            <a:off x="566928" y="1280160"/>
-            <a:ext cx="9960559" cy="365760"/>
-          </a:xfrm>
-          <a:prstGeom prst="rect">
-            <a:avLst/>
-          </a:prstGeom>
-          <a:noFill/>
-          <a:ln/>
-        </p:spPr>
-        <p:txBody>
-          <a:bodyPr wrap="square" lIns="0" tIns="0" rIns="0" bIns="0" rtlCol="0" anchor="t"/>
-          <a:lstStyle/>
-          <a:p>
-            <a:pPr indent="0" marL="0">
-              <a:buNone/>
-            </a:pPr>
-            <a:r>
-              <a:rPr lang="en-US" sz="1500" dirty="0">
-                <a:solidFill>
-                  <a:srgbClr val="5A6B73"/>
-                </a:solidFill>
-                <a:latin typeface="Calibri" pitchFamily="34" charset="0"/>
-                <a:ea typeface="Calibri" pitchFamily="34" charset="-122"/>
-                <a:cs typeface="Calibri" pitchFamily="34" charset="-120"/>
-              </a:rPr>
-              <a:t>El orden no es una sugerencia. Es lo que convierte el ejercicio en un trabajo defendible.</a:t>
-            </a:r>
-            <a:endParaRPr lang="en-US" sz="1500" dirty="0"/>
-          </a:p>
-        </p:txBody>
-      </p:sp>
-      <p:sp>
-        <p:nvSpPr>
-          <p:cNvPr id="4" name="Shape 2"/>
-          <p:cNvSpPr/>
-          <p:nvPr/>
-        </p:nvSpPr>
-        <p:spPr>
-          <a:xfrm>
-            <a:off x="566928" y="2011680"/>
-            <a:ext cx="3503066" cy="2623058"/>
-          </a:xfrm>
-          <a:prstGeom prst="roundRect">
-            <a:avLst>
-              <a:gd name="adj" fmla="val 2789"/>
-            </a:avLst>
-          </a:prstGeom>
-          <a:solidFill>
-            <a:srgbClr val="F2F5F6"/>
-          </a:solidFill>
-          <a:ln w="12700">
-            <a:solidFill>
-              <a:srgbClr val="F2F5F6"/>
-            </a:solidFill>
-            <a:prstDash val="solid"/>
-          </a:ln>
-        </p:spPr>
-      </p:sp>
-      <p:sp>
-        <p:nvSpPr>
-          <p:cNvPr id="5" name="Shape 3"/>
-          <p:cNvSpPr/>
-          <p:nvPr/>
-        </p:nvSpPr>
-        <p:spPr>
-          <a:xfrm>
-            <a:off x="804672" y="2231136"/>
-            <a:ext cx="420624" cy="420624"/>
-          </a:xfrm>
-          <a:prstGeom prst="ellipse">
-            <a:avLst/>
-          </a:prstGeom>
-          <a:solidFill>
-            <a:srgbClr val="2E7D7D"/>
-          </a:solidFill>
-          <a:ln w="12700">
-            <a:solidFill>
-              <a:srgbClr val="2E7D7D"/>
-            </a:solidFill>
-            <a:prstDash val="solid"/>
-          </a:ln>
-        </p:spPr>
-      </p:sp>
-      <p:sp>
-        <p:nvSpPr>
-          <p:cNvPr id="6" name="Text 4"/>
-          <p:cNvSpPr txBox="1"/>
-          <p:nvPr/>
-        </p:nvSpPr>
-        <p:spPr>
-          <a:xfrm>
-            <a:off x="804672" y="2231136"/>
-            <a:ext cx="420624" cy="420624"/>
-          </a:xfrm>
-          <a:prstGeom prst="rect">
-            <a:avLst/>
-          </a:prstGeom>
-          <a:noFill/>
-          <a:ln/>
-        </p:spPr>
-        <p:txBody>
-          <a:bodyPr wrap="square" lIns="0" tIns="0" rIns="0" bIns="0" rtlCol="0" anchor="ctr"/>
-          <a:lstStyle/>
-          <a:p>
-            <a:pPr algn="ctr" indent="0" marL="0">
-              <a:buNone/>
-            </a:pPr>
-            <a:r>
-              <a:rPr lang="en-US" sz="1400" b="1" dirty="0">
-                <a:solidFill>
-                  <a:srgbClr val="FFFFFF"/>
-                </a:solidFill>
-                <a:latin typeface="Arial" pitchFamily="34" charset="0"/>
-                <a:ea typeface="Arial" pitchFamily="34" charset="-122"/>
-                <a:cs typeface="Arial" pitchFamily="34" charset="-120"/>
-              </a:rPr>
-              <a:t>1</a:t>
-            </a:r>
-            <a:endParaRPr lang="en-US" sz="1400" dirty="0"/>
-          </a:p>
-        </p:txBody>
-      </p:sp>
-      <p:sp>
-        <p:nvSpPr>
-          <p:cNvPr id="7" name="Text 5"/>
-          <p:cNvSpPr txBox="1"/>
-          <p:nvPr/>
-        </p:nvSpPr>
-        <p:spPr>
-          <a:xfrm>
-            <a:off x="804672" y="2798064"/>
-            <a:ext cx="3027578" cy="457200"/>
-          </a:xfrm>
-          <a:prstGeom prst="rect">
-            <a:avLst/>
-          </a:prstGeom>
-          <a:noFill/>
-          <a:ln/>
-        </p:spPr>
-        <p:txBody>
-          <a:bodyPr wrap="square" lIns="0" tIns="0" rIns="0" bIns="0" rtlCol="0" anchor="t"/>
-          <a:lstStyle/>
-          <a:p>
-            <a:pPr indent="0" marL="0">
-              <a:buNone/>
-            </a:pPr>
-            <a:r>
-              <a:rPr lang="en-US" sz="1600" b="1" dirty="0">
-                <a:solidFill>
-                  <a:srgbClr val="16262E"/>
-                </a:solidFill>
-                <a:latin typeface="Arial" pitchFamily="34" charset="0"/>
-                <a:ea typeface="Arial" pitchFamily="34" charset="-122"/>
-                <a:cs typeface="Arial" pitchFamily="34" charset="-120"/>
-              </a:rPr>
-              <a:t>La herramienta propone</a:t>
-            </a:r>
-            <a:endParaRPr lang="en-US" sz="1600" dirty="0"/>
-          </a:p>
-        </p:txBody>
-      </p:sp>
-      <p:sp>
-        <p:nvSpPr>
-          <p:cNvPr id="8" name="Text 6"/>
-          <p:cNvSpPr txBox="1"/>
-          <p:nvPr/>
-        </p:nvSpPr>
-        <p:spPr>
-          <a:xfrm>
-            <a:off x="804672" y="3273552"/>
-            <a:ext cx="3027578" cy="1123442"/>
-          </a:xfrm>
-          <a:prstGeom prst="rect">
-            <a:avLst/>
-          </a:prstGeom>
-          <a:noFill/>
-          <a:ln/>
-        </p:spPr>
-        <p:txBody>
-          <a:bodyPr wrap="square" lIns="0" tIns="0" rIns="0" bIns="0" rtlCol="0" anchor="t"/>
-          <a:lstStyle/>
-          <a:p>
-            <a:pPr indent="0" marL="0">
-              <a:lnSpc>
-                <a:spcPct val="110000"/>
-              </a:lnSpc>
-              <a:buNone/>
-            </a:pPr>
-            <a:r>
-              <a:rPr lang="en-US" sz="1300" dirty="0">
-                <a:solidFill>
-                  <a:srgbClr val="16262E"/>
-                </a:solidFill>
-                <a:latin typeface="Calibri" pitchFamily="34" charset="0"/>
-                <a:ea typeface="Calibri" pitchFamily="34" charset="-122"/>
-                <a:cs typeface="Calibri" pitchFamily="34" charset="-120"/>
-              </a:rPr>
-              <a:t>Se le da una muestra de los registros y se le pide un libro de códigos: categorías, con su definición y con ejemplos.</a:t>
-            </a:r>
-            <a:endParaRPr lang="en-US" sz="1300" dirty="0"/>
-          </a:p>
-          <a:p>
-            <a:pPr indent="0" marL="0">
-              <a:lnSpc>
-                <a:spcPct val="110000"/>
-              </a:lnSpc>
-              <a:buNone/>
-            </a:pPr>
-            <a:endParaRPr lang="en-US" sz="1300" dirty="0"/>
-          </a:p>
-          <a:p>
-            <a:pPr indent="0" marL="0">
-              <a:lnSpc>
-                <a:spcPct val="110000"/>
-              </a:lnSpc>
-              <a:buNone/>
-            </a:pPr>
-            <a:r>
-              <a:rPr lang="en-US" sz="1300" dirty="0">
-                <a:solidFill>
-                  <a:srgbClr val="16262E"/>
-                </a:solidFill>
-                <a:latin typeface="Calibri" pitchFamily="34" charset="0"/>
-                <a:ea typeface="Calibri" pitchFamily="34" charset="-122"/>
-                <a:cs typeface="Calibri" pitchFamily="34" charset="-120"/>
-              </a:rPr>
-              <a:t>Aquí la herramienta hace lo que hace bien, que es encontrar patrones en volumen.</a:t>
-            </a:r>
-            <a:endParaRPr lang="en-US" sz="1300" dirty="0"/>
-          </a:p>
-        </p:txBody>
-      </p:sp>
-      <p:sp>
-        <p:nvSpPr>
-          <p:cNvPr id="9" name="Shape 7"/>
-          <p:cNvSpPr/>
-          <p:nvPr/>
-        </p:nvSpPr>
-        <p:spPr>
-          <a:xfrm>
-            <a:off x="4344314" y="2011680"/>
-            <a:ext cx="3503066" cy="2623058"/>
-          </a:xfrm>
-          <a:prstGeom prst="roundRect">
-            <a:avLst>
-              <a:gd name="adj" fmla="val 2789"/>
-            </a:avLst>
-          </a:prstGeom>
-          <a:solidFill>
-            <a:srgbClr val="F7E4D8"/>
-          </a:solidFill>
-          <a:ln w="12700">
-            <a:solidFill>
-              <a:srgbClr val="F7E4D8"/>
-            </a:solidFill>
-            <a:prstDash val="solid"/>
-          </a:ln>
-        </p:spPr>
-      </p:sp>
-      <p:sp>
-        <p:nvSpPr>
-          <p:cNvPr id="10" name="Shape 8"/>
-          <p:cNvSpPr/>
-          <p:nvPr/>
-        </p:nvSpPr>
-        <p:spPr>
-          <a:xfrm>
-            <a:off x="4582058" y="2231136"/>
-            <a:ext cx="420624" cy="420624"/>
-          </a:xfrm>
-          <a:prstGeom prst="ellipse">
-            <a:avLst/>
-          </a:prstGeom>
-          <a:solidFill>
-            <a:srgbClr val="C85A28"/>
-          </a:solidFill>
-          <a:ln w="12700">
-            <a:solidFill>
-              <a:srgbClr val="C85A28"/>
-            </a:solidFill>
-            <a:prstDash val="solid"/>
-          </a:ln>
-        </p:spPr>
-      </p:sp>
-      <p:sp>
-        <p:nvSpPr>
-          <p:cNvPr id="11" name="Text 9"/>
-          <p:cNvSpPr txBox="1"/>
-          <p:nvPr/>
-        </p:nvSpPr>
-        <p:spPr>
-          <a:xfrm>
-            <a:off x="4582058" y="2231136"/>
-            <a:ext cx="420624" cy="420624"/>
-          </a:xfrm>
-          <a:prstGeom prst="rect">
-            <a:avLst/>
-          </a:prstGeom>
-          <a:noFill/>
-          <a:ln/>
-        </p:spPr>
-        <p:txBody>
-          <a:bodyPr wrap="square" lIns="0" tIns="0" rIns="0" bIns="0" rtlCol="0" anchor="ctr"/>
-          <a:lstStyle/>
-          <a:p>
-            <a:pPr algn="ctr" indent="0" marL="0">
-              <a:buNone/>
-            </a:pPr>
-            <a:r>
-              <a:rPr lang="en-US" sz="1400" b="1" dirty="0">
-                <a:solidFill>
-                  <a:srgbClr val="FFFFFF"/>
-                </a:solidFill>
-                <a:latin typeface="Arial" pitchFamily="34" charset="0"/>
-                <a:ea typeface="Arial" pitchFamily="34" charset="-122"/>
-                <a:cs typeface="Arial" pitchFamily="34" charset="-120"/>
-              </a:rPr>
-              <a:t>2</a:t>
-            </a:r>
-            <a:endParaRPr lang="en-US" sz="1400" dirty="0"/>
-          </a:p>
-        </p:txBody>
-      </p:sp>
-      <p:sp>
-        <p:nvSpPr>
-          <p:cNvPr id="12" name="Text 10"/>
-          <p:cNvSpPr txBox="1"/>
-          <p:nvPr/>
-        </p:nvSpPr>
-        <p:spPr>
-          <a:xfrm>
-            <a:off x="4582058" y="2798064"/>
-            <a:ext cx="3027578" cy="457200"/>
-          </a:xfrm>
-          <a:prstGeom prst="rect">
-            <a:avLst/>
-          </a:prstGeom>
-          <a:noFill/>
-          <a:ln/>
-        </p:spPr>
-        <p:txBody>
-          <a:bodyPr wrap="square" lIns="0" tIns="0" rIns="0" bIns="0" rtlCol="0" anchor="t"/>
-          <a:lstStyle/>
-          <a:p>
-            <a:pPr indent="0" marL="0">
-              <a:buNone/>
-            </a:pPr>
-            <a:r>
-              <a:rPr lang="en-US" sz="1600" b="1" dirty="0">
-                <a:solidFill>
-                  <a:srgbClr val="16262E"/>
-                </a:solidFill>
-                <a:latin typeface="Arial" pitchFamily="34" charset="0"/>
-                <a:ea typeface="Arial" pitchFamily="34" charset="-122"/>
-                <a:cs typeface="Arial" pitchFamily="34" charset="-120"/>
-              </a:rPr>
-              <a:t>La persona ratifica</a:t>
-            </a:r>
-            <a:endParaRPr lang="en-US" sz="1600" dirty="0"/>
-          </a:p>
-        </p:txBody>
-      </p:sp>
-      <p:sp>
-        <p:nvSpPr>
-          <p:cNvPr id="13" name="Text 11"/>
-          <p:cNvSpPr txBox="1"/>
-          <p:nvPr/>
-        </p:nvSpPr>
-        <p:spPr>
-          <a:xfrm>
-            <a:off x="4582058" y="3273552"/>
-            <a:ext cx="3027578" cy="1123442"/>
-          </a:xfrm>
-          <a:prstGeom prst="rect">
-            <a:avLst/>
-          </a:prstGeom>
-          <a:noFill/>
-          <a:ln/>
-        </p:spPr>
-        <p:txBody>
-          <a:bodyPr wrap="square" lIns="0" tIns="0" rIns="0" bIns="0" rtlCol="0" anchor="t"/>
-          <a:lstStyle/>
-          <a:p>
-            <a:pPr indent="0" marL="0">
-              <a:lnSpc>
-                <a:spcPct val="110000"/>
-              </a:lnSpc>
-              <a:buNone/>
-            </a:pPr>
-            <a:r>
-              <a:rPr lang="en-US" sz="1300" dirty="0">
-                <a:solidFill>
-                  <a:srgbClr val="16262E"/>
-                </a:solidFill>
-                <a:latin typeface="Calibri" pitchFamily="34" charset="0"/>
-                <a:ea typeface="Calibri" pitchFamily="34" charset="-122"/>
-                <a:cs typeface="Calibri" pitchFamily="34" charset="-120"/>
-              </a:rPr>
-              <a:t>Usted revisa ese libro de códigos, elimina las categorías que se traslapan, precisa las definiciones ambiguas y agrega las que el modelo no vio.</a:t>
-            </a:r>
-            <a:endParaRPr lang="en-US" sz="1300" dirty="0"/>
-          </a:p>
-          <a:p>
-            <a:pPr indent="0" marL="0">
-              <a:lnSpc>
-                <a:spcPct val="110000"/>
-              </a:lnSpc>
-              <a:buNone/>
-            </a:pPr>
-            <a:endParaRPr lang="en-US" sz="1300" dirty="0"/>
-          </a:p>
-          <a:p>
-            <a:pPr indent="0" marL="0">
-              <a:lnSpc>
-                <a:spcPct val="110000"/>
-              </a:lnSpc>
-              <a:buNone/>
-            </a:pPr>
-            <a:r>
-              <a:rPr lang="en-US" sz="1300" dirty="0">
-                <a:solidFill>
-                  <a:srgbClr val="16262E"/>
-                </a:solidFill>
-                <a:latin typeface="Calibri" pitchFamily="34" charset="0"/>
-                <a:ea typeface="Calibri" pitchFamily="34" charset="-122"/>
-                <a:cs typeface="Calibri" pitchFamily="34" charset="-120"/>
-              </a:rPr>
-              <a:t>Este paso lo hace usted. No se delega.</a:t>
-            </a:r>
-            <a:endParaRPr lang="en-US" sz="1300" dirty="0"/>
-          </a:p>
-        </p:txBody>
-      </p:sp>
-      <p:sp>
-        <p:nvSpPr>
-          <p:cNvPr id="14" name="Shape 12"/>
-          <p:cNvSpPr/>
-          <p:nvPr/>
-        </p:nvSpPr>
-        <p:spPr>
-          <a:xfrm>
-            <a:off x="8121701" y="2011680"/>
-            <a:ext cx="3503066" cy="2623058"/>
-          </a:xfrm>
-          <a:prstGeom prst="roundRect">
-            <a:avLst>
-              <a:gd name="adj" fmla="val 2789"/>
-            </a:avLst>
-          </a:prstGeom>
-          <a:solidFill>
-            <a:srgbClr val="F2F5F6"/>
-          </a:solidFill>
-          <a:ln w="12700">
-            <a:solidFill>
-              <a:srgbClr val="F2F5F6"/>
-            </a:solidFill>
-            <a:prstDash val="solid"/>
-          </a:ln>
-        </p:spPr>
-      </p:sp>
-      <p:sp>
-        <p:nvSpPr>
-          <p:cNvPr id="15" name="Shape 13"/>
-          <p:cNvSpPr/>
-          <p:nvPr/>
-        </p:nvSpPr>
-        <p:spPr>
-          <a:xfrm>
-            <a:off x="8359445" y="2231136"/>
-            <a:ext cx="420624" cy="420624"/>
-          </a:xfrm>
-          <a:prstGeom prst="ellipse">
-            <a:avLst/>
-          </a:prstGeom>
-          <a:solidFill>
-            <a:srgbClr val="2E7D7D"/>
-          </a:solidFill>
-          <a:ln w="12700">
-            <a:solidFill>
-              <a:srgbClr val="2E7D7D"/>
-            </a:solidFill>
-            <a:prstDash val="solid"/>
-          </a:ln>
-        </p:spPr>
-      </p:sp>
-      <p:sp>
-        <p:nvSpPr>
-          <p:cNvPr id="16" name="Text 14"/>
-          <p:cNvSpPr txBox="1"/>
-          <p:nvPr/>
-        </p:nvSpPr>
-        <p:spPr>
-          <a:xfrm>
-            <a:off x="8359445" y="2231136"/>
-            <a:ext cx="420624" cy="420624"/>
-          </a:xfrm>
-          <a:prstGeom prst="rect">
-            <a:avLst/>
-          </a:prstGeom>
-          <a:noFill/>
-          <a:ln/>
-        </p:spPr>
-        <p:txBody>
-          <a:bodyPr wrap="square" lIns="0" tIns="0" rIns="0" bIns="0" rtlCol="0" anchor="ctr"/>
-          <a:lstStyle/>
-          <a:p>
-            <a:pPr algn="ctr" indent="0" marL="0">
-              <a:buNone/>
-            </a:pPr>
-            <a:r>
-              <a:rPr lang="en-US" sz="1400" b="1" dirty="0">
-                <a:solidFill>
-                  <a:srgbClr val="FFFFFF"/>
-                </a:solidFill>
-                <a:latin typeface="Arial" pitchFamily="34" charset="0"/>
-                <a:ea typeface="Arial" pitchFamily="34" charset="-122"/>
-                <a:cs typeface="Arial" pitchFamily="34" charset="-120"/>
-              </a:rPr>
-              <a:t>3</a:t>
-            </a:r>
-            <a:endParaRPr lang="en-US" sz="1400" dirty="0"/>
-          </a:p>
-        </p:txBody>
-      </p:sp>
-      <p:sp>
-        <p:nvSpPr>
-          <p:cNvPr id="17" name="Text 15"/>
-          <p:cNvSpPr txBox="1"/>
-          <p:nvPr/>
-        </p:nvSpPr>
-        <p:spPr>
-          <a:xfrm>
-            <a:off x="8359445" y="2798064"/>
-            <a:ext cx="3027578" cy="457200"/>
-          </a:xfrm>
-          <a:prstGeom prst="rect">
-            <a:avLst/>
-          </a:prstGeom>
-          <a:noFill/>
-          <a:ln/>
-        </p:spPr>
-        <p:txBody>
-          <a:bodyPr wrap="square" lIns="0" tIns="0" rIns="0" bIns="0" rtlCol="0" anchor="t"/>
-          <a:lstStyle/>
-          <a:p>
-            <a:pPr indent="0" marL="0">
-              <a:buNone/>
-            </a:pPr>
-            <a:r>
-              <a:rPr lang="en-US" sz="1600" b="1" dirty="0">
-                <a:solidFill>
-                  <a:srgbClr val="16262E"/>
-                </a:solidFill>
-                <a:latin typeface="Arial" pitchFamily="34" charset="0"/>
-                <a:ea typeface="Arial" pitchFamily="34" charset="-122"/>
-                <a:cs typeface="Arial" pitchFamily="34" charset="-120"/>
-              </a:rPr>
-              <a:t>La herramienta aplica</a:t>
-            </a:r>
-            <a:endParaRPr lang="en-US" sz="1600" dirty="0"/>
-          </a:p>
-        </p:txBody>
-      </p:sp>
-      <p:sp>
-        <p:nvSpPr>
-          <p:cNvPr id="18" name="Text 16"/>
-          <p:cNvSpPr txBox="1"/>
-          <p:nvPr/>
-        </p:nvSpPr>
-        <p:spPr>
-          <a:xfrm>
-            <a:off x="8359445" y="3273552"/>
-            <a:ext cx="3027578" cy="1123442"/>
-          </a:xfrm>
-          <a:prstGeom prst="rect">
-            <a:avLst/>
-          </a:prstGeom>
-          <a:noFill/>
-          <a:ln/>
-        </p:spPr>
-        <p:txBody>
-          <a:bodyPr wrap="square" lIns="0" tIns="0" rIns="0" bIns="0" rtlCol="0" anchor="t"/>
-          <a:lstStyle/>
-          <a:p>
-            <a:pPr indent="0" marL="0">
-              <a:lnSpc>
-                <a:spcPct val="110000"/>
-              </a:lnSpc>
-              <a:buNone/>
-            </a:pPr>
-            <a:r>
-              <a:rPr lang="en-US" sz="1300" dirty="0">
-                <a:solidFill>
-                  <a:srgbClr val="16262E"/>
-                </a:solidFill>
-                <a:latin typeface="Calibri" pitchFamily="34" charset="0"/>
-                <a:ea typeface="Calibri" pitchFamily="34" charset="-122"/>
-                <a:cs typeface="Calibri" pitchFamily="34" charset="-120"/>
-              </a:rPr>
-              <a:t>Se clasifica el conjunto completo con el libro de códigos ya ratificado, y se revisa una muestra de veinte registros para estimar qué tan bien lo hizo.</a:t>
-            </a:r>
-            <a:endParaRPr lang="en-US" sz="1300" dirty="0"/>
           </a:p>
         </p:txBody>
       </p:sp>

--- a/sesion-04/Sesion_04_PLN_Gestion_Documental.pptx
+++ b/sesion-04/Sesion_04_PLN_Gestion_Documental.pptx
@@ -4190,7 +4190,7 @@
                 <a:ea typeface="Calibri" pitchFamily="34" charset="-122"/>
                 <a:cs typeface="Calibri" pitchFamily="34" charset="-120"/>
               </a:rPr>
-              <a:t>Archivo: Registros_atencion_ciudadana_PARTICIPANTE.xlsx, hoja Registros.</a:t>
+              <a:t>Archivo: Registros_atencion_ciudadana_PARTICIPANTE.xlsx, hoja Registros. Súbelo a OneDrive y adjúntalo en Copilot Chat; si no lee la hoja, pega los registros directo.</a:t>
             </a:r>
             <a:endParaRPr lang="en-US" sz="1350" dirty="0"/>
           </a:p>
@@ -9474,7 +9474,7 @@
                 <a:ea typeface="Calibri" pitchFamily="34" charset="-122"/>
                 <a:cs typeface="Calibri" pitchFamily="34" charset="-120"/>
               </a:rPr>
-              <a:t>Toma un informe de evaluación público y pide la síntesis extractiva. Dile expresamente que transcriba oraciones textuales sin reescribirlas, y que las ponga entre comillas.</a:t>
+              <a:t>Adjunta un informe de evaluación público en Copilot Chat y pide la síntesis extractiva. Dile expresamente que transcriba oraciones textuales sin reescribirlas, y que las ponga entre comillas.</a:t>
             </a:r>
             <a:endParaRPr lang="en-US" sz="1450" dirty="0"/>
           </a:p>
@@ -11101,7 +11101,7 @@
                 <a:ea typeface="Calibri" pitchFamily="34" charset="-122"/>
                 <a:cs typeface="Calibri" pitchFamily="34" charset="-120"/>
               </a:rPr>
-              <a:t>Se hace en Copilot dentro de Excel. Plantilla en Plantillas_tabulares_curso_IA.xlsx.</a:t>
+              <a:t>Se hace en Copilot Chat con los tres documentos adjuntos. La tabla final la pegas en la plantilla de Plantillas_tabulares_curso_IA.xlsx.</a:t>
             </a:r>
             <a:endParaRPr lang="en-US" sz="1350" dirty="0"/>
           </a:p>

--- a/sesion-04/Sesion_04_PLN_Gestion_Documental.pptx
+++ b/sesion-04/Sesion_04_PLN_Gestion_Documental.pptx
@@ -11101,7 +11101,7 @@
                 <a:ea typeface="Calibri" pitchFamily="34" charset="-122"/>
                 <a:cs typeface="Calibri" pitchFamily="34" charset="-120"/>
               </a:rPr>
-              <a:t>Se hace en Copilot Chat con los tres documentos adjuntos. La tabla final la pegas en la plantilla de Plantillas_tabulares_curso_IA.xlsx.</a:t>
+              <a:t>Se hace en Copilot Chat con los tres documentos adjuntos. Las ligas están en sesion-04/Reglas_de_operacion_Practica_B.md; la tabla final va en Plantillas_tabulares_curso_IA.xlsx.</a:t>
             </a:r>
             <a:endParaRPr lang="en-US" sz="1350" dirty="0"/>
           </a:p>

--- a/sesion-04/Sesion_04_PLN_Gestion_Documental.pptx
+++ b/sesion-04/Sesion_04_PLN_Gestion_Documental.pptx
@@ -4293,7 +4293,7 @@
                 <a:ea typeface="Calibri" pitchFamily="34" charset="-122"/>
                 <a:cs typeface="Calibri" pitchFamily="34" charset="-120"/>
               </a:rPr>
-              <a:t>Quince minutos sobre transcripciones de foros de consulta.</a:t>
+              <a:t>Quince minutos sobre el archivo Transcripciones_foro_PARTICIPANTE.docx, en la carpeta de la sesión 4.</a:t>
             </a:r>
             <a:endParaRPr lang="en-US" sz="1500" dirty="0"/>
           </a:p>

--- a/sesion-04/Sesion_04_PLN_Gestion_Documental.pptx
+++ b/sesion-04/Sesion_04_PLN_Gestion_Documental.pptx
@@ -14,6 +14,8 @@
     <p:sldId id="262" r:id="rId8"/>
     <p:sldId id="263" r:id="rId9"/>
     <p:sldId id="264" r:id="rId10"/>
+    <p:sldId id="271" r:id="rId22"/>
+    <p:sldId id="272" r:id="rId23"/>
     <p:sldId id="265" r:id="rId11"/>
     <p:sldId id="266" r:id="rId12"/>
     <p:sldId id="267" r:id="rId13"/>
@@ -1086,6 +1088,206 @@
 </p:notes>
 </file>
 
+<file path=ppt/notesSlides/notesSlide16.xml><?xml version="1.0" encoding="utf-8"?>
+<p:notes xmlns:a="http://schemas.openxmlformats.org/drawingml/2006/main" xmlns:r="http://schemas.openxmlformats.org/officeDocument/2006/relationships" xmlns:p="http://schemas.openxmlformats.org/presentationml/2006/main">
+  <p:cSld>
+    <p:spTree>
+      <p:nvGrpSpPr>
+        <p:cNvPr id="1" name=""/>
+        <p:cNvGrpSpPr/>
+        <p:nvPr/>
+      </p:nvGrpSpPr>
+      <p:grpSpPr>
+        <a:xfrm>
+          <a:off x="0" y="0"/>
+          <a:ext cx="0" cy="0"/>
+          <a:chOff x="0" y="0"/>
+          <a:chExt cx="0" cy="0"/>
+        </a:xfrm>
+      </p:grpSpPr>
+      <p:sp>
+        <p:nvSpPr>
+          <p:cNvPr id="2" name="Slide Image Placeholder 1"/>
+          <p:cNvSpPr>
+            <a:spLocks noGrp="1" noRot="1" noChangeAspect="1"/>
+          </p:cNvSpPr>
+          <p:nvPr>
+            <p:ph type="sldImg"/>
+          </p:nvPr>
+        </p:nvSpPr>
+        <p:spPr/>
+      </p:sp>
+      <p:sp>
+        <p:nvSpPr>
+          <p:cNvPr id="3" name="Notes Placeholder 2"/>
+          <p:cNvSpPr>
+            <a:spLocks noGrp="1"/>
+          </p:cNvSpPr>
+          <p:nvPr>
+            <p:ph type="body" idx="1"/>
+          </p:nvPr>
+        </p:nvSpPr>
+        <p:spPr/>
+        <p:txBody>
+          <a:bodyPr/>
+          <a:lstStyle/>
+          <a:p>
+            <a:r>
+              <a:rPr lang="en-US" dirty="0"/>
+              <a:t>Seis minutos. La frase que tienen que salir diciendo es «frecuente aquí, raro en el resto».</a:t>
+            </a:r>
+          </a:p>
+          <a:p>
+            <a:r>
+              <a:rPr lang="en-US" dirty="0"/>
+              <a:t>Los conteos son reales: se calcularon sobre los 118 registros que ellos van a clasificar en la Práctica C.</a:t>
+            </a:r>
+          </a:p>
+          <a:p>
+            <a:r>
+              <a:rPr lang="en-US" dirty="0"/>
+              <a:t>El remate es el que importa para la evaluación: la minoría no se pierde por descuido del modelo, se pierde por cómo está construida la medida. Enlaza con el sesgo de mayoría de la sesión 1.</a:t>
+            </a:r>
+          </a:p>
+          <a:p>
+            <a:r>
+              <a:rPr lang="en-US" dirty="0"/>
+              <a:t>Si alguien del área de ciencia de datos pregunta por la fórmula, remítelo al anexo y a la charla del receso: en clase no se escribe ninguna fórmula.</a:t>
+            </a:r>
+          </a:p>
+        </p:txBody>
+      </p:sp>
+      <p:sp>
+        <p:nvSpPr>
+          <p:cNvPr id="4" name="Slide Number Placeholder 3"/>
+          <p:cNvSpPr>
+            <a:spLocks noGrp="1"/>
+          </p:cNvSpPr>
+          <p:nvPr>
+            <p:ph type="sldNum" sz="quarter" idx="10"/>
+          </p:nvPr>
+        </p:nvSpPr>
+        <p:spPr/>
+        <p:txBody>
+          <a:bodyPr/>
+          <a:lstStyle/>
+          <a:p>
+            <a:fld id="{A7C21451-1387-4CA6-816F-3879F97B5CB2}" type="slidenum">
+              <a:rPr lang="en-US"/>
+              <a:t>10</a:t>
+            </a:fld>
+            <a:endParaRPr lang="en-US"/>
+          </a:p>
+        </p:txBody>
+      </p:sp>
+    </p:spTree>
+  </p:cSld>
+  <p:clrMapOvr>
+    <a:masterClrMapping/>
+  </p:clrMapOvr>
+</p:notes>
+</file>
+
+<file path=ppt/notesSlides/notesSlide17.xml><?xml version="1.0" encoding="utf-8"?>
+<p:notes xmlns:a="http://schemas.openxmlformats.org/drawingml/2006/main" xmlns:r="http://schemas.openxmlformats.org/officeDocument/2006/relationships" xmlns:p="http://schemas.openxmlformats.org/presentationml/2006/main">
+  <p:cSld>
+    <p:spTree>
+      <p:nvGrpSpPr>
+        <p:cNvPr id="1" name=""/>
+        <p:cNvGrpSpPr/>
+        <p:nvPr/>
+      </p:nvGrpSpPr>
+      <p:grpSpPr>
+        <a:xfrm>
+          <a:off x="0" y="0"/>
+          <a:ext cx="0" cy="0"/>
+          <a:chOff x="0" y="0"/>
+          <a:chExt cx="0" cy="0"/>
+        </a:xfrm>
+      </p:grpSpPr>
+      <p:sp>
+        <p:nvSpPr>
+          <p:cNvPr id="2" name="Slide Image Placeholder 1"/>
+          <p:cNvSpPr>
+            <a:spLocks noGrp="1" noRot="1" noChangeAspect="1"/>
+          </p:cNvSpPr>
+          <p:nvPr>
+            <p:ph type="sldImg"/>
+          </p:nvPr>
+        </p:nvSpPr>
+        <p:spPr/>
+      </p:sp>
+      <p:sp>
+        <p:nvSpPr>
+          <p:cNvPr id="3" name="Notes Placeholder 2"/>
+          <p:cNvSpPr>
+            <a:spLocks noGrp="1"/>
+          </p:cNvSpPr>
+          <p:nvPr>
+            <p:ph type="body" idx="1"/>
+          </p:nvPr>
+        </p:nvSpPr>
+        <p:spPr/>
+        <p:txBody>
+          <a:bodyPr/>
+          <a:lstStyle/>
+          <a:p>
+            <a:r>
+              <a:rPr lang="en-US" dirty="0"/>
+              <a:t>Seis minutos. Lee las cuatro citas en voz alta antes de explicar nada: el grupo suele detectar solo el par que comparte palabras.</a:t>
+            </a:r>
+          </a:p>
+          <a:p>
+            <a:r>
+              <a:rPr lang="en-US" dirty="0"/>
+              <a:t>La pregunta que abre la discusión: ¿cuál de los dos errores es más caro en una evaluación? Normalmente llegan a que juntar temas distintos infla una categoría y separar el mismo tema esconde un problema.</a:t>
+            </a:r>
+          </a:p>
+          <a:p>
+            <a:r>
+              <a:rPr lang="en-US" dirty="0"/>
+              <a:t>Aquí se anuncia la charla opcional del receso, de diez minutos, sobre el anexo visual: sesion-04/Anexo_De_las_palabras_a_los_numeros.pptx.</a:t>
+            </a:r>
+          </a:p>
+          <a:p>
+            <a:r>
+              <a:rPr lang="en-US" dirty="0"/>
+              <a:t>Gower solo se nombra, no se explica. Es el gancho del Módulo III para quienes trabajan con padrones y tablas.</a:t>
+            </a:r>
+          </a:p>
+        </p:txBody>
+      </p:sp>
+      <p:sp>
+        <p:nvSpPr>
+          <p:cNvPr id="4" name="Slide Number Placeholder 3"/>
+          <p:cNvSpPr>
+            <a:spLocks noGrp="1"/>
+          </p:cNvSpPr>
+          <p:nvPr>
+            <p:ph type="sldNum" sz="quarter" idx="10"/>
+          </p:nvPr>
+        </p:nvSpPr>
+        <p:spPr/>
+        <p:txBody>
+          <a:bodyPr/>
+          <a:lstStyle/>
+          <a:p>
+            <a:fld id="{A7C21451-1387-4CA6-816F-3879F97B5CB2}" type="slidenum">
+              <a:rPr lang="en-US"/>
+              <a:t>11</a:t>
+            </a:fld>
+            <a:endParaRPr lang="en-US"/>
+          </a:p>
+        </p:txBody>
+      </p:sp>
+    </p:spTree>
+  </p:cSld>
+  <p:clrMapOvr>
+    <a:masterClrMapping/>
+  </p:clrMapOvr>
+</p:notes>
+</file>
+
 <file path=ppt/notesSlides/notesSlide2.xml><?xml version="1.0" encoding="utf-8"?>
 <p:notes xmlns:a="http://schemas.openxmlformats.org/drawingml/2006/main" xmlns:r="http://schemas.openxmlformats.org/officeDocument/2006/relationships" xmlns:p="http://schemas.openxmlformats.org/presentationml/2006/main">
   <p:cSld>
@@ -6482,9 +6684,9 @@
 </p:sld>
 </file>
 
-<file path=ppt/slides/slide2.xml><?xml version="1.0" encoding="utf-8"?>
+<file path=ppt/slides/slide16.xml><?xml version="1.0" encoding="utf-8"?>
 <p:sld xmlns:a="http://schemas.openxmlformats.org/drawingml/2006/main" xmlns:r="http://schemas.openxmlformats.org/officeDocument/2006/relationships" xmlns:p="http://schemas.openxmlformats.org/presentationml/2006/main">
-  <p:cSld name="Slide 2">
+  <p:cSld name="TF-IDF">
     <p:spTree>
       <p:nvGrpSpPr>
         <p:cNvPr id="1" name=""/>
@@ -6501,14 +6703,14 @@
       </p:grpSpPr>
       <p:sp>
         <p:nvSpPr>
-          <p:cNvPr id="2" name="Text 0"/>
+          <p:cNvPr id="2" name="Text"/>
           <p:cNvSpPr txBox="1"/>
           <p:nvPr/>
         </p:nvSpPr>
         <p:spPr>
           <a:xfrm>
             <a:off x="566928" y="402336"/>
-            <a:ext cx="9229039" cy="749808"/>
+            <a:ext cx="11057839" cy="749808"/>
           </a:xfrm>
           <a:prstGeom prst="rect">
             <a:avLst/>
@@ -6532,7 +6734,7 @@
                 <a:ea typeface="Arial" pitchFamily="34" charset="-122"/>
                 <a:cs typeface="Arial" pitchFamily="34" charset="-120"/>
               </a:rPr>
-              <a:t>Cómo vamos a usar los 150 minutos</a:t>
+              <a:t>Cómo decide la máquina que dos textos se parecen</a:t>
             </a:r>
             <a:endParaRPr lang="en-US" sz="3200" dirty="0"/>
           </a:p>
@@ -6540,18 +6742,585 @@
       </p:sp>
       <p:sp>
         <p:nvSpPr>
-          <p:cNvPr id="3" name="Shape 1"/>
+          <p:cNvPr id="3" name="Text"/>
+          <p:cNvSpPr txBox="1"/>
+          <p:nvPr/>
+        </p:nvSpPr>
+        <p:spPr>
+          <a:xfrm>
+            <a:off x="566928" y="1280160"/>
+            <a:ext cx="11057839" cy="731520"/>
+          </a:xfrm>
+          <a:prstGeom prst="rect">
+            <a:avLst/>
+          </a:prstGeom>
+          <a:noFill/>
+          <a:ln/>
+        </p:spPr>
+        <p:txBody>
+          <a:bodyPr wrap="square" lIns="0" tIns="0" rIns="0" bIns="0" rtlCol="0" anchor="t"/>
+          <a:lstStyle/>
+          <a:p>
+            <a:pPr indent="0" marL="0">
+              <a:buNone/>
+            </a:pPr>
+            <a:r>
+              <a:rPr lang="en-US" sz="1500" dirty="0">
+                <a:solidFill>
+                  <a:srgbClr val="5A6B73"/>
+                </a:solidFill>
+                <a:latin typeface="Calibri" pitchFamily="34" charset="0"/>
+                <a:ea typeface="Calibri" pitchFamily="34" charset="-122"/>
+                <a:cs typeface="Calibri" pitchFamily="34" charset="-120"/>
+              </a:rPr>
+              <a:t>No lee: cuenta palabras y las pesa. Estos son los conteos reales de tus 118 registros de atención ciudadana.</a:t>
+            </a:r>
+            <a:endParaRPr lang="en-US" sz="1500" dirty="0"/>
+          </a:p>
+        </p:txBody>
+      </p:sp>
+      <p:sp>
+        <p:nvSpPr>
+          <p:cNvPr id="4" name="Shape"/>
           <p:cNvSpPr/>
           <p:nvPr/>
         </p:nvSpPr>
         <p:spPr>
           <a:xfrm>
-            <a:off x="9485071" y="457200"/>
-            <a:ext cx="2139696" cy="347472"/>
+            <a:off x="566928" y="1900000"/>
+            <a:ext cx="5460655" cy="3350000"/>
+          </a:xfrm>
+          <a:prstGeom prst="roundRect">
+            <a:avLst>
+              <a:gd name="adj" fmla="val 2933"/>
+            </a:avLst>
+          </a:prstGeom>
+          <a:solidFill>
+            <a:srgbClr val="D7E7E7"/>
+          </a:solidFill>
+          <a:ln w="12700">
+            <a:solidFill>
+              <a:srgbClr val="D7E7E7"/>
+            </a:solidFill>
+            <a:prstDash val="solid"/>
+          </a:ln>
+        </p:spPr>
+      </p:sp>
+      <p:sp>
+        <p:nvSpPr>
+          <p:cNvPr id="5" name="Text"/>
+          <p:cNvSpPr txBox="1"/>
+          <p:nvPr/>
+        </p:nvSpPr>
+        <p:spPr>
+          <a:xfrm>
+            <a:off x="841248" y="2100000"/>
+            <a:ext cx="4912015" cy="365760"/>
+          </a:xfrm>
+          <a:prstGeom prst="rect">
+            <a:avLst/>
+          </a:prstGeom>
+          <a:noFill/>
+          <a:ln/>
+        </p:spPr>
+        <p:txBody>
+          <a:bodyPr wrap="square" lIns="0" tIns="0" rIns="0" bIns="0" rtlCol="0" anchor="t"/>
+          <a:lstStyle/>
+          <a:p>
+            <a:pPr indent="0" marL="0">
+              <a:buNone/>
+            </a:pPr>
+            <a:r>
+              <a:rPr lang="en-US" sz="1700" b="1" dirty="0">
+                <a:solidFill>
+                  <a:srgbClr val="2E7D7D"/>
+                </a:solidFill>
+                <a:latin typeface="Arial" pitchFamily="34" charset="0"/>
+                <a:ea typeface="Arial" pitchFamily="34" charset="-122"/>
+                <a:cs typeface="Arial" pitchFamily="34" charset="-120"/>
+              </a:rPr>
+              <a:t>Las que no distinguen nada</a:t>
+            </a:r>
+            <a:endParaRPr lang="en-US" sz="1700" dirty="0"/>
+          </a:p>
+        </p:txBody>
+      </p:sp>
+      <p:sp>
+        <p:nvSpPr>
+          <p:cNvPr id="6" name="Text"/>
+          <p:cNvSpPr txBox="1"/>
+          <p:nvPr/>
+        </p:nvSpPr>
+        <p:spPr>
+          <a:xfrm>
+            <a:off x="841248" y="2530000"/>
+            <a:ext cx="4912015" cy="400000"/>
+          </a:xfrm>
+          <a:prstGeom prst="rect">
+            <a:avLst/>
+          </a:prstGeom>
+          <a:noFill/>
+          <a:ln/>
+        </p:spPr>
+        <p:txBody>
+          <a:bodyPr wrap="square" lIns="0" tIns="0" rIns="0" bIns="0" rtlCol="0" anchor="t"/>
+          <a:lstStyle/>
+          <a:p>
+            <a:pPr indent="0" marL="0">
+              <a:lnSpc>
+                <a:spcPct val="110000"/>
+              </a:lnSpc>
+              <a:buNone/>
+            </a:pPr>
+            <a:r>
+              <a:rPr lang="en-US" sz="1250" dirty="0">
+                <a:solidFill>
+                  <a:srgbClr val="16262E"/>
+                </a:solidFill>
+                <a:latin typeface="Calibri" pitchFamily="34" charset="0"/>
+                <a:ea typeface="Calibri" pitchFamily="34" charset="-122"/>
+                <a:cs typeface="Calibri" pitchFamily="34" charset="-120"/>
+              </a:rPr>
+              <a:t>Están en casi todos los registros, así que no separan un tema de otro.</a:t>
+            </a:r>
+            <a:endParaRPr lang="en-US" sz="1250" dirty="0"/>
+          </a:p>
+        </p:txBody>
+      </p:sp>
+      <p:sp>
+        <p:nvSpPr>
+          <p:cNvPr id="7" name="Shape"/>
+          <p:cNvSpPr/>
+          <p:nvPr/>
+        </p:nvSpPr>
+        <p:spPr>
+          <a:xfrm>
+            <a:off x="841248" y="3050000"/>
+            <a:ext cx="3000000" cy="420000"/>
           </a:xfrm>
           <a:prstGeom prst="roundRect">
             <a:avLst>
               <a:gd name="adj" fmla="val 50000"/>
+            </a:avLst>
+          </a:prstGeom>
+          <a:solidFill>
+            <a:srgbClr val="FFFFFF"/>
+          </a:solidFill>
+          <a:ln w="12700">
+            <a:solidFill>
+              <a:srgbClr val="FFFFFF"/>
+            </a:solidFill>
+            <a:prstDash val="solid"/>
+          </a:ln>
+        </p:spPr>
+      </p:sp>
+      <p:sp>
+        <p:nvSpPr>
+          <p:cNvPr id="8" name="Text"/>
+          <p:cNvSpPr txBox="1"/>
+          <p:nvPr/>
+        </p:nvSpPr>
+        <p:spPr>
+          <a:xfrm>
+            <a:off x="841248" y="3050000"/>
+            <a:ext cx="3000000" cy="420000"/>
+          </a:xfrm>
+          <a:prstGeom prst="rect">
+            <a:avLst/>
+          </a:prstGeom>
+          <a:noFill/>
+          <a:ln/>
+        </p:spPr>
+        <p:txBody>
+          <a:bodyPr wrap="square" lIns="0" tIns="0" rIns="0" bIns="0" rtlCol="0" anchor="ctr"/>
+          <a:lstStyle/>
+          <a:p>
+            <a:pPr algn="ctr" indent="0" marL="0">
+              <a:buNone/>
+            </a:pPr>
+            <a:r>
+              <a:rPr lang="en-US" sz="1300" b="1" dirty="0">
+                <a:solidFill>
+                  <a:srgbClr val="16262E"/>
+                </a:solidFill>
+                <a:latin typeface="Arial" pitchFamily="34" charset="0"/>
+                <a:ea typeface="Arial" pitchFamily="34" charset="-122"/>
+                <a:cs typeface="Arial" pitchFamily="34" charset="-120"/>
+              </a:rPr>
+              <a:t>modulo</a:t>
+            </a:r>
+            <a:endParaRPr lang="en-US" sz="1300" dirty="0"/>
+          </a:p>
+        </p:txBody>
+      </p:sp>
+      <p:sp>
+        <p:nvSpPr>
+          <p:cNvPr id="9" name="Text"/>
+          <p:cNvSpPr txBox="1"/>
+          <p:nvPr/>
+        </p:nvSpPr>
+        <p:spPr>
+          <a:xfrm>
+            <a:off x="3966928" y="3050000"/>
+            <a:ext cx="1700000" cy="420000"/>
+          </a:xfrm>
+          <a:prstGeom prst="rect">
+            <a:avLst/>
+          </a:prstGeom>
+          <a:noFill/>
+          <a:ln/>
+        </p:spPr>
+        <p:txBody>
+          <a:bodyPr wrap="square" lIns="0" tIns="0" rIns="0" bIns="0" rtlCol="0" anchor="ctr"/>
+          <a:lstStyle/>
+          <a:p>
+            <a:pPr indent="0" marL="0">
+              <a:buNone/>
+            </a:pPr>
+            <a:r>
+              <a:rPr lang="en-US" sz="1200" dirty="0">
+                <a:solidFill>
+                  <a:srgbClr val="5A6B73"/>
+                </a:solidFill>
+                <a:latin typeface="Calibri" pitchFamily="34" charset="0"/>
+                <a:ea typeface="Calibri" pitchFamily="34" charset="-122"/>
+                <a:cs typeface="Calibri" pitchFamily="34" charset="-120"/>
+              </a:rPr>
+              <a:t>14 de 118</a:t>
+            </a:r>
+            <a:endParaRPr lang="en-US" sz="1200" dirty="0"/>
+          </a:p>
+        </p:txBody>
+      </p:sp>
+      <p:sp>
+        <p:nvSpPr>
+          <p:cNvPr id="10" name="Shape"/>
+          <p:cNvSpPr/>
+          <p:nvPr/>
+        </p:nvSpPr>
+        <p:spPr>
+          <a:xfrm>
+            <a:off x="841248" y="3540000"/>
+            <a:ext cx="3000000" cy="420000"/>
+          </a:xfrm>
+          <a:prstGeom prst="roundRect">
+            <a:avLst>
+              <a:gd name="adj" fmla="val 50000"/>
+            </a:avLst>
+          </a:prstGeom>
+          <a:solidFill>
+            <a:srgbClr val="FFFFFF"/>
+          </a:solidFill>
+          <a:ln w="12700">
+            <a:solidFill>
+              <a:srgbClr val="FFFFFF"/>
+            </a:solidFill>
+            <a:prstDash val="solid"/>
+          </a:ln>
+        </p:spPr>
+      </p:sp>
+      <p:sp>
+        <p:nvSpPr>
+          <p:cNvPr id="11" name="Text"/>
+          <p:cNvSpPr txBox="1"/>
+          <p:nvPr/>
+        </p:nvSpPr>
+        <p:spPr>
+          <a:xfrm>
+            <a:off x="841248" y="3540000"/>
+            <a:ext cx="3000000" cy="420000"/>
+          </a:xfrm>
+          <a:prstGeom prst="rect">
+            <a:avLst/>
+          </a:prstGeom>
+          <a:noFill/>
+          <a:ln/>
+        </p:spPr>
+        <p:txBody>
+          <a:bodyPr wrap="square" lIns="0" tIns="0" rIns="0" bIns="0" rtlCol="0" anchor="ctr"/>
+          <a:lstStyle/>
+          <a:p>
+            <a:pPr algn="ctr" indent="0" marL="0">
+              <a:buNone/>
+            </a:pPr>
+            <a:r>
+              <a:rPr lang="en-US" sz="1300" b="1" dirty="0">
+                <a:solidFill>
+                  <a:srgbClr val="16262E"/>
+                </a:solidFill>
+                <a:latin typeface="Arial" pitchFamily="34" charset="0"/>
+                <a:ea typeface="Arial" pitchFamily="34" charset="-122"/>
+                <a:cs typeface="Arial" pitchFamily="34" charset="-120"/>
+              </a:rPr>
+              <a:t>tarjeta</a:t>
+            </a:r>
+            <a:endParaRPr lang="en-US" sz="1300" dirty="0"/>
+          </a:p>
+        </p:txBody>
+      </p:sp>
+      <p:sp>
+        <p:nvSpPr>
+          <p:cNvPr id="12" name="Text"/>
+          <p:cNvSpPr txBox="1"/>
+          <p:nvPr/>
+        </p:nvSpPr>
+        <p:spPr>
+          <a:xfrm>
+            <a:off x="3966928" y="3540000"/>
+            <a:ext cx="1700000" cy="420000"/>
+          </a:xfrm>
+          <a:prstGeom prst="rect">
+            <a:avLst/>
+          </a:prstGeom>
+          <a:noFill/>
+          <a:ln/>
+        </p:spPr>
+        <p:txBody>
+          <a:bodyPr wrap="square" lIns="0" tIns="0" rIns="0" bIns="0" rtlCol="0" anchor="ctr"/>
+          <a:lstStyle/>
+          <a:p>
+            <a:pPr indent="0" marL="0">
+              <a:buNone/>
+            </a:pPr>
+            <a:r>
+              <a:rPr lang="en-US" sz="1200" dirty="0">
+                <a:solidFill>
+                  <a:srgbClr val="5A6B73"/>
+                </a:solidFill>
+                <a:latin typeface="Calibri" pitchFamily="34" charset="0"/>
+                <a:ea typeface="Calibri" pitchFamily="34" charset="-122"/>
+                <a:cs typeface="Calibri" pitchFamily="34" charset="-120"/>
+              </a:rPr>
+              <a:t>12 de 118</a:t>
+            </a:r>
+            <a:endParaRPr lang="en-US" sz="1200" dirty="0"/>
+          </a:p>
+        </p:txBody>
+      </p:sp>
+      <p:sp>
+        <p:nvSpPr>
+          <p:cNvPr id="13" name="Shape"/>
+          <p:cNvSpPr/>
+          <p:nvPr/>
+        </p:nvSpPr>
+        <p:spPr>
+          <a:xfrm>
+            <a:off x="841248" y="4030000"/>
+            <a:ext cx="3000000" cy="420000"/>
+          </a:xfrm>
+          <a:prstGeom prst="roundRect">
+            <a:avLst>
+              <a:gd name="adj" fmla="val 50000"/>
+            </a:avLst>
+          </a:prstGeom>
+          <a:solidFill>
+            <a:srgbClr val="FFFFFF"/>
+          </a:solidFill>
+          <a:ln w="12700">
+            <a:solidFill>
+              <a:srgbClr val="FFFFFF"/>
+            </a:solidFill>
+            <a:prstDash val="solid"/>
+          </a:ln>
+        </p:spPr>
+      </p:sp>
+      <p:sp>
+        <p:nvSpPr>
+          <p:cNvPr id="14" name="Text"/>
+          <p:cNvSpPr txBox="1"/>
+          <p:nvPr/>
+        </p:nvSpPr>
+        <p:spPr>
+          <a:xfrm>
+            <a:off x="841248" y="4030000"/>
+            <a:ext cx="3000000" cy="420000"/>
+          </a:xfrm>
+          <a:prstGeom prst="rect">
+            <a:avLst/>
+          </a:prstGeom>
+          <a:noFill/>
+          <a:ln/>
+        </p:spPr>
+        <p:txBody>
+          <a:bodyPr wrap="square" lIns="0" tIns="0" rIns="0" bIns="0" rtlCol="0" anchor="ctr"/>
+          <a:lstStyle/>
+          <a:p>
+            <a:pPr algn="ctr" indent="0" marL="0">
+              <a:buNone/>
+            </a:pPr>
+            <a:r>
+              <a:rPr lang="en-US" sz="1300" b="1" dirty="0">
+                <a:solidFill>
+                  <a:srgbClr val="16262E"/>
+                </a:solidFill>
+                <a:latin typeface="Arial" pitchFamily="34" charset="0"/>
+                <a:ea typeface="Arial" pitchFamily="34" charset="-122"/>
+                <a:cs typeface="Arial" pitchFamily="34" charset="-120"/>
+              </a:rPr>
+              <a:t>tramite</a:t>
+            </a:r>
+            <a:endParaRPr lang="en-US" sz="1300" dirty="0"/>
+          </a:p>
+        </p:txBody>
+      </p:sp>
+      <p:sp>
+        <p:nvSpPr>
+          <p:cNvPr id="15" name="Text"/>
+          <p:cNvSpPr txBox="1"/>
+          <p:nvPr/>
+        </p:nvSpPr>
+        <p:spPr>
+          <a:xfrm>
+            <a:off x="3966928" y="4030000"/>
+            <a:ext cx="1700000" cy="420000"/>
+          </a:xfrm>
+          <a:prstGeom prst="rect">
+            <a:avLst/>
+          </a:prstGeom>
+          <a:noFill/>
+          <a:ln/>
+        </p:spPr>
+        <p:txBody>
+          <a:bodyPr wrap="square" lIns="0" tIns="0" rIns="0" bIns="0" rtlCol="0" anchor="ctr"/>
+          <a:lstStyle/>
+          <a:p>
+            <a:pPr indent="0" marL="0">
+              <a:buNone/>
+            </a:pPr>
+            <a:r>
+              <a:rPr lang="en-US" sz="1200" dirty="0">
+                <a:solidFill>
+                  <a:srgbClr val="5A6B73"/>
+                </a:solidFill>
+                <a:latin typeface="Calibri" pitchFamily="34" charset="0"/>
+                <a:ea typeface="Calibri" pitchFamily="34" charset="-122"/>
+                <a:cs typeface="Calibri" pitchFamily="34" charset="-120"/>
+              </a:rPr>
+              <a:t>10 de 118</a:t>
+            </a:r>
+            <a:endParaRPr lang="en-US" sz="1200" dirty="0"/>
+          </a:p>
+        </p:txBody>
+      </p:sp>
+      <p:sp>
+        <p:nvSpPr>
+          <p:cNvPr id="16" name="Shape"/>
+          <p:cNvSpPr/>
+          <p:nvPr/>
+        </p:nvSpPr>
+        <p:spPr>
+          <a:xfrm>
+            <a:off x="841248" y="4520000"/>
+            <a:ext cx="3000000" cy="420000"/>
+          </a:xfrm>
+          <a:prstGeom prst="roundRect">
+            <a:avLst>
+              <a:gd name="adj" fmla="val 50000"/>
+            </a:avLst>
+          </a:prstGeom>
+          <a:solidFill>
+            <a:srgbClr val="FFFFFF"/>
+          </a:solidFill>
+          <a:ln w="12700">
+            <a:solidFill>
+              <a:srgbClr val="FFFFFF"/>
+            </a:solidFill>
+            <a:prstDash val="solid"/>
+          </a:ln>
+        </p:spPr>
+      </p:sp>
+      <p:sp>
+        <p:nvSpPr>
+          <p:cNvPr id="17" name="Text"/>
+          <p:cNvSpPr txBox="1"/>
+          <p:nvPr/>
+        </p:nvSpPr>
+        <p:spPr>
+          <a:xfrm>
+            <a:off x="841248" y="4520000"/>
+            <a:ext cx="3000000" cy="420000"/>
+          </a:xfrm>
+          <a:prstGeom prst="rect">
+            <a:avLst/>
+          </a:prstGeom>
+          <a:noFill/>
+          <a:ln/>
+        </p:spPr>
+        <p:txBody>
+          <a:bodyPr wrap="square" lIns="0" tIns="0" rIns="0" bIns="0" rtlCol="0" anchor="ctr"/>
+          <a:lstStyle/>
+          <a:p>
+            <a:pPr algn="ctr" indent="0" marL="0">
+              <a:buNone/>
+            </a:pPr>
+            <a:r>
+              <a:rPr lang="en-US" sz="1300" b="1" dirty="0">
+                <a:solidFill>
+                  <a:srgbClr val="16262E"/>
+                </a:solidFill>
+                <a:latin typeface="Arial" pitchFamily="34" charset="0"/>
+                <a:ea typeface="Arial" pitchFamily="34" charset="-122"/>
+                <a:cs typeface="Arial" pitchFamily="34" charset="-120"/>
+              </a:rPr>
+              <a:t>cajero</a:t>
+            </a:r>
+            <a:endParaRPr lang="en-US" sz="1300" dirty="0"/>
+          </a:p>
+        </p:txBody>
+      </p:sp>
+      <p:sp>
+        <p:nvSpPr>
+          <p:cNvPr id="18" name="Text"/>
+          <p:cNvSpPr txBox="1"/>
+          <p:nvPr/>
+        </p:nvSpPr>
+        <p:spPr>
+          <a:xfrm>
+            <a:off x="3966928" y="4520000"/>
+            <a:ext cx="1700000" cy="420000"/>
+          </a:xfrm>
+          <a:prstGeom prst="rect">
+            <a:avLst/>
+          </a:prstGeom>
+          <a:noFill/>
+          <a:ln/>
+        </p:spPr>
+        <p:txBody>
+          <a:bodyPr wrap="square" lIns="0" tIns="0" rIns="0" bIns="0" rtlCol="0" anchor="ctr"/>
+          <a:lstStyle/>
+          <a:p>
+            <a:pPr indent="0" marL="0">
+              <a:buNone/>
+            </a:pPr>
+            <a:r>
+              <a:rPr lang="en-US" sz="1200" dirty="0">
+                <a:solidFill>
+                  <a:srgbClr val="5A6B73"/>
+                </a:solidFill>
+                <a:latin typeface="Calibri" pitchFamily="34" charset="0"/>
+                <a:ea typeface="Calibri" pitchFamily="34" charset="-122"/>
+                <a:cs typeface="Calibri" pitchFamily="34" charset="-120"/>
+              </a:rPr>
+              <a:t>7 de 118</a:t>
+            </a:r>
+            <a:endParaRPr lang="en-US" sz="1200" dirty="0"/>
+          </a:p>
+        </p:txBody>
+      </p:sp>
+      <p:sp>
+        <p:nvSpPr>
+          <p:cNvPr id="19" name="Shape"/>
+          <p:cNvSpPr/>
+          <p:nvPr/>
+        </p:nvSpPr>
+        <p:spPr>
+          <a:xfrm>
+            <a:off x="6164511" y="1900000"/>
+            <a:ext cx="5460655" cy="3350000"/>
+          </a:xfrm>
+          <a:prstGeom prst="roundRect">
+            <a:avLst>
+              <a:gd name="adj" fmla="val 2933"/>
             </a:avLst>
           </a:prstGeom>
           <a:solidFill>
@@ -6567,57 +7336,1472 @@
       </p:sp>
       <p:sp>
         <p:nvSpPr>
-          <p:cNvPr id="4" name="Text 2"/>
-          <p:cNvSpPr txBox="1"/>
-          <p:nvPr/>
-        </p:nvSpPr>
-        <p:spPr>
-          <a:xfrm>
-            <a:off x="9485071" y="457200"/>
-            <a:ext cx="2139696" cy="347472"/>
-          </a:xfrm>
-          <a:prstGeom prst="rect">
-            <a:avLst/>
-          </a:prstGeom>
-          <a:noFill/>
-          <a:ln/>
-        </p:spPr>
-        <p:txBody>
-          <a:bodyPr wrap="square" lIns="0" tIns="0" rIns="0" bIns="0" rtlCol="0" anchor="ctr"/>
-          <a:lstStyle/>
-          <a:p>
-            <a:pPr algn="ctr" indent="0" marL="0">
-              <a:buNone/>
-            </a:pPr>
-            <a:r>
-              <a:rPr lang="en-US" sz="1200" b="1" dirty="0">
+          <p:cNvPr id="20" name="Text"/>
+          <p:cNvSpPr txBox="1"/>
+          <p:nvPr/>
+        </p:nvSpPr>
+        <p:spPr>
+          <a:xfrm>
+            <a:off x="6438831" y="2100000"/>
+            <a:ext cx="4912015" cy="365760"/>
+          </a:xfrm>
+          <a:prstGeom prst="rect">
+            <a:avLst/>
+          </a:prstGeom>
+          <a:noFill/>
+          <a:ln/>
+        </p:spPr>
+        <p:txBody>
+          <a:bodyPr wrap="square" lIns="0" tIns="0" rIns="0" bIns="0" rtlCol="0" anchor="t"/>
+          <a:lstStyle/>
+          <a:p>
+            <a:pPr indent="0" marL="0">
+              <a:buNone/>
+            </a:pPr>
+            <a:r>
+              <a:rPr lang="en-US" sz="1700" b="1" dirty="0">
                 <a:solidFill>
                   <a:srgbClr val="5A6B73"/>
+                </a:solidFill>
+                <a:latin typeface="Arial" pitchFamily="34" charset="0"/>
+                <a:ea typeface="Arial" pitchFamily="34" charset="-122"/>
+                <a:cs typeface="Arial" pitchFamily="34" charset="-120"/>
+              </a:rPr>
+              <a:t>Las que sí marcan un tema</a:t>
+            </a:r>
+            <a:endParaRPr lang="en-US" sz="1700" dirty="0"/>
+          </a:p>
+        </p:txBody>
+      </p:sp>
+      <p:sp>
+        <p:nvSpPr>
+          <p:cNvPr id="21" name="Text"/>
+          <p:cNvSpPr txBox="1"/>
+          <p:nvPr/>
+        </p:nvSpPr>
+        <p:spPr>
+          <a:xfrm>
+            <a:off x="6438831" y="2530000"/>
+            <a:ext cx="4912015" cy="400000"/>
+          </a:xfrm>
+          <a:prstGeom prst="rect">
+            <a:avLst/>
+          </a:prstGeom>
+          <a:noFill/>
+          <a:ln/>
+        </p:spPr>
+        <p:txBody>
+          <a:bodyPr wrap="square" lIns="0" tIns="0" rIns="0" bIns="0" rtlCol="0" anchor="t"/>
+          <a:lstStyle/>
+          <a:p>
+            <a:pPr indent="0" marL="0">
+              <a:lnSpc>
+                <a:spcPct val="110000"/>
+              </a:lnSpc>
+              <a:buNone/>
+            </a:pPr>
+            <a:r>
+              <a:rPr lang="en-US" sz="1250" dirty="0">
+                <a:solidFill>
+                  <a:srgbClr val="16262E"/>
                 </a:solidFill>
                 <a:latin typeface="Calibri" pitchFamily="34" charset="0"/>
                 <a:ea typeface="Calibri" pitchFamily="34" charset="-122"/>
                 <a:cs typeface="Calibri" pitchFamily="34" charset="-120"/>
               </a:rPr>
-              <a:t>9:00 a 11:30</a:t>
-            </a:r>
-            <a:endParaRPr lang="en-US" sz="1200" dirty="0"/>
-          </a:p>
-        </p:txBody>
-      </p:sp>
-      <p:sp>
-        <p:nvSpPr>
-          <p:cNvPr id="5" name="Shape 3"/>
+              <a:t>Son raras en el resto del corpus, y por eso pesan cuando aparecen.</a:t>
+            </a:r>
+            <a:endParaRPr lang="en-US" sz="1250" dirty="0"/>
+          </a:p>
+        </p:txBody>
+      </p:sp>
+      <p:sp>
+        <p:nvSpPr>
+          <p:cNvPr id="22" name="Shape"/>
           <p:cNvSpPr/>
           <p:nvPr/>
         </p:nvSpPr>
         <p:spPr>
           <a:xfrm>
-            <a:off x="566928" y="1408176"/>
-            <a:ext cx="5364328" cy="1081278"/>
+            <a:off x="6438831" y="3050000"/>
+            <a:ext cx="3000000" cy="420000"/>
           </a:xfrm>
           <a:prstGeom prst="roundRect">
             <a:avLst>
-              <a:gd name="adj" fmla="val 5920"/>
+              <a:gd name="adj" fmla="val 50000"/>
+            </a:avLst>
+          </a:prstGeom>
+          <a:solidFill>
+            <a:srgbClr val="FFFFFF"/>
+          </a:solidFill>
+          <a:ln w="12700">
+            <a:solidFill>
+              <a:srgbClr val="FFFFFF"/>
+            </a:solidFill>
+            <a:prstDash val="solid"/>
+          </a:ln>
+        </p:spPr>
+      </p:sp>
+      <p:sp>
+        <p:nvSpPr>
+          <p:cNvPr id="23" name="Text"/>
+          <p:cNvSpPr txBox="1"/>
+          <p:nvPr/>
+        </p:nvSpPr>
+        <p:spPr>
+          <a:xfrm>
+            <a:off x="6438831" y="3050000"/>
+            <a:ext cx="3000000" cy="420000"/>
+          </a:xfrm>
+          <a:prstGeom prst="rect">
+            <a:avLst/>
+          </a:prstGeom>
+          <a:noFill/>
+          <a:ln/>
+        </p:spPr>
+        <p:txBody>
+          <a:bodyPr wrap="square" lIns="0" tIns="0" rIns="0" bIns="0" rtlCol="0" anchor="ctr"/>
+          <a:lstStyle/>
+          <a:p>
+            <a:pPr algn="ctr" indent="0" marL="0">
+              <a:buNone/>
+            </a:pPr>
+            <a:r>
+              <a:rPr lang="en-US" sz="1300" b="1" dirty="0">
+                <a:solidFill>
+                  <a:srgbClr val="16262E"/>
+                </a:solidFill>
+                <a:latin typeface="Arial" pitchFamily="34" charset="0"/>
+                <a:ea typeface="Arial" pitchFamily="34" charset="-122"/>
+                <a:cs typeface="Arial" pitchFamily="34" charset="-120"/>
+              </a:rPr>
+              <a:t>convocatoria</a:t>
+            </a:r>
+            <a:endParaRPr lang="en-US" sz="1300" dirty="0"/>
+          </a:p>
+        </p:txBody>
+      </p:sp>
+      <p:sp>
+        <p:nvSpPr>
+          <p:cNvPr id="24" name="Text"/>
+          <p:cNvSpPr txBox="1"/>
+          <p:nvPr/>
+        </p:nvSpPr>
+        <p:spPr>
+          <a:xfrm>
+            <a:off x="9564511" y="3050000"/>
+            <a:ext cx="1700000" cy="420000"/>
+          </a:xfrm>
+          <a:prstGeom prst="rect">
+            <a:avLst/>
+          </a:prstGeom>
+          <a:noFill/>
+          <a:ln/>
+        </p:spPr>
+        <p:txBody>
+          <a:bodyPr wrap="square" lIns="0" tIns="0" rIns="0" bIns="0" rtlCol="0" anchor="ctr"/>
+          <a:lstStyle/>
+          <a:p>
+            <a:pPr indent="0" marL="0">
+              <a:buNone/>
+            </a:pPr>
+            <a:r>
+              <a:rPr lang="en-US" sz="1200" dirty="0">
+                <a:solidFill>
+                  <a:srgbClr val="5A6B73"/>
+                </a:solidFill>
+                <a:latin typeface="Calibri" pitchFamily="34" charset="0"/>
+                <a:ea typeface="Calibri" pitchFamily="34" charset="-122"/>
+                <a:cs typeface="Calibri" pitchFamily="34" charset="-120"/>
+              </a:rPr>
+              <a:t>3 de 118</a:t>
+            </a:r>
+            <a:endParaRPr lang="en-US" sz="1200" dirty="0"/>
+          </a:p>
+        </p:txBody>
+      </p:sp>
+      <p:sp>
+        <p:nvSpPr>
+          <p:cNvPr id="25" name="Shape"/>
+          <p:cNvSpPr/>
+          <p:nvPr/>
+        </p:nvSpPr>
+        <p:spPr>
+          <a:xfrm>
+            <a:off x="6438831" y="3540000"/>
+            <a:ext cx="3000000" cy="420000"/>
+          </a:xfrm>
+          <a:prstGeom prst="roundRect">
+            <a:avLst>
+              <a:gd name="adj" fmla="val 50000"/>
+            </a:avLst>
+          </a:prstGeom>
+          <a:solidFill>
+            <a:srgbClr val="FFFFFF"/>
+          </a:solidFill>
+          <a:ln w="12700">
+            <a:solidFill>
+              <a:srgbClr val="FFFFFF"/>
+            </a:solidFill>
+            <a:prstDash val="solid"/>
+          </a:ln>
+        </p:spPr>
+      </p:sp>
+      <p:sp>
+        <p:nvSpPr>
+          <p:cNvPr id="26" name="Text"/>
+          <p:cNvSpPr txBox="1"/>
+          <p:nvPr/>
+        </p:nvSpPr>
+        <p:spPr>
+          <a:xfrm>
+            <a:off x="6438831" y="3540000"/>
+            <a:ext cx="3000000" cy="420000"/>
+          </a:xfrm>
+          <a:prstGeom prst="rect">
+            <a:avLst/>
+          </a:prstGeom>
+          <a:noFill/>
+          <a:ln/>
+        </p:spPr>
+        <p:txBody>
+          <a:bodyPr wrap="square" lIns="0" tIns="0" rIns="0" bIns="0" rtlCol="0" anchor="ctr"/>
+          <a:lstStyle/>
+          <a:p>
+            <a:pPr algn="ctr" indent="0" marL="0">
+              <a:buNone/>
+            </a:pPr>
+            <a:r>
+              <a:rPr lang="en-US" sz="1300" b="1" dirty="0">
+                <a:solidFill>
+                  <a:srgbClr val="16262E"/>
+                </a:solidFill>
+                <a:latin typeface="Arial" pitchFamily="34" charset="0"/>
+                <a:ea typeface="Arial" pitchFamily="34" charset="-122"/>
+                <a:cs typeface="Arial" pitchFamily="34" charset="-120"/>
+              </a:rPr>
+              <a:t>comprobante</a:t>
+            </a:r>
+            <a:endParaRPr lang="en-US" sz="1300" dirty="0"/>
+          </a:p>
+        </p:txBody>
+      </p:sp>
+      <p:sp>
+        <p:nvSpPr>
+          <p:cNvPr id="27" name="Text"/>
+          <p:cNvSpPr txBox="1"/>
+          <p:nvPr/>
+        </p:nvSpPr>
+        <p:spPr>
+          <a:xfrm>
+            <a:off x="9564511" y="3540000"/>
+            <a:ext cx="1700000" cy="420000"/>
+          </a:xfrm>
+          <a:prstGeom prst="rect">
+            <a:avLst/>
+          </a:prstGeom>
+          <a:noFill/>
+          <a:ln/>
+        </p:spPr>
+        <p:txBody>
+          <a:bodyPr wrap="square" lIns="0" tIns="0" rIns="0" bIns="0" rtlCol="0" anchor="ctr"/>
+          <a:lstStyle/>
+          <a:p>
+            <a:pPr indent="0" marL="0">
+              <a:buNone/>
+            </a:pPr>
+            <a:r>
+              <a:rPr lang="en-US" sz="1200" dirty="0">
+                <a:solidFill>
+                  <a:srgbClr val="5A6B73"/>
+                </a:solidFill>
+                <a:latin typeface="Calibri" pitchFamily="34" charset="0"/>
+                <a:ea typeface="Calibri" pitchFamily="34" charset="-122"/>
+                <a:cs typeface="Calibri" pitchFamily="34" charset="-120"/>
+              </a:rPr>
+              <a:t>3 de 118</a:t>
+            </a:r>
+            <a:endParaRPr lang="en-US" sz="1200" dirty="0"/>
+          </a:p>
+        </p:txBody>
+      </p:sp>
+      <p:sp>
+        <p:nvSpPr>
+          <p:cNvPr id="28" name="Shape"/>
+          <p:cNvSpPr/>
+          <p:nvPr/>
+        </p:nvSpPr>
+        <p:spPr>
+          <a:xfrm>
+            <a:off x="6438831" y="4030000"/>
+            <a:ext cx="3000000" cy="420000"/>
+          </a:xfrm>
+          <a:prstGeom prst="roundRect">
+            <a:avLst>
+              <a:gd name="adj" fmla="val 50000"/>
+            </a:avLst>
+          </a:prstGeom>
+          <a:solidFill>
+            <a:srgbClr val="FFFFFF"/>
+          </a:solidFill>
+          <a:ln w="12700">
+            <a:solidFill>
+              <a:srgbClr val="FFFFFF"/>
+            </a:solidFill>
+            <a:prstDash val="solid"/>
+          </a:ln>
+        </p:spPr>
+      </p:sp>
+      <p:sp>
+        <p:nvSpPr>
+          <p:cNvPr id="29" name="Text"/>
+          <p:cNvSpPr txBox="1"/>
+          <p:nvPr/>
+        </p:nvSpPr>
+        <p:spPr>
+          <a:xfrm>
+            <a:off x="6438831" y="4030000"/>
+            <a:ext cx="3000000" cy="420000"/>
+          </a:xfrm>
+          <a:prstGeom prst="rect">
+            <a:avLst/>
+          </a:prstGeom>
+          <a:noFill/>
+          <a:ln/>
+        </p:spPr>
+        <p:txBody>
+          <a:bodyPr wrap="square" lIns="0" tIns="0" rIns="0" bIns="0" rtlCol="0" anchor="ctr"/>
+          <a:lstStyle/>
+          <a:p>
+            <a:pPr algn="ctr" indent="0" marL="0">
+              <a:buNone/>
+            </a:pPr>
+            <a:r>
+              <a:rPr lang="en-US" sz="1300" b="1" dirty="0">
+                <a:solidFill>
+                  <a:srgbClr val="16262E"/>
+                </a:solidFill>
+                <a:latin typeface="Arial" pitchFamily="34" charset="0"/>
+                <a:ea typeface="Arial" pitchFamily="34" charset="-122"/>
+                <a:cs typeface="Arial" pitchFamily="34" charset="-120"/>
+              </a:rPr>
+              <a:t>rechazaron</a:t>
+            </a:r>
+            <a:endParaRPr lang="en-US" sz="1300" dirty="0"/>
+          </a:p>
+        </p:txBody>
+      </p:sp>
+      <p:sp>
+        <p:nvSpPr>
+          <p:cNvPr id="30" name="Text"/>
+          <p:cNvSpPr txBox="1"/>
+          <p:nvPr/>
+        </p:nvSpPr>
+        <p:spPr>
+          <a:xfrm>
+            <a:off x="9564511" y="4030000"/>
+            <a:ext cx="1700000" cy="420000"/>
+          </a:xfrm>
+          <a:prstGeom prst="rect">
+            <a:avLst/>
+          </a:prstGeom>
+          <a:noFill/>
+          <a:ln/>
+        </p:spPr>
+        <p:txBody>
+          <a:bodyPr wrap="square" lIns="0" tIns="0" rIns="0" bIns="0" rtlCol="0" anchor="ctr"/>
+          <a:lstStyle/>
+          <a:p>
+            <a:pPr indent="0" marL="0">
+              <a:buNone/>
+            </a:pPr>
+            <a:r>
+              <a:rPr lang="en-US" sz="1200" dirty="0">
+                <a:solidFill>
+                  <a:srgbClr val="5A6B73"/>
+                </a:solidFill>
+                <a:latin typeface="Calibri" pitchFamily="34" charset="0"/>
+                <a:ea typeface="Calibri" pitchFamily="34" charset="-122"/>
+                <a:cs typeface="Calibri" pitchFamily="34" charset="-120"/>
+              </a:rPr>
+              <a:t>3 de 118</a:t>
+            </a:r>
+            <a:endParaRPr lang="en-US" sz="1200" dirty="0"/>
+          </a:p>
+        </p:txBody>
+      </p:sp>
+      <p:sp>
+        <p:nvSpPr>
+          <p:cNvPr id="31" name="Shape"/>
+          <p:cNvSpPr/>
+          <p:nvPr/>
+        </p:nvSpPr>
+        <p:spPr>
+          <a:xfrm>
+            <a:off x="6438831" y="4520000"/>
+            <a:ext cx="3000000" cy="420000"/>
+          </a:xfrm>
+          <a:prstGeom prst="roundRect">
+            <a:avLst>
+              <a:gd name="adj" fmla="val 50000"/>
+            </a:avLst>
+          </a:prstGeom>
+          <a:solidFill>
+            <a:srgbClr val="FFFFFF"/>
+          </a:solidFill>
+          <a:ln w="12700">
+            <a:solidFill>
+              <a:srgbClr val="FFFFFF"/>
+            </a:solidFill>
+            <a:prstDash val="solid"/>
+          </a:ln>
+        </p:spPr>
+      </p:sp>
+      <p:sp>
+        <p:nvSpPr>
+          <p:cNvPr id="32" name="Text"/>
+          <p:cNvSpPr txBox="1"/>
+          <p:nvPr/>
+        </p:nvSpPr>
+        <p:spPr>
+          <a:xfrm>
+            <a:off x="6438831" y="4520000"/>
+            <a:ext cx="3000000" cy="420000"/>
+          </a:xfrm>
+          <a:prstGeom prst="rect">
+            <a:avLst/>
+          </a:prstGeom>
+          <a:noFill/>
+          <a:ln/>
+        </p:spPr>
+        <p:txBody>
+          <a:bodyPr wrap="square" lIns="0" tIns="0" rIns="0" bIns="0" rtlCol="0" anchor="ctr"/>
+          <a:lstStyle/>
+          <a:p>
+            <a:pPr algn="ctr" indent="0" marL="0">
+              <a:buNone/>
+            </a:pPr>
+            <a:r>
+              <a:rPr lang="en-US" sz="1300" b="1" dirty="0">
+                <a:solidFill>
+                  <a:srgbClr val="16262E"/>
+                </a:solidFill>
+                <a:latin typeface="Arial" pitchFamily="34" charset="0"/>
+                <a:ea typeface="Arial" pitchFamily="34" charset="-122"/>
+                <a:cs typeface="Arial" pitchFamily="34" charset="-120"/>
+              </a:rPr>
+              <a:t>descalifica</a:t>
+            </a:r>
+            <a:endParaRPr lang="en-US" sz="1300" dirty="0"/>
+          </a:p>
+        </p:txBody>
+      </p:sp>
+      <p:sp>
+        <p:nvSpPr>
+          <p:cNvPr id="33" name="Text"/>
+          <p:cNvSpPr txBox="1"/>
+          <p:nvPr/>
+        </p:nvSpPr>
+        <p:spPr>
+          <a:xfrm>
+            <a:off x="9564511" y="4520000"/>
+            <a:ext cx="1700000" cy="420000"/>
+          </a:xfrm>
+          <a:prstGeom prst="rect">
+            <a:avLst/>
+          </a:prstGeom>
+          <a:noFill/>
+          <a:ln/>
+        </p:spPr>
+        <p:txBody>
+          <a:bodyPr wrap="square" lIns="0" tIns="0" rIns="0" bIns="0" rtlCol="0" anchor="ctr"/>
+          <a:lstStyle/>
+          <a:p>
+            <a:pPr indent="0" marL="0">
+              <a:buNone/>
+            </a:pPr>
+            <a:r>
+              <a:rPr lang="en-US" sz="1200" dirty="0">
+                <a:solidFill>
+                  <a:srgbClr val="5A6B73"/>
+                </a:solidFill>
+                <a:latin typeface="Calibri" pitchFamily="34" charset="0"/>
+                <a:ea typeface="Calibri" pitchFamily="34" charset="-122"/>
+                <a:cs typeface="Calibri" pitchFamily="34" charset="-120"/>
+              </a:rPr>
+              <a:t>2 de 118</a:t>
+            </a:r>
+            <a:endParaRPr lang="en-US" sz="1200" dirty="0"/>
+          </a:p>
+        </p:txBody>
+      </p:sp>
+      <p:sp>
+        <p:nvSpPr>
+          <p:cNvPr id="34" name="Shape"/>
+          <p:cNvSpPr/>
+          <p:nvPr/>
+        </p:nvSpPr>
+        <p:spPr>
+          <a:xfrm>
+            <a:off x="566928" y="5824728"/>
+            <a:ext cx="11057839" cy="594360"/>
+          </a:xfrm>
+          <a:prstGeom prst="roundRect">
+            <a:avLst>
+              <a:gd name="adj" fmla="val 8235"/>
+            </a:avLst>
+          </a:prstGeom>
+          <a:solidFill>
+            <a:srgbClr val="F7E4D8"/>
+          </a:solidFill>
+          <a:ln w="12700">
+            <a:solidFill>
+              <a:srgbClr val="F7E4D8"/>
+            </a:solidFill>
+            <a:prstDash val="solid"/>
+          </a:ln>
+        </p:spPr>
+      </p:sp>
+      <p:sp>
+        <p:nvSpPr>
+          <p:cNvPr id="35" name="Text"/>
+          <p:cNvSpPr txBox="1"/>
+          <p:nvPr/>
+        </p:nvSpPr>
+        <p:spPr>
+          <a:xfrm>
+            <a:off x="804672" y="5824728"/>
+            <a:ext cx="10582351" cy="594360"/>
+          </a:xfrm>
+          <a:prstGeom prst="rect">
+            <a:avLst/>
+          </a:prstGeom>
+          <a:noFill/>
+          <a:ln/>
+        </p:spPr>
+        <p:txBody>
+          <a:bodyPr wrap="square" lIns="0" tIns="0" rIns="0" bIns="0" rtlCol="0" anchor="ctr"/>
+          <a:lstStyle/>
+          <a:p>
+            <a:pPr indent="0" marL="0">
+              <a:lnSpc>
+                <a:spcPct val="110000"/>
+              </a:lnSpc>
+              <a:buNone/>
+            </a:pPr>
+            <a:r>
+              <a:rPr lang="en-US" sz="1300" dirty="0">
+                <a:solidFill>
+                  <a:srgbClr val="16262E"/>
+                </a:solidFill>
+                <a:latin typeface="Calibri" pitchFamily="34" charset="0"/>
+                <a:ea typeface="Calibri" pitchFamily="34" charset="-122"/>
+                <a:cs typeface="Calibri" pitchFamily="34" charset="-120"/>
+              </a:rPr>
+              <a:t>TF-IDF cabe en una frase: una palabra pesa cuando es frecuente aquí y rara en el resto. De ahí sale algo que te importa: una queja poco frecuente nunca junta peso suficiente para volverse categoría, y termina en la bolsa de «otros».</a:t>
+            </a:r>
+            <a:endParaRPr lang="en-US" sz="1300" dirty="0"/>
+          </a:p>
+        </p:txBody>
+      </p:sp>
+    </p:spTree>
+  </p:cSld>
+  <p:clrMapOvr>
+    <a:masterClrMapping/>
+  </p:clrMapOvr>
+</p:sld>
+</file>
+
+<file path=ppt/slides/slide17.xml><?xml version="1.0" encoding="utf-8"?>
+<p:sld xmlns:a="http://schemas.openxmlformats.org/drawingml/2006/main" xmlns:r="http://schemas.openxmlformats.org/officeDocument/2006/relationships" xmlns:p="http://schemas.openxmlformats.org/presentationml/2006/main">
+  <p:cSld name="Vectores">
+    <p:spTree>
+      <p:nvGrpSpPr>
+        <p:cNvPr id="1" name=""/>
+        <p:cNvGrpSpPr/>
+        <p:nvPr/>
+      </p:nvGrpSpPr>
+      <p:grpSpPr>
+        <a:xfrm>
+          <a:off x="0" y="0"/>
+          <a:ext cx="0" cy="0"/>
+          <a:chOff x="0" y="0"/>
+          <a:chExt cx="0" cy="0"/>
+        </a:xfrm>
+      </p:grpSpPr>
+      <p:sp>
+        <p:nvSpPr>
+          <p:cNvPr id="2" name="Text"/>
+          <p:cNvSpPr txBox="1"/>
+          <p:nvPr/>
+        </p:nvSpPr>
+        <p:spPr>
+          <a:xfrm>
+            <a:off x="566928" y="402336"/>
+            <a:ext cx="11057839" cy="749808"/>
+          </a:xfrm>
+          <a:prstGeom prst="rect">
+            <a:avLst/>
+          </a:prstGeom>
+          <a:noFill/>
+          <a:ln/>
+        </p:spPr>
+        <p:txBody>
+          <a:bodyPr wrap="square" lIns="0" tIns="0" rIns="0" bIns="0" rtlCol="0" anchor="t"/>
+          <a:lstStyle/>
+          <a:p>
+            <a:pPr algn="l" indent="0" marL="0">
+              <a:buNone/>
+            </a:pPr>
+            <a:r>
+              <a:rPr lang="en-US" sz="3200" b="1" dirty="0">
+                <a:solidFill>
+                  <a:srgbClr val="16262E"/>
+                </a:solidFill>
+                <a:latin typeface="Arial" pitchFamily="34" charset="0"/>
+                <a:ea typeface="Arial" pitchFamily="34" charset="-122"/>
+                <a:cs typeface="Arial" pitchFamily="34" charset="-120"/>
+              </a:rPr>
+              <a:t>Contar palabras falla en dos direcciones</a:t>
+            </a:r>
+            <a:endParaRPr lang="en-US" sz="3200" dirty="0"/>
+          </a:p>
+        </p:txBody>
+      </p:sp>
+      <p:sp>
+        <p:nvSpPr>
+          <p:cNvPr id="3" name="Text"/>
+          <p:cNvSpPr txBox="1"/>
+          <p:nvPr/>
+        </p:nvSpPr>
+        <p:spPr>
+          <a:xfrm>
+            <a:off x="566928" y="1280160"/>
+            <a:ext cx="11057839" cy="731520"/>
+          </a:xfrm>
+          <a:prstGeom prst="rect">
+            <a:avLst/>
+          </a:prstGeom>
+          <a:noFill/>
+          <a:ln/>
+        </p:spPr>
+        <p:txBody>
+          <a:bodyPr wrap="square" lIns="0" tIns="0" rIns="0" bIns="0" rtlCol="0" anchor="t"/>
+          <a:lstStyle/>
+          <a:p>
+            <a:pPr indent="0" marL="0">
+              <a:buNone/>
+            </a:pPr>
+            <a:r>
+              <a:rPr lang="en-US" sz="1500" dirty="0">
+                <a:solidFill>
+                  <a:srgbClr val="5A6B73"/>
+                </a:solidFill>
+                <a:latin typeface="Calibri" pitchFamily="34" charset="0"/>
+                <a:ea typeface="Calibri" pitchFamily="34" charset="-122"/>
+                <a:cs typeface="Calibri" pitchFamily="34" charset="-120"/>
+              </a:rPr>
+              <a:t>Cuatro registros reales del corpus de hoy. A la izquierda comparten palabras y no comparten tema; a la derecha es exactamente al revés.</a:t>
+            </a:r>
+            <a:endParaRPr lang="en-US" sz="1500" dirty="0"/>
+          </a:p>
+        </p:txBody>
+      </p:sp>
+      <p:sp>
+        <p:nvSpPr>
+          <p:cNvPr id="4" name="Shape"/>
+          <p:cNvSpPr/>
+          <p:nvPr/>
+        </p:nvSpPr>
+        <p:spPr>
+          <a:xfrm>
+            <a:off x="566928" y="1900000"/>
+            <a:ext cx="5460655" cy="3700000"/>
+          </a:xfrm>
+          <a:prstGeom prst="roundRect">
+            <a:avLst>
+              <a:gd name="adj" fmla="val 2933"/>
+            </a:avLst>
+          </a:prstGeom>
+          <a:solidFill>
+            <a:srgbClr val="F7E4D8"/>
+          </a:solidFill>
+          <a:ln w="12700">
+            <a:solidFill>
+              <a:srgbClr val="F7E4D8"/>
+            </a:solidFill>
+            <a:prstDash val="solid"/>
+          </a:ln>
+        </p:spPr>
+      </p:sp>
+      <p:sp>
+        <p:nvSpPr>
+          <p:cNvPr id="5" name="Text"/>
+          <p:cNvSpPr txBox="1"/>
+          <p:nvPr/>
+        </p:nvSpPr>
+        <p:spPr>
+          <a:xfrm>
+            <a:off x="796928" y="2080000"/>
+            <a:ext cx="5000655" cy="330000"/>
+          </a:xfrm>
+          <a:prstGeom prst="rect">
+            <a:avLst/>
+          </a:prstGeom>
+          <a:noFill/>
+          <a:ln/>
+        </p:spPr>
+        <p:txBody>
+          <a:bodyPr wrap="square" lIns="0" tIns="0" rIns="0" bIns="0" rtlCol="0" anchor="t"/>
+          <a:lstStyle/>
+          <a:p>
+            <a:pPr indent="0" marL="0">
+              <a:buNone/>
+            </a:pPr>
+            <a:r>
+              <a:rPr lang="en-US" sz="1600" b="1" dirty="0">
+                <a:solidFill>
+                  <a:srgbClr val="C85A28"/>
+                </a:solidFill>
+                <a:latin typeface="Arial" pitchFamily="34" charset="0"/>
+                <a:ea typeface="Arial" pitchFamily="34" charset="-122"/>
+                <a:cs typeface="Arial" pitchFamily="34" charset="-120"/>
+              </a:rPr>
+              <a:t>Mismas palabras, distinto tema</a:t>
+            </a:r>
+            <a:endParaRPr lang="en-US" sz="1600" dirty="0"/>
+          </a:p>
+        </p:txBody>
+      </p:sp>
+      <p:sp>
+        <p:nvSpPr>
+          <p:cNvPr id="6" name="Shape"/>
+          <p:cNvSpPr/>
+          <p:nvPr/>
+        </p:nvSpPr>
+        <p:spPr>
+          <a:xfrm>
+            <a:off x="796928" y="2440000"/>
+            <a:ext cx="5000000" cy="1160000"/>
+          </a:xfrm>
+          <a:prstGeom prst="roundRect">
+            <a:avLst>
+              <a:gd name="adj" fmla="val 8000"/>
+            </a:avLst>
+          </a:prstGeom>
+          <a:solidFill>
+            <a:srgbClr val="FFFFFF"/>
+          </a:solidFill>
+          <a:ln w="12700">
+            <a:solidFill>
+              <a:srgbClr val="FFFFFF"/>
+            </a:solidFill>
+            <a:prstDash val="solid"/>
+          </a:ln>
+        </p:spPr>
+      </p:sp>
+      <p:sp>
+        <p:nvSpPr>
+          <p:cNvPr id="7" name="Text"/>
+          <p:cNvSpPr txBox="1"/>
+          <p:nvPr/>
+        </p:nvSpPr>
+        <p:spPr>
+          <a:xfrm>
+            <a:off x="1036928" y="2560000"/>
+            <a:ext cx="4520000" cy="760000"/>
+          </a:xfrm>
+          <a:prstGeom prst="rect">
+            <a:avLst/>
+          </a:prstGeom>
+          <a:noFill/>
+          <a:ln/>
+        </p:spPr>
+        <p:txBody>
+          <a:bodyPr wrap="square" lIns="0" tIns="0" rIns="0" bIns="0" rtlCol="0" anchor="t"/>
+          <a:lstStyle/>
+          <a:p>
+            <a:pPr indent="0" marL="0">
+              <a:lnSpc>
+                <a:spcPct val="105000"/>
+              </a:lnSpc>
+              <a:buNone/>
+            </a:pPr>
+            <a:r>
+              <a:rPr lang="en-US" sz="1250" dirty="0">
+                <a:solidFill>
+                  <a:srgbClr val="16262E"/>
+                </a:solidFill>
+                <a:latin typeface="Calibri" pitchFamily="34" charset="0"/>
+                <a:ea typeface="Calibri" pitchFamily="34" charset="-122"/>
+                <a:cs typeface="Calibri" pitchFamily="34" charset="-120"/>
+              </a:rPr>
+              <a:t>«Manifiesta que su esposo cobró con su tarjeta sin su permiso y quiere saber cómo cambiar el NIP.»</a:t>
+            </a:r>
+            <a:endParaRPr lang="en-US" sz="1250" dirty="0"/>
+          </a:p>
+        </p:txBody>
+      </p:sp>
+      <p:sp>
+        <p:nvSpPr>
+          <p:cNvPr id="8" name="Text"/>
+          <p:cNvSpPr txBox="1"/>
+          <p:nvPr/>
+        </p:nvSpPr>
+        <p:spPr>
+          <a:xfrm>
+            <a:off x="1036928" y="3320000"/>
+            <a:ext cx="4520000" cy="220000"/>
+          </a:xfrm>
+          <a:prstGeom prst="rect">
+            <a:avLst/>
+          </a:prstGeom>
+          <a:noFill/>
+          <a:ln/>
+        </p:spPr>
+        <p:txBody>
+          <a:bodyPr wrap="square" lIns="0" tIns="0" rIns="0" bIns="0" rtlCol="0" anchor="t"/>
+          <a:lstStyle/>
+          <a:p>
+            <a:pPr indent="0" marL="0">
+              <a:buNone/>
+            </a:pPr>
+            <a:r>
+              <a:rPr lang="en-US" sz="1050" dirty="0">
+                <a:solidFill>
+                  <a:srgbClr val="5A6B73"/>
+                </a:solidFill>
+                <a:latin typeface="Calibri" pitchFamily="34" charset="0"/>
+                <a:ea typeface="Calibri" pitchFamily="34" charset="-122"/>
+                <a:cs typeface="Calibri" pitchFamily="34" charset="-120"/>
+              </a:rPr>
+              <a:t>RAC-2025-00073</a:t>
+            </a:r>
+            <a:endParaRPr lang="en-US" sz="1050" dirty="0"/>
+          </a:p>
+        </p:txBody>
+      </p:sp>
+      <p:sp>
+        <p:nvSpPr>
+          <p:cNvPr id="9" name="Shape"/>
+          <p:cNvSpPr/>
+          <p:nvPr/>
+        </p:nvSpPr>
+        <p:spPr>
+          <a:xfrm>
+            <a:off x="796928" y="3660000"/>
+            <a:ext cx="5000000" cy="1160000"/>
+          </a:xfrm>
+          <a:prstGeom prst="roundRect">
+            <a:avLst>
+              <a:gd name="adj" fmla="val 8000"/>
+            </a:avLst>
+          </a:prstGeom>
+          <a:solidFill>
+            <a:srgbClr val="FFFFFF"/>
+          </a:solidFill>
+          <a:ln w="12700">
+            <a:solidFill>
+              <a:srgbClr val="FFFFFF"/>
+            </a:solidFill>
+            <a:prstDash val="solid"/>
+          </a:ln>
+        </p:spPr>
+      </p:sp>
+      <p:sp>
+        <p:nvSpPr>
+          <p:cNvPr id="10" name="Text"/>
+          <p:cNvSpPr txBox="1"/>
+          <p:nvPr/>
+        </p:nvSpPr>
+        <p:spPr>
+          <a:xfrm>
+            <a:off x="1036928" y="3780000"/>
+            <a:ext cx="4520000" cy="760000"/>
+          </a:xfrm>
+          <a:prstGeom prst="rect">
+            <a:avLst/>
+          </a:prstGeom>
+          <a:noFill/>
+          <a:ln/>
+        </p:spPr>
+        <p:txBody>
+          <a:bodyPr wrap="square" lIns="0" tIns="0" rIns="0" bIns="0" rtlCol="0" anchor="t"/>
+          <a:lstStyle/>
+          <a:p>
+            <a:pPr indent="0" marL="0">
+              <a:lnSpc>
+                <a:spcPct val="105000"/>
+              </a:lnSpc>
+              <a:buNone/>
+            </a:pPr>
+            <a:r>
+              <a:rPr lang="en-US" sz="1250" dirty="0">
+                <a:solidFill>
+                  <a:srgbClr val="16262E"/>
+                </a:solidFill>
+                <a:latin typeface="Calibri" pitchFamily="34" charset="0"/>
+                <a:ea typeface="Calibri" pitchFamily="34" charset="-122"/>
+                <a:cs typeface="Calibri" pitchFamily="34" charset="-120"/>
+              </a:rPr>
+              <a:t>«Su tarjeta caducó el mes pasado y quiere saber si el apoyo se pierde mientras le dan la nueva.»</a:t>
+            </a:r>
+            <a:endParaRPr lang="en-US" sz="1250" dirty="0"/>
+          </a:p>
+        </p:txBody>
+      </p:sp>
+      <p:sp>
+        <p:nvSpPr>
+          <p:cNvPr id="11" name="Text"/>
+          <p:cNvSpPr txBox="1"/>
+          <p:nvPr/>
+        </p:nvSpPr>
+        <p:spPr>
+          <a:xfrm>
+            <a:off x="1036928" y="4540000"/>
+            <a:ext cx="4520000" cy="220000"/>
+          </a:xfrm>
+          <a:prstGeom prst="rect">
+            <a:avLst/>
+          </a:prstGeom>
+          <a:noFill/>
+          <a:ln/>
+        </p:spPr>
+        <p:txBody>
+          <a:bodyPr wrap="square" lIns="0" tIns="0" rIns="0" bIns="0" rtlCol="0" anchor="t"/>
+          <a:lstStyle/>
+          <a:p>
+            <a:pPr indent="0" marL="0">
+              <a:buNone/>
+            </a:pPr>
+            <a:r>
+              <a:rPr lang="en-US" sz="1050" dirty="0">
+                <a:solidFill>
+                  <a:srgbClr val="5A6B73"/>
+                </a:solidFill>
+                <a:latin typeface="Calibri" pitchFamily="34" charset="0"/>
+                <a:ea typeface="Calibri" pitchFamily="34" charset="-122"/>
+                <a:cs typeface="Calibri" pitchFamily="34" charset="-120"/>
+              </a:rPr>
+              <a:t>RAC-2025-00055</a:t>
+            </a:r>
+            <a:endParaRPr lang="en-US" sz="1050" dirty="0"/>
+          </a:p>
+        </p:txBody>
+      </p:sp>
+      <p:sp>
+        <p:nvSpPr>
+          <p:cNvPr id="12" name="Text"/>
+          <p:cNvSpPr txBox="1"/>
+          <p:nvPr/>
+        </p:nvSpPr>
+        <p:spPr>
+          <a:xfrm>
+            <a:off x="796928" y="4900000"/>
+            <a:ext cx="5000655" cy="560000"/>
+          </a:xfrm>
+          <a:prstGeom prst="rect">
+            <a:avLst/>
+          </a:prstGeom>
+          <a:noFill/>
+          <a:ln/>
+        </p:spPr>
+        <p:txBody>
+          <a:bodyPr wrap="square" lIns="0" tIns="0" rIns="0" bIns="0" rtlCol="0" anchor="t"/>
+          <a:lstStyle/>
+          <a:p>
+            <a:pPr indent="0" marL="0">
+              <a:lnSpc>
+                <a:spcPct val="110000"/>
+              </a:lnSpc>
+              <a:buNone/>
+            </a:pPr>
+            <a:r>
+              <a:rPr lang="en-US" sz="1250" dirty="0">
+                <a:solidFill>
+                  <a:srgbClr val="16262E"/>
+                </a:solidFill>
+                <a:latin typeface="Calibri" pitchFamily="34" charset="0"/>
+                <a:ea typeface="Calibri" pitchFamily="34" charset="-122"/>
+                <a:cs typeface="Calibri" pitchFamily="34" charset="-120"/>
+              </a:rPr>
+              <a:t>Comparten tarjeta, quiere y saber. Una es de uso indebido y la otra de vigencia del plástico.</a:t>
+            </a:r>
+            <a:endParaRPr lang="en-US" sz="1250" dirty="0"/>
+          </a:p>
+        </p:txBody>
+      </p:sp>
+      <p:sp>
+        <p:nvSpPr>
+          <p:cNvPr id="13" name="Shape"/>
+          <p:cNvSpPr/>
+          <p:nvPr/>
+        </p:nvSpPr>
+        <p:spPr>
+          <a:xfrm>
+            <a:off x="6164511" y="1900000"/>
+            <a:ext cx="5460655" cy="3700000"/>
+          </a:xfrm>
+          <a:prstGeom prst="roundRect">
+            <a:avLst>
+              <a:gd name="adj" fmla="val 2933"/>
+            </a:avLst>
+          </a:prstGeom>
+          <a:solidFill>
+            <a:srgbClr val="D7E7E7"/>
+          </a:solidFill>
+          <a:ln w="12700">
+            <a:solidFill>
+              <a:srgbClr val="D7E7E7"/>
+            </a:solidFill>
+            <a:prstDash val="solid"/>
+          </a:ln>
+        </p:spPr>
+      </p:sp>
+      <p:sp>
+        <p:nvSpPr>
+          <p:cNvPr id="14" name="Text"/>
+          <p:cNvSpPr txBox="1"/>
+          <p:nvPr/>
+        </p:nvSpPr>
+        <p:spPr>
+          <a:xfrm>
+            <a:off x="6394511" y="2080000"/>
+            <a:ext cx="5000655" cy="330000"/>
+          </a:xfrm>
+          <a:prstGeom prst="rect">
+            <a:avLst/>
+          </a:prstGeom>
+          <a:noFill/>
+          <a:ln/>
+        </p:spPr>
+        <p:txBody>
+          <a:bodyPr wrap="square" lIns="0" tIns="0" rIns="0" bIns="0" rtlCol="0" anchor="t"/>
+          <a:lstStyle/>
+          <a:p>
+            <a:pPr indent="0" marL="0">
+              <a:buNone/>
+            </a:pPr>
+            <a:r>
+              <a:rPr lang="en-US" sz="1600" b="1" dirty="0">
+                <a:solidFill>
+                  <a:srgbClr val="2E7D7D"/>
+                </a:solidFill>
+                <a:latin typeface="Arial" pitchFamily="34" charset="0"/>
+                <a:ea typeface="Arial" pitchFamily="34" charset="-122"/>
+                <a:cs typeface="Arial" pitchFamily="34" charset="-120"/>
+              </a:rPr>
+              <a:t>Distintas palabras, mismo tema</a:t>
+            </a:r>
+            <a:endParaRPr lang="en-US" sz="1600" dirty="0"/>
+          </a:p>
+        </p:txBody>
+      </p:sp>
+      <p:sp>
+        <p:nvSpPr>
+          <p:cNvPr id="15" name="Shape"/>
+          <p:cNvSpPr/>
+          <p:nvPr/>
+        </p:nvSpPr>
+        <p:spPr>
+          <a:xfrm>
+            <a:off x="6394511" y="2440000"/>
+            <a:ext cx="5000000" cy="1160000"/>
+          </a:xfrm>
+          <a:prstGeom prst="roundRect">
+            <a:avLst>
+              <a:gd name="adj" fmla="val 8000"/>
+            </a:avLst>
+          </a:prstGeom>
+          <a:solidFill>
+            <a:srgbClr val="FFFFFF"/>
+          </a:solidFill>
+          <a:ln w="12700">
+            <a:solidFill>
+              <a:srgbClr val="FFFFFF"/>
+            </a:solidFill>
+            <a:prstDash val="solid"/>
+          </a:ln>
+        </p:spPr>
+      </p:sp>
+      <p:sp>
+        <p:nvSpPr>
+          <p:cNvPr id="16" name="Text"/>
+          <p:cNvSpPr txBox="1"/>
+          <p:nvPr/>
+        </p:nvSpPr>
+        <p:spPr>
+          <a:xfrm>
+            <a:off x="6634511" y="2560000"/>
+            <a:ext cx="4520000" cy="760000"/>
+          </a:xfrm>
+          <a:prstGeom prst="rect">
+            <a:avLst/>
+          </a:prstGeom>
+          <a:noFill/>
+          <a:ln/>
+        </p:spPr>
+        <p:txBody>
+          <a:bodyPr wrap="square" lIns="0" tIns="0" rIns="0" bIns="0" rtlCol="0" anchor="t"/>
+          <a:lstStyle/>
+          <a:p>
+            <a:pPr indent="0" marL="0">
+              <a:lnSpc>
+                <a:spcPct val="105000"/>
+              </a:lnSpc>
+              <a:buNone/>
+            </a:pPr>
+            <a:r>
+              <a:rPr lang="en-US" sz="1250" dirty="0">
+                <a:solidFill>
+                  <a:srgbClr val="16262E"/>
+                </a:solidFill>
+                <a:latin typeface="Calibri" pitchFamily="34" charset="0"/>
+                <a:ea typeface="Calibri" pitchFamily="34" charset="-122"/>
+                <a:cs typeface="Calibri" pitchFamily="34" charset="-120"/>
+              </a:rPr>
+              <a:t>«La beneficiaria señala que el apoyo del bimestre no le ha llegado. Comenta que a su vecina sí le depositaron desde la semana pasada.»</a:t>
+            </a:r>
+            <a:endParaRPr lang="en-US" sz="1250" dirty="0"/>
+          </a:p>
+        </p:txBody>
+      </p:sp>
+      <p:sp>
+        <p:nvSpPr>
+          <p:cNvPr id="17" name="Text"/>
+          <p:cNvSpPr txBox="1"/>
+          <p:nvPr/>
+        </p:nvSpPr>
+        <p:spPr>
+          <a:xfrm>
+            <a:off x="6634511" y="3320000"/>
+            <a:ext cx="4520000" cy="220000"/>
+          </a:xfrm>
+          <a:prstGeom prst="rect">
+            <a:avLst/>
+          </a:prstGeom>
+          <a:noFill/>
+          <a:ln/>
+        </p:spPr>
+        <p:txBody>
+          <a:bodyPr wrap="square" lIns="0" tIns="0" rIns="0" bIns="0" rtlCol="0" anchor="t"/>
+          <a:lstStyle/>
+          <a:p>
+            <a:pPr indent="0" marL="0">
+              <a:buNone/>
+            </a:pPr>
+            <a:r>
+              <a:rPr lang="en-US" sz="1050" dirty="0">
+                <a:solidFill>
+                  <a:srgbClr val="5A6B73"/>
+                </a:solidFill>
+                <a:latin typeface="Calibri" pitchFamily="34" charset="0"/>
+                <a:ea typeface="Calibri" pitchFamily="34" charset="-122"/>
+                <a:cs typeface="Calibri" pitchFamily="34" charset="-120"/>
+              </a:rPr>
+              <a:t>RAC-2025-00014</a:t>
+            </a:r>
+            <a:endParaRPr lang="en-US" sz="1050" dirty="0"/>
+          </a:p>
+        </p:txBody>
+      </p:sp>
+      <p:sp>
+        <p:nvSpPr>
+          <p:cNvPr id="18" name="Shape"/>
+          <p:cNvSpPr/>
+          <p:nvPr/>
+        </p:nvSpPr>
+        <p:spPr>
+          <a:xfrm>
+            <a:off x="6394511" y="3660000"/>
+            <a:ext cx="5000000" cy="1160000"/>
+          </a:xfrm>
+          <a:prstGeom prst="roundRect">
+            <a:avLst>
+              <a:gd name="adj" fmla="val 8000"/>
+            </a:avLst>
+          </a:prstGeom>
+          <a:solidFill>
+            <a:srgbClr val="FFFFFF"/>
+          </a:solidFill>
+          <a:ln w="12700">
+            <a:solidFill>
+              <a:srgbClr val="FFFFFF"/>
+            </a:solidFill>
+            <a:prstDash val="solid"/>
+          </a:ln>
+        </p:spPr>
+      </p:sp>
+      <p:sp>
+        <p:nvSpPr>
+          <p:cNvPr id="19" name="Text"/>
+          <p:cNvSpPr txBox="1"/>
+          <p:nvPr/>
+        </p:nvSpPr>
+        <p:spPr>
+          <a:xfrm>
+            <a:off x="6634511" y="3780000"/>
+            <a:ext cx="4520000" cy="760000"/>
+          </a:xfrm>
+          <a:prstGeom prst="rect">
+            <a:avLst/>
+          </a:prstGeom>
+          <a:noFill/>
+          <a:ln/>
+        </p:spPr>
+        <p:txBody>
+          <a:bodyPr wrap="square" lIns="0" tIns="0" rIns="0" bIns="0" rtlCol="0" anchor="t"/>
+          <a:lstStyle/>
+          <a:p>
+            <a:pPr indent="0" marL="0">
+              <a:lnSpc>
+                <a:spcPct val="105000"/>
+              </a:lnSpc>
+              <a:buNone/>
+            </a:pPr>
+            <a:r>
+              <a:rPr lang="en-US" sz="1250" dirty="0">
+                <a:solidFill>
+                  <a:srgbClr val="16262E"/>
+                </a:solidFill>
+                <a:latin typeface="Calibri" pitchFamily="34" charset="0"/>
+                <a:ea typeface="Calibri" pitchFamily="34" charset="-122"/>
+                <a:cs typeface="Calibri" pitchFamily="34" charset="-120"/>
+              </a:rPr>
+              <a:t>«No ha podido cobrar porque en el banco le dicen que su cuenta aparece inactiva.»</a:t>
+            </a:r>
+            <a:endParaRPr lang="en-US" sz="1250" dirty="0"/>
+          </a:p>
+        </p:txBody>
+      </p:sp>
+      <p:sp>
+        <p:nvSpPr>
+          <p:cNvPr id="20" name="Text"/>
+          <p:cNvSpPr txBox="1"/>
+          <p:nvPr/>
+        </p:nvSpPr>
+        <p:spPr>
+          <a:xfrm>
+            <a:off x="6634511" y="4540000"/>
+            <a:ext cx="4520000" cy="220000"/>
+          </a:xfrm>
+          <a:prstGeom prst="rect">
+            <a:avLst/>
+          </a:prstGeom>
+          <a:noFill/>
+          <a:ln/>
+        </p:spPr>
+        <p:txBody>
+          <a:bodyPr wrap="square" lIns="0" tIns="0" rIns="0" bIns="0" rtlCol="0" anchor="t"/>
+          <a:lstStyle/>
+          <a:p>
+            <a:pPr indent="0" marL="0">
+              <a:buNone/>
+            </a:pPr>
+            <a:r>
+              <a:rPr lang="en-US" sz="1050" dirty="0">
+                <a:solidFill>
+                  <a:srgbClr val="5A6B73"/>
+                </a:solidFill>
+                <a:latin typeface="Calibri" pitchFamily="34" charset="0"/>
+                <a:ea typeface="Calibri" pitchFamily="34" charset="-122"/>
+                <a:cs typeface="Calibri" pitchFamily="34" charset="-120"/>
+              </a:rPr>
+              <a:t>RAC-2025-00096</a:t>
+            </a:r>
+            <a:endParaRPr lang="en-US" sz="1050" dirty="0"/>
+          </a:p>
+        </p:txBody>
+      </p:sp>
+      <p:sp>
+        <p:nvSpPr>
+          <p:cNvPr id="21" name="Text"/>
+          <p:cNvSpPr txBox="1"/>
+          <p:nvPr/>
+        </p:nvSpPr>
+        <p:spPr>
+          <a:xfrm>
+            <a:off x="6394511" y="4900000"/>
+            <a:ext cx="5000655" cy="560000"/>
+          </a:xfrm>
+          <a:prstGeom prst="rect">
+            <a:avLst/>
+          </a:prstGeom>
+          <a:noFill/>
+          <a:ln/>
+        </p:spPr>
+        <p:txBody>
+          <a:bodyPr wrap="square" lIns="0" tIns="0" rIns="0" bIns="0" rtlCol="0" anchor="t"/>
+          <a:lstStyle/>
+          <a:p>
+            <a:pPr indent="0" marL="0">
+              <a:lnSpc>
+                <a:spcPct val="110000"/>
+              </a:lnSpc>
+              <a:buNone/>
+            </a:pPr>
+            <a:r>
+              <a:rPr lang="en-US" sz="1250" dirty="0">
+                <a:solidFill>
+                  <a:srgbClr val="16262E"/>
+                </a:solidFill>
+                <a:latin typeface="Calibri" pitchFamily="34" charset="0"/>
+                <a:ea typeface="Calibri" pitchFamily="34" charset="-122"/>
+                <a:cs typeface="Calibri" pitchFamily="34" charset="-120"/>
+              </a:rPr>
+              <a:t>No comparten una sola palabra de contenido. Las dos dicen lo mismo: no tengo mi dinero.</a:t>
+            </a:r>
+            <a:endParaRPr lang="en-US" sz="1250" dirty="0"/>
+          </a:p>
+        </p:txBody>
+      </p:sp>
+      <p:sp>
+        <p:nvSpPr>
+          <p:cNvPr id="22" name="Shape"/>
+          <p:cNvSpPr/>
+          <p:nvPr/>
+        </p:nvSpPr>
+        <p:spPr>
+          <a:xfrm>
+            <a:off x="566928" y="5824728"/>
+            <a:ext cx="11057839" cy="594360"/>
+          </a:xfrm>
+          <a:prstGeom prst="roundRect">
+            <a:avLst>
+              <a:gd name="adj" fmla="val 8235"/>
+            </a:avLst>
+          </a:prstGeom>
+          <a:solidFill>
+            <a:srgbClr val="F7E4D8"/>
+          </a:solidFill>
+          <a:ln w="12700">
+            <a:solidFill>
+              <a:srgbClr val="F7E4D8"/>
+            </a:solidFill>
+            <a:prstDash val="solid"/>
+          </a:ln>
+        </p:spPr>
+      </p:sp>
+      <p:sp>
+        <p:nvSpPr>
+          <p:cNvPr id="23" name="Text"/>
+          <p:cNvSpPr txBox="1"/>
+          <p:nvPr/>
+        </p:nvSpPr>
+        <p:spPr>
+          <a:xfrm>
+            <a:off x="804672" y="5824728"/>
+            <a:ext cx="10582351" cy="594360"/>
+          </a:xfrm>
+          <a:prstGeom prst="rect">
+            <a:avLst/>
+          </a:prstGeom>
+          <a:noFill/>
+          <a:ln/>
+        </p:spPr>
+        <p:txBody>
+          <a:bodyPr wrap="square" lIns="0" tIns="0" rIns="0" bIns="0" rtlCol="0" anchor="ctr"/>
+          <a:lstStyle/>
+          <a:p>
+            <a:pPr indent="0" marL="0">
+              <a:lnSpc>
+                <a:spcPct val="110000"/>
+              </a:lnSpc>
+              <a:buNone/>
+            </a:pPr>
+            <a:r>
+              <a:rPr lang="en-US" sz="1300" dirty="0">
+                <a:solidFill>
+                  <a:srgbClr val="16262E"/>
+                </a:solidFill>
+                <a:latin typeface="Calibri" pitchFamily="34" charset="0"/>
+                <a:ea typeface="Calibri" pitchFamily="34" charset="-122"/>
+                <a:cs typeface="Calibri" pitchFamily="34" charset="-120"/>
+              </a:rPr>
+              <a:t>Por eso las herramientas convierten el texto en coordenadas, los vectores: lo que significa parecido queda cerca aunque esté escrito distinto. Y cuando el dato no es texto sino una tabla de variables mezcladas, la distancia se mide con Gower, que verás en el Módulo III.</a:t>
+            </a:r>
+            <a:endParaRPr lang="en-US" sz="1300" dirty="0"/>
+          </a:p>
+        </p:txBody>
+      </p:sp>
+    </p:spTree>
+  </p:cSld>
+  <p:clrMapOvr>
+    <a:masterClrMapping/>
+  </p:clrMapOvr>
+</p:sld>
+</file>
+
+<file path=ppt/slides/slide2.xml><?xml version="1.0" encoding="utf-8"?>
+<p:sld xmlns:a="http://schemas.openxmlformats.org/drawingml/2006/main" xmlns:r="http://schemas.openxmlformats.org/officeDocument/2006/relationships" xmlns:p="http://schemas.openxmlformats.org/presentationml/2006/main">
+  <p:cSld name="Agenda">
+    <p:spTree>
+      <p:nvGrpSpPr>
+        <p:cNvPr id="1" name=""/>
+        <p:cNvGrpSpPr/>
+        <p:nvPr/>
+      </p:nvGrpSpPr>
+      <p:grpSpPr>
+        <a:xfrm>
+          <a:off x="0" y="0"/>
+          <a:ext cx="0" cy="0"/>
+          <a:chOff x="0" y="0"/>
+          <a:chExt cx="0" cy="0"/>
+        </a:xfrm>
+      </p:grpSpPr>
+      <p:sp>
+        <p:nvSpPr>
+          <p:cNvPr id="2" name="Text"/>
+          <p:cNvSpPr txBox="1"/>
+          <p:nvPr/>
+        </p:nvSpPr>
+        <p:spPr>
+          <a:xfrm>
+            <a:off x="566928" y="402336"/>
+            <a:ext cx="11057839" cy="749808"/>
+          </a:xfrm>
+          <a:prstGeom prst="rect">
+            <a:avLst/>
+          </a:prstGeom>
+          <a:noFill/>
+          <a:ln/>
+        </p:spPr>
+        <p:txBody>
+          <a:bodyPr wrap="square" lIns="0" tIns="0" rIns="0" bIns="0" rtlCol="0" anchor="t"/>
+          <a:lstStyle/>
+          <a:p>
+            <a:pPr algn="l" indent="0" marL="0">
+              <a:buNone/>
+            </a:pPr>
+            <a:r>
+              <a:rPr lang="en-US" sz="3200" b="1" dirty="0">
+                <a:solidFill>
+                  <a:srgbClr val="16262E"/>
+                </a:solidFill>
+                <a:latin typeface="Arial" pitchFamily="34" charset="0"/>
+                <a:ea typeface="Arial" pitchFamily="34" charset="-122"/>
+                <a:cs typeface="Arial" pitchFamily="34" charset="-120"/>
+              </a:rPr>
+              <a:t>Cómo vamos a usar los 150 minutos</a:t>
+            </a:r>
+            <a:endParaRPr lang="en-US" sz="3200" dirty="0"/>
+          </a:p>
+        </p:txBody>
+      </p:sp>
+      <p:sp>
+        <p:nvSpPr>
+          <p:cNvPr id="3" name="Shape"/>
+          <p:cNvSpPr/>
+          <p:nvPr/>
+        </p:nvSpPr>
+        <p:spPr>
+          <a:xfrm>
+            <a:off x="9485071" y="457200"/>
+            <a:ext cx="2139696" cy="347472"/>
+          </a:xfrm>
+          <a:prstGeom prst="roundRect">
+            <a:avLst>
+              <a:gd name="adj" fmla="val 50000"/>
             </a:avLst>
           </a:prstGeom>
           <a:solidFill>
@@ -6633,14 +8817,14 @@
       </p:sp>
       <p:sp>
         <p:nvSpPr>
-          <p:cNvPr id="6" name="Text 4"/>
-          <p:cNvSpPr txBox="1"/>
-          <p:nvPr/>
-        </p:nvSpPr>
-        <p:spPr>
-          <a:xfrm>
-            <a:off x="786384" y="1408176"/>
-            <a:ext cx="1371600" cy="1081278"/>
+          <p:cNvPr id="4" name="Text"/>
+          <p:cNvSpPr txBox="1"/>
+          <p:nvPr/>
+        </p:nvSpPr>
+        <p:spPr>
+          <a:xfrm>
+            <a:off x="9485071" y="457200"/>
+            <a:ext cx="2139696" cy="347472"/>
           </a:xfrm>
           <a:prstGeom prst="rect">
             <a:avLst/>
@@ -6652,80 +8836,38 @@
           <a:bodyPr wrap="square" lIns="0" tIns="0" rIns="0" bIns="0" rtlCol="0" anchor="ctr"/>
           <a:lstStyle/>
           <a:p>
-            <a:pPr indent="0" marL="0">
-              <a:buNone/>
-            </a:pPr>
-            <a:r>
-              <a:rPr lang="en-US" sz="1300" b="1" dirty="0">
-                <a:solidFill>
-                  <a:srgbClr val="2E7D7D"/>
-                </a:solidFill>
-                <a:latin typeface="Arial" pitchFamily="34" charset="0"/>
-                <a:ea typeface="Arial" pitchFamily="34" charset="-122"/>
-                <a:cs typeface="Arial" pitchFamily="34" charset="-120"/>
-              </a:rPr>
-              <a:t>9:00</a:t>
-            </a:r>
-            <a:endParaRPr lang="en-US" sz="1300" dirty="0"/>
-          </a:p>
-        </p:txBody>
-      </p:sp>
-      <p:sp>
-        <p:nvSpPr>
-          <p:cNvPr id="7" name="Text 5"/>
-          <p:cNvSpPr txBox="1"/>
-          <p:nvPr/>
-        </p:nvSpPr>
-        <p:spPr>
-          <a:xfrm>
-            <a:off x="2194560" y="1463040"/>
-            <a:ext cx="3517240" cy="971550"/>
-          </a:xfrm>
-          <a:prstGeom prst="rect">
-            <a:avLst/>
-          </a:prstGeom>
-          <a:noFill/>
-          <a:ln/>
-        </p:spPr>
-        <p:txBody>
-          <a:bodyPr wrap="square" lIns="0" tIns="0" rIns="0" bIns="0" rtlCol="0" anchor="ctr"/>
-          <a:lstStyle/>
-          <a:p>
-            <a:pPr indent="0" marL="0">
-              <a:lnSpc>
-                <a:spcPct val="105000"/>
-              </a:lnSpc>
-              <a:buNone/>
-            </a:pPr>
-            <a:r>
-              <a:rPr lang="en-US" sz="1350" dirty="0">
-                <a:solidFill>
-                  <a:srgbClr val="16262E"/>
+            <a:pPr algn="ctr" indent="0" marL="0">
+              <a:buNone/>
+            </a:pPr>
+            <a:r>
+              <a:rPr lang="en-US" sz="1200" b="1" dirty="0">
+                <a:solidFill>
+                  <a:srgbClr val="5A6B73"/>
                 </a:solidFill>
                 <a:latin typeface="Calibri" pitchFamily="34" charset="0"/>
                 <a:ea typeface="Calibri" pitchFamily="34" charset="-122"/>
                 <a:cs typeface="Calibri" pitchFamily="34" charset="-120"/>
               </a:rPr>
-              <a:t>Las cuatro tareas y para qué sirve cada una</a:t>
-            </a:r>
-            <a:endParaRPr lang="en-US" sz="1350" dirty="0"/>
-          </a:p>
-        </p:txBody>
-      </p:sp>
-      <p:sp>
-        <p:nvSpPr>
-          <p:cNvPr id="8" name="Shape 6"/>
+              <a:t>9:00 a 11:30</a:t>
+            </a:r>
+            <a:endParaRPr lang="en-US" sz="1200" dirty="0"/>
+          </a:p>
+        </p:txBody>
+      </p:sp>
+      <p:sp>
+        <p:nvSpPr>
+          <p:cNvPr id="5" name="Shape"/>
           <p:cNvSpPr/>
           <p:nvPr/>
         </p:nvSpPr>
         <p:spPr>
           <a:xfrm>
-            <a:off x="566928" y="2635758"/>
-            <a:ext cx="5364328" cy="1081278"/>
+            <a:off x="566928" y="1408176"/>
+            <a:ext cx="5364328" cy="860000"/>
           </a:xfrm>
           <a:prstGeom prst="roundRect">
             <a:avLst>
-              <a:gd name="adj" fmla="val 5920"/>
+              <a:gd name="adj" fmla="val 5000"/>
             </a:avLst>
           </a:prstGeom>
           <a:solidFill>
@@ -6741,14 +8883,14 @@
       </p:sp>
       <p:sp>
         <p:nvSpPr>
-          <p:cNvPr id="9" name="Text 7"/>
-          <p:cNvSpPr txBox="1"/>
-          <p:nvPr/>
-        </p:nvSpPr>
-        <p:spPr>
-          <a:xfrm>
-            <a:off x="786384" y="2635758"/>
-            <a:ext cx="1371600" cy="1081278"/>
+          <p:cNvPr id="6" name="Text"/>
+          <p:cNvSpPr txBox="1"/>
+          <p:nvPr/>
+        </p:nvSpPr>
+        <p:spPr>
+          <a:xfrm>
+            <a:off x="786384" y="1408176"/>
+            <a:ext cx="1371600" cy="860000"/>
           </a:xfrm>
           <a:prstGeom prst="rect">
             <a:avLst/>
@@ -6772,7 +8914,7 @@
                 <a:ea typeface="Arial" pitchFamily="34" charset="-122"/>
                 <a:cs typeface="Arial" pitchFamily="34" charset="-120"/>
               </a:rPr>
-              <a:t>9:25</a:t>
+              <a:t>9:00</a:t>
             </a:r>
             <a:endParaRPr lang="en-US" sz="1300" dirty="0"/>
           </a:p>
@@ -6780,14 +8922,14 @@
       </p:sp>
       <p:sp>
         <p:nvSpPr>
-          <p:cNvPr id="10" name="Text 8"/>
-          <p:cNvSpPr txBox="1"/>
-          <p:nvPr/>
-        </p:nvSpPr>
-        <p:spPr>
-          <a:xfrm>
-            <a:off x="2194560" y="2690622"/>
-            <a:ext cx="3517240" cy="971550"/>
+          <p:cNvPr id="7" name="Text"/>
+          <p:cNvSpPr txBox="1"/>
+          <p:nvPr/>
+        </p:nvSpPr>
+        <p:spPr>
+          <a:xfrm>
+            <a:off x="2194560" y="1448176"/>
+            <a:ext cx="3517240" cy="780000"/>
           </a:xfrm>
           <a:prstGeom prst="rect">
             <a:avLst/>
@@ -6801,12 +8943,12 @@
           <a:p>
             <a:pPr indent="0" marL="0">
               <a:lnSpc>
-                <a:spcPct val="105000"/>
+                <a:spcPct val="108000"/>
               </a:lnSpc>
               <a:buNone/>
             </a:pPr>
             <a:r>
-              <a:rPr lang="en-US" sz="1350" dirty="0">
+              <a:rPr lang="en-US" sz="1300" dirty="0">
                 <a:solidFill>
                   <a:srgbClr val="16262E"/>
                 </a:solidFill>
@@ -6814,26 +8956,26 @@
                 <a:ea typeface="Calibri" pitchFamily="34" charset="-122"/>
                 <a:cs typeface="Calibri" pitchFamily="34" charset="-120"/>
               </a:rPr>
-              <a:t>Práctica A: las dos formas de resumir</a:t>
-            </a:r>
-            <a:endParaRPr lang="en-US" sz="1350" dirty="0"/>
-          </a:p>
-        </p:txBody>
-      </p:sp>
-      <p:sp>
-        <p:nvSpPr>
-          <p:cNvPr id="11" name="Shape 9"/>
+              <a:t>Las cuatro tareas y para qué sirve cada una</a:t>
+            </a:r>
+            <a:endParaRPr lang="en-US" sz="1300" dirty="0"/>
+          </a:p>
+        </p:txBody>
+      </p:sp>
+      <p:sp>
+        <p:nvSpPr>
+          <p:cNvPr id="8" name="Shape"/>
           <p:cNvSpPr/>
           <p:nvPr/>
         </p:nvSpPr>
         <p:spPr>
           <a:xfrm>
-            <a:off x="566928" y="3863340"/>
-            <a:ext cx="5364328" cy="1081278"/>
+            <a:off x="566928" y="2341176"/>
+            <a:ext cx="5364328" cy="860000"/>
           </a:xfrm>
           <a:prstGeom prst="roundRect">
             <a:avLst>
-              <a:gd name="adj" fmla="val 5920"/>
+              <a:gd name="adj" fmla="val 5000"/>
             </a:avLst>
           </a:prstGeom>
           <a:solidFill>
@@ -6849,14 +8991,14 @@
       </p:sp>
       <p:sp>
         <p:nvSpPr>
-          <p:cNvPr id="12" name="Text 10"/>
-          <p:cNvSpPr txBox="1"/>
-          <p:nvPr/>
-        </p:nvSpPr>
-        <p:spPr>
-          <a:xfrm>
-            <a:off x="786384" y="3863340"/>
-            <a:ext cx="1371600" cy="1081278"/>
+          <p:cNvPr id="9" name="Text"/>
+          <p:cNvSpPr txBox="1"/>
+          <p:nvPr/>
+        </p:nvSpPr>
+        <p:spPr>
+          <a:xfrm>
+            <a:off x="786384" y="2341176"/>
+            <a:ext cx="1371600" cy="860000"/>
           </a:xfrm>
           <a:prstGeom prst="rect">
             <a:avLst/>
@@ -6880,7 +9022,7 @@
                 <a:ea typeface="Arial" pitchFamily="34" charset="-122"/>
                 <a:cs typeface="Arial" pitchFamily="34" charset="-120"/>
               </a:rPr>
-              <a:t>9:45</a:t>
+              <a:t>9:25</a:t>
             </a:r>
             <a:endParaRPr lang="en-US" sz="1300" dirty="0"/>
           </a:p>
@@ -6888,14 +9030,14 @@
       </p:sp>
       <p:sp>
         <p:nvSpPr>
-          <p:cNvPr id="13" name="Text 11"/>
-          <p:cNvSpPr txBox="1"/>
-          <p:nvPr/>
-        </p:nvSpPr>
-        <p:spPr>
-          <a:xfrm>
-            <a:off x="2194560" y="3918204"/>
-            <a:ext cx="3517240" cy="971550"/>
+          <p:cNvPr id="10" name="Text"/>
+          <p:cNvSpPr txBox="1"/>
+          <p:nvPr/>
+        </p:nvSpPr>
+        <p:spPr>
+          <a:xfrm>
+            <a:off x="2194560" y="2381176"/>
+            <a:ext cx="3517240" cy="780000"/>
           </a:xfrm>
           <a:prstGeom prst="rect">
             <a:avLst/>
@@ -6909,12 +9051,12 @@
           <a:p>
             <a:pPr indent="0" marL="0">
               <a:lnSpc>
-                <a:spcPct val="105000"/>
+                <a:spcPct val="108000"/>
               </a:lnSpc>
               <a:buNone/>
             </a:pPr>
             <a:r>
-              <a:rPr lang="en-US" sz="1350" dirty="0">
+              <a:rPr lang="en-US" sz="1300" dirty="0">
                 <a:solidFill>
                   <a:srgbClr val="16262E"/>
                 </a:solidFill>
@@ -6922,26 +9064,242 @@
                 <a:ea typeface="Calibri" pitchFamily="34" charset="-122"/>
                 <a:cs typeface="Calibri" pitchFamily="34" charset="-120"/>
               </a:rPr>
-              <a:t>Práctica B: sacar la tabla de adentro del texto</a:t>
-            </a:r>
-            <a:endParaRPr lang="en-US" sz="1350" dirty="0"/>
-          </a:p>
-        </p:txBody>
-      </p:sp>
-      <p:sp>
-        <p:nvSpPr>
-          <p:cNvPr id="14" name="Shape 12"/>
+              <a:t>Práctica A: las dos formas de resumir</a:t>
+            </a:r>
+            <a:endParaRPr lang="en-US" sz="1300" dirty="0"/>
+          </a:p>
+        </p:txBody>
+      </p:sp>
+      <p:sp>
+        <p:nvSpPr>
+          <p:cNvPr id="11" name="Shape"/>
           <p:cNvSpPr/>
           <p:nvPr/>
         </p:nvSpPr>
         <p:spPr>
           <a:xfrm>
-            <a:off x="566928" y="5090922"/>
-            <a:ext cx="5364328" cy="1081278"/>
+            <a:off x="566928" y="3274176"/>
+            <a:ext cx="5364328" cy="860000"/>
           </a:xfrm>
           <a:prstGeom prst="roundRect">
             <a:avLst>
-              <a:gd name="adj" fmla="val 5920"/>
+              <a:gd name="adj" fmla="val 5000"/>
+            </a:avLst>
+          </a:prstGeom>
+          <a:solidFill>
+            <a:srgbClr val="F2F5F6"/>
+          </a:solidFill>
+          <a:ln w="12700">
+            <a:solidFill>
+              <a:srgbClr val="F2F5F6"/>
+            </a:solidFill>
+            <a:prstDash val="solid"/>
+          </a:ln>
+        </p:spPr>
+      </p:sp>
+      <p:sp>
+        <p:nvSpPr>
+          <p:cNvPr id="12" name="Text"/>
+          <p:cNvSpPr txBox="1"/>
+          <p:nvPr/>
+        </p:nvSpPr>
+        <p:spPr>
+          <a:xfrm>
+            <a:off x="786384" y="3274176"/>
+            <a:ext cx="1371600" cy="860000"/>
+          </a:xfrm>
+          <a:prstGeom prst="rect">
+            <a:avLst/>
+          </a:prstGeom>
+          <a:noFill/>
+          <a:ln/>
+        </p:spPr>
+        <p:txBody>
+          <a:bodyPr wrap="square" lIns="0" tIns="0" rIns="0" bIns="0" rtlCol="0" anchor="ctr"/>
+          <a:lstStyle/>
+          <a:p>
+            <a:pPr indent="0" marL="0">
+              <a:buNone/>
+            </a:pPr>
+            <a:r>
+              <a:rPr lang="en-US" sz="1300" b="1" dirty="0">
+                <a:solidFill>
+                  <a:srgbClr val="2E7D7D"/>
+                </a:solidFill>
+                <a:latin typeface="Arial" pitchFamily="34" charset="0"/>
+                <a:ea typeface="Arial" pitchFamily="34" charset="-122"/>
+                <a:cs typeface="Arial" pitchFamily="34" charset="-120"/>
+              </a:rPr>
+              <a:t>9:37</a:t>
+            </a:r>
+            <a:endParaRPr lang="en-US" sz="1300" dirty="0"/>
+          </a:p>
+        </p:txBody>
+      </p:sp>
+      <p:sp>
+        <p:nvSpPr>
+          <p:cNvPr id="13" name="Text"/>
+          <p:cNvSpPr txBox="1"/>
+          <p:nvPr/>
+        </p:nvSpPr>
+        <p:spPr>
+          <a:xfrm>
+            <a:off x="2194560" y="3314176"/>
+            <a:ext cx="3517240" cy="780000"/>
+          </a:xfrm>
+          <a:prstGeom prst="rect">
+            <a:avLst/>
+          </a:prstGeom>
+          <a:noFill/>
+          <a:ln/>
+        </p:spPr>
+        <p:txBody>
+          <a:bodyPr wrap="square" lIns="0" tIns="0" rIns="0" bIns="0" rtlCol="0" anchor="ctr"/>
+          <a:lstStyle/>
+          <a:p>
+            <a:pPr indent="0" marL="0">
+              <a:lnSpc>
+                <a:spcPct val="108000"/>
+              </a:lnSpc>
+              <a:buNone/>
+            </a:pPr>
+            <a:r>
+              <a:rPr lang="en-US" sz="1300" dirty="0">
+                <a:solidFill>
+                  <a:srgbClr val="16262E"/>
+                </a:solidFill>
+                <a:latin typeface="Calibri" pitchFamily="34" charset="0"/>
+                <a:ea typeface="Calibri" pitchFamily="34" charset="-122"/>
+                <a:cs typeface="Calibri" pitchFamily="34" charset="-120"/>
+              </a:rPr>
+              <a:t>Práctica B: sacar la tabla de adentro del texto</a:t>
+            </a:r>
+            <a:endParaRPr lang="en-US" sz="1300" dirty="0"/>
+          </a:p>
+        </p:txBody>
+      </p:sp>
+      <p:sp>
+        <p:nvSpPr>
+          <p:cNvPr id="14" name="Shape"/>
+          <p:cNvSpPr/>
+          <p:nvPr/>
+        </p:nvSpPr>
+        <p:spPr>
+          <a:xfrm>
+            <a:off x="566928" y="4207176"/>
+            <a:ext cx="5364328" cy="860000"/>
+          </a:xfrm>
+          <a:prstGeom prst="roundRect">
+            <a:avLst>
+              <a:gd name="adj" fmla="val 5000"/>
+            </a:avLst>
+          </a:prstGeom>
+          <a:solidFill>
+            <a:srgbClr val="F2F5F6"/>
+          </a:solidFill>
+          <a:ln w="12700">
+            <a:solidFill>
+              <a:srgbClr val="F2F5F6"/>
+            </a:solidFill>
+            <a:prstDash val="solid"/>
+          </a:ln>
+        </p:spPr>
+      </p:sp>
+      <p:sp>
+        <p:nvSpPr>
+          <p:cNvPr id="15" name="Text"/>
+          <p:cNvSpPr txBox="1"/>
+          <p:nvPr/>
+        </p:nvSpPr>
+        <p:spPr>
+          <a:xfrm>
+            <a:off x="786384" y="4207176"/>
+            <a:ext cx="1371600" cy="860000"/>
+          </a:xfrm>
+          <a:prstGeom prst="rect">
+            <a:avLst/>
+          </a:prstGeom>
+          <a:noFill/>
+          <a:ln/>
+        </p:spPr>
+        <p:txBody>
+          <a:bodyPr wrap="square" lIns="0" tIns="0" rIns="0" bIns="0" rtlCol="0" anchor="ctr"/>
+          <a:lstStyle/>
+          <a:p>
+            <a:pPr indent="0" marL="0">
+              <a:buNone/>
+            </a:pPr>
+            <a:r>
+              <a:rPr lang="en-US" sz="1300" b="1" dirty="0">
+                <a:solidFill>
+                  <a:srgbClr val="2E7D7D"/>
+                </a:solidFill>
+                <a:latin typeface="Arial" pitchFamily="34" charset="0"/>
+                <a:ea typeface="Arial" pitchFamily="34" charset="-122"/>
+                <a:cs typeface="Arial" pitchFamily="34" charset="-120"/>
+              </a:rPr>
+              <a:t>10:07</a:t>
+            </a:r>
+            <a:endParaRPr lang="en-US" sz="1300" dirty="0"/>
+          </a:p>
+        </p:txBody>
+      </p:sp>
+      <p:sp>
+        <p:nvSpPr>
+          <p:cNvPr id="16" name="Text"/>
+          <p:cNvSpPr txBox="1"/>
+          <p:nvPr/>
+        </p:nvSpPr>
+        <p:spPr>
+          <a:xfrm>
+            <a:off x="2194560" y="4247176"/>
+            <a:ext cx="3517240" cy="780000"/>
+          </a:xfrm>
+          <a:prstGeom prst="rect">
+            <a:avLst/>
+          </a:prstGeom>
+          <a:noFill/>
+          <a:ln/>
+        </p:spPr>
+        <p:txBody>
+          <a:bodyPr wrap="square" lIns="0" tIns="0" rIns="0" bIns="0" rtlCol="0" anchor="ctr"/>
+          <a:lstStyle/>
+          <a:p>
+            <a:pPr indent="0" marL="0">
+              <a:lnSpc>
+                <a:spcPct val="108000"/>
+              </a:lnSpc>
+              <a:buNone/>
+            </a:pPr>
+            <a:r>
+              <a:rPr lang="en-US" sz="1300" dirty="0">
+                <a:solidFill>
+                  <a:srgbClr val="16262E"/>
+                </a:solidFill>
+                <a:latin typeface="Calibri" pitchFamily="34" charset="0"/>
+                <a:ea typeface="Calibri" pitchFamily="34" charset="-122"/>
+                <a:cs typeface="Calibri" pitchFamily="34" charset="-120"/>
+              </a:rPr>
+              <a:t>Cómo decide la máquina que dos textos se parecen</a:t>
+            </a:r>
+            <a:endParaRPr lang="en-US" sz="1300" dirty="0"/>
+          </a:p>
+        </p:txBody>
+      </p:sp>
+      <p:sp>
+        <p:nvSpPr>
+          <p:cNvPr id="17" name="Shape"/>
+          <p:cNvSpPr/>
+          <p:nvPr/>
+        </p:nvSpPr>
+        <p:spPr>
+          <a:xfrm>
+            <a:off x="566928" y="5140176"/>
+            <a:ext cx="5364328" cy="860000"/>
+          </a:xfrm>
+          <a:prstGeom prst="roundRect">
+            <a:avLst>
+              <a:gd name="adj" fmla="val 5000"/>
             </a:avLst>
           </a:prstGeom>
           <a:solidFill>
@@ -6957,14 +9315,14 @@
       </p:sp>
       <p:sp>
         <p:nvSpPr>
-          <p:cNvPr id="15" name="Text 13"/>
-          <p:cNvSpPr txBox="1"/>
-          <p:nvPr/>
-        </p:nvSpPr>
-        <p:spPr>
-          <a:xfrm>
-            <a:off x="786384" y="5090922"/>
-            <a:ext cx="1371600" cy="1081278"/>
+          <p:cNvPr id="18" name="Text"/>
+          <p:cNvSpPr txBox="1"/>
+          <p:nvPr/>
+        </p:nvSpPr>
+        <p:spPr>
+          <a:xfrm>
+            <a:off x="786384" y="5140176"/>
+            <a:ext cx="1371600" cy="860000"/>
           </a:xfrm>
           <a:prstGeom prst="rect">
             <a:avLst/>
@@ -6988,7 +9346,7 @@
                 <a:ea typeface="Arial" pitchFamily="34" charset="-122"/>
                 <a:cs typeface="Arial" pitchFamily="34" charset="-120"/>
               </a:rPr>
-              <a:t>10:15</a:t>
+              <a:t>10:19</a:t>
             </a:r>
             <a:endParaRPr lang="en-US" sz="1300" dirty="0"/>
           </a:p>
@@ -6996,14 +9354,14 @@
       </p:sp>
       <p:sp>
         <p:nvSpPr>
-          <p:cNvPr id="16" name="Text 14"/>
-          <p:cNvSpPr txBox="1"/>
-          <p:nvPr/>
-        </p:nvSpPr>
-        <p:spPr>
-          <a:xfrm>
-            <a:off x="2194560" y="5145786"/>
-            <a:ext cx="3517240" cy="971550"/>
+          <p:cNvPr id="19" name="Text"/>
+          <p:cNvSpPr txBox="1"/>
+          <p:nvPr/>
+        </p:nvSpPr>
+        <p:spPr>
+          <a:xfrm>
+            <a:off x="2194560" y="5180176"/>
+            <a:ext cx="3517240" cy="780000"/>
           </a:xfrm>
           <a:prstGeom prst="rect">
             <a:avLst/>
@@ -7017,12 +9375,12 @@
           <a:p>
             <a:pPr indent="0" marL="0">
               <a:lnSpc>
-                <a:spcPct val="105000"/>
+                <a:spcPct val="108000"/>
               </a:lnSpc>
               <a:buNone/>
             </a:pPr>
             <a:r>
-              <a:rPr lang="en-US" sz="1350" dirty="0">
+              <a:rPr lang="en-US" sz="1300" dirty="0">
                 <a:solidFill>
                   <a:srgbClr val="16262E"/>
                 </a:solidFill>
@@ -7030,26 +9388,26 @@
                 <a:ea typeface="Calibri" pitchFamily="34" charset="-122"/>
                 <a:cs typeface="Calibri" pitchFamily="34" charset="-120"/>
               </a:rPr>
-              <a:t>Receso de diez minutos</a:t>
-            </a:r>
-            <a:endParaRPr lang="en-US" sz="1350" dirty="0"/>
-          </a:p>
-        </p:txBody>
-      </p:sp>
-      <p:sp>
-        <p:nvSpPr>
-          <p:cNvPr id="17" name="Shape 15"/>
+              <a:t>Receso, con charla opcional sobre vectores</a:t>
+            </a:r>
+            <a:endParaRPr lang="en-US" sz="1300" dirty="0"/>
+          </a:p>
+        </p:txBody>
+      </p:sp>
+      <p:sp>
+        <p:nvSpPr>
+          <p:cNvPr id="20" name="Shape"/>
           <p:cNvSpPr/>
           <p:nvPr/>
         </p:nvSpPr>
         <p:spPr>
           <a:xfrm>
             <a:off x="6260440" y="1408176"/>
-            <a:ext cx="5364328" cy="1081278"/>
+            <a:ext cx="5364328" cy="860000"/>
           </a:xfrm>
           <a:prstGeom prst="roundRect">
             <a:avLst>
-              <a:gd name="adj" fmla="val 5920"/>
+              <a:gd name="adj" fmla="val 5000"/>
             </a:avLst>
           </a:prstGeom>
           <a:solidFill>
@@ -7065,14 +9423,14 @@
       </p:sp>
       <p:sp>
         <p:nvSpPr>
-          <p:cNvPr id="18" name="Text 16"/>
+          <p:cNvPr id="21" name="Text"/>
           <p:cNvSpPr txBox="1"/>
           <p:nvPr/>
         </p:nvSpPr>
         <p:spPr>
           <a:xfrm>
             <a:off x="6479896" y="1408176"/>
-            <a:ext cx="1371600" cy="1081278"/>
+            <a:ext cx="1371600" cy="860000"/>
           </a:xfrm>
           <a:prstGeom prst="rect">
             <a:avLst/>
@@ -7096,7 +9454,7 @@
                 <a:ea typeface="Arial" pitchFamily="34" charset="-122"/>
                 <a:cs typeface="Arial" pitchFamily="34" charset="-120"/>
               </a:rPr>
-              <a:t>10:25</a:t>
+              <a:t>10:29</a:t>
             </a:r>
             <a:endParaRPr lang="en-US" sz="1300" dirty="0"/>
           </a:p>
@@ -7104,14 +9462,14 @@
       </p:sp>
       <p:sp>
         <p:nvSpPr>
-          <p:cNvPr id="19" name="Text 17"/>
-          <p:cNvSpPr txBox="1"/>
-          <p:nvPr/>
-        </p:nvSpPr>
-        <p:spPr>
-          <a:xfrm>
-            <a:off x="7888072" y="1463040"/>
-            <a:ext cx="3517240" cy="971550"/>
+          <p:cNvPr id="22" name="Text"/>
+          <p:cNvSpPr txBox="1"/>
+          <p:nvPr/>
+        </p:nvSpPr>
+        <p:spPr>
+          <a:xfrm>
+            <a:off x="7888072" y="1448176"/>
+            <a:ext cx="3517240" cy="780000"/>
           </a:xfrm>
           <a:prstGeom prst="rect">
             <a:avLst/>
@@ -7125,12 +9483,12 @@
           <a:p>
             <a:pPr indent="0" marL="0">
               <a:lnSpc>
-                <a:spcPct val="105000"/>
+                <a:spcPct val="108000"/>
               </a:lnSpc>
               <a:buNone/>
             </a:pPr>
             <a:r>
-              <a:rPr lang="en-US" sz="1350" dirty="0">
+              <a:rPr lang="en-US" sz="1300" dirty="0">
                 <a:solidFill>
                   <a:srgbClr val="16262E"/>
                 </a:solidFill>
@@ -7140,24 +9498,24 @@
               </a:rPr>
               <a:t>Práctica C: agrupar temas sin perder a la minoría</a:t>
             </a:r>
-            <a:endParaRPr lang="en-US" sz="1350" dirty="0"/>
-          </a:p>
-        </p:txBody>
-      </p:sp>
-      <p:sp>
-        <p:nvSpPr>
-          <p:cNvPr id="20" name="Shape 18"/>
+            <a:endParaRPr lang="en-US" sz="1300" dirty="0"/>
+          </a:p>
+        </p:txBody>
+      </p:sp>
+      <p:sp>
+        <p:nvSpPr>
+          <p:cNvPr id="23" name="Shape"/>
           <p:cNvSpPr/>
           <p:nvPr/>
         </p:nvSpPr>
         <p:spPr>
           <a:xfrm>
-            <a:off x="6260440" y="2635758"/>
-            <a:ext cx="5364328" cy="1081278"/>
+            <a:off x="6260440" y="2341176"/>
+            <a:ext cx="5364328" cy="860000"/>
           </a:xfrm>
           <a:prstGeom prst="roundRect">
             <a:avLst>
-              <a:gd name="adj" fmla="val 5920"/>
+              <a:gd name="adj" fmla="val 5000"/>
             </a:avLst>
           </a:prstGeom>
           <a:solidFill>
@@ -7173,14 +9531,14 @@
       </p:sp>
       <p:sp>
         <p:nvSpPr>
-          <p:cNvPr id="21" name="Text 19"/>
-          <p:cNvSpPr txBox="1"/>
-          <p:nvPr/>
-        </p:nvSpPr>
-        <p:spPr>
-          <a:xfrm>
-            <a:off x="6479896" y="2635758"/>
-            <a:ext cx="1371600" cy="1081278"/>
+          <p:cNvPr id="24" name="Text"/>
+          <p:cNvSpPr txBox="1"/>
+          <p:nvPr/>
+        </p:nvSpPr>
+        <p:spPr>
+          <a:xfrm>
+            <a:off x="6479896" y="2341176"/>
+            <a:ext cx="1371600" cy="860000"/>
           </a:xfrm>
           <a:prstGeom prst="rect">
             <a:avLst/>
@@ -7204,7 +9562,7 @@
                 <a:ea typeface="Arial" pitchFamily="34" charset="-122"/>
                 <a:cs typeface="Arial" pitchFamily="34" charset="-120"/>
               </a:rPr>
-              <a:t>11:00</a:t>
+              <a:t>11:04</a:t>
             </a:r>
             <a:endParaRPr lang="en-US" sz="1300" dirty="0"/>
           </a:p>
@@ -7212,14 +9570,14 @@
       </p:sp>
       <p:sp>
         <p:nvSpPr>
-          <p:cNvPr id="22" name="Text 20"/>
-          <p:cNvSpPr txBox="1"/>
-          <p:nvPr/>
-        </p:nvSpPr>
-        <p:spPr>
-          <a:xfrm>
-            <a:off x="7888072" y="2690622"/>
-            <a:ext cx="3517240" cy="971550"/>
+          <p:cNvPr id="25" name="Text"/>
+          <p:cNvSpPr txBox="1"/>
+          <p:nvPr/>
+        </p:nvSpPr>
+        <p:spPr>
+          <a:xfrm>
+            <a:off x="7888072" y="2381176"/>
+            <a:ext cx="3517240" cy="780000"/>
           </a:xfrm>
           <a:prstGeom prst="rect">
             <a:avLst/>
@@ -7233,12 +9591,12 @@
           <a:p>
             <a:pPr indent="0" marL="0">
               <a:lnSpc>
-                <a:spcPct val="105000"/>
+                <a:spcPct val="108000"/>
               </a:lnSpc>
               <a:buNone/>
             </a:pPr>
             <a:r>
-              <a:rPr lang="en-US" sz="1350" dirty="0">
+              <a:rPr lang="en-US" sz="1300" dirty="0">
                 <a:solidFill>
                   <a:srgbClr val="16262E"/>
                 </a:solidFill>
@@ -7248,24 +9606,24 @@
               </a:rPr>
               <a:t>Práctica D: postura y causa raíz</a:t>
             </a:r>
-            <a:endParaRPr lang="en-US" sz="1350" dirty="0"/>
-          </a:p>
-        </p:txBody>
-      </p:sp>
-      <p:sp>
-        <p:nvSpPr>
-          <p:cNvPr id="23" name="Shape 21"/>
+            <a:endParaRPr lang="en-US" sz="1300" dirty="0"/>
+          </a:p>
+        </p:txBody>
+      </p:sp>
+      <p:sp>
+        <p:nvSpPr>
+          <p:cNvPr id="26" name="Shape"/>
           <p:cNvSpPr/>
           <p:nvPr/>
         </p:nvSpPr>
         <p:spPr>
           <a:xfrm>
-            <a:off x="6260440" y="3863340"/>
-            <a:ext cx="5364328" cy="1081278"/>
+            <a:off x="6260440" y="3274176"/>
+            <a:ext cx="5364328" cy="860000"/>
           </a:xfrm>
           <a:prstGeom prst="roundRect">
             <a:avLst>
-              <a:gd name="adj" fmla="val 5920"/>
+              <a:gd name="adj" fmla="val 5000"/>
             </a:avLst>
           </a:prstGeom>
           <a:solidFill>
@@ -7281,14 +9639,14 @@
       </p:sp>
       <p:sp>
         <p:nvSpPr>
-          <p:cNvPr id="24" name="Text 22"/>
-          <p:cNvSpPr txBox="1"/>
-          <p:nvPr/>
-        </p:nvSpPr>
-        <p:spPr>
-          <a:xfrm>
-            <a:off x="6479896" y="3863340"/>
-            <a:ext cx="1371600" cy="1081278"/>
+          <p:cNvPr id="27" name="Text"/>
+          <p:cNvSpPr txBox="1"/>
+          <p:nvPr/>
+        </p:nvSpPr>
+        <p:spPr>
+          <a:xfrm>
+            <a:off x="6479896" y="3274176"/>
+            <a:ext cx="1371600" cy="860000"/>
           </a:xfrm>
           <a:prstGeom prst="rect">
             <a:avLst/>
@@ -7312,7 +9670,7 @@
                 <a:ea typeface="Arial" pitchFamily="34" charset="-122"/>
                 <a:cs typeface="Arial" pitchFamily="34" charset="-120"/>
               </a:rPr>
-              <a:t>11:15</a:t>
+              <a:t>11:19</a:t>
             </a:r>
             <a:endParaRPr lang="en-US" sz="1300" dirty="0"/>
           </a:p>
@@ -7320,14 +9678,14 @@
       </p:sp>
       <p:sp>
         <p:nvSpPr>
-          <p:cNvPr id="25" name="Text 23"/>
-          <p:cNvSpPr txBox="1"/>
-          <p:nvPr/>
-        </p:nvSpPr>
-        <p:spPr>
-          <a:xfrm>
-            <a:off x="7888072" y="3918204"/>
-            <a:ext cx="3517240" cy="971550"/>
+          <p:cNvPr id="28" name="Text"/>
+          <p:cNvSpPr txBox="1"/>
+          <p:nvPr/>
+        </p:nvSpPr>
+        <p:spPr>
+          <a:xfrm>
+            <a:off x="7888072" y="3314176"/>
+            <a:ext cx="3517240" cy="780000"/>
           </a:xfrm>
           <a:prstGeom prst="rect">
             <a:avLst/>
@@ -7341,12 +9699,12 @@
           <a:p>
             <a:pPr indent="0" marL="0">
               <a:lnSpc>
-                <a:spcPct val="105000"/>
+                <a:spcPct val="108000"/>
               </a:lnSpc>
               <a:buNone/>
             </a:pPr>
             <a:r>
-              <a:rPr lang="en-US" sz="1350" dirty="0">
+              <a:rPr lang="en-US" sz="1300" dirty="0">
                 <a:solidFill>
                   <a:srgbClr val="16262E"/>
                 </a:solidFill>
@@ -7356,24 +9714,24 @@
               </a:rPr>
               <a:t>Qué haces cuando el texto no cabe</a:t>
             </a:r>
-            <a:endParaRPr lang="en-US" sz="1350" dirty="0"/>
-          </a:p>
-        </p:txBody>
-      </p:sp>
-      <p:sp>
-        <p:nvSpPr>
-          <p:cNvPr id="26" name="Shape 24"/>
+            <a:endParaRPr lang="en-US" sz="1300" dirty="0"/>
+          </a:p>
+        </p:txBody>
+      </p:sp>
+      <p:sp>
+        <p:nvSpPr>
+          <p:cNvPr id="29" name="Shape"/>
           <p:cNvSpPr/>
           <p:nvPr/>
         </p:nvSpPr>
         <p:spPr>
           <a:xfrm>
-            <a:off x="6260440" y="5090922"/>
-            <a:ext cx="5364328" cy="1081278"/>
+            <a:off x="6260440" y="4207176"/>
+            <a:ext cx="5364328" cy="860000"/>
           </a:xfrm>
           <a:prstGeom prst="roundRect">
             <a:avLst>
-              <a:gd name="adj" fmla="val 5920"/>
+              <a:gd name="adj" fmla="val 5000"/>
             </a:avLst>
           </a:prstGeom>
           <a:solidFill>
@@ -7389,14 +9747,14 @@
       </p:sp>
       <p:sp>
         <p:nvSpPr>
-          <p:cNvPr id="27" name="Text 25"/>
-          <p:cNvSpPr txBox="1"/>
-          <p:nvPr/>
-        </p:nvSpPr>
-        <p:spPr>
-          <a:xfrm>
-            <a:off x="6479896" y="5090922"/>
-            <a:ext cx="1371600" cy="1081278"/>
+          <p:cNvPr id="30" name="Text"/>
+          <p:cNvSpPr txBox="1"/>
+          <p:nvPr/>
+        </p:nvSpPr>
+        <p:spPr>
+          <a:xfrm>
+            <a:off x="6479896" y="4207176"/>
+            <a:ext cx="1371600" cy="860000"/>
           </a:xfrm>
           <a:prstGeom prst="rect">
             <a:avLst/>
@@ -7420,7 +9778,7 @@
                 <a:ea typeface="Arial" pitchFamily="34" charset="-122"/>
                 <a:cs typeface="Arial" pitchFamily="34" charset="-120"/>
               </a:rPr>
-              <a:t>11:25</a:t>
+              <a:t>11:27</a:t>
             </a:r>
             <a:endParaRPr lang="en-US" sz="1300" dirty="0"/>
           </a:p>
@@ -7428,14 +9786,14 @@
       </p:sp>
       <p:sp>
         <p:nvSpPr>
-          <p:cNvPr id="28" name="Text 26"/>
-          <p:cNvSpPr txBox="1"/>
-          <p:nvPr/>
-        </p:nvSpPr>
-        <p:spPr>
-          <a:xfrm>
-            <a:off x="7888072" y="5145786"/>
-            <a:ext cx="3517240" cy="971550"/>
+          <p:cNvPr id="31" name="Text"/>
+          <p:cNvSpPr txBox="1"/>
+          <p:nvPr/>
+        </p:nvSpPr>
+        <p:spPr>
+          <a:xfrm>
+            <a:off x="7888072" y="4247176"/>
+            <a:ext cx="3517240" cy="780000"/>
           </a:xfrm>
           <a:prstGeom prst="rect">
             <a:avLst/>
@@ -7449,12 +9807,12 @@
           <a:p>
             <a:pPr indent="0" marL="0">
               <a:lnSpc>
-                <a:spcPct val="105000"/>
+                <a:spcPct val="108000"/>
               </a:lnSpc>
               <a:buNone/>
             </a:pPr>
             <a:r>
-              <a:rPr lang="en-US" sz="1350" dirty="0">
+              <a:rPr lang="en-US" sz="1300" dirty="0">
                 <a:solidFill>
                   <a:srgbClr val="16262E"/>
                 </a:solidFill>
@@ -7464,13 +9822,13 @@
               </a:rPr>
               <a:t>Cierre y entregables</a:t>
             </a:r>
-            <a:endParaRPr lang="en-US" sz="1350" dirty="0"/>
-          </a:p>
-        </p:txBody>
-      </p:sp>
-      <p:sp>
-        <p:nvSpPr>
-          <p:cNvPr id="29" name="Text 27"/>
+            <a:endParaRPr lang="en-US" sz="1300" dirty="0"/>
+          </a:p>
+        </p:txBody>
+      </p:sp>
+      <p:sp>
+        <p:nvSpPr>
+          <p:cNvPr id="32" name="Text"/>
           <p:cNvSpPr txBox="1"/>
           <p:nvPr/>
         </p:nvSpPr>
@@ -7486,7 +9844,7 @@
           <a:ln/>
         </p:spPr>
         <p:txBody>
-          <a:bodyPr wrap="square" lIns="0" tIns="0" rIns="0" bIns="0" rtlCol="0" anchor="ctr"/>
+          <a:bodyPr wrap="square" lIns="0" tIns="0" rIns="0" bIns="0" rtlCol="0" anchor="t"/>
           <a:lstStyle/>
           <a:p>
             <a:pPr indent="0" marL="0">
@@ -7501,7 +9859,7 @@
                 <a:ea typeface="Calibri" pitchFamily="34" charset="-122"/>
                 <a:cs typeface="Calibri" pitchFamily="34" charset="-120"/>
               </a:rPr>
-              <a:t>Hoy trabajas 90 minutos con las manos en el teclado. Es la sesión con más práctica de las dos semanas.</a:t>
+              <a:t>Hoy trabajas unos 90 minutos con las manos en el teclado. Es la sesión con más práctica de las dos semanas.</a:t>
             </a:r>
             <a:endParaRPr lang="en-US" sz="1000" dirty="0"/>
           </a:p>
@@ -9302,7 +11660,7 @@
                 <a:ea typeface="Arial" pitchFamily="34" charset="-122"/>
                 <a:cs typeface="Arial" pitchFamily="34" charset="-120"/>
               </a:rPr>
-              <a:t>20 minutos</a:t>
+              <a:t>12 minutos</a:t>
             </a:r>
             <a:endParaRPr lang="en-US" sz="1300" dirty="0"/>
           </a:p>
@@ -9740,7 +12098,7 @@
                 <a:ea typeface="Calibri" pitchFamily="34" charset="-122"/>
                 <a:cs typeface="Calibri" pitchFamily="34" charset="-120"/>
               </a:rPr>
-              <a:t>Pon las dos salidas lado a lado y busca una afirmación que esté en la abstractiva pero no se sostenga en ninguna oración de la extractiva.</a:t>
+              <a:t>Ponlas lado a lado y busca una sola cosa: una afirmación de la abstractiva que no se sostenga en ninguna oración de la extractiva.</a:t>
             </a:r>
             <a:endParaRPr lang="en-US" sz="1450" dirty="0"/>
           </a:p>
@@ -11341,7 +13699,7 @@
                 <a:ea typeface="Calibri" pitchFamily="34" charset="-122"/>
                 <a:cs typeface="Calibri" pitchFamily="34" charset="-120"/>
               </a:rPr>
-              <a:t>10:25 a 11:00</a:t>
+              <a:t>10:29 a 11:04</a:t>
             </a:r>
             <a:endParaRPr lang="en-US" sz="1200" dirty="0"/>
           </a:p>

--- a/sesion-04/Sesion_04_PLN_Gestion_Documental.pptx
+++ b/sesion-04/Sesion_04_PLN_Gestion_Documental.pptx
@@ -7843,7 +7843,7 @@
         </p:nvSpPr>
         <p:spPr>
           <a:xfrm>
-            <a:off x="566928" y="5824728"/>
+            <a:off x="566928" y="5700000"/>
             <a:ext cx="11057839" cy="594360"/>
           </a:xfrm>
           <a:prstGeom prst="roundRect">
@@ -7870,7 +7870,7 @@
         </p:nvSpPr>
         <p:spPr>
           <a:xfrm>
-            <a:off x="804672" y="5824728"/>
+            <a:off x="804672" y="5700000"/>
             <a:ext cx="10582351" cy="594360"/>
           </a:xfrm>
           <a:prstGeom prst="rect">
@@ -7901,6 +7901,45 @@
               <a:t>TF-IDF cabe en una frase: una palabra pesa cuando es frecuente aquí y rara en el resto. De ahí sale algo que te importa: una queja poco frecuente nunca junta peso suficiente para volverse categoría, y termina en la bolsa de «otros».</a:t>
             </a:r>
             <a:endParaRPr lang="en-US" sz="1300" dirty="0"/>
+          </a:p>
+        </p:txBody>
+      </p:sp>
+      <p:sp>
+        <p:nvSpPr>
+          <p:cNvPr id="36" name="Text"/>
+          <p:cNvSpPr txBox="1"/>
+          <p:nvPr/>
+        </p:nvSpPr>
+        <p:spPr>
+          <a:xfrm>
+            <a:off x="566928" y="6360000"/>
+            <a:ext cx="11057839" cy="240000"/>
+          </a:xfrm>
+          <a:prstGeom prst="rect">
+            <a:avLst/>
+          </a:prstGeom>
+          <a:noFill/>
+          <a:ln/>
+        </p:spPr>
+        <p:txBody>
+          <a:bodyPr wrap="square" lIns="0" tIns="0" rIns="0" bIns="0" rtlCol="0" anchor="t"/>
+          <a:lstStyle/>
+          <a:p>
+            <a:pPr indent="0" marL="0">
+              <a:buNone/>
+            </a:pPr>
+            <a:r>
+              <a:rPr lang="en-US" sz="1000" dirty="0">
+                <a:solidFill>
+                  <a:srgbClr val="5A6B73"/>
+                </a:solidFill>
+                <a:latin typeface="Calibri" pitchFamily="34" charset="0"/>
+                <a:ea typeface="Calibri" pitchFamily="34" charset="-122"/>
+                <a:cs typeface="Calibri" pitchFamily="34" charset="-120"/>
+              </a:rPr>
+              <a:t>Conteos de tu propio corpus: Registros_atencion_ciudadana_PARTICIPANTE.xlsx, hoja Registros, el mismo archivo de la Práctica C.</a:t>
+            </a:r>
+            <a:endParaRPr lang="en-US" sz="1000" dirty="0"/>
           </a:p>
         </p:txBody>
       </p:sp>
@@ -8016,7 +8055,7 @@
         <p:spPr>
           <a:xfrm>
             <a:off x="566928" y="1900000"/>
-            <a:ext cx="5460655" cy="3700000"/>
+            <a:ext cx="5460655" cy="3550000"/>
           </a:xfrm>
           <a:prstGeom prst="roundRect">
             <a:avLst>
@@ -8081,7 +8120,7 @@
         </p:nvSpPr>
         <p:spPr>
           <a:xfrm>
-            <a:off x="796928" y="2440000"/>
+            <a:off x="796928" y="2400000"/>
             <a:ext cx="5000000" cy="1160000"/>
           </a:xfrm>
           <a:prstGeom prst="roundRect">
@@ -8108,7 +8147,7 @@
         </p:nvSpPr>
         <p:spPr>
           <a:xfrm>
-            <a:off x="1036928" y="2560000"/>
+            <a:off x="1036928" y="2520000"/>
             <a:ext cx="4520000" cy="760000"/>
           </a:xfrm>
           <a:prstGeom prst="rect">
@@ -8150,7 +8189,7 @@
         </p:nvSpPr>
         <p:spPr>
           <a:xfrm>
-            <a:off x="1036928" y="3320000"/>
+            <a:off x="1036928" y="3280000"/>
             <a:ext cx="4520000" cy="220000"/>
           </a:xfrm>
           <a:prstGeom prst="rect">
@@ -8189,7 +8228,7 @@
         </p:nvSpPr>
         <p:spPr>
           <a:xfrm>
-            <a:off x="796928" y="3660000"/>
+            <a:off x="796928" y="3560000"/>
             <a:ext cx="5000000" cy="1160000"/>
           </a:xfrm>
           <a:prstGeom prst="roundRect">
@@ -8216,7 +8255,7 @@
         </p:nvSpPr>
         <p:spPr>
           <a:xfrm>
-            <a:off x="1036928" y="3780000"/>
+            <a:off x="1036928" y="3680000"/>
             <a:ext cx="4520000" cy="760000"/>
           </a:xfrm>
           <a:prstGeom prst="rect">
@@ -8258,7 +8297,7 @@
         </p:nvSpPr>
         <p:spPr>
           <a:xfrm>
-            <a:off x="1036928" y="4540000"/>
+            <a:off x="1036928" y="4440000"/>
             <a:ext cx="4520000" cy="220000"/>
           </a:xfrm>
           <a:prstGeom prst="rect">
@@ -8297,8 +8336,8 @@
         </p:nvSpPr>
         <p:spPr>
           <a:xfrm>
-            <a:off x="796928" y="4900000"/>
-            <a:ext cx="5000655" cy="560000"/>
+            <a:off x="796928" y="4790000"/>
+            <a:ext cx="5000655" cy="540000"/>
           </a:xfrm>
           <a:prstGeom prst="rect">
             <a:avLst/>
@@ -8340,7 +8379,7 @@
         <p:spPr>
           <a:xfrm>
             <a:off x="6164511" y="1900000"/>
-            <a:ext cx="5460655" cy="3700000"/>
+            <a:ext cx="5460655" cy="3550000"/>
           </a:xfrm>
           <a:prstGeom prst="roundRect">
             <a:avLst>
@@ -8405,7 +8444,7 @@
         </p:nvSpPr>
         <p:spPr>
           <a:xfrm>
-            <a:off x="6394511" y="2440000"/>
+            <a:off x="6394511" y="2400000"/>
             <a:ext cx="5000000" cy="1160000"/>
           </a:xfrm>
           <a:prstGeom prst="roundRect">
@@ -8432,7 +8471,7 @@
         </p:nvSpPr>
         <p:spPr>
           <a:xfrm>
-            <a:off x="6634511" y="2560000"/>
+            <a:off x="6634511" y="2520000"/>
             <a:ext cx="4520000" cy="760000"/>
           </a:xfrm>
           <a:prstGeom prst="rect">
@@ -8474,7 +8513,7 @@
         </p:nvSpPr>
         <p:spPr>
           <a:xfrm>
-            <a:off x="6634511" y="3320000"/>
+            <a:off x="6634511" y="3280000"/>
             <a:ext cx="4520000" cy="220000"/>
           </a:xfrm>
           <a:prstGeom prst="rect">
@@ -8513,7 +8552,7 @@
         </p:nvSpPr>
         <p:spPr>
           <a:xfrm>
-            <a:off x="6394511" y="3660000"/>
+            <a:off x="6394511" y="3560000"/>
             <a:ext cx="5000000" cy="1160000"/>
           </a:xfrm>
           <a:prstGeom prst="roundRect">
@@ -8540,7 +8579,7 @@
         </p:nvSpPr>
         <p:spPr>
           <a:xfrm>
-            <a:off x="6634511" y="3780000"/>
+            <a:off x="6634511" y="3680000"/>
             <a:ext cx="4520000" cy="760000"/>
           </a:xfrm>
           <a:prstGeom prst="rect">
@@ -8582,7 +8621,7 @@
         </p:nvSpPr>
         <p:spPr>
           <a:xfrm>
-            <a:off x="6634511" y="4540000"/>
+            <a:off x="6634511" y="4440000"/>
             <a:ext cx="4520000" cy="220000"/>
           </a:xfrm>
           <a:prstGeom prst="rect">
@@ -8621,8 +8660,8 @@
         </p:nvSpPr>
         <p:spPr>
           <a:xfrm>
-            <a:off x="6394511" y="4900000"/>
-            <a:ext cx="5000655" cy="560000"/>
+            <a:off x="6394511" y="4790000"/>
+            <a:ext cx="5000655" cy="540000"/>
           </a:xfrm>
           <a:prstGeom prst="rect">
             <a:avLst/>
@@ -8663,7 +8702,7 @@
         </p:nvSpPr>
         <p:spPr>
           <a:xfrm>
-            <a:off x="566928" y="5824728"/>
+            <a:off x="566928" y="5700000"/>
             <a:ext cx="11057839" cy="594360"/>
           </a:xfrm>
           <a:prstGeom prst="roundRect">
@@ -8690,7 +8729,7 @@
         </p:nvSpPr>
         <p:spPr>
           <a:xfrm>
-            <a:off x="804672" y="5824728"/>
+            <a:off x="804672" y="5700000"/>
             <a:ext cx="10582351" cy="594360"/>
           </a:xfrm>
           <a:prstGeom prst="rect">
@@ -8721,6 +8760,45 @@
               <a:t>Por eso las herramientas convierten el texto en coordenadas, los vectores: lo que significa parecido queda cerca aunque esté escrito distinto. Y cuando el dato no es texto sino una tabla de variables mezcladas, la distancia se mide con Gower, que verás en el Módulo III.</a:t>
             </a:r>
             <a:endParaRPr lang="en-US" sz="1300" dirty="0"/>
+          </a:p>
+        </p:txBody>
+      </p:sp>
+      <p:sp>
+        <p:nvSpPr>
+          <p:cNvPr id="24" name="Text"/>
+          <p:cNvSpPr txBox="1"/>
+          <p:nvPr/>
+        </p:nvSpPr>
+        <p:spPr>
+          <a:xfrm>
+            <a:off x="566928" y="6360000"/>
+            <a:ext cx="11057839" cy="240000"/>
+          </a:xfrm>
+          <a:prstGeom prst="rect">
+            <a:avLst/>
+          </a:prstGeom>
+          <a:noFill/>
+          <a:ln/>
+        </p:spPr>
+        <p:txBody>
+          <a:bodyPr wrap="square" lIns="0" tIns="0" rIns="0" bIns="0" rtlCol="0" anchor="t"/>
+          <a:lstStyle/>
+          <a:p>
+            <a:pPr indent="0" marL="0">
+              <a:buNone/>
+            </a:pPr>
+            <a:r>
+              <a:rPr lang="en-US" sz="1000" dirty="0">
+                <a:solidFill>
+                  <a:srgbClr val="5A6B73"/>
+                </a:solidFill>
+                <a:latin typeface="Calibri" pitchFamily="34" charset="0"/>
+                <a:ea typeface="Calibri" pitchFamily="34" charset="-122"/>
+                <a:cs typeface="Calibri" pitchFamily="34" charset="-120"/>
+              </a:rPr>
+              <a:t>Los cuatro salen de ese mismo archivo, hoja Registros: folios RAC-2025-00073, 00055, 00014 y 00096. Ábrelos y verifícalos.</a:t>
+            </a:r>
+            <a:endParaRPr lang="en-US" sz="1000" dirty="0"/>
           </a:p>
         </p:txBody>
       </p:sp>
